--- a/docs/poster/scientific/umbra-poster-editable.pptx
+++ b/docs/poster/scientific/umbra-poster-editable.pptx
@@ -1521,7 +1521,7 @@
       </p:sp>
       <p:pic>
         <p:nvPicPr>
-          <p:cNvPr id="18" name="Image 0" descr="/home/kawase/Documents/GitHub/umbra/docs/poster/scientific/building-3d.png">    </p:cNvPr>
+          <p:cNvPr id="18" name="Image 0" descr="/home/perjoc/github/umbra/docs/poster/scientific/building-3d.png">    </p:cNvPr>
           <p:cNvPicPr>
             <a:picLocks noChangeAspect="1"/>
           </p:cNvPicPr>
@@ -2082,7 +2082,7 @@
                 <a:ea typeface="Noto Sans" pitchFamily="34" charset="-122"/>
                 <a:cs typeface="Noto Sans" pitchFamily="34" charset="-120"/>
               </a:rPr>
-              <a:t>Instantaneu OSM: 51.428 clădiri; GBA asociat la 40.658 (79,1%).</a:t>
+              <a:t>Instantaneu OSM Constanța: 51.428 clădiri; GBA asociat la 40.658 (79,1%).</a:t>
             </a:r>
             <a:endParaRPr lang="en-US" sz="1200" dirty="0"/>
           </a:p>
@@ -10411,7 +10411,7 @@
                 <a:ea typeface="Noto Sans" pitchFamily="34" charset="-122"/>
                 <a:cs typeface="Noto Sans" pitchFamily="34" charset="-120"/>
               </a:rPr>
-              <a:t>Aplicație testată pe teren în Constanța. Umbra compară traseele și integrează înălțimile confirmate de utilizatori.</a:t>
+              <a:t>Testată pe teren în Constanța. Trasee umbrite în București și în toate reședințele de județ; înălțimi confirmate de utilizatori.</a:t>
             </a:r>
             <a:endParaRPr lang="en-US" sz="1200" dirty="0"/>
           </a:p>

--- a/docs/poster/scientific/umbra-poster-editable.pptx
+++ b/docs/poster/scientific/umbra-poster-editable.pptx
@@ -10,8 +10,8 @@
   <p:notesMasterIdLst>
     <p:notesMasterId r:id="rId3"/>
   </p:notesMasterIdLst>
-  <p:sldSz cx="14630400" cy="21945600"/>
-  <p:notesSz cx="21945600" cy="14630400"/>
+  <p:sldSz cx="14630400" cy="20684359"/>
+  <p:notesSz cx="20684359" cy="14630400"/>
   <p:defaultTextStyle>
     <a:lvl1pPr marL="0" algn="l" defTabSz="914400" rtl="0" eaLnBrk="1" latinLnBrk="0" hangingPunct="1">
       <a:defRPr sz="1800" kern="1200">
@@ -883,8 +883,8 @@
         </p:nvSpPr>
         <p:spPr>
           <a:xfrm>
-            <a:off x="548640" y="210312"/>
-            <a:ext cx="9144000" cy="228600"/>
+            <a:off x="548640" y="198225"/>
+            <a:ext cx="13533120" cy="215462"/>
           </a:xfrm>
           <a:prstGeom prst="rect">
             <a:avLst/>
@@ -910,7 +910,7 @@
                 <a:ea typeface="Noto Sans" pitchFamily="34" charset="-122"/>
                 <a:cs typeface="Noto Sans" pitchFamily="34" charset="-120"/>
               </a:rPr>
-              <a:t>RoSEF 2026  /  TEHNOLOGIA INFORMAȚIEI ȘI COMUNICAȚIILOR</a:t>
+              <a:t>RoSEF 2026  /  TEHNOLOGIA INFORMAȚIEI ȘI COMUNICAȚIILOR  /  APLICAȚIE MOBILĂ + CERCETARE</a:t>
             </a:r>
             <a:endParaRPr lang="en-US" sz="1200" dirty="0"/>
           </a:p>
@@ -924,8 +924,8 @@
         </p:nvSpPr>
         <p:spPr>
           <a:xfrm>
-            <a:off x="502920" y="438912"/>
-            <a:ext cx="7772400" cy="1188720"/>
+            <a:off x="502920" y="413687"/>
+            <a:ext cx="7772400" cy="1120403"/>
           </a:xfrm>
           <a:prstGeom prst="rect">
             <a:avLst/>
@@ -965,8 +965,8 @@
         </p:nvSpPr>
         <p:spPr>
           <a:xfrm>
-            <a:off x="8641080" y="585216"/>
-            <a:ext cx="5303520" cy="960120"/>
+            <a:off x="8641080" y="551583"/>
+            <a:ext cx="5303520" cy="904941"/>
           </a:xfrm>
           <a:prstGeom prst="rect">
             <a:avLst/>
@@ -1023,8 +1023,8 @@
         </p:nvSpPr>
         <p:spPr>
           <a:xfrm>
-            <a:off x="8641080" y="1618488"/>
-            <a:ext cx="5394960" cy="256032"/>
+            <a:off x="594360" y="1646130"/>
+            <a:ext cx="13350240" cy="258554"/>
           </a:xfrm>
           <a:prstGeom prst="rect">
             <a:avLst/>
@@ -1042,6 +1042,47 @@
               <a:buNone/>
             </a:pPr>
             <a:r>
+              <a:rPr lang="en-US" sz="1400" b="1" dirty="0">
+                <a:solidFill>
+                  <a:srgbClr val="321B40"/>
+                </a:solidFill>
+                <a:latin typeface="Noto Sans" pitchFamily="34" charset="0"/>
+                <a:ea typeface="Noto Sans" pitchFamily="34" charset="-122"/>
+                <a:cs typeface="Noto Sans" pitchFamily="34" charset="-120"/>
+              </a:rPr>
+              <a:t>Eduard-Mihai Perjoc · Eduard-Andrei Haivas · Cezar-Ștefan Manea</a:t>
+            </a:r>
+            <a:endParaRPr lang="en-US" sz="1400" dirty="0"/>
+          </a:p>
+        </p:txBody>
+      </p:sp>
+      <p:sp>
+        <p:nvSpPr>
+          <p:cNvPr id="6" name="Text 4"/>
+          <p:cNvSpPr/>
+          <p:nvPr/>
+        </p:nvSpPr>
+        <p:spPr>
+          <a:xfrm>
+            <a:off x="594360" y="1956396"/>
+            <a:ext cx="13350240" cy="215462"/>
+          </a:xfrm>
+          <a:prstGeom prst="rect">
+            <a:avLst/>
+          </a:prstGeom>
+          <a:noFill/>
+          <a:ln/>
+        </p:spPr>
+        <p:txBody>
+          <a:bodyPr wrap="square" lIns="0" tIns="0" rIns="0" bIns="0" rtlCol="0" anchor="ctr">
+            <a:normAutofit/>
+          </a:bodyPr>
+          <a:lstStyle/>
+          <a:p>
+            <a:pPr algn="l" indent="0" marL="0">
+              <a:buNone/>
+            </a:pPr>
+            <a:r>
               <a:rPr lang="en-US" sz="1200" dirty="0">
                 <a:solidFill>
                   <a:srgbClr val="625A6A"/>
@@ -1050,7 +1091,7 @@
                 <a:ea typeface="Noto Sans" pitchFamily="34" charset="-122"/>
                 <a:cs typeface="Noto Sans" pitchFamily="34" charset="-120"/>
               </a:rPr>
-              <a:t>Aplicație mobilă + cercetare  /  Constanța</a:t>
+              <a:t>Clasa a X-a · Constanța    |    Coordonator: prof. Ramona Rădulescu</a:t>
             </a:r>
             <a:endParaRPr lang="en-US" sz="1200" dirty="0"/>
           </a:p>
@@ -1058,14 +1099,41 @@
       </p:sp>
       <p:sp>
         <p:nvSpPr>
-          <p:cNvPr id="6" name="Text 4"/>
-          <p:cNvSpPr/>
-          <p:nvPr/>
-        </p:nvSpPr>
-        <p:spPr>
-          <a:xfrm>
-            <a:off x="594360" y="1956816"/>
-            <a:ext cx="13350240" cy="274320"/>
+          <p:cNvPr id="7" name="Shape 5"/>
+          <p:cNvSpPr/>
+          <p:nvPr/>
+        </p:nvSpPr>
+        <p:spPr>
+          <a:xfrm>
+            <a:off x="548640" y="2309753"/>
+            <a:ext cx="13533120" cy="930796"/>
+          </a:xfrm>
+          <a:prstGeom prst="rect">
+            <a:avLst/>
+          </a:prstGeom>
+          <a:solidFill>
+            <a:srgbClr val="F1EDF5"/>
+          </a:solidFill>
+          <a:ln w="12700">
+            <a:solidFill>
+              <a:srgbClr val="F1EDF5">
+                <a:alpha val="0"/>
+              </a:srgbClr>
+            </a:solidFill>
+            <a:prstDash val="solid"/>
+          </a:ln>
+        </p:spPr>
+      </p:sp>
+      <p:sp>
+        <p:nvSpPr>
+          <p:cNvPr id="8" name="Text 6"/>
+          <p:cNvSpPr/>
+          <p:nvPr/>
+        </p:nvSpPr>
+        <p:spPr>
+          <a:xfrm>
+            <a:off x="731520" y="2387320"/>
+            <a:ext cx="13075920" cy="198225"/>
           </a:xfrm>
           <a:prstGeom prst="rect">
             <a:avLst/>
@@ -1083,7 +1151,48 @@
               <a:buNone/>
             </a:pPr>
             <a:r>
-              <a:rPr lang="en-US" sz="1500" b="1" dirty="0">
+              <a:rPr lang="en-US" sz="1200" b="1" dirty="0">
+                <a:solidFill>
+                  <a:srgbClr val="B84419"/>
+                </a:solidFill>
+                <a:latin typeface="Noto Sans" pitchFamily="34" charset="0"/>
+                <a:ea typeface="Noto Sans" pitchFamily="34" charset="-122"/>
+                <a:cs typeface="Noto Sans" pitchFamily="34" charset="-120"/>
+              </a:rPr>
+              <a:t>ÎNTREBAREA ȘTIINȚIFICĂ</a:t>
+            </a:r>
+            <a:endParaRPr lang="en-US" sz="1200" dirty="0"/>
+          </a:p>
+        </p:txBody>
+      </p:sp>
+      <p:sp>
+        <p:nvSpPr>
+          <p:cNvPr id="9" name="Text 7"/>
+          <p:cNvSpPr/>
+          <p:nvPr/>
+        </p:nvSpPr>
+        <p:spPr>
+          <a:xfrm>
+            <a:off x="731520" y="2645874"/>
+            <a:ext cx="13075920" cy="301647"/>
+          </a:xfrm>
+          <a:prstGeom prst="rect">
+            <a:avLst/>
+          </a:prstGeom>
+          <a:noFill/>
+          <a:ln/>
+        </p:spPr>
+        <p:txBody>
+          <a:bodyPr wrap="square" lIns="0" tIns="0" rIns="0" bIns="0" rtlCol="0" anchor="ctr">
+            <a:normAutofit/>
+          </a:bodyPr>
+          <a:lstStyle/>
+          <a:p>
+            <a:pPr algn="l" indent="0" marL="0">
+              <a:buNone/>
+            </a:pPr>
+            <a:r>
+              <a:rPr lang="en-US" sz="1700" b="1" dirty="0">
                 <a:solidFill>
                   <a:srgbClr val="321B40"/>
                 </a:solidFill>
@@ -1091,22 +1200,22 @@
                 <a:ea typeface="Noto Sans" pitchFamily="34" charset="-122"/>
                 <a:cs typeface="Noto Sans" pitchFamily="34" charset="-120"/>
               </a:rPr>
-              <a:t>Eduard-Mihai Perjoc · Eduard-Andrei Haivas · Cezar-Ștefan Manea</a:t>
-            </a:r>
-            <a:endParaRPr lang="en-US" sz="1500" dirty="0"/>
-          </a:p>
-        </p:txBody>
-      </p:sp>
-      <p:sp>
-        <p:nvSpPr>
-          <p:cNvPr id="7" name="Text 5"/>
-          <p:cNvSpPr/>
-          <p:nvPr/>
-        </p:nvSpPr>
-        <p:spPr>
-          <a:xfrm>
-            <a:off x="594360" y="2313432"/>
-            <a:ext cx="12801600" cy="228600"/>
+              <a:t>Cu ce eroare estimăm înălțimea clădirilor din umbre și când rămân vârfurile umbrelor neobstrucționate?</a:t>
+            </a:r>
+            <a:endParaRPr lang="en-US" sz="1700" dirty="0"/>
+          </a:p>
+        </p:txBody>
+      </p:sp>
+      <p:sp>
+        <p:nvSpPr>
+          <p:cNvPr id="10" name="Text 8"/>
+          <p:cNvSpPr/>
+          <p:nvPr/>
+        </p:nvSpPr>
+        <p:spPr>
+          <a:xfrm>
+            <a:off x="731520" y="3007850"/>
+            <a:ext cx="13075920" cy="189607"/>
           </a:xfrm>
           <a:prstGeom prst="rect">
             <a:avLst/>
@@ -1132,7 +1241,7 @@
                 <a:ea typeface="Noto Sans" pitchFamily="34" charset="-122"/>
                 <a:cs typeface="Noto Sans" pitchFamily="34" charset="-120"/>
               </a:rPr>
-              <a:t>Clasa a X-a · Constanța    |    Coordonator: prof. Ramona Rădulescu</a:t>
+              <a:t>Aplicăm înălțimile obținute la harta umbrelor și la comparația traseelor pietonale.</a:t>
             </a:r>
             <a:endParaRPr lang="en-US" sz="1200" dirty="0"/>
           </a:p>
@@ -1140,37 +1249,14 @@
       </p:sp>
       <p:sp>
         <p:nvSpPr>
-          <p:cNvPr id="8" name="Shape 6"/>
-          <p:cNvSpPr/>
-          <p:nvPr/>
-        </p:nvSpPr>
-        <p:spPr>
-          <a:xfrm>
-            <a:off x="548640" y="2660904"/>
-            <a:ext cx="13533120" cy="914"/>
-          </a:xfrm>
-          <a:prstGeom prst="line">
-            <a:avLst/>
-          </a:prstGeom>
-          <a:noFill/>
-          <a:ln w="19050">
-            <a:solidFill>
-              <a:srgbClr val="321B40"/>
-            </a:solidFill>
-            <a:prstDash val="solid"/>
-          </a:ln>
-        </p:spPr>
-      </p:sp>
-      <p:sp>
-        <p:nvSpPr>
-          <p:cNvPr id="9" name="Shape 7"/>
-          <p:cNvSpPr/>
-          <p:nvPr/>
-        </p:nvSpPr>
-        <p:spPr>
-          <a:xfrm>
-            <a:off x="548640" y="2788920"/>
-            <a:ext cx="4251960" cy="310896"/>
+          <p:cNvPr id="11" name="Shape 9"/>
+          <p:cNvSpPr/>
+          <p:nvPr/>
+        </p:nvSpPr>
+        <p:spPr>
+          <a:xfrm>
+            <a:off x="548640" y="3387064"/>
+            <a:ext cx="4251960" cy="293028"/>
           </a:xfrm>
           <a:prstGeom prst="rect">
             <a:avLst/>
@@ -1190,14 +1276,14 @@
       </p:sp>
       <p:sp>
         <p:nvSpPr>
-          <p:cNvPr id="10" name="Text 8"/>
-          <p:cNvSpPr/>
-          <p:nvPr/>
-        </p:nvSpPr>
-        <p:spPr>
-          <a:xfrm>
-            <a:off x="658368" y="2820924"/>
-            <a:ext cx="4069080" cy="219456"/>
+          <p:cNvPr id="12" name="Text 10"/>
+          <p:cNvSpPr/>
+          <p:nvPr/>
+        </p:nvSpPr>
+        <p:spPr>
+          <a:xfrm>
+            <a:off x="658368" y="3417228"/>
+            <a:ext cx="4069080" cy="206844"/>
           </a:xfrm>
           <a:prstGeom prst="rect">
             <a:avLst/>
@@ -1223,7 +1309,7 @@
                 <a:ea typeface="Noto Sans" pitchFamily="34" charset="-122"/>
                 <a:cs typeface="Noto Sans" pitchFamily="34" charset="-120"/>
               </a:rPr>
-              <a:t>01  CE FACE APLICAȚIA UMBRA</a:t>
+              <a:t>01  APLICAȚIA UMBRA</a:t>
             </a:r>
             <a:endParaRPr lang="en-US" sz="1300" dirty="0"/>
           </a:p>
@@ -1231,14 +1317,14 @@
       </p:sp>
       <p:sp>
         <p:nvSpPr>
-          <p:cNvPr id="11" name="Text 9"/>
-          <p:cNvSpPr/>
-          <p:nvPr/>
-        </p:nvSpPr>
-        <p:spPr>
-          <a:xfrm>
-            <a:off x="594360" y="3246120"/>
-            <a:ext cx="4114800" cy="365760"/>
+          <p:cNvPr id="13" name="Text 11"/>
+          <p:cNvSpPr/>
+          <p:nvPr/>
+        </p:nvSpPr>
+        <p:spPr>
+          <a:xfrm>
+            <a:off x="594360" y="3783514"/>
+            <a:ext cx="4114800" cy="344739"/>
           </a:xfrm>
           <a:prstGeom prst="rect">
             <a:avLst/>
@@ -1264,7 +1350,7 @@
                 <a:ea typeface="Noto Sans" pitchFamily="34" charset="-122"/>
                 <a:cs typeface="Noto Sans" pitchFamily="34" charset="-120"/>
               </a:rPr>
-              <a:t>Pe unde mergi cu mai puțin soare?</a:t>
+              <a:t>Traseu mai rapid sau mai umbrit?</a:t>
             </a:r>
             <a:endParaRPr lang="en-US" sz="1600" dirty="0"/>
           </a:p>
@@ -1272,14 +1358,14 @@
       </p:sp>
       <p:sp>
         <p:nvSpPr>
-          <p:cNvPr id="12" name="Text 10"/>
-          <p:cNvSpPr/>
-          <p:nvPr/>
-        </p:nvSpPr>
-        <p:spPr>
-          <a:xfrm>
-            <a:off x="594360" y="3822192"/>
-            <a:ext cx="4069080" cy="566928"/>
+          <p:cNvPr id="14" name="Text 12"/>
+          <p:cNvSpPr/>
+          <p:nvPr/>
+        </p:nvSpPr>
+        <p:spPr>
+          <a:xfrm>
+            <a:off x="594360" y="4300623"/>
+            <a:ext cx="4069080" cy="655005"/>
           </a:xfrm>
           <a:prstGeom prst="rect">
             <a:avLst/>
@@ -1305,7 +1391,7 @@
                 <a:ea typeface="Noto Sans" pitchFamily="34" charset="-122"/>
                 <a:cs typeface="Noto Sans" pitchFamily="34" charset="-120"/>
               </a:rPr>
-              <a:t>Alegi plecarea, destinația, ora și ocolul maxim acceptat.</a:t>
+              <a:t>Alegi destinația, ora plecării și ocolul acceptat. Umbra compară durata și expunerea estimată la soare.</a:t>
             </a:r>
             <a:endParaRPr lang="en-US" sz="1300" dirty="0"/>
           </a:p>
@@ -1313,14 +1399,14 @@
       </p:sp>
       <p:sp>
         <p:nvSpPr>
-          <p:cNvPr id="13" name="Text 11"/>
-          <p:cNvSpPr/>
-          <p:nvPr/>
-        </p:nvSpPr>
-        <p:spPr>
-          <a:xfrm>
-            <a:off x="594360" y="4498848"/>
-            <a:ext cx="4069080" cy="694944"/>
+          <p:cNvPr id="15" name="Text 13"/>
+          <p:cNvSpPr/>
+          <p:nvPr/>
+        </p:nvSpPr>
+        <p:spPr>
+          <a:xfrm>
+            <a:off x="594360" y="5084905"/>
+            <a:ext cx="4069080" cy="663623"/>
           </a:xfrm>
           <a:prstGeom prst="rect">
             <a:avLst/>
@@ -1338,7 +1424,7 @@
               <a:buNone/>
             </a:pPr>
             <a:r>
-              <a:rPr lang="en-US" sz="1300" dirty="0">
+              <a:rPr lang="en-US" sz="1200" dirty="0">
                 <a:solidFill>
                   <a:srgbClr val="321B40"/>
                 </a:solidFill>
@@ -1346,22 +1432,22 @@
                 <a:ea typeface="Noto Sans" pitchFamily="34" charset="-122"/>
                 <a:cs typeface="Noto Sans" pitchFamily="34" charset="-120"/>
               </a:rPr>
-              <a:t>Serverul modelează Soarele și umbrele și compară traseele. Telefonul afișează harta și ghidarea GPS.</a:t>
-            </a:r>
-            <a:endParaRPr lang="en-US" sz="1300" dirty="0"/>
-          </a:p>
-        </p:txBody>
-      </p:sp>
-      <p:sp>
-        <p:nvSpPr>
-          <p:cNvPr id="14" name="Text 12"/>
-          <p:cNvSpPr/>
-          <p:nvPr/>
-        </p:nvSpPr>
-        <p:spPr>
-          <a:xfrm>
-            <a:off x="594360" y="5285232"/>
-            <a:ext cx="4069080" cy="640080"/>
+              <a:t>Clădiri + copaci + prognoză meteo: serverul calculează alternativele; telefonul afișează harta și urmărirea GPS.</a:t>
+            </a:r>
+            <a:endParaRPr lang="en-US" sz="1200" dirty="0"/>
+          </a:p>
+        </p:txBody>
+      </p:sp>
+      <p:sp>
+        <p:nvSpPr>
+          <p:cNvPr id="16" name="Text 14"/>
+          <p:cNvSpPr/>
+          <p:nvPr/>
+        </p:nvSpPr>
+        <p:spPr>
+          <a:xfrm>
+            <a:off x="594360" y="5860568"/>
+            <a:ext cx="4069080" cy="568820"/>
           </a:xfrm>
           <a:prstGeom prst="rect">
             <a:avLst/>
@@ -1395,14 +1481,14 @@
       </p:sp>
       <p:sp>
         <p:nvSpPr>
-          <p:cNvPr id="15" name="Text 13"/>
-          <p:cNvSpPr/>
-          <p:nvPr/>
-        </p:nvSpPr>
-        <p:spPr>
-          <a:xfrm>
-            <a:off x="594360" y="6007608"/>
-            <a:ext cx="4114800" cy="393192"/>
+          <p:cNvPr id="17" name="Text 15"/>
+          <p:cNvSpPr/>
+          <p:nvPr/>
+        </p:nvSpPr>
+        <p:spPr>
+          <a:xfrm>
+            <a:off x="594360" y="6506954"/>
+            <a:ext cx="4114800" cy="370595"/>
           </a:xfrm>
           <a:prstGeom prst="rect">
             <a:avLst/>
@@ -1428,39 +1514,22 @@
                 <a:ea typeface="Noto Sans" pitchFamily="34" charset="-122"/>
                 <a:cs typeface="Noto Sans" pitchFamily="34" charset="-120"/>
               </a:rPr>
-              <a:t>Înălțimi confirmate → umbre și trasee.</a:t>
+              <a:t>Salvare locală; partajare opțională. Înălțimile confirmate actualizează modelul.</a:t>
             </a:r>
             <a:endParaRPr lang="en-US" sz="1100" dirty="0"/>
           </a:p>
-          <a:p>
-            <a:pPr algn="l" indent="0" marL="0">
-              <a:buNone/>
-            </a:pPr>
-            <a:r>
-              <a:rPr lang="en-US" sz="1100" dirty="0">
-                <a:solidFill>
-                  <a:srgbClr val="B84419"/>
-                </a:solidFill>
-                <a:latin typeface="Noto Sans" pitchFamily="34" charset="0"/>
-                <a:ea typeface="Noto Sans" pitchFamily="34" charset="-122"/>
-                <a:cs typeface="Noto Sans" pitchFamily="34" charset="-120"/>
-              </a:rPr>
-              <a:t>Salvare locală; partajare opțională.</a:t>
-            </a:r>
-            <a:endParaRPr lang="en-US" sz="1100" dirty="0"/>
-          </a:p>
-        </p:txBody>
-      </p:sp>
-      <p:sp>
-        <p:nvSpPr>
-          <p:cNvPr id="16" name="Shape 14"/>
-          <p:cNvSpPr/>
-          <p:nvPr/>
-        </p:nvSpPr>
-        <p:spPr>
-          <a:xfrm>
-            <a:off x="548640" y="6510528"/>
-            <a:ext cx="4251960" cy="310896"/>
+        </p:txBody>
+      </p:sp>
+      <p:sp>
+        <p:nvSpPr>
+          <p:cNvPr id="18" name="Shape 16"/>
+          <p:cNvSpPr/>
+          <p:nvPr/>
+        </p:nvSpPr>
+        <p:spPr>
+          <a:xfrm>
+            <a:off x="548640" y="6998208"/>
+            <a:ext cx="4251960" cy="293028"/>
           </a:xfrm>
           <a:prstGeom prst="rect">
             <a:avLst/>
@@ -1480,14 +1549,14 @@
       </p:sp>
       <p:sp>
         <p:nvSpPr>
-          <p:cNvPr id="17" name="Text 15"/>
-          <p:cNvSpPr/>
-          <p:nvPr/>
-        </p:nvSpPr>
-        <p:spPr>
-          <a:xfrm>
-            <a:off x="658368" y="6542532"/>
-            <a:ext cx="4069080" cy="219456"/>
+          <p:cNvPr id="19" name="Text 17"/>
+          <p:cNvSpPr/>
+          <p:nvPr/>
+        </p:nvSpPr>
+        <p:spPr>
+          <a:xfrm>
+            <a:off x="658368" y="7028373"/>
+            <a:ext cx="4069080" cy="206844"/>
           </a:xfrm>
           <a:prstGeom prst="rect">
             <a:avLst/>
@@ -1521,7 +1590,7 @@
       </p:sp>
       <p:pic>
         <p:nvPicPr>
-          <p:cNvPr id="18" name="Image 0" descr="/home/perjoc/github/umbra/docs/poster/scientific/building-3d.png">    </p:cNvPr>
+          <p:cNvPr id="20" name="Image 0" descr="/home/kawase/Documents/GitHub/umbra/docs/poster/scientific/building-3d.png">    </p:cNvPr>
           <p:cNvPicPr>
             <a:picLocks noChangeAspect="1"/>
           </p:cNvPicPr>
@@ -1535,8 +1604,8 @@
         </p:blipFill>
         <p:spPr>
           <a:xfrm>
-            <a:off x="640080" y="6912864"/>
-            <a:ext cx="3886200" cy="1938528"/>
+            <a:off x="1053399" y="7386040"/>
+            <a:ext cx="3059561" cy="1525471"/>
           </a:xfrm>
           <a:prstGeom prst="rect">
             <a:avLst/>
@@ -1545,14 +1614,14 @@
       </p:pic>
       <p:sp>
         <p:nvSpPr>
-          <p:cNvPr id="19" name="Text 16"/>
-          <p:cNvSpPr/>
-          <p:nvPr/>
-        </p:nvSpPr>
-        <p:spPr>
-          <a:xfrm>
-            <a:off x="1051560" y="7845552"/>
-            <a:ext cx="274320" cy="274320"/>
+          <p:cNvPr id="21" name="Text 18"/>
+          <p:cNvSpPr/>
+          <p:nvPr/>
+        </p:nvSpPr>
+        <p:spPr>
+          <a:xfrm>
+            <a:off x="1298448" y="8075518"/>
+            <a:ext cx="274320" cy="258554"/>
           </a:xfrm>
           <a:prstGeom prst="rect">
             <a:avLst/>
@@ -1570,7 +1639,7 @@
               <a:buNone/>
             </a:pPr>
             <a:r>
-              <a:rPr lang="en-US" sz="1600" b="1" dirty="0">
+              <a:rPr lang="en-US" sz="1500" b="1" dirty="0">
                 <a:solidFill>
                   <a:srgbClr val="321B40"/>
                 </a:solidFill>
@@ -1580,20 +1649,20 @@
               </a:rPr>
               <a:t>h</a:t>
             </a:r>
-            <a:endParaRPr lang="en-US" sz="1600" dirty="0"/>
-          </a:p>
-        </p:txBody>
-      </p:sp>
-      <p:sp>
-        <p:nvSpPr>
-          <p:cNvPr id="20" name="Text 17"/>
-          <p:cNvSpPr/>
-          <p:nvPr/>
-        </p:nvSpPr>
-        <p:spPr>
-          <a:xfrm>
-            <a:off x="2788920" y="8595360"/>
-            <a:ext cx="274320" cy="274320"/>
+            <a:endParaRPr lang="en-US" sz="1500" dirty="0"/>
+          </a:p>
+        </p:txBody>
+      </p:sp>
+      <p:sp>
+        <p:nvSpPr>
+          <p:cNvPr id="22" name="Text 19"/>
+          <p:cNvSpPr/>
+          <p:nvPr/>
+        </p:nvSpPr>
+        <p:spPr>
+          <a:xfrm>
+            <a:off x="2761488" y="8687431"/>
+            <a:ext cx="274320" cy="258554"/>
           </a:xfrm>
           <a:prstGeom prst="rect">
             <a:avLst/>
@@ -1611,7 +1680,7 @@
               <a:buNone/>
             </a:pPr>
             <a:r>
-              <a:rPr lang="en-US" sz="1600" b="1" dirty="0">
+              <a:rPr lang="en-US" sz="1500" b="1" dirty="0">
                 <a:solidFill>
                   <a:srgbClr val="321B40"/>
                 </a:solidFill>
@@ -1621,20 +1690,20 @@
               </a:rPr>
               <a:t>L</a:t>
             </a:r>
-            <a:endParaRPr lang="en-US" sz="1600" dirty="0"/>
-          </a:p>
-        </p:txBody>
-      </p:sp>
-      <p:sp>
-        <p:nvSpPr>
-          <p:cNvPr id="21" name="Text 18"/>
-          <p:cNvSpPr/>
-          <p:nvPr/>
-        </p:nvSpPr>
-        <p:spPr>
-          <a:xfrm>
-            <a:off x="3502152" y="8211312"/>
-            <a:ext cx="274320" cy="274320"/>
+            <a:endParaRPr lang="en-US" sz="1500" dirty="0"/>
+          </a:p>
+        </p:txBody>
+      </p:sp>
+      <p:sp>
+        <p:nvSpPr>
+          <p:cNvPr id="23" name="Text 20"/>
+          <p:cNvSpPr/>
+          <p:nvPr/>
+        </p:nvSpPr>
+        <p:spPr>
+          <a:xfrm>
+            <a:off x="3346704" y="8385784"/>
+            <a:ext cx="274320" cy="258554"/>
           </a:xfrm>
           <a:prstGeom prst="rect">
             <a:avLst/>
@@ -1652,7 +1721,7 @@
               <a:buNone/>
             </a:pPr>
             <a:r>
-              <a:rPr lang="en-US" sz="1600" b="1" dirty="0">
+              <a:rPr lang="en-US" sz="1500" b="1" dirty="0">
                 <a:solidFill>
                   <a:srgbClr val="321B40"/>
                 </a:solidFill>
@@ -1662,20 +1731,20 @@
               </a:rPr>
               <a:t>e</a:t>
             </a:r>
-            <a:endParaRPr lang="en-US" sz="1600" dirty="0"/>
-          </a:p>
-        </p:txBody>
-      </p:sp>
-      <p:sp>
-        <p:nvSpPr>
-          <p:cNvPr id="22" name="Text 19"/>
-          <p:cNvSpPr/>
-          <p:nvPr/>
-        </p:nvSpPr>
-        <p:spPr>
-          <a:xfrm>
-            <a:off x="658368" y="9034272"/>
-            <a:ext cx="3931920" cy="411480"/>
+            <a:endParaRPr lang="en-US" sz="1500" dirty="0"/>
+          </a:p>
+        </p:txBody>
+      </p:sp>
+      <p:sp>
+        <p:nvSpPr>
+          <p:cNvPr id="24" name="Text 21"/>
+          <p:cNvSpPr/>
+          <p:nvPr/>
+        </p:nvSpPr>
+        <p:spPr>
+          <a:xfrm>
+            <a:off x="658368" y="8868419"/>
+            <a:ext cx="3931920" cy="336121"/>
           </a:xfrm>
           <a:prstGeom prst="rect">
             <a:avLst/>
@@ -1693,7 +1762,7 @@
               <a:buNone/>
             </a:pPr>
             <a:r>
-              <a:rPr lang="en-US" sz="2500" b="1" dirty="0">
+              <a:rPr lang="en-US" sz="2300" b="1" dirty="0">
                 <a:solidFill>
                   <a:srgbClr val="321B40"/>
                 </a:solidFill>
@@ -1703,20 +1772,20 @@
               </a:rPr>
               <a:t>h = L · tan(e)</a:t>
             </a:r>
-            <a:endParaRPr lang="en-US" sz="2500" dirty="0"/>
-          </a:p>
-        </p:txBody>
-      </p:sp>
-      <p:sp>
-        <p:nvSpPr>
-          <p:cNvPr id="23" name="Text 20"/>
-          <p:cNvSpPr/>
-          <p:nvPr/>
-        </p:nvSpPr>
-        <p:spPr>
-          <a:xfrm>
-            <a:off x="658368" y="9528048"/>
-            <a:ext cx="4069080" cy="274320"/>
+            <a:endParaRPr lang="en-US" sz="2300" dirty="0"/>
+          </a:p>
+        </p:txBody>
+      </p:sp>
+      <p:sp>
+        <p:nvSpPr>
+          <p:cNvPr id="25" name="Text 22"/>
+          <p:cNvSpPr/>
+          <p:nvPr/>
+        </p:nvSpPr>
+        <p:spPr>
+          <a:xfrm>
+            <a:off x="658368" y="9247632"/>
+            <a:ext cx="4069080" cy="198225"/>
           </a:xfrm>
           <a:prstGeom prst="rect">
             <a:avLst/>
@@ -1750,14 +1819,14 @@
       </p:sp>
       <p:sp>
         <p:nvSpPr>
-          <p:cNvPr id="24" name="Shape 21"/>
-          <p:cNvSpPr/>
-          <p:nvPr/>
-        </p:nvSpPr>
-        <p:spPr>
-          <a:xfrm>
-            <a:off x="5257800" y="2788920"/>
-            <a:ext cx="8823960" cy="310896"/>
+          <p:cNvPr id="26" name="Shape 23"/>
+          <p:cNvSpPr/>
+          <p:nvPr/>
+        </p:nvSpPr>
+        <p:spPr>
+          <a:xfrm>
+            <a:off x="5257800" y="3387064"/>
+            <a:ext cx="8823960" cy="293028"/>
           </a:xfrm>
           <a:prstGeom prst="rect">
             <a:avLst/>
@@ -1777,14 +1846,14 @@
       </p:sp>
       <p:sp>
         <p:nvSpPr>
-          <p:cNvPr id="25" name="Text 22"/>
-          <p:cNvSpPr/>
-          <p:nvPr/>
-        </p:nvSpPr>
-        <p:spPr>
-          <a:xfrm>
-            <a:off x="5367528" y="2820924"/>
-            <a:ext cx="8641080" cy="219456"/>
+          <p:cNvPr id="27" name="Text 24"/>
+          <p:cNvSpPr/>
+          <p:nvPr/>
+        </p:nvSpPr>
+        <p:spPr>
+          <a:xfrm>
+            <a:off x="5367528" y="3417228"/>
+            <a:ext cx="8641080" cy="206844"/>
           </a:xfrm>
           <a:prstGeom prst="rect">
             <a:avLst/>
@@ -1810,7 +1879,7 @@
                 <a:ea typeface="Noto Sans" pitchFamily="34" charset="-122"/>
                 <a:cs typeface="Noto Sans" pitchFamily="34" charset="-120"/>
               </a:rPr>
-              <a:t>03  DATE ȘI REZULTATE</a:t>
+              <a:t>03  CERCETARE: DATE ȘI REZULTATE</a:t>
             </a:r>
             <a:endParaRPr lang="en-US" sz="1300" dirty="0"/>
           </a:p>
@@ -1818,14 +1887,14 @@
       </p:sp>
       <p:sp>
         <p:nvSpPr>
-          <p:cNvPr id="26" name="Text 23"/>
-          <p:cNvSpPr/>
-          <p:nvPr/>
-        </p:nvSpPr>
-        <p:spPr>
-          <a:xfrm>
-            <a:off x="5303520" y="3246120"/>
-            <a:ext cx="8686800" cy="347472"/>
+          <p:cNvPr id="28" name="Text 25"/>
+          <p:cNvSpPr/>
+          <p:nvPr/>
+        </p:nvSpPr>
+        <p:spPr>
+          <a:xfrm>
+            <a:off x="5303520" y="3783514"/>
+            <a:ext cx="8686800" cy="327502"/>
           </a:xfrm>
           <a:prstGeom prst="rect">
             <a:avLst/>
@@ -1851,7 +1920,7 @@
                 <a:ea typeface="Noto Sans" pitchFamily="34" charset="-122"/>
                 <a:cs typeface="Noto Sans" pitchFamily="34" charset="-120"/>
               </a:rPr>
-              <a:t>Fig. 1  Datele de înălțime lipsesc pentru 87,8% din clădiri</a:t>
+              <a:t>Fig. 1  În OSM, 87,8% dintre clădiri nu au înălțime sau etaje</a:t>
             </a:r>
             <a:endParaRPr lang="en-US" sz="1500" dirty="0"/>
           </a:p>
@@ -1859,14 +1928,14 @@
       </p:sp>
       <p:sp>
         <p:nvSpPr>
-          <p:cNvPr id="27" name="Shape 24"/>
-          <p:cNvSpPr/>
-          <p:nvPr/>
-        </p:nvSpPr>
-        <p:spPr>
-          <a:xfrm>
-            <a:off x="5440680" y="3822192"/>
-            <a:ext cx="42884" cy="475488"/>
+          <p:cNvPr id="29" name="Shape 26"/>
+          <p:cNvSpPr/>
+          <p:nvPr/>
+        </p:nvSpPr>
+        <p:spPr>
+          <a:xfrm>
+            <a:off x="5440680" y="4326478"/>
+            <a:ext cx="42884" cy="448161"/>
           </a:xfrm>
           <a:prstGeom prst="rect">
             <a:avLst/>
@@ -1886,14 +1955,14 @@
       </p:sp>
       <p:sp>
         <p:nvSpPr>
-          <p:cNvPr id="28" name="Shape 25"/>
-          <p:cNvSpPr/>
-          <p:nvPr/>
-        </p:nvSpPr>
-        <p:spPr>
-          <a:xfrm>
-            <a:off x="5483564" y="3822192"/>
-            <a:ext cx="935695" cy="475488"/>
+          <p:cNvPr id="30" name="Shape 27"/>
+          <p:cNvSpPr/>
+          <p:nvPr/>
+        </p:nvSpPr>
+        <p:spPr>
+          <a:xfrm>
+            <a:off x="5483564" y="4326478"/>
+            <a:ext cx="935695" cy="448161"/>
           </a:xfrm>
           <a:prstGeom prst="rect">
             <a:avLst/>
@@ -1913,14 +1982,14 @@
       </p:sp>
       <p:sp>
         <p:nvSpPr>
-          <p:cNvPr id="29" name="Shape 26"/>
-          <p:cNvSpPr/>
-          <p:nvPr/>
-        </p:nvSpPr>
-        <p:spPr>
-          <a:xfrm>
-            <a:off x="6419259" y="3822192"/>
-            <a:ext cx="7146130" cy="475488"/>
+          <p:cNvPr id="31" name="Shape 28"/>
+          <p:cNvSpPr/>
+          <p:nvPr/>
+        </p:nvSpPr>
+        <p:spPr>
+          <a:xfrm>
+            <a:off x="6419259" y="4326478"/>
+            <a:ext cx="7146130" cy="448161"/>
           </a:xfrm>
           <a:prstGeom prst="rect">
             <a:avLst/>
@@ -1940,14 +2009,14 @@
       </p:sp>
       <p:sp>
         <p:nvSpPr>
-          <p:cNvPr id="30" name="Shape 27"/>
-          <p:cNvSpPr/>
-          <p:nvPr/>
-        </p:nvSpPr>
-        <p:spPr>
-          <a:xfrm>
-            <a:off x="13565389" y="3822192"/>
-            <a:ext cx="13451" cy="475488"/>
+          <p:cNvPr id="32" name="Shape 29"/>
+          <p:cNvSpPr/>
+          <p:nvPr/>
+        </p:nvSpPr>
+        <p:spPr>
+          <a:xfrm>
+            <a:off x="13565389" y="4326478"/>
+            <a:ext cx="13451" cy="448161"/>
           </a:xfrm>
           <a:prstGeom prst="rect">
             <a:avLst/>
@@ -1967,14 +2036,14 @@
       </p:sp>
       <p:sp>
         <p:nvSpPr>
-          <p:cNvPr id="31" name="Text 28"/>
-          <p:cNvSpPr/>
-          <p:nvPr/>
-        </p:nvSpPr>
-        <p:spPr>
-          <a:xfrm>
-            <a:off x="7772400" y="3886200"/>
-            <a:ext cx="5029200" cy="292608"/>
+          <p:cNvPr id="33" name="Text 30"/>
+          <p:cNvSpPr/>
+          <p:nvPr/>
+        </p:nvSpPr>
+        <p:spPr>
+          <a:xfrm>
+            <a:off x="7772400" y="4386808"/>
+            <a:ext cx="5029200" cy="275791"/>
           </a:xfrm>
           <a:prstGeom prst="rect">
             <a:avLst/>
@@ -2008,14 +2077,14 @@
       </p:sp>
       <p:sp>
         <p:nvSpPr>
-          <p:cNvPr id="32" name="Text 29"/>
-          <p:cNvSpPr/>
-          <p:nvPr/>
-        </p:nvSpPr>
-        <p:spPr>
-          <a:xfrm>
-            <a:off x="5440680" y="4480560"/>
-            <a:ext cx="8229600" cy="274320"/>
+          <p:cNvPr id="34" name="Text 31"/>
+          <p:cNvSpPr/>
+          <p:nvPr/>
+        </p:nvSpPr>
+        <p:spPr>
+          <a:xfrm>
+            <a:off x="5440680" y="4929772"/>
+            <a:ext cx="8229600" cy="258554"/>
           </a:xfrm>
           <a:prstGeom prst="rect">
             <a:avLst/>
@@ -2049,14 +2118,14 @@
       </p:sp>
       <p:sp>
         <p:nvSpPr>
-          <p:cNvPr id="33" name="Text 30"/>
-          <p:cNvSpPr/>
-          <p:nvPr/>
-        </p:nvSpPr>
-        <p:spPr>
-          <a:xfrm>
-            <a:off x="5440680" y="4882896"/>
-            <a:ext cx="8229600" cy="274320"/>
+          <p:cNvPr id="35" name="Text 32"/>
+          <p:cNvSpPr/>
+          <p:nvPr/>
+        </p:nvSpPr>
+        <p:spPr>
+          <a:xfrm>
+            <a:off x="5440680" y="5265893"/>
+            <a:ext cx="8229600" cy="258554"/>
           </a:xfrm>
           <a:prstGeom prst="rect">
             <a:avLst/>
@@ -2082,7 +2151,7 @@
                 <a:ea typeface="Noto Sans" pitchFamily="34" charset="-122"/>
                 <a:cs typeface="Noto Sans" pitchFamily="34" charset="-120"/>
               </a:rPr>
-              <a:t>Instantaneu OSM Constanța: 51.428 clădiri; GBA asociat la 40.658 (79,1%).</a:t>
+              <a:t>Studiu Constanța, OSM 25.10.2026: 51.428 clădiri; GBA asociat la 40.658.</a:t>
             </a:r>
             <a:endParaRPr lang="en-US" sz="1200" dirty="0"/>
           </a:p>
@@ -2090,14 +2159,14 @@
       </p:sp>
       <p:sp>
         <p:nvSpPr>
-          <p:cNvPr id="34" name="Text 31"/>
-          <p:cNvSpPr/>
-          <p:nvPr/>
-        </p:nvSpPr>
-        <p:spPr>
-          <a:xfrm>
-            <a:off x="5303520" y="5577840"/>
-            <a:ext cx="8686800" cy="320040"/>
+          <p:cNvPr id="36" name="Text 33"/>
+          <p:cNvSpPr/>
+          <p:nvPr/>
+        </p:nvSpPr>
+        <p:spPr>
+          <a:xfrm>
+            <a:off x="5440680" y="5610632"/>
+            <a:ext cx="8229600" cy="275791"/>
           </a:xfrm>
           <a:prstGeom prst="rect">
             <a:avLst/>
@@ -2115,6 +2184,47 @@
               <a:buNone/>
             </a:pPr>
             <a:r>
+              <a:rPr lang="en-US" sz="1200" dirty="0">
+                <a:solidFill>
+                  <a:srgbClr val="B84419"/>
+                </a:solidFill>
+                <a:latin typeface="Noto Sans" pitchFamily="34" charset="0"/>
+                <a:ea typeface="Noto Sans" pitchFamily="34" charset="-122"/>
+                <a:cs typeface="Noto Sans" pitchFamily="34" charset="-120"/>
+              </a:rPr>
+              <a:t>În aplicație, Copernicus 2012 adaugă 16.243 estimări pentru clădiri fără înălțimi OSM.</a:t>
+            </a:r>
+            <a:endParaRPr lang="en-US" sz="1200" dirty="0"/>
+          </a:p>
+        </p:txBody>
+      </p:sp>
+      <p:sp>
+        <p:nvSpPr>
+          <p:cNvPr id="37" name="Text 34"/>
+          <p:cNvSpPr/>
+          <p:nvPr/>
+        </p:nvSpPr>
+        <p:spPr>
+          <a:xfrm>
+            <a:off x="5303520" y="6076030"/>
+            <a:ext cx="8686800" cy="301647"/>
+          </a:xfrm>
+          <a:prstGeom prst="rect">
+            <a:avLst/>
+          </a:prstGeom>
+          <a:noFill/>
+          <a:ln/>
+        </p:spPr>
+        <p:txBody>
+          <a:bodyPr wrap="square" lIns="0" tIns="0" rIns="0" bIns="0" rtlCol="0" anchor="ctr">
+            <a:normAutofit/>
+          </a:bodyPr>
+          <a:lstStyle/>
+          <a:p>
+            <a:pPr algn="l" indent="0" marL="0">
+              <a:buNone/>
+            </a:pPr>
+            <a:r>
               <a:rPr lang="en-US" sz="1500" b="1" dirty="0">
                 <a:solidFill>
                   <a:srgbClr val="321B40"/>
@@ -2131,13 +2241,13 @@
       </p:sp>
       <p:sp>
         <p:nvSpPr>
-          <p:cNvPr id="35" name="Shape 32"/>
-          <p:cNvSpPr/>
-          <p:nvPr/>
-        </p:nvSpPr>
-        <p:spPr>
-          <a:xfrm>
-            <a:off x="5989320" y="8531352"/>
+          <p:cNvPr id="38" name="Shape 35"/>
+          <p:cNvSpPr/>
+          <p:nvPr/>
+        </p:nvSpPr>
+        <p:spPr>
+          <a:xfrm>
+            <a:off x="5989320" y="8325454"/>
             <a:ext cx="7589520" cy="914"/>
           </a:xfrm>
           <a:prstGeom prst="line">
@@ -2154,14 +2264,14 @@
       </p:sp>
       <p:sp>
         <p:nvSpPr>
-          <p:cNvPr id="36" name="Text 33"/>
-          <p:cNvSpPr/>
-          <p:nvPr/>
-        </p:nvSpPr>
-        <p:spPr>
-          <a:xfrm>
-            <a:off x="5669280" y="8421624"/>
-            <a:ext cx="237744" cy="201168"/>
+          <p:cNvPr id="39" name="Text 36"/>
+          <p:cNvSpPr/>
+          <p:nvPr/>
+        </p:nvSpPr>
+        <p:spPr>
+          <a:xfrm>
+            <a:off x="5669280" y="8222033"/>
+            <a:ext cx="237744" cy="189607"/>
           </a:xfrm>
           <a:prstGeom prst="rect">
             <a:avLst/>
@@ -2179,7 +2289,7 @@
               <a:buNone/>
             </a:pPr>
             <a:r>
-              <a:rPr lang="en-US" sz="1000" dirty="0">
+              <a:rPr lang="en-US" sz="1100" dirty="0">
                 <a:solidFill>
                   <a:srgbClr val="625A6A"/>
                 </a:solidFill>
@@ -2189,19 +2299,19 @@
               </a:rPr>
               <a:t>0</a:t>
             </a:r>
-            <a:endParaRPr lang="en-US" sz="1000" dirty="0"/>
-          </a:p>
-        </p:txBody>
-      </p:sp>
-      <p:sp>
-        <p:nvSpPr>
-          <p:cNvPr id="37" name="Shape 34"/>
-          <p:cNvSpPr/>
-          <p:nvPr/>
-        </p:nvSpPr>
-        <p:spPr>
-          <a:xfrm>
-            <a:off x="5989320" y="7971282"/>
+            <a:endParaRPr lang="en-US" sz="1100" dirty="0"/>
+          </a:p>
+        </p:txBody>
+      </p:sp>
+      <p:sp>
+        <p:nvSpPr>
+          <p:cNvPr id="40" name="Shape 37"/>
+          <p:cNvSpPr/>
+          <p:nvPr/>
+        </p:nvSpPr>
+        <p:spPr>
+          <a:xfrm>
+            <a:off x="5989320" y="7920386"/>
             <a:ext cx="7589520" cy="914"/>
           </a:xfrm>
           <a:prstGeom prst="line">
@@ -2218,14 +2328,14 @@
       </p:sp>
       <p:sp>
         <p:nvSpPr>
-          <p:cNvPr id="38" name="Text 35"/>
-          <p:cNvSpPr/>
-          <p:nvPr/>
-        </p:nvSpPr>
-        <p:spPr>
-          <a:xfrm>
-            <a:off x="5669280" y="7861554"/>
-            <a:ext cx="237744" cy="201168"/>
+          <p:cNvPr id="41" name="Text 38"/>
+          <p:cNvSpPr/>
+          <p:nvPr/>
+        </p:nvSpPr>
+        <p:spPr>
+          <a:xfrm>
+            <a:off x="5669280" y="7816964"/>
+            <a:ext cx="237744" cy="189607"/>
           </a:xfrm>
           <a:prstGeom prst="rect">
             <a:avLst/>
@@ -2243,7 +2353,7 @@
               <a:buNone/>
             </a:pPr>
             <a:r>
-              <a:rPr lang="en-US" sz="1000" dirty="0">
+              <a:rPr lang="en-US" sz="1100" dirty="0">
                 <a:solidFill>
                   <a:srgbClr val="625A6A"/>
                 </a:solidFill>
@@ -2253,19 +2363,19 @@
               </a:rPr>
               <a:t>1</a:t>
             </a:r>
-            <a:endParaRPr lang="en-US" sz="1000" dirty="0"/>
-          </a:p>
-        </p:txBody>
-      </p:sp>
-      <p:sp>
-        <p:nvSpPr>
-          <p:cNvPr id="39" name="Shape 36"/>
-          <p:cNvSpPr/>
-          <p:nvPr/>
-        </p:nvSpPr>
-        <p:spPr>
-          <a:xfrm>
-            <a:off x="5989320" y="7411212"/>
+            <a:endParaRPr lang="en-US" sz="1100" dirty="0"/>
+          </a:p>
+        </p:txBody>
+      </p:sp>
+      <p:sp>
+        <p:nvSpPr>
+          <p:cNvPr id="42" name="Shape 39"/>
+          <p:cNvSpPr/>
+          <p:nvPr/>
+        </p:nvSpPr>
+        <p:spPr>
+          <a:xfrm>
+            <a:off x="5989320" y="7515317"/>
             <a:ext cx="7589520" cy="914"/>
           </a:xfrm>
           <a:prstGeom prst="line">
@@ -2282,14 +2392,14 @@
       </p:sp>
       <p:sp>
         <p:nvSpPr>
-          <p:cNvPr id="40" name="Text 37"/>
-          <p:cNvSpPr/>
-          <p:nvPr/>
-        </p:nvSpPr>
-        <p:spPr>
-          <a:xfrm>
-            <a:off x="5669280" y="7301484"/>
-            <a:ext cx="237744" cy="201168"/>
+          <p:cNvPr id="43" name="Text 40"/>
+          <p:cNvSpPr/>
+          <p:nvPr/>
+        </p:nvSpPr>
+        <p:spPr>
+          <a:xfrm>
+            <a:off x="5669280" y="7411895"/>
+            <a:ext cx="237744" cy="189607"/>
           </a:xfrm>
           <a:prstGeom prst="rect">
             <a:avLst/>
@@ -2307,7 +2417,7 @@
               <a:buNone/>
             </a:pPr>
             <a:r>
-              <a:rPr lang="en-US" sz="1000" dirty="0">
+              <a:rPr lang="en-US" sz="1100" dirty="0">
                 <a:solidFill>
                   <a:srgbClr val="625A6A"/>
                 </a:solidFill>
@@ -2317,19 +2427,19 @@
               </a:rPr>
               <a:t>2</a:t>
             </a:r>
-            <a:endParaRPr lang="en-US" sz="1000" dirty="0"/>
-          </a:p>
-        </p:txBody>
-      </p:sp>
-      <p:sp>
-        <p:nvSpPr>
-          <p:cNvPr id="41" name="Shape 38"/>
-          <p:cNvSpPr/>
-          <p:nvPr/>
-        </p:nvSpPr>
-        <p:spPr>
-          <a:xfrm>
-            <a:off x="5989320" y="6851142"/>
+            <a:endParaRPr lang="en-US" sz="1100" dirty="0"/>
+          </a:p>
+        </p:txBody>
+      </p:sp>
+      <p:sp>
+        <p:nvSpPr>
+          <p:cNvPr id="44" name="Shape 41"/>
+          <p:cNvSpPr/>
+          <p:nvPr/>
+        </p:nvSpPr>
+        <p:spPr>
+          <a:xfrm>
+            <a:off x="5989320" y="7110248"/>
             <a:ext cx="7589520" cy="914"/>
           </a:xfrm>
           <a:prstGeom prst="line">
@@ -2346,14 +2456,14 @@
       </p:sp>
       <p:sp>
         <p:nvSpPr>
-          <p:cNvPr id="42" name="Text 39"/>
-          <p:cNvSpPr/>
-          <p:nvPr/>
-        </p:nvSpPr>
-        <p:spPr>
-          <a:xfrm>
-            <a:off x="5669280" y="6741414"/>
-            <a:ext cx="237744" cy="201168"/>
+          <p:cNvPr id="45" name="Text 42"/>
+          <p:cNvSpPr/>
+          <p:nvPr/>
+        </p:nvSpPr>
+        <p:spPr>
+          <a:xfrm>
+            <a:off x="5669280" y="7006826"/>
+            <a:ext cx="237744" cy="189607"/>
           </a:xfrm>
           <a:prstGeom prst="rect">
             <a:avLst/>
@@ -2371,7 +2481,7 @@
               <a:buNone/>
             </a:pPr>
             <a:r>
-              <a:rPr lang="en-US" sz="1000" dirty="0">
+              <a:rPr lang="en-US" sz="1100" dirty="0">
                 <a:solidFill>
                   <a:srgbClr val="625A6A"/>
                 </a:solidFill>
@@ -2381,19 +2491,19 @@
               </a:rPr>
               <a:t>3</a:t>
             </a:r>
-            <a:endParaRPr lang="en-US" sz="1000" dirty="0"/>
-          </a:p>
-        </p:txBody>
-      </p:sp>
-      <p:sp>
-        <p:nvSpPr>
-          <p:cNvPr id="43" name="Shape 40"/>
-          <p:cNvSpPr/>
-          <p:nvPr/>
-        </p:nvSpPr>
-        <p:spPr>
-          <a:xfrm>
-            <a:off x="5989320" y="6291072"/>
+            <a:endParaRPr lang="en-US" sz="1100" dirty="0"/>
+          </a:p>
+        </p:txBody>
+      </p:sp>
+      <p:sp>
+        <p:nvSpPr>
+          <p:cNvPr id="46" name="Shape 43"/>
+          <p:cNvSpPr/>
+          <p:nvPr/>
+        </p:nvSpPr>
+        <p:spPr>
+          <a:xfrm>
+            <a:off x="5989320" y="6705180"/>
             <a:ext cx="7589520" cy="914"/>
           </a:xfrm>
           <a:prstGeom prst="line">
@@ -2410,14 +2520,14 @@
       </p:sp>
       <p:sp>
         <p:nvSpPr>
-          <p:cNvPr id="44" name="Text 41"/>
-          <p:cNvSpPr/>
-          <p:nvPr/>
-        </p:nvSpPr>
-        <p:spPr>
-          <a:xfrm>
-            <a:off x="5669280" y="6181344"/>
-            <a:ext cx="237744" cy="201168"/>
+          <p:cNvPr id="47" name="Text 44"/>
+          <p:cNvSpPr/>
+          <p:nvPr/>
+        </p:nvSpPr>
+        <p:spPr>
+          <a:xfrm>
+            <a:off x="5669280" y="6601758"/>
+            <a:ext cx="237744" cy="189607"/>
           </a:xfrm>
           <a:prstGeom prst="rect">
             <a:avLst/>
@@ -2435,7 +2545,7 @@
               <a:buNone/>
             </a:pPr>
             <a:r>
-              <a:rPr lang="en-US" sz="1000" dirty="0">
+              <a:rPr lang="en-US" sz="1100" dirty="0">
                 <a:solidFill>
                   <a:srgbClr val="625A6A"/>
                 </a:solidFill>
@@ -2445,20 +2555,20 @@
               </a:rPr>
               <a:t>4</a:t>
             </a:r>
-            <a:endParaRPr lang="en-US" sz="1000" dirty="0"/>
-          </a:p>
-        </p:txBody>
-      </p:sp>
-      <p:sp>
-        <p:nvSpPr>
-          <p:cNvPr id="45" name="Shape 42"/>
-          <p:cNvSpPr/>
-          <p:nvPr/>
-        </p:nvSpPr>
-        <p:spPr>
-          <a:xfrm>
-            <a:off x="6519672" y="6313475"/>
-            <a:ext cx="822960" cy="2217877"/>
+            <a:endParaRPr lang="en-US" sz="1100" dirty="0"/>
+          </a:p>
+        </p:txBody>
+      </p:sp>
+      <p:sp>
+        <p:nvSpPr>
+          <p:cNvPr id="48" name="Shape 45"/>
+          <p:cNvSpPr/>
+          <p:nvPr/>
+        </p:nvSpPr>
+        <p:spPr>
+          <a:xfrm>
+            <a:off x="6519672" y="6721382"/>
+            <a:ext cx="822960" cy="1604072"/>
           </a:xfrm>
           <a:prstGeom prst="rect">
             <a:avLst/>
@@ -2478,14 +2588,14 @@
       </p:sp>
       <p:sp>
         <p:nvSpPr>
-          <p:cNvPr id="46" name="Text 43"/>
-          <p:cNvSpPr/>
-          <p:nvPr/>
-        </p:nvSpPr>
-        <p:spPr>
-          <a:xfrm>
-            <a:off x="6519672" y="6039155"/>
-            <a:ext cx="822960" cy="219456"/>
+          <p:cNvPr id="49" name="Text 46"/>
+          <p:cNvSpPr/>
+          <p:nvPr/>
+        </p:nvSpPr>
+        <p:spPr>
+          <a:xfrm>
+            <a:off x="6519672" y="6462828"/>
+            <a:ext cx="822960" cy="206844"/>
           </a:xfrm>
           <a:prstGeom prst="rect">
             <a:avLst/>
@@ -2519,14 +2629,14 @@
       </p:sp>
       <p:sp>
         <p:nvSpPr>
-          <p:cNvPr id="47" name="Text 44"/>
-          <p:cNvSpPr/>
-          <p:nvPr/>
-        </p:nvSpPr>
-        <p:spPr>
-          <a:xfrm>
-            <a:off x="6291072" y="8595360"/>
-            <a:ext cx="1280160" cy="438912"/>
+          <p:cNvPr id="50" name="Text 47"/>
+          <p:cNvSpPr/>
+          <p:nvPr/>
+        </p:nvSpPr>
+        <p:spPr>
+          <a:xfrm>
+            <a:off x="6291072" y="8385784"/>
+            <a:ext cx="1280160" cy="413687"/>
           </a:xfrm>
           <a:prstGeom prst="rect">
             <a:avLst/>
@@ -2544,7 +2654,7 @@
               <a:buNone/>
             </a:pPr>
             <a:r>
-              <a:rPr lang="en-US" sz="1000" dirty="0">
+              <a:rPr lang="en-US" sz="1100" dirty="0">
                 <a:solidFill>
                   <a:srgbClr val="321B40"/>
                 </a:solidFill>
@@ -2554,14 +2664,14 @@
               </a:rPr>
               <a:t>1–2 etaje</a:t>
             </a:r>
-            <a:endParaRPr lang="en-US" sz="1000" dirty="0"/>
+            <a:endParaRPr lang="en-US" sz="1100" dirty="0"/>
           </a:p>
           <a:p>
             <a:pPr algn="ctr" indent="0" marL="0">
               <a:buNone/>
             </a:pPr>
             <a:r>
-              <a:rPr lang="en-US" sz="1000" dirty="0">
+              <a:rPr lang="en-US" sz="1100" dirty="0">
                 <a:solidFill>
                   <a:srgbClr val="321B40"/>
                 </a:solidFill>
@@ -2571,20 +2681,20 @@
               </a:rPr>
               <a:t>n = 2.591</a:t>
             </a:r>
-            <a:endParaRPr lang="en-US" sz="1000" dirty="0"/>
-          </a:p>
-        </p:txBody>
-      </p:sp>
-      <p:sp>
-        <p:nvSpPr>
-          <p:cNvPr id="48" name="Shape 45"/>
-          <p:cNvSpPr/>
-          <p:nvPr/>
-        </p:nvSpPr>
-        <p:spPr>
-          <a:xfrm>
-            <a:off x="8330184" y="7332802"/>
-            <a:ext cx="822960" cy="1198550"/>
+            <a:endParaRPr lang="en-US" sz="1100" dirty="0"/>
+          </a:p>
+        </p:txBody>
+      </p:sp>
+      <p:sp>
+        <p:nvSpPr>
+          <p:cNvPr id="51" name="Shape 48"/>
+          <p:cNvSpPr/>
+          <p:nvPr/>
+        </p:nvSpPr>
+        <p:spPr>
+          <a:xfrm>
+            <a:off x="8330184" y="7458607"/>
+            <a:ext cx="822960" cy="866847"/>
           </a:xfrm>
           <a:prstGeom prst="rect">
             <a:avLst/>
@@ -2604,14 +2714,14 @@
       </p:sp>
       <p:sp>
         <p:nvSpPr>
-          <p:cNvPr id="49" name="Text 46"/>
-          <p:cNvSpPr/>
-          <p:nvPr/>
-        </p:nvSpPr>
-        <p:spPr>
-          <a:xfrm>
-            <a:off x="8330184" y="7058482"/>
-            <a:ext cx="822960" cy="219456"/>
+          <p:cNvPr id="52" name="Text 49"/>
+          <p:cNvSpPr/>
+          <p:nvPr/>
+        </p:nvSpPr>
+        <p:spPr>
+          <a:xfrm>
+            <a:off x="8330184" y="7200053"/>
+            <a:ext cx="822960" cy="206844"/>
           </a:xfrm>
           <a:prstGeom prst="rect">
             <a:avLst/>
@@ -2645,14 +2755,14 @@
       </p:sp>
       <p:sp>
         <p:nvSpPr>
-          <p:cNvPr id="50" name="Text 47"/>
-          <p:cNvSpPr/>
-          <p:nvPr/>
-        </p:nvSpPr>
-        <p:spPr>
-          <a:xfrm>
-            <a:off x="8101584" y="8595360"/>
-            <a:ext cx="1280160" cy="438912"/>
+          <p:cNvPr id="53" name="Text 50"/>
+          <p:cNvSpPr/>
+          <p:nvPr/>
+        </p:nvSpPr>
+        <p:spPr>
+          <a:xfrm>
+            <a:off x="8101584" y="8385784"/>
+            <a:ext cx="1280160" cy="413687"/>
           </a:xfrm>
           <a:prstGeom prst="rect">
             <a:avLst/>
@@ -2670,7 +2780,7 @@
               <a:buNone/>
             </a:pPr>
             <a:r>
-              <a:rPr lang="en-US" sz="1000" dirty="0">
+              <a:rPr lang="en-US" sz="1100" dirty="0">
                 <a:solidFill>
                   <a:srgbClr val="321B40"/>
                 </a:solidFill>
@@ -2680,14 +2790,14 @@
               </a:rPr>
               <a:t>3–4 etaje</a:t>
             </a:r>
-            <a:endParaRPr lang="en-US" sz="1000" dirty="0"/>
+            <a:endParaRPr lang="en-US" sz="1100" dirty="0"/>
           </a:p>
           <a:p>
             <a:pPr algn="ctr" indent="0" marL="0">
               <a:buNone/>
             </a:pPr>
             <a:r>
-              <a:rPr lang="en-US" sz="1000" dirty="0">
+              <a:rPr lang="en-US" sz="1100" dirty="0">
                 <a:solidFill>
                   <a:srgbClr val="321B40"/>
                 </a:solidFill>
@@ -2697,20 +2807,20 @@
               </a:rPr>
               <a:t>n = 965</a:t>
             </a:r>
-            <a:endParaRPr lang="en-US" sz="1000" dirty="0"/>
-          </a:p>
-        </p:txBody>
-      </p:sp>
-      <p:sp>
-        <p:nvSpPr>
-          <p:cNvPr id="51" name="Shape 48"/>
-          <p:cNvSpPr/>
-          <p:nvPr/>
-        </p:nvSpPr>
-        <p:spPr>
-          <a:xfrm>
-            <a:off x="10140696" y="7528827"/>
-            <a:ext cx="822960" cy="1002525"/>
+            <a:endParaRPr lang="en-US" sz="1100" dirty="0"/>
+          </a:p>
+        </p:txBody>
+      </p:sp>
+      <p:sp>
+        <p:nvSpPr>
+          <p:cNvPr id="54" name="Shape 51"/>
+          <p:cNvSpPr/>
+          <p:nvPr/>
+        </p:nvSpPr>
+        <p:spPr>
+          <a:xfrm>
+            <a:off x="10140696" y="7600381"/>
+            <a:ext cx="822960" cy="725073"/>
           </a:xfrm>
           <a:prstGeom prst="rect">
             <a:avLst/>
@@ -2730,14 +2840,14 @@
       </p:sp>
       <p:sp>
         <p:nvSpPr>
-          <p:cNvPr id="52" name="Text 49"/>
-          <p:cNvSpPr/>
-          <p:nvPr/>
-        </p:nvSpPr>
-        <p:spPr>
-          <a:xfrm>
-            <a:off x="10140696" y="7254507"/>
-            <a:ext cx="822960" cy="219456"/>
+          <p:cNvPr id="55" name="Text 52"/>
+          <p:cNvSpPr/>
+          <p:nvPr/>
+        </p:nvSpPr>
+        <p:spPr>
+          <a:xfrm>
+            <a:off x="10140696" y="7341827"/>
+            <a:ext cx="822960" cy="206844"/>
           </a:xfrm>
           <a:prstGeom prst="rect">
             <a:avLst/>
@@ -2771,14 +2881,14 @@
       </p:sp>
       <p:sp>
         <p:nvSpPr>
-          <p:cNvPr id="53" name="Text 50"/>
-          <p:cNvSpPr/>
-          <p:nvPr/>
-        </p:nvSpPr>
-        <p:spPr>
-          <a:xfrm>
-            <a:off x="9912096" y="8595360"/>
-            <a:ext cx="1280160" cy="438912"/>
+          <p:cNvPr id="56" name="Text 53"/>
+          <p:cNvSpPr/>
+          <p:nvPr/>
+        </p:nvSpPr>
+        <p:spPr>
+          <a:xfrm>
+            <a:off x="9912096" y="8385784"/>
+            <a:ext cx="1280160" cy="413687"/>
           </a:xfrm>
           <a:prstGeom prst="rect">
             <a:avLst/>
@@ -2796,7 +2906,7 @@
               <a:buNone/>
             </a:pPr>
             <a:r>
-              <a:rPr lang="en-US" sz="1000" dirty="0">
+              <a:rPr lang="en-US" sz="1100" dirty="0">
                 <a:solidFill>
                   <a:srgbClr val="321B40"/>
                 </a:solidFill>
@@ -2806,14 +2916,14 @@
               </a:rPr>
               <a:t>5–8 etaje</a:t>
             </a:r>
-            <a:endParaRPr lang="en-US" sz="1000" dirty="0"/>
+            <a:endParaRPr lang="en-US" sz="1100" dirty="0"/>
           </a:p>
           <a:p>
             <a:pPr algn="ctr" indent="0" marL="0">
               <a:buNone/>
             </a:pPr>
             <a:r>
-              <a:rPr lang="en-US" sz="1000" dirty="0">
+              <a:rPr lang="en-US" sz="1100" dirty="0">
                 <a:solidFill>
                   <a:srgbClr val="321B40"/>
                 </a:solidFill>
@@ -2823,20 +2933,20 @@
               </a:rPr>
               <a:t>n = 1.042</a:t>
             </a:r>
-            <a:endParaRPr lang="en-US" sz="1000" dirty="0"/>
-          </a:p>
-        </p:txBody>
-      </p:sp>
-      <p:sp>
-        <p:nvSpPr>
-          <p:cNvPr id="54" name="Shape 51"/>
-          <p:cNvSpPr/>
-          <p:nvPr/>
-        </p:nvSpPr>
-        <p:spPr>
-          <a:xfrm>
-            <a:off x="11951208" y="7769657"/>
-            <a:ext cx="822960" cy="761695"/>
+            <a:endParaRPr lang="en-US" sz="1100" dirty="0"/>
+          </a:p>
+        </p:txBody>
+      </p:sp>
+      <p:sp>
+        <p:nvSpPr>
+          <p:cNvPr id="57" name="Shape 54"/>
+          <p:cNvSpPr/>
+          <p:nvPr/>
+        </p:nvSpPr>
+        <p:spPr>
+          <a:xfrm>
+            <a:off x="11951208" y="7774561"/>
+            <a:ext cx="822960" cy="550893"/>
           </a:xfrm>
           <a:prstGeom prst="rect">
             <a:avLst/>
@@ -2856,14 +2966,14 @@
       </p:sp>
       <p:sp>
         <p:nvSpPr>
-          <p:cNvPr id="55" name="Text 52"/>
-          <p:cNvSpPr/>
-          <p:nvPr/>
-        </p:nvSpPr>
-        <p:spPr>
-          <a:xfrm>
-            <a:off x="11951208" y="7495337"/>
-            <a:ext cx="822960" cy="219456"/>
+          <p:cNvPr id="58" name="Text 55"/>
+          <p:cNvSpPr/>
+          <p:nvPr/>
+        </p:nvSpPr>
+        <p:spPr>
+          <a:xfrm>
+            <a:off x="11951208" y="7516006"/>
+            <a:ext cx="822960" cy="206844"/>
           </a:xfrm>
           <a:prstGeom prst="rect">
             <a:avLst/>
@@ -2897,14 +3007,14 @@
       </p:sp>
       <p:sp>
         <p:nvSpPr>
-          <p:cNvPr id="56" name="Text 53"/>
-          <p:cNvSpPr/>
-          <p:nvPr/>
-        </p:nvSpPr>
-        <p:spPr>
-          <a:xfrm>
-            <a:off x="11722608" y="8595360"/>
-            <a:ext cx="1280160" cy="438912"/>
+          <p:cNvPr id="59" name="Text 56"/>
+          <p:cNvSpPr/>
+          <p:nvPr/>
+        </p:nvSpPr>
+        <p:spPr>
+          <a:xfrm>
+            <a:off x="11722608" y="8385784"/>
+            <a:ext cx="1280160" cy="413687"/>
           </a:xfrm>
           <a:prstGeom prst="rect">
             <a:avLst/>
@@ -2922,7 +3032,7 @@
               <a:buNone/>
             </a:pPr>
             <a:r>
-              <a:rPr lang="en-US" sz="1000" dirty="0">
+              <a:rPr lang="en-US" sz="1100" dirty="0">
                 <a:solidFill>
                   <a:srgbClr val="321B40"/>
                 </a:solidFill>
@@ -2932,14 +3042,14 @@
               </a:rPr>
               <a:t>9–12 etaje</a:t>
             </a:r>
-            <a:endParaRPr lang="en-US" sz="1000" dirty="0"/>
+            <a:endParaRPr lang="en-US" sz="1100" dirty="0"/>
           </a:p>
           <a:p>
             <a:pPr algn="ctr" indent="0" marL="0">
               <a:buNone/>
             </a:pPr>
             <a:r>
-              <a:rPr lang="en-US" sz="1000" dirty="0">
+              <a:rPr lang="en-US" sz="1100" dirty="0">
                 <a:solidFill>
                   <a:srgbClr val="321B40"/>
                 </a:solidFill>
@@ -2949,20 +3059,20 @@
               </a:rPr>
               <a:t>n = 309</a:t>
             </a:r>
-            <a:endParaRPr lang="en-US" sz="1000" dirty="0"/>
-          </a:p>
-        </p:txBody>
-      </p:sp>
-      <p:sp>
-        <p:nvSpPr>
-          <p:cNvPr id="57" name="Text 54"/>
-          <p:cNvSpPr/>
-          <p:nvPr/>
-        </p:nvSpPr>
-        <p:spPr>
-          <a:xfrm>
-            <a:off x="5989320" y="9125712"/>
-            <a:ext cx="7498080" cy="228600"/>
+            <a:endParaRPr lang="en-US" sz="1100" dirty="0"/>
+          </a:p>
+        </p:txBody>
+      </p:sp>
+      <p:sp>
+        <p:nvSpPr>
+          <p:cNvPr id="60" name="Text 57"/>
+          <p:cNvSpPr/>
+          <p:nvPr/>
+        </p:nvSpPr>
+        <p:spPr>
+          <a:xfrm>
+            <a:off x="5989320" y="8877037"/>
+            <a:ext cx="7498080" cy="215462"/>
           </a:xfrm>
           <a:prstGeom prst="rect">
             <a:avLst/>
@@ -2996,14 +3106,14 @@
       </p:sp>
       <p:sp>
         <p:nvSpPr>
-          <p:cNvPr id="58" name="Text 55"/>
-          <p:cNvSpPr/>
-          <p:nvPr/>
-        </p:nvSpPr>
-        <p:spPr>
-          <a:xfrm>
-            <a:off x="5989320" y="9409176"/>
-            <a:ext cx="7680960" cy="274320"/>
+          <p:cNvPr id="61" name="Text 58"/>
+          <p:cNvSpPr/>
+          <p:nvPr/>
+        </p:nvSpPr>
+        <p:spPr>
+          <a:xfrm>
+            <a:off x="5989320" y="9152829"/>
+            <a:ext cx="7680960" cy="258554"/>
           </a:xfrm>
           <a:prstGeom prst="rect">
             <a:avLst/>
@@ -3029,7 +3139,7 @@
                 <a:ea typeface="Noto Sans" pitchFamily="34" charset="-122"/>
                 <a:cs typeface="Noto Sans" pitchFamily="34" charset="-120"/>
               </a:rPr>
-              <a:t>n = 4.925 asocieri; graficul prezintă 4.907 clădiri cu 1–12 etaje.</a:t>
+              <a:t>n = 4.925 asocieri; graficul arată 4.907 clădiri cu 1–12 etaje.</a:t>
             </a:r>
             <a:endParaRPr lang="en-US" sz="1100" dirty="0"/>
           </a:p>
@@ -3037,14 +3147,14 @@
       </p:sp>
       <p:sp>
         <p:nvSpPr>
-          <p:cNvPr id="59" name="Shape 56"/>
-          <p:cNvSpPr/>
-          <p:nvPr/>
-        </p:nvSpPr>
-        <p:spPr>
-          <a:xfrm>
-            <a:off x="548640" y="10104120"/>
-            <a:ext cx="6492240" cy="310896"/>
+          <p:cNvPr id="62" name="Shape 59"/>
+          <p:cNvSpPr/>
+          <p:nvPr/>
+        </p:nvSpPr>
+        <p:spPr>
+          <a:xfrm>
+            <a:off x="548640" y="9523423"/>
+            <a:ext cx="6492240" cy="293028"/>
           </a:xfrm>
           <a:prstGeom prst="rect">
             <a:avLst/>
@@ -3064,14 +3174,14 @@
       </p:sp>
       <p:sp>
         <p:nvSpPr>
-          <p:cNvPr id="60" name="Text 57"/>
-          <p:cNvSpPr/>
-          <p:nvPr/>
-        </p:nvSpPr>
-        <p:spPr>
-          <a:xfrm>
-            <a:off x="658368" y="10136124"/>
-            <a:ext cx="6309360" cy="219456"/>
+          <p:cNvPr id="63" name="Text 60"/>
+          <p:cNvSpPr/>
+          <p:nvPr/>
+        </p:nvSpPr>
+        <p:spPr>
+          <a:xfrm>
+            <a:off x="658368" y="9553588"/>
+            <a:ext cx="6309360" cy="206844"/>
           </a:xfrm>
           <a:prstGeom prst="rect">
             <a:avLst/>
@@ -3105,14 +3215,14 @@
       </p:sp>
       <p:sp>
         <p:nvSpPr>
-          <p:cNvPr id="61" name="Shape 58"/>
-          <p:cNvSpPr/>
-          <p:nvPr/>
-        </p:nvSpPr>
-        <p:spPr>
-          <a:xfrm>
-            <a:off x="7498080" y="10104120"/>
-            <a:ext cx="6583680" cy="310896"/>
+          <p:cNvPr id="64" name="Shape 61"/>
+          <p:cNvSpPr/>
+          <p:nvPr/>
+        </p:nvSpPr>
+        <p:spPr>
+          <a:xfrm>
+            <a:off x="7498080" y="9523423"/>
+            <a:ext cx="6583680" cy="293028"/>
           </a:xfrm>
           <a:prstGeom prst="rect">
             <a:avLst/>
@@ -3132,14 +3242,14 @@
       </p:sp>
       <p:sp>
         <p:nvSpPr>
-          <p:cNvPr id="62" name="Text 59"/>
-          <p:cNvSpPr/>
-          <p:nvPr/>
-        </p:nvSpPr>
-        <p:spPr>
-          <a:xfrm>
-            <a:off x="7607808" y="10136124"/>
-            <a:ext cx="6400800" cy="219456"/>
+          <p:cNvPr id="65" name="Text 62"/>
+          <p:cNvSpPr/>
+          <p:nvPr/>
+        </p:nvSpPr>
+        <p:spPr>
+          <a:xfrm>
+            <a:off x="7607808" y="9553588"/>
+            <a:ext cx="6400800" cy="206844"/>
           </a:xfrm>
           <a:prstGeom prst="rect">
             <a:avLst/>
@@ -3173,14 +3283,14 @@
       </p:sp>
       <p:sp>
         <p:nvSpPr>
-          <p:cNvPr id="63" name="Text 60"/>
-          <p:cNvSpPr/>
-          <p:nvPr/>
-        </p:nvSpPr>
-        <p:spPr>
-          <a:xfrm>
-            <a:off x="594360" y="10533888"/>
-            <a:ext cx="6400800" cy="310896"/>
+          <p:cNvPr id="66" name="Text 63"/>
+          <p:cNvSpPr/>
+          <p:nvPr/>
+        </p:nvSpPr>
+        <p:spPr>
+          <a:xfrm>
+            <a:off x="594360" y="9928492"/>
+            <a:ext cx="6400800" cy="293028"/>
           </a:xfrm>
           <a:prstGeom prst="rect">
             <a:avLst/>
@@ -3214,14 +3324,14 @@
       </p:sp>
       <p:sp>
         <p:nvSpPr>
-          <p:cNvPr id="64" name="Text 61"/>
-          <p:cNvSpPr/>
-          <p:nvPr/>
-        </p:nvSpPr>
-        <p:spPr>
-          <a:xfrm>
-            <a:off x="7543800" y="10533888"/>
-            <a:ext cx="6400800" cy="310896"/>
+          <p:cNvPr id="67" name="Text 64"/>
+          <p:cNvSpPr/>
+          <p:nvPr/>
+        </p:nvSpPr>
+        <p:spPr>
+          <a:xfrm>
+            <a:off x="7543800" y="9928492"/>
+            <a:ext cx="6400800" cy="293028"/>
           </a:xfrm>
           <a:prstGeom prst="rect">
             <a:avLst/>
@@ -3255,14 +3365,14 @@
       </p:sp>
       <p:sp>
         <p:nvSpPr>
-          <p:cNvPr id="65" name="Text 62"/>
-          <p:cNvSpPr/>
-          <p:nvPr/>
-        </p:nvSpPr>
-        <p:spPr>
-          <a:xfrm>
-            <a:off x="1097280" y="11237976"/>
-            <a:ext cx="5440680" cy="201168"/>
+          <p:cNvPr id="68" name="Text 65"/>
+          <p:cNvSpPr/>
+          <p:nvPr/>
+        </p:nvSpPr>
+        <p:spPr>
+          <a:xfrm>
+            <a:off x="1097280" y="10592115"/>
+            <a:ext cx="5440680" cy="189607"/>
           </a:xfrm>
           <a:prstGeom prst="rect">
             <a:avLst/>
@@ -3280,7 +3390,7 @@
               <a:buNone/>
             </a:pPr>
             <a:r>
-              <a:rPr lang="en-US" sz="1000" dirty="0">
+              <a:rPr lang="en-US" sz="1100" dirty="0">
                 <a:solidFill>
                   <a:srgbClr val="625A6A"/>
                 </a:solidFill>
@@ -3290,19 +3400,19 @@
               </a:rPr>
               <a:t>Eroarea înălțimii δh (m)</a:t>
             </a:r>
-            <a:endParaRPr lang="en-US" sz="1000" dirty="0"/>
-          </a:p>
-        </p:txBody>
-      </p:sp>
-      <p:sp>
-        <p:nvSpPr>
-          <p:cNvPr id="66" name="Shape 63"/>
-          <p:cNvSpPr/>
-          <p:nvPr/>
-        </p:nvSpPr>
-        <p:spPr>
-          <a:xfrm>
-            <a:off x="1097280" y="14218920"/>
+            <a:endParaRPr lang="en-US" sz="1100" dirty="0"/>
+          </a:p>
+        </p:txBody>
+      </p:sp>
+      <p:sp>
+        <p:nvSpPr>
+          <p:cNvPr id="69" name="Shape 66"/>
+          <p:cNvSpPr/>
+          <p:nvPr/>
+        </p:nvSpPr>
+        <p:spPr>
+          <a:xfrm>
+            <a:off x="1097280" y="13401741"/>
             <a:ext cx="5440680" cy="914"/>
           </a:xfrm>
           <a:prstGeom prst="line">
@@ -3319,14 +3429,14 @@
       </p:sp>
       <p:sp>
         <p:nvSpPr>
-          <p:cNvPr id="67" name="Text 64"/>
-          <p:cNvSpPr/>
-          <p:nvPr/>
-        </p:nvSpPr>
-        <p:spPr>
-          <a:xfrm>
-            <a:off x="768096" y="14127480"/>
-            <a:ext cx="228600" cy="182880"/>
+          <p:cNvPr id="70" name="Text 67"/>
+          <p:cNvSpPr/>
+          <p:nvPr/>
+        </p:nvSpPr>
+        <p:spPr>
+          <a:xfrm>
+            <a:off x="768096" y="13315556"/>
+            <a:ext cx="228600" cy="172370"/>
           </a:xfrm>
           <a:prstGeom prst="rect">
             <a:avLst/>
@@ -3344,7 +3454,7 @@
               <a:buNone/>
             </a:pPr>
             <a:r>
-              <a:rPr lang="en-US" sz="1000" dirty="0">
+              <a:rPr lang="en-US" sz="1100" dirty="0">
                 <a:solidFill>
                   <a:srgbClr val="625A6A"/>
                 </a:solidFill>
@@ -3354,19 +3464,19 @@
               </a:rPr>
               <a:t>0</a:t>
             </a:r>
-            <a:endParaRPr lang="en-US" sz="1000" dirty="0"/>
-          </a:p>
-        </p:txBody>
-      </p:sp>
-      <p:sp>
-        <p:nvSpPr>
-          <p:cNvPr id="68" name="Shape 65"/>
-          <p:cNvSpPr/>
-          <p:nvPr/>
-        </p:nvSpPr>
-        <p:spPr>
-          <a:xfrm>
-            <a:off x="1097280" y="13555980"/>
+            <a:endParaRPr lang="en-US" sz="1100" dirty="0"/>
+          </a:p>
+        </p:txBody>
+      </p:sp>
+      <p:sp>
+        <p:nvSpPr>
+          <p:cNvPr id="71" name="Shape 68"/>
+          <p:cNvSpPr/>
+          <p:nvPr/>
+        </p:nvSpPr>
+        <p:spPr>
+          <a:xfrm>
+            <a:off x="1097280" y="12776901"/>
             <a:ext cx="5440680" cy="914"/>
           </a:xfrm>
           <a:prstGeom prst="line">
@@ -3383,14 +3493,14 @@
       </p:sp>
       <p:sp>
         <p:nvSpPr>
-          <p:cNvPr id="69" name="Text 66"/>
-          <p:cNvSpPr/>
-          <p:nvPr/>
-        </p:nvSpPr>
-        <p:spPr>
-          <a:xfrm>
-            <a:off x="768096" y="13464540"/>
-            <a:ext cx="228600" cy="182880"/>
+          <p:cNvPr id="72" name="Text 69"/>
+          <p:cNvSpPr/>
+          <p:nvPr/>
+        </p:nvSpPr>
+        <p:spPr>
+          <a:xfrm>
+            <a:off x="768096" y="12690716"/>
+            <a:ext cx="228600" cy="172370"/>
           </a:xfrm>
           <a:prstGeom prst="rect">
             <a:avLst/>
@@ -3408,7 +3518,7 @@
               <a:buNone/>
             </a:pPr>
             <a:r>
-              <a:rPr lang="en-US" sz="1000" dirty="0">
+              <a:rPr lang="en-US" sz="1100" dirty="0">
                 <a:solidFill>
                   <a:srgbClr val="625A6A"/>
                 </a:solidFill>
@@ -3418,19 +3528,19 @@
               </a:rPr>
               <a:t>5</a:t>
             </a:r>
-            <a:endParaRPr lang="en-US" sz="1000" dirty="0"/>
-          </a:p>
-        </p:txBody>
-      </p:sp>
-      <p:sp>
-        <p:nvSpPr>
-          <p:cNvPr id="70" name="Shape 67"/>
-          <p:cNvSpPr/>
-          <p:nvPr/>
-        </p:nvSpPr>
-        <p:spPr>
-          <a:xfrm>
-            <a:off x="1097280" y="12893040"/>
+            <a:endParaRPr lang="en-US" sz="1100" dirty="0"/>
+          </a:p>
+        </p:txBody>
+      </p:sp>
+      <p:sp>
+        <p:nvSpPr>
+          <p:cNvPr id="73" name="Shape 70"/>
+          <p:cNvSpPr/>
+          <p:nvPr/>
+        </p:nvSpPr>
+        <p:spPr>
+          <a:xfrm>
+            <a:off x="1097280" y="12152061"/>
             <a:ext cx="5440680" cy="914"/>
           </a:xfrm>
           <a:prstGeom prst="line">
@@ -3447,14 +3557,14 @@
       </p:sp>
       <p:sp>
         <p:nvSpPr>
-          <p:cNvPr id="71" name="Text 68"/>
-          <p:cNvSpPr/>
-          <p:nvPr/>
-        </p:nvSpPr>
-        <p:spPr>
-          <a:xfrm>
-            <a:off x="768096" y="12801600"/>
-            <a:ext cx="228600" cy="182880"/>
+          <p:cNvPr id="74" name="Text 71"/>
+          <p:cNvSpPr/>
+          <p:nvPr/>
+        </p:nvSpPr>
+        <p:spPr>
+          <a:xfrm>
+            <a:off x="768096" y="12065876"/>
+            <a:ext cx="228600" cy="172370"/>
           </a:xfrm>
           <a:prstGeom prst="rect">
             <a:avLst/>
@@ -3472,7 +3582,7 @@
               <a:buNone/>
             </a:pPr>
             <a:r>
-              <a:rPr lang="en-US" sz="1000" dirty="0">
+              <a:rPr lang="en-US" sz="1100" dirty="0">
                 <a:solidFill>
                   <a:srgbClr val="625A6A"/>
                 </a:solidFill>
@@ -3482,19 +3592,19 @@
               </a:rPr>
               <a:t>10</a:t>
             </a:r>
-            <a:endParaRPr lang="en-US" sz="1000" dirty="0"/>
-          </a:p>
-        </p:txBody>
-      </p:sp>
-      <p:sp>
-        <p:nvSpPr>
-          <p:cNvPr id="72" name="Shape 69"/>
-          <p:cNvSpPr/>
-          <p:nvPr/>
-        </p:nvSpPr>
-        <p:spPr>
-          <a:xfrm>
-            <a:off x="1097280" y="12230100"/>
+            <a:endParaRPr lang="en-US" sz="1100" dirty="0"/>
+          </a:p>
+        </p:txBody>
+      </p:sp>
+      <p:sp>
+        <p:nvSpPr>
+          <p:cNvPr id="75" name="Shape 72"/>
+          <p:cNvSpPr/>
+          <p:nvPr/>
+        </p:nvSpPr>
+        <p:spPr>
+          <a:xfrm>
+            <a:off x="1097280" y="11527221"/>
             <a:ext cx="5440680" cy="914"/>
           </a:xfrm>
           <a:prstGeom prst="line">
@@ -3511,14 +3621,14 @@
       </p:sp>
       <p:sp>
         <p:nvSpPr>
-          <p:cNvPr id="73" name="Text 70"/>
-          <p:cNvSpPr/>
-          <p:nvPr/>
-        </p:nvSpPr>
-        <p:spPr>
-          <a:xfrm>
-            <a:off x="768096" y="12138660"/>
-            <a:ext cx="228600" cy="182880"/>
+          <p:cNvPr id="76" name="Text 73"/>
+          <p:cNvSpPr/>
+          <p:nvPr/>
+        </p:nvSpPr>
+        <p:spPr>
+          <a:xfrm>
+            <a:off x="768096" y="11441036"/>
+            <a:ext cx="228600" cy="172370"/>
           </a:xfrm>
           <a:prstGeom prst="rect">
             <a:avLst/>
@@ -3536,7 +3646,7 @@
               <a:buNone/>
             </a:pPr>
             <a:r>
-              <a:rPr lang="en-US" sz="1000" dirty="0">
+              <a:rPr lang="en-US" sz="1100" dirty="0">
                 <a:solidFill>
                   <a:srgbClr val="625A6A"/>
                 </a:solidFill>
@@ -3546,20 +3656,20 @@
               </a:rPr>
               <a:t>15</a:t>
             </a:r>
-            <a:endParaRPr lang="en-US" sz="1000" dirty="0"/>
-          </a:p>
-        </p:txBody>
-      </p:sp>
-      <p:sp>
-        <p:nvSpPr>
-          <p:cNvPr id="74" name="Text 71"/>
-          <p:cNvSpPr/>
-          <p:nvPr/>
-        </p:nvSpPr>
-        <p:spPr>
-          <a:xfrm>
-            <a:off x="941832" y="14328648"/>
-            <a:ext cx="320040" cy="210312"/>
+            <a:endParaRPr lang="en-US" sz="1100" dirty="0"/>
+          </a:p>
+        </p:txBody>
+      </p:sp>
+      <p:sp>
+        <p:nvSpPr>
+          <p:cNvPr id="77" name="Text 74"/>
+          <p:cNvSpPr/>
+          <p:nvPr/>
+        </p:nvSpPr>
+        <p:spPr>
+          <a:xfrm>
+            <a:off x="941832" y="13505162"/>
+            <a:ext cx="320040" cy="198225"/>
           </a:xfrm>
           <a:prstGeom prst="rect">
             <a:avLst/>
@@ -3577,7 +3687,7 @@
               <a:buNone/>
             </a:pPr>
             <a:r>
-              <a:rPr lang="en-US" sz="1000" dirty="0">
+              <a:rPr lang="en-US" sz="1100" dirty="0">
                 <a:solidFill>
                   <a:srgbClr val="321B40"/>
                 </a:solidFill>
@@ -3587,20 +3697,20 @@
               </a:rPr>
               <a:t>10</a:t>
             </a:r>
-            <a:endParaRPr lang="en-US" sz="1000" dirty="0"/>
-          </a:p>
-        </p:txBody>
-      </p:sp>
-      <p:sp>
-        <p:nvSpPr>
-          <p:cNvPr id="75" name="Text 72"/>
-          <p:cNvSpPr/>
-          <p:nvPr/>
-        </p:nvSpPr>
-        <p:spPr>
-          <a:xfrm>
-            <a:off x="1778860" y="14328648"/>
-            <a:ext cx="320040" cy="210312"/>
+            <a:endParaRPr lang="en-US" sz="1100" dirty="0"/>
+          </a:p>
+        </p:txBody>
+      </p:sp>
+      <p:sp>
+        <p:nvSpPr>
+          <p:cNvPr id="78" name="Text 75"/>
+          <p:cNvSpPr/>
+          <p:nvPr/>
+        </p:nvSpPr>
+        <p:spPr>
+          <a:xfrm>
+            <a:off x="1778860" y="13505162"/>
+            <a:ext cx="320040" cy="198225"/>
           </a:xfrm>
           <a:prstGeom prst="rect">
             <a:avLst/>
@@ -3618,7 +3728,7 @@
               <a:buNone/>
             </a:pPr>
             <a:r>
-              <a:rPr lang="en-US" sz="1000" dirty="0">
+              <a:rPr lang="en-US" sz="1100" dirty="0">
                 <a:solidFill>
                   <a:srgbClr val="321B40"/>
                 </a:solidFill>
@@ -3628,20 +3738,20 @@
               </a:rPr>
               <a:t>20</a:t>
             </a:r>
-            <a:endParaRPr lang="en-US" sz="1000" dirty="0"/>
-          </a:p>
-        </p:txBody>
-      </p:sp>
-      <p:sp>
-        <p:nvSpPr>
-          <p:cNvPr id="76" name="Text 73"/>
-          <p:cNvSpPr/>
-          <p:nvPr/>
-        </p:nvSpPr>
-        <p:spPr>
-          <a:xfrm>
-            <a:off x="2615887" y="14328648"/>
-            <a:ext cx="320040" cy="210312"/>
+            <a:endParaRPr lang="en-US" sz="1100" dirty="0"/>
+          </a:p>
+        </p:txBody>
+      </p:sp>
+      <p:sp>
+        <p:nvSpPr>
+          <p:cNvPr id="79" name="Text 76"/>
+          <p:cNvSpPr/>
+          <p:nvPr/>
+        </p:nvSpPr>
+        <p:spPr>
+          <a:xfrm>
+            <a:off x="2615887" y="13505162"/>
+            <a:ext cx="320040" cy="198225"/>
           </a:xfrm>
           <a:prstGeom prst="rect">
             <a:avLst/>
@@ -3659,7 +3769,7 @@
               <a:buNone/>
             </a:pPr>
             <a:r>
-              <a:rPr lang="en-US" sz="1000" dirty="0">
+              <a:rPr lang="en-US" sz="1100" dirty="0">
                 <a:solidFill>
                   <a:srgbClr val="321B40"/>
                 </a:solidFill>
@@ -3669,20 +3779,20 @@
               </a:rPr>
               <a:t>30</a:t>
             </a:r>
-            <a:endParaRPr lang="en-US" sz="1000" dirty="0"/>
-          </a:p>
-        </p:txBody>
-      </p:sp>
-      <p:sp>
-        <p:nvSpPr>
-          <p:cNvPr id="77" name="Text 74"/>
-          <p:cNvSpPr/>
-          <p:nvPr/>
-        </p:nvSpPr>
-        <p:spPr>
-          <a:xfrm>
-            <a:off x="3452915" y="14328648"/>
-            <a:ext cx="320040" cy="210312"/>
+            <a:endParaRPr lang="en-US" sz="1100" dirty="0"/>
+          </a:p>
+        </p:txBody>
+      </p:sp>
+      <p:sp>
+        <p:nvSpPr>
+          <p:cNvPr id="80" name="Text 77"/>
+          <p:cNvSpPr/>
+          <p:nvPr/>
+        </p:nvSpPr>
+        <p:spPr>
+          <a:xfrm>
+            <a:off x="3452915" y="13505162"/>
+            <a:ext cx="320040" cy="198225"/>
           </a:xfrm>
           <a:prstGeom prst="rect">
             <a:avLst/>
@@ -3700,7 +3810,7 @@
               <a:buNone/>
             </a:pPr>
             <a:r>
-              <a:rPr lang="en-US" sz="1000" dirty="0">
+              <a:rPr lang="en-US" sz="1100" dirty="0">
                 <a:solidFill>
                   <a:srgbClr val="321B40"/>
                 </a:solidFill>
@@ -3710,20 +3820,20 @@
               </a:rPr>
               <a:t>40</a:t>
             </a:r>
-            <a:endParaRPr lang="en-US" sz="1000" dirty="0"/>
-          </a:p>
-        </p:txBody>
-      </p:sp>
-      <p:sp>
-        <p:nvSpPr>
-          <p:cNvPr id="78" name="Text 75"/>
-          <p:cNvSpPr/>
-          <p:nvPr/>
-        </p:nvSpPr>
-        <p:spPr>
-          <a:xfrm>
-            <a:off x="4289943" y="14328648"/>
-            <a:ext cx="320040" cy="210312"/>
+            <a:endParaRPr lang="en-US" sz="1100" dirty="0"/>
+          </a:p>
+        </p:txBody>
+      </p:sp>
+      <p:sp>
+        <p:nvSpPr>
+          <p:cNvPr id="81" name="Text 78"/>
+          <p:cNvSpPr/>
+          <p:nvPr/>
+        </p:nvSpPr>
+        <p:spPr>
+          <a:xfrm>
+            <a:off x="4289943" y="13505162"/>
+            <a:ext cx="320040" cy="198225"/>
           </a:xfrm>
           <a:prstGeom prst="rect">
             <a:avLst/>
@@ -3741,7 +3851,7 @@
               <a:buNone/>
             </a:pPr>
             <a:r>
-              <a:rPr lang="en-US" sz="1000" dirty="0">
+              <a:rPr lang="en-US" sz="1100" dirty="0">
                 <a:solidFill>
                   <a:srgbClr val="321B40"/>
                 </a:solidFill>
@@ -3751,20 +3861,20 @@
               </a:rPr>
               <a:t>50</a:t>
             </a:r>
-            <a:endParaRPr lang="en-US" sz="1000" dirty="0"/>
-          </a:p>
-        </p:txBody>
-      </p:sp>
-      <p:sp>
-        <p:nvSpPr>
-          <p:cNvPr id="79" name="Text 76"/>
-          <p:cNvSpPr/>
-          <p:nvPr/>
-        </p:nvSpPr>
-        <p:spPr>
-          <a:xfrm>
-            <a:off x="5126970" y="14328648"/>
-            <a:ext cx="320040" cy="210312"/>
+            <a:endParaRPr lang="en-US" sz="1100" dirty="0"/>
+          </a:p>
+        </p:txBody>
+      </p:sp>
+      <p:sp>
+        <p:nvSpPr>
+          <p:cNvPr id="82" name="Text 79"/>
+          <p:cNvSpPr/>
+          <p:nvPr/>
+        </p:nvSpPr>
+        <p:spPr>
+          <a:xfrm>
+            <a:off x="5126970" y="13505162"/>
+            <a:ext cx="320040" cy="198225"/>
           </a:xfrm>
           <a:prstGeom prst="rect">
             <a:avLst/>
@@ -3782,7 +3892,7 @@
               <a:buNone/>
             </a:pPr>
             <a:r>
-              <a:rPr lang="en-US" sz="1000" dirty="0">
+              <a:rPr lang="en-US" sz="1100" dirty="0">
                 <a:solidFill>
                   <a:srgbClr val="321B40"/>
                 </a:solidFill>
@@ -3792,20 +3902,20 @@
               </a:rPr>
               <a:t>60</a:t>
             </a:r>
-            <a:endParaRPr lang="en-US" sz="1000" dirty="0"/>
-          </a:p>
-        </p:txBody>
-      </p:sp>
-      <p:sp>
-        <p:nvSpPr>
-          <p:cNvPr id="80" name="Text 77"/>
-          <p:cNvSpPr/>
-          <p:nvPr/>
-        </p:nvSpPr>
-        <p:spPr>
-          <a:xfrm>
-            <a:off x="5963998" y="14328648"/>
-            <a:ext cx="320040" cy="210312"/>
+            <a:endParaRPr lang="en-US" sz="1100" dirty="0"/>
+          </a:p>
+        </p:txBody>
+      </p:sp>
+      <p:sp>
+        <p:nvSpPr>
+          <p:cNvPr id="83" name="Text 80"/>
+          <p:cNvSpPr/>
+          <p:nvPr/>
+        </p:nvSpPr>
+        <p:spPr>
+          <a:xfrm>
+            <a:off x="5963998" y="13505162"/>
+            <a:ext cx="320040" cy="198225"/>
           </a:xfrm>
           <a:prstGeom prst="rect">
             <a:avLst/>
@@ -3823,7 +3933,7 @@
               <a:buNone/>
             </a:pPr>
             <a:r>
-              <a:rPr lang="en-US" sz="1000" dirty="0">
+              <a:rPr lang="en-US" sz="1100" dirty="0">
                 <a:solidFill>
                   <a:srgbClr val="321B40"/>
                 </a:solidFill>
@@ -3833,20 +3943,20 @@
               </a:rPr>
               <a:t>70</a:t>
             </a:r>
-            <a:endParaRPr lang="en-US" sz="1000" dirty="0"/>
-          </a:p>
-        </p:txBody>
-      </p:sp>
-      <p:sp>
-        <p:nvSpPr>
-          <p:cNvPr id="81" name="Shape 78"/>
-          <p:cNvSpPr/>
-          <p:nvPr/>
-        </p:nvSpPr>
-        <p:spPr>
-          <a:xfrm flipV="1">
-            <a:off x="1097280" y="14090058"/>
-            <a:ext cx="83703" cy="11968"/>
+            <a:endParaRPr lang="en-US" sz="1100" dirty="0"/>
+          </a:p>
+        </p:txBody>
+      </p:sp>
+      <p:sp>
+        <p:nvSpPr>
+          <p:cNvPr id="84" name="Shape 81"/>
+          <p:cNvSpPr/>
+          <p:nvPr/>
+        </p:nvSpPr>
+        <p:spPr>
+          <a:xfrm flipV="1">
+            <a:off x="1097280" y="13280284"/>
+            <a:ext cx="83703" cy="11280"/>
           </a:xfrm>
           <a:prstGeom prst="line">
             <a:avLst/>
@@ -3862,14 +3972,14 @@
       </p:sp>
       <p:sp>
         <p:nvSpPr>
-          <p:cNvPr id="82" name="Shape 79"/>
-          <p:cNvSpPr/>
-          <p:nvPr/>
-        </p:nvSpPr>
-        <p:spPr>
-          <a:xfrm flipV="1">
-            <a:off x="1180983" y="14078008"/>
-            <a:ext cx="83703" cy="12050"/>
+          <p:cNvPr id="85" name="Shape 82"/>
+          <p:cNvSpPr/>
+          <p:nvPr/>
+        </p:nvSpPr>
+        <p:spPr>
+          <a:xfrm flipV="1">
+            <a:off x="1180983" y="13268927"/>
+            <a:ext cx="83703" cy="11357"/>
           </a:xfrm>
           <a:prstGeom prst="line">
             <a:avLst/>
@@ -3885,14 +3995,14 @@
       </p:sp>
       <p:sp>
         <p:nvSpPr>
-          <p:cNvPr id="83" name="Shape 80"/>
-          <p:cNvSpPr/>
-          <p:nvPr/>
-        </p:nvSpPr>
-        <p:spPr>
-          <a:xfrm flipV="1">
-            <a:off x="1264686" y="14065868"/>
-            <a:ext cx="83703" cy="12140"/>
+          <p:cNvPr id="86" name="Shape 83"/>
+          <p:cNvSpPr/>
+          <p:nvPr/>
+        </p:nvSpPr>
+        <p:spPr>
+          <a:xfrm flipV="1">
+            <a:off x="1264686" y="13257485"/>
+            <a:ext cx="83703" cy="11442"/>
           </a:xfrm>
           <a:prstGeom prst="line">
             <a:avLst/>
@@ -3908,14 +4018,14 @@
       </p:sp>
       <p:sp>
         <p:nvSpPr>
-          <p:cNvPr id="84" name="Shape 81"/>
-          <p:cNvSpPr/>
-          <p:nvPr/>
-        </p:nvSpPr>
-        <p:spPr>
-          <a:xfrm flipV="1">
-            <a:off x="1348388" y="14053630"/>
-            <a:ext cx="83703" cy="12238"/>
+          <p:cNvPr id="87" name="Shape 84"/>
+          <p:cNvSpPr/>
+          <p:nvPr/>
+        </p:nvSpPr>
+        <p:spPr>
+          <a:xfrm flipV="1">
+            <a:off x="1348388" y="13245951"/>
+            <a:ext cx="83703" cy="11534"/>
           </a:xfrm>
           <a:prstGeom prst="line">
             <a:avLst/>
@@ -3931,14 +4041,14 @@
       </p:sp>
       <p:sp>
         <p:nvSpPr>
-          <p:cNvPr id="85" name="Shape 82"/>
-          <p:cNvSpPr/>
-          <p:nvPr/>
-        </p:nvSpPr>
-        <p:spPr>
-          <a:xfrm flipV="1">
-            <a:off x="1432091" y="14041286"/>
-            <a:ext cx="83703" cy="12345"/>
+          <p:cNvPr id="88" name="Shape 85"/>
+          <p:cNvSpPr/>
+          <p:nvPr/>
+        </p:nvSpPr>
+        <p:spPr>
+          <a:xfrm flipV="1">
+            <a:off x="1432091" y="13234315"/>
+            <a:ext cx="83703" cy="11635"/>
           </a:xfrm>
           <a:prstGeom prst="line">
             <a:avLst/>
@@ -3954,14 +4064,14 @@
       </p:sp>
       <p:sp>
         <p:nvSpPr>
-          <p:cNvPr id="86" name="Shape 83"/>
-          <p:cNvSpPr/>
-          <p:nvPr/>
-        </p:nvSpPr>
-        <p:spPr>
-          <a:xfrm flipV="1">
-            <a:off x="1515794" y="14028825"/>
-            <a:ext cx="83703" cy="12461"/>
+          <p:cNvPr id="89" name="Shape 86"/>
+          <p:cNvSpPr/>
+          <p:nvPr/>
+        </p:nvSpPr>
+        <p:spPr>
+          <a:xfrm flipV="1">
+            <a:off x="1515794" y="13222571"/>
+            <a:ext cx="83703" cy="11745"/>
           </a:xfrm>
           <a:prstGeom prst="line">
             <a:avLst/>
@@ -3977,14 +4087,14 @@
       </p:sp>
       <p:sp>
         <p:nvSpPr>
-          <p:cNvPr id="87" name="Shape 84"/>
-          <p:cNvSpPr/>
-          <p:nvPr/>
-        </p:nvSpPr>
-        <p:spPr>
-          <a:xfrm flipV="1">
-            <a:off x="1599497" y="14016239"/>
-            <a:ext cx="83703" cy="12586"/>
+          <p:cNvPr id="90" name="Shape 87"/>
+          <p:cNvSpPr/>
+          <p:nvPr/>
+        </p:nvSpPr>
+        <p:spPr>
+          <a:xfrm flipV="1">
+            <a:off x="1599497" y="13210708"/>
+            <a:ext cx="83703" cy="11863"/>
           </a:xfrm>
           <a:prstGeom prst="line">
             <a:avLst/>
@@ -4000,14 +4110,14 @@
       </p:sp>
       <p:sp>
         <p:nvSpPr>
-          <p:cNvPr id="88" name="Shape 85"/>
-          <p:cNvSpPr/>
-          <p:nvPr/>
-        </p:nvSpPr>
-        <p:spPr>
-          <a:xfrm flipV="1">
-            <a:off x="1683199" y="14003518"/>
-            <a:ext cx="83703" cy="12721"/>
+          <p:cNvPr id="91" name="Shape 88"/>
+          <p:cNvSpPr/>
+          <p:nvPr/>
+        </p:nvSpPr>
+        <p:spPr>
+          <a:xfrm flipV="1">
+            <a:off x="1683199" y="13198718"/>
+            <a:ext cx="83703" cy="11990"/>
           </a:xfrm>
           <a:prstGeom prst="line">
             <a:avLst/>
@@ -4023,14 +4133,14 @@
       </p:sp>
       <p:sp>
         <p:nvSpPr>
-          <p:cNvPr id="89" name="Shape 86"/>
-          <p:cNvSpPr/>
-          <p:nvPr/>
-        </p:nvSpPr>
-        <p:spPr>
-          <a:xfrm flipV="1">
-            <a:off x="1766902" y="13990651"/>
-            <a:ext cx="83703" cy="12866"/>
+          <p:cNvPr id="92" name="Shape 89"/>
+          <p:cNvSpPr/>
+          <p:nvPr/>
+        </p:nvSpPr>
+        <p:spPr>
+          <a:xfrm flipV="1">
+            <a:off x="1766902" y="13186591"/>
+            <a:ext cx="83703" cy="12127"/>
           </a:xfrm>
           <a:prstGeom prst="line">
             <a:avLst/>
@@ -4046,14 +4156,14 @@
       </p:sp>
       <p:sp>
         <p:nvSpPr>
-          <p:cNvPr id="90" name="Shape 87"/>
-          <p:cNvSpPr/>
-          <p:nvPr/>
-        </p:nvSpPr>
-        <p:spPr>
-          <a:xfrm flipV="1">
-            <a:off x="1850605" y="13977630"/>
-            <a:ext cx="83703" cy="13022"/>
+          <p:cNvPr id="93" name="Shape 90"/>
+          <p:cNvSpPr/>
+          <p:nvPr/>
+        </p:nvSpPr>
+        <p:spPr>
+          <a:xfrm flipV="1">
+            <a:off x="1850605" y="13174318"/>
+            <a:ext cx="83703" cy="12273"/>
           </a:xfrm>
           <a:prstGeom prst="line">
             <a:avLst/>
@@ -4069,14 +4179,14 @@
       </p:sp>
       <p:sp>
         <p:nvSpPr>
-          <p:cNvPr id="91" name="Shape 88"/>
-          <p:cNvSpPr/>
-          <p:nvPr/>
-        </p:nvSpPr>
-        <p:spPr>
-          <a:xfrm flipV="1">
-            <a:off x="1934308" y="13964441"/>
-            <a:ext cx="83703" cy="13188"/>
+          <p:cNvPr id="94" name="Shape 91"/>
+          <p:cNvSpPr/>
+          <p:nvPr/>
+        </p:nvSpPr>
+        <p:spPr>
+          <a:xfrm flipV="1">
+            <a:off x="1934308" y="13161887"/>
+            <a:ext cx="83703" cy="12430"/>
           </a:xfrm>
           <a:prstGeom prst="line">
             <a:avLst/>
@@ -4092,14 +4202,14 @@
       </p:sp>
       <p:sp>
         <p:nvSpPr>
-          <p:cNvPr id="92" name="Shape 89"/>
-          <p:cNvSpPr/>
-          <p:nvPr/>
-        </p:nvSpPr>
-        <p:spPr>
-          <a:xfrm flipV="1">
-            <a:off x="2018010" y="13951075"/>
-            <a:ext cx="83703" cy="13366"/>
+          <p:cNvPr id="95" name="Shape 92"/>
+          <p:cNvSpPr/>
+          <p:nvPr/>
+        </p:nvSpPr>
+        <p:spPr>
+          <a:xfrm flipV="1">
+            <a:off x="2018010" y="13149289"/>
+            <a:ext cx="83703" cy="12598"/>
           </a:xfrm>
           <a:prstGeom prst="line">
             <a:avLst/>
@@ -4115,14 +4225,14 @@
       </p:sp>
       <p:sp>
         <p:nvSpPr>
-          <p:cNvPr id="93" name="Shape 90"/>
-          <p:cNvSpPr/>
-          <p:nvPr/>
-        </p:nvSpPr>
-        <p:spPr>
-          <a:xfrm flipV="1">
-            <a:off x="2101713" y="13937519"/>
-            <a:ext cx="83703" cy="13556"/>
+          <p:cNvPr id="96" name="Shape 93"/>
+          <p:cNvSpPr/>
+          <p:nvPr/>
+        </p:nvSpPr>
+        <p:spPr>
+          <a:xfrm flipV="1">
+            <a:off x="2101713" y="13136512"/>
+            <a:ext cx="83703" cy="12777"/>
           </a:xfrm>
           <a:prstGeom prst="line">
             <a:avLst/>
@@ -4138,14 +4248,14 @@
       </p:sp>
       <p:sp>
         <p:nvSpPr>
-          <p:cNvPr id="94" name="Shape 91"/>
-          <p:cNvSpPr/>
-          <p:nvPr/>
-        </p:nvSpPr>
-        <p:spPr>
-          <a:xfrm flipV="1">
-            <a:off x="2185416" y="13923760"/>
-            <a:ext cx="83703" cy="13759"/>
+          <p:cNvPr id="97" name="Shape 94"/>
+          <p:cNvSpPr/>
+          <p:nvPr/>
+        </p:nvSpPr>
+        <p:spPr>
+          <a:xfrm flipV="1">
+            <a:off x="2185416" y="13123544"/>
+            <a:ext cx="83703" cy="12968"/>
           </a:xfrm>
           <a:prstGeom prst="line">
             <a:avLst/>
@@ -4161,14 +4271,14 @@
       </p:sp>
       <p:sp>
         <p:nvSpPr>
-          <p:cNvPr id="95" name="Shape 92"/>
-          <p:cNvSpPr/>
-          <p:nvPr/>
-        </p:nvSpPr>
-        <p:spPr>
-          <a:xfrm flipV="1">
-            <a:off x="2269119" y="13909786"/>
-            <a:ext cx="83703" cy="13974"/>
+          <p:cNvPr id="98" name="Shape 95"/>
+          <p:cNvSpPr/>
+          <p:nvPr/>
+        </p:nvSpPr>
+        <p:spPr>
+          <a:xfrm flipV="1">
+            <a:off x="2269119" y="13110373"/>
+            <a:ext cx="83703" cy="13171"/>
           </a:xfrm>
           <a:prstGeom prst="line">
             <a:avLst/>
@@ -4184,14 +4294,14 @@
       </p:sp>
       <p:sp>
         <p:nvSpPr>
-          <p:cNvPr id="96" name="Shape 93"/>
-          <p:cNvSpPr/>
-          <p:nvPr/>
-        </p:nvSpPr>
-        <p:spPr>
-          <a:xfrm flipV="1">
-            <a:off x="2352822" y="13895583"/>
-            <a:ext cx="83703" cy="14203"/>
+          <p:cNvPr id="99" name="Shape 96"/>
+          <p:cNvSpPr/>
+          <p:nvPr/>
+        </p:nvSpPr>
+        <p:spPr>
+          <a:xfrm flipV="1">
+            <a:off x="2352822" y="13096986"/>
+            <a:ext cx="83703" cy="13387"/>
           </a:xfrm>
           <a:prstGeom prst="line">
             <a:avLst/>
@@ -4207,14 +4317,14 @@
       </p:sp>
       <p:sp>
         <p:nvSpPr>
-          <p:cNvPr id="97" name="Shape 94"/>
-          <p:cNvSpPr/>
-          <p:nvPr/>
-        </p:nvSpPr>
-        <p:spPr>
-          <a:xfrm flipV="1">
-            <a:off x="2436524" y="13881135"/>
-            <a:ext cx="83703" cy="14447"/>
+          <p:cNvPr id="100" name="Shape 97"/>
+          <p:cNvSpPr/>
+          <p:nvPr/>
+        </p:nvSpPr>
+        <p:spPr>
+          <a:xfrm flipV="1">
+            <a:off x="2436524" y="13083369"/>
+            <a:ext cx="83703" cy="13617"/>
           </a:xfrm>
           <a:prstGeom prst="line">
             <a:avLst/>
@@ -4230,14 +4340,14 @@
       </p:sp>
       <p:sp>
         <p:nvSpPr>
-          <p:cNvPr id="98" name="Shape 95"/>
-          <p:cNvSpPr/>
-          <p:nvPr/>
-        </p:nvSpPr>
-        <p:spPr>
-          <a:xfrm flipV="1">
-            <a:off x="2520227" y="13866429"/>
-            <a:ext cx="83703" cy="14707"/>
+          <p:cNvPr id="101" name="Shape 98"/>
+          <p:cNvSpPr/>
+          <p:nvPr/>
+        </p:nvSpPr>
+        <p:spPr>
+          <a:xfrm flipV="1">
+            <a:off x="2520227" y="13069507"/>
+            <a:ext cx="83703" cy="13861"/>
           </a:xfrm>
           <a:prstGeom prst="line">
             <a:avLst/>
@@ -4253,14 +4363,14 @@
       </p:sp>
       <p:sp>
         <p:nvSpPr>
-          <p:cNvPr id="99" name="Shape 96"/>
-          <p:cNvSpPr/>
-          <p:nvPr/>
-        </p:nvSpPr>
-        <p:spPr>
-          <a:xfrm flipV="1">
-            <a:off x="2603930" y="13851446"/>
-            <a:ext cx="83703" cy="14982"/>
+          <p:cNvPr id="102" name="Shape 99"/>
+          <p:cNvSpPr/>
+          <p:nvPr/>
+        </p:nvSpPr>
+        <p:spPr>
+          <a:xfrm flipV="1">
+            <a:off x="2603930" y="13055386"/>
+            <a:ext cx="83703" cy="14121"/>
           </a:xfrm>
           <a:prstGeom prst="line">
             <a:avLst/>
@@ -4276,14 +4386,14 @@
       </p:sp>
       <p:sp>
         <p:nvSpPr>
-          <p:cNvPr id="100" name="Shape 97"/>
-          <p:cNvSpPr/>
-          <p:nvPr/>
-        </p:nvSpPr>
-        <p:spPr>
-          <a:xfrm flipV="1">
-            <a:off x="2687633" y="13836171"/>
-            <a:ext cx="83703" cy="15275"/>
+          <p:cNvPr id="103" name="Shape 100"/>
+          <p:cNvSpPr/>
+          <p:nvPr/>
+        </p:nvSpPr>
+        <p:spPr>
+          <a:xfrm flipV="1">
+            <a:off x="2687633" y="13040989"/>
+            <a:ext cx="83703" cy="14397"/>
           </a:xfrm>
           <a:prstGeom prst="line">
             <a:avLst/>
@@ -4299,14 +4409,14 @@
       </p:sp>
       <p:sp>
         <p:nvSpPr>
-          <p:cNvPr id="101" name="Shape 98"/>
-          <p:cNvSpPr/>
-          <p:nvPr/>
-        </p:nvSpPr>
-        <p:spPr>
-          <a:xfrm flipV="1">
-            <a:off x="2771335" y="13820585"/>
-            <a:ext cx="83703" cy="15586"/>
+          <p:cNvPr id="104" name="Shape 101"/>
+          <p:cNvSpPr/>
+          <p:nvPr/>
+        </p:nvSpPr>
+        <p:spPr>
+          <a:xfrm flipV="1">
+            <a:off x="2771335" y="13026299"/>
+            <a:ext cx="83703" cy="14690"/>
           </a:xfrm>
           <a:prstGeom prst="line">
             <a:avLst/>
@@ -4322,14 +4432,14 @@
       </p:sp>
       <p:sp>
         <p:nvSpPr>
-          <p:cNvPr id="102" name="Shape 99"/>
-          <p:cNvSpPr/>
-          <p:nvPr/>
-        </p:nvSpPr>
-        <p:spPr>
-          <a:xfrm flipV="1">
-            <a:off x="2855038" y="13804669"/>
-            <a:ext cx="83703" cy="15916"/>
+          <p:cNvPr id="105" name="Shape 102"/>
+          <p:cNvSpPr/>
+          <p:nvPr/>
+        </p:nvSpPr>
+        <p:spPr>
+          <a:xfrm flipV="1">
+            <a:off x="2855038" y="13011297"/>
+            <a:ext cx="83703" cy="15002"/>
           </a:xfrm>
           <a:prstGeom prst="line">
             <a:avLst/>
@@ -4345,14 +4455,14 @@
       </p:sp>
       <p:sp>
         <p:nvSpPr>
-          <p:cNvPr id="103" name="Shape 100"/>
-          <p:cNvSpPr/>
-          <p:nvPr/>
-        </p:nvSpPr>
-        <p:spPr>
-          <a:xfrm flipV="1">
-            <a:off x="2938741" y="13788402"/>
-            <a:ext cx="83703" cy="16267"/>
+          <p:cNvPr id="106" name="Shape 103"/>
+          <p:cNvSpPr/>
+          <p:nvPr/>
+        </p:nvSpPr>
+        <p:spPr>
+          <a:xfrm flipV="1">
+            <a:off x="2938741" y="12995965"/>
+            <a:ext cx="83703" cy="15332"/>
           </a:xfrm>
           <a:prstGeom prst="line">
             <a:avLst/>
@@ -4368,14 +4478,14 @@
       </p:sp>
       <p:sp>
         <p:nvSpPr>
-          <p:cNvPr id="104" name="Shape 101"/>
-          <p:cNvSpPr/>
-          <p:nvPr/>
-        </p:nvSpPr>
-        <p:spPr>
-          <a:xfrm flipV="1">
-            <a:off x="3022444" y="13771761"/>
-            <a:ext cx="83703" cy="16640"/>
+          <p:cNvPr id="107" name="Shape 104"/>
+          <p:cNvSpPr/>
+          <p:nvPr/>
+        </p:nvSpPr>
+        <p:spPr>
+          <a:xfrm flipV="1">
+            <a:off x="3022444" y="12980281"/>
+            <a:ext cx="83703" cy="15684"/>
           </a:xfrm>
           <a:prstGeom prst="line">
             <a:avLst/>
@@ -4391,14 +4501,14 @@
       </p:sp>
       <p:sp>
         <p:nvSpPr>
-          <p:cNvPr id="105" name="Shape 102"/>
-          <p:cNvSpPr/>
-          <p:nvPr/>
-        </p:nvSpPr>
-        <p:spPr>
-          <a:xfrm flipV="1">
-            <a:off x="3106146" y="13754724"/>
-            <a:ext cx="83703" cy="17037"/>
+          <p:cNvPr id="108" name="Shape 105"/>
+          <p:cNvSpPr/>
+          <p:nvPr/>
+        </p:nvSpPr>
+        <p:spPr>
+          <a:xfrm flipV="1">
+            <a:off x="3106146" y="12964223"/>
+            <a:ext cx="83703" cy="16058"/>
           </a:xfrm>
           <a:prstGeom prst="line">
             <a:avLst/>
@@ -4414,14 +4524,14 @@
       </p:sp>
       <p:sp>
         <p:nvSpPr>
-          <p:cNvPr id="106" name="Shape 103"/>
-          <p:cNvSpPr/>
-          <p:nvPr/>
-        </p:nvSpPr>
-        <p:spPr>
-          <a:xfrm flipV="1">
-            <a:off x="3189849" y="13737266"/>
-            <a:ext cx="83703" cy="17459"/>
+          <p:cNvPr id="109" name="Shape 106"/>
+          <p:cNvSpPr/>
+          <p:nvPr/>
+        </p:nvSpPr>
+        <p:spPr>
+          <a:xfrm flipV="1">
+            <a:off x="3189849" y="12947768"/>
+            <a:ext cx="83703" cy="16455"/>
           </a:xfrm>
           <a:prstGeom prst="line">
             <a:avLst/>
@@ -4437,14 +4547,14 @@
       </p:sp>
       <p:sp>
         <p:nvSpPr>
-          <p:cNvPr id="107" name="Shape 104"/>
-          <p:cNvSpPr/>
-          <p:nvPr/>
-        </p:nvSpPr>
-        <p:spPr>
-          <a:xfrm flipV="1">
-            <a:off x="3273552" y="13719359"/>
-            <a:ext cx="83703" cy="17907"/>
+          <p:cNvPr id="110" name="Shape 107"/>
+          <p:cNvSpPr/>
+          <p:nvPr/>
+        </p:nvSpPr>
+        <p:spPr>
+          <a:xfrm flipV="1">
+            <a:off x="3273552" y="12930890"/>
+            <a:ext cx="83703" cy="16878"/>
           </a:xfrm>
           <a:prstGeom prst="line">
             <a:avLst/>
@@ -4460,14 +4570,14 @@
       </p:sp>
       <p:sp>
         <p:nvSpPr>
-          <p:cNvPr id="108" name="Shape 105"/>
-          <p:cNvSpPr/>
-          <p:nvPr/>
-        </p:nvSpPr>
-        <p:spPr>
-          <a:xfrm flipV="1">
-            <a:off x="3357255" y="13700975"/>
-            <a:ext cx="83703" cy="18384"/>
+          <p:cNvPr id="111" name="Shape 108"/>
+          <p:cNvSpPr/>
+          <p:nvPr/>
+        </p:nvSpPr>
+        <p:spPr>
+          <a:xfrm flipV="1">
+            <a:off x="3357255" y="12913562"/>
+            <a:ext cx="83703" cy="17328"/>
           </a:xfrm>
           <a:prstGeom prst="line">
             <a:avLst/>
@@ -4483,14 +4593,14 @@
       </p:sp>
       <p:sp>
         <p:nvSpPr>
-          <p:cNvPr id="109" name="Shape 106"/>
-          <p:cNvSpPr/>
-          <p:nvPr/>
-        </p:nvSpPr>
-        <p:spPr>
-          <a:xfrm flipV="1">
-            <a:off x="3440958" y="13682082"/>
-            <a:ext cx="83703" cy="18893"/>
+          <p:cNvPr id="112" name="Shape 109"/>
+          <p:cNvSpPr/>
+          <p:nvPr/>
+        </p:nvSpPr>
+        <p:spPr>
+          <a:xfrm flipV="1">
+            <a:off x="3440958" y="12895755"/>
+            <a:ext cx="83703" cy="17807"/>
           </a:xfrm>
           <a:prstGeom prst="line">
             <a:avLst/>
@@ -4506,14 +4616,14 @@
       </p:sp>
       <p:sp>
         <p:nvSpPr>
-          <p:cNvPr id="110" name="Shape 107"/>
-          <p:cNvSpPr/>
-          <p:nvPr/>
-        </p:nvSpPr>
-        <p:spPr>
-          <a:xfrm flipV="1">
-            <a:off x="3524660" y="13662647"/>
-            <a:ext cx="83703" cy="19434"/>
+          <p:cNvPr id="113" name="Shape 110"/>
+          <p:cNvSpPr/>
+          <p:nvPr/>
+        </p:nvSpPr>
+        <p:spPr>
+          <a:xfrm flipV="1">
+            <a:off x="3524660" y="12877438"/>
+            <a:ext cx="83703" cy="18318"/>
           </a:xfrm>
           <a:prstGeom prst="line">
             <a:avLst/>
@@ -4529,14 +4639,14 @@
       </p:sp>
       <p:sp>
         <p:nvSpPr>
-          <p:cNvPr id="111" name="Shape 108"/>
-          <p:cNvSpPr/>
-          <p:nvPr/>
-        </p:nvSpPr>
-        <p:spPr>
-          <a:xfrm flipV="1">
-            <a:off x="3608363" y="13642635"/>
-            <a:ext cx="83703" cy="20012"/>
+          <p:cNvPr id="114" name="Shape 111"/>
+          <p:cNvSpPr/>
+          <p:nvPr/>
+        </p:nvSpPr>
+        <p:spPr>
+          <a:xfrm flipV="1">
+            <a:off x="3608363" y="12858576"/>
+            <a:ext cx="83703" cy="18862"/>
           </a:xfrm>
           <a:prstGeom prst="line">
             <a:avLst/>
@@ -4552,14 +4662,14 @@
       </p:sp>
       <p:sp>
         <p:nvSpPr>
-          <p:cNvPr id="112" name="Shape 109"/>
-          <p:cNvSpPr/>
-          <p:nvPr/>
-        </p:nvSpPr>
-        <p:spPr>
-          <a:xfrm flipV="1">
-            <a:off x="3692066" y="13622006"/>
-            <a:ext cx="83703" cy="20629"/>
+          <p:cNvPr id="115" name="Shape 112"/>
+          <p:cNvSpPr/>
+          <p:nvPr/>
+        </p:nvSpPr>
+        <p:spPr>
+          <a:xfrm flipV="1">
+            <a:off x="3692066" y="12839132"/>
+            <a:ext cx="83703" cy="19443"/>
           </a:xfrm>
           <a:prstGeom prst="line">
             <a:avLst/>
@@ -4575,14 +4685,14 @@
       </p:sp>
       <p:sp>
         <p:nvSpPr>
-          <p:cNvPr id="113" name="Shape 110"/>
-          <p:cNvSpPr/>
-          <p:nvPr/>
-        </p:nvSpPr>
-        <p:spPr>
-          <a:xfrm flipV="1">
-            <a:off x="3775769" y="13600718"/>
-            <a:ext cx="83703" cy="21288"/>
+          <p:cNvPr id="116" name="Shape 113"/>
+          <p:cNvSpPr/>
+          <p:nvPr/>
+        </p:nvSpPr>
+        <p:spPr>
+          <a:xfrm flipV="1">
+            <a:off x="3775769" y="12819068"/>
+            <a:ext cx="83703" cy="20064"/>
           </a:xfrm>
           <a:prstGeom prst="line">
             <a:avLst/>
@@ -4598,14 +4708,14 @@
       </p:sp>
       <p:sp>
         <p:nvSpPr>
-          <p:cNvPr id="114" name="Shape 111"/>
-          <p:cNvSpPr/>
-          <p:nvPr/>
-        </p:nvSpPr>
-        <p:spPr>
-          <a:xfrm flipV="1">
-            <a:off x="3859471" y="13578726"/>
-            <a:ext cx="83703" cy="21992"/>
+          <p:cNvPr id="117" name="Shape 114"/>
+          <p:cNvSpPr/>
+          <p:nvPr/>
+        </p:nvSpPr>
+        <p:spPr>
+          <a:xfrm flipV="1">
+            <a:off x="3859471" y="12798340"/>
+            <a:ext cx="83703" cy="20728"/>
           </a:xfrm>
           <a:prstGeom prst="line">
             <a:avLst/>
@@ -4621,14 +4731,14 @@
       </p:sp>
       <p:sp>
         <p:nvSpPr>
-          <p:cNvPr id="115" name="Shape 112"/>
-          <p:cNvSpPr/>
-          <p:nvPr/>
-        </p:nvSpPr>
-        <p:spPr>
-          <a:xfrm flipV="1">
-            <a:off x="3943174" y="13555980"/>
-            <a:ext cx="83703" cy="22746"/>
+          <p:cNvPr id="118" name="Shape 115"/>
+          <p:cNvSpPr/>
+          <p:nvPr/>
+        </p:nvSpPr>
+        <p:spPr>
+          <a:xfrm flipV="1">
+            <a:off x="3943174" y="12776901"/>
+            <a:ext cx="83703" cy="21439"/>
           </a:xfrm>
           <a:prstGeom prst="line">
             <a:avLst/>
@@ -4644,14 +4754,14 @@
       </p:sp>
       <p:sp>
         <p:nvSpPr>
-          <p:cNvPr id="116" name="Shape 113"/>
-          <p:cNvSpPr/>
-          <p:nvPr/>
-        </p:nvSpPr>
-        <p:spPr>
-          <a:xfrm flipV="1">
-            <a:off x="4026877" y="13532426"/>
-            <a:ext cx="83703" cy="23554"/>
+          <p:cNvPr id="119" name="Shape 116"/>
+          <p:cNvSpPr/>
+          <p:nvPr/>
+        </p:nvSpPr>
+        <p:spPr>
+          <a:xfrm flipV="1">
+            <a:off x="4026877" y="12754700"/>
+            <a:ext cx="83703" cy="22201"/>
           </a:xfrm>
           <a:prstGeom prst="line">
             <a:avLst/>
@@ -4667,14 +4777,14 @@
       </p:sp>
       <p:sp>
         <p:nvSpPr>
-          <p:cNvPr id="117" name="Shape 114"/>
-          <p:cNvSpPr/>
-          <p:nvPr/>
-        </p:nvSpPr>
-        <p:spPr>
-          <a:xfrm flipV="1">
-            <a:off x="4110580" y="13508004"/>
-            <a:ext cx="83703" cy="24422"/>
+          <p:cNvPr id="120" name="Shape 117"/>
+          <p:cNvSpPr/>
+          <p:nvPr/>
+        </p:nvSpPr>
+        <p:spPr>
+          <a:xfrm flipV="1">
+            <a:off x="4110580" y="12731682"/>
+            <a:ext cx="83703" cy="23018"/>
           </a:xfrm>
           <a:prstGeom prst="line">
             <a:avLst/>
@@ -4690,14 +4800,14 @@
       </p:sp>
       <p:sp>
         <p:nvSpPr>
-          <p:cNvPr id="118" name="Shape 115"/>
-          <p:cNvSpPr/>
-          <p:nvPr/>
-        </p:nvSpPr>
-        <p:spPr>
-          <a:xfrm flipV="1">
-            <a:off x="4194282" y="13482651"/>
-            <a:ext cx="83703" cy="25353"/>
+          <p:cNvPr id="121" name="Shape 118"/>
+          <p:cNvSpPr/>
+          <p:nvPr/>
+        </p:nvSpPr>
+        <p:spPr>
+          <a:xfrm flipV="1">
+            <a:off x="4194282" y="12707786"/>
+            <a:ext cx="83703" cy="23896"/>
           </a:xfrm>
           <a:prstGeom prst="line">
             <a:avLst/>
@@ -4713,14 +4823,14 @@
       </p:sp>
       <p:sp>
         <p:nvSpPr>
-          <p:cNvPr id="119" name="Shape 116"/>
-          <p:cNvSpPr/>
-          <p:nvPr/>
-        </p:nvSpPr>
-        <p:spPr>
-          <a:xfrm flipV="1">
-            <a:off x="4277985" y="13456295"/>
-            <a:ext cx="83703" cy="26356"/>
+          <p:cNvPr id="122" name="Shape 119"/>
+          <p:cNvSpPr/>
+          <p:nvPr/>
+        </p:nvSpPr>
+        <p:spPr>
+          <a:xfrm flipV="1">
+            <a:off x="4277985" y="12682944"/>
+            <a:ext cx="83703" cy="24841"/>
           </a:xfrm>
           <a:prstGeom prst="line">
             <a:avLst/>
@@ -4736,14 +4846,14 @@
       </p:sp>
       <p:sp>
         <p:nvSpPr>
-          <p:cNvPr id="120" name="Shape 117"/>
-          <p:cNvSpPr/>
-          <p:nvPr/>
-        </p:nvSpPr>
-        <p:spPr>
-          <a:xfrm flipV="1">
-            <a:off x="4361688" y="13428859"/>
-            <a:ext cx="83703" cy="27436"/>
+          <p:cNvPr id="123" name="Shape 120"/>
+          <p:cNvSpPr/>
+          <p:nvPr/>
+        </p:nvSpPr>
+        <p:spPr>
+          <a:xfrm flipV="1">
+            <a:off x="4361688" y="12657085"/>
+            <a:ext cx="83703" cy="25859"/>
           </a:xfrm>
           <a:prstGeom prst="line">
             <a:avLst/>
@@ -4759,14 +4869,14 @@
       </p:sp>
       <p:sp>
         <p:nvSpPr>
-          <p:cNvPr id="121" name="Shape 118"/>
-          <p:cNvSpPr/>
-          <p:nvPr/>
-        </p:nvSpPr>
-        <p:spPr>
-          <a:xfrm flipV="1">
-            <a:off x="4445391" y="13400257"/>
-            <a:ext cx="83703" cy="28602"/>
+          <p:cNvPr id="124" name="Shape 121"/>
+          <p:cNvSpPr/>
+          <p:nvPr/>
+        </p:nvSpPr>
+        <p:spPr>
+          <a:xfrm flipV="1">
+            <a:off x="4445391" y="12630128"/>
+            <a:ext cx="83703" cy="26958"/>
           </a:xfrm>
           <a:prstGeom prst="line">
             <a:avLst/>
@@ -4782,14 +4892,14 @@
       </p:sp>
       <p:sp>
         <p:nvSpPr>
-          <p:cNvPr id="122" name="Shape 119"/>
-          <p:cNvSpPr/>
-          <p:nvPr/>
-        </p:nvSpPr>
-        <p:spPr>
-          <a:xfrm flipV="1">
-            <a:off x="4529094" y="13370395"/>
-            <a:ext cx="83703" cy="29862"/>
+          <p:cNvPr id="125" name="Shape 122"/>
+          <p:cNvSpPr/>
+          <p:nvPr/>
+        </p:nvSpPr>
+        <p:spPr>
+          <a:xfrm flipV="1">
+            <a:off x="4529094" y="12601982"/>
+            <a:ext cx="83703" cy="28146"/>
           </a:xfrm>
           <a:prstGeom prst="line">
             <a:avLst/>
@@ -4805,14 +4915,14 @@
       </p:sp>
       <p:sp>
         <p:nvSpPr>
-          <p:cNvPr id="123" name="Shape 120"/>
-          <p:cNvSpPr/>
-          <p:nvPr/>
-        </p:nvSpPr>
-        <p:spPr>
-          <a:xfrm flipV="1">
-            <a:off x="4612796" y="13339169"/>
-            <a:ext cx="83703" cy="31227"/>
+          <p:cNvPr id="126" name="Shape 123"/>
+          <p:cNvSpPr/>
+          <p:nvPr/>
+        </p:nvSpPr>
+        <p:spPr>
+          <a:xfrm flipV="1">
+            <a:off x="4612796" y="12572550"/>
+            <a:ext cx="83703" cy="29432"/>
           </a:xfrm>
           <a:prstGeom prst="line">
             <a:avLst/>
@@ -4828,14 +4938,14 @@
       </p:sp>
       <p:sp>
         <p:nvSpPr>
-          <p:cNvPr id="124" name="Shape 121"/>
-          <p:cNvSpPr/>
-          <p:nvPr/>
-        </p:nvSpPr>
-        <p:spPr>
-          <a:xfrm flipV="1">
-            <a:off x="4696499" y="13306461"/>
-            <a:ext cx="83703" cy="32708"/>
+          <p:cNvPr id="127" name="Shape 124"/>
+          <p:cNvSpPr/>
+          <p:nvPr/>
+        </p:nvSpPr>
+        <p:spPr>
+          <a:xfrm flipV="1">
+            <a:off x="4696499" y="12541722"/>
+            <a:ext cx="83703" cy="30828"/>
           </a:xfrm>
           <a:prstGeom prst="line">
             <a:avLst/>
@@ -4851,14 +4961,14 @@
       </p:sp>
       <p:sp>
         <p:nvSpPr>
-          <p:cNvPr id="125" name="Shape 122"/>
-          <p:cNvSpPr/>
-          <p:nvPr/>
-        </p:nvSpPr>
-        <p:spPr>
-          <a:xfrm flipV="1">
-            <a:off x="4780202" y="13272144"/>
-            <a:ext cx="83703" cy="34318"/>
+          <p:cNvPr id="128" name="Shape 125"/>
+          <p:cNvSpPr/>
+          <p:nvPr/>
+        </p:nvSpPr>
+        <p:spPr>
+          <a:xfrm flipV="1">
+            <a:off x="4780202" y="12509377"/>
+            <a:ext cx="83703" cy="32346"/>
           </a:xfrm>
           <a:prstGeom prst="line">
             <a:avLst/>
@@ -4874,14 +4984,14 @@
       </p:sp>
       <p:sp>
         <p:nvSpPr>
-          <p:cNvPr id="126" name="Shape 123"/>
-          <p:cNvSpPr/>
-          <p:nvPr/>
-        </p:nvSpPr>
-        <p:spPr>
-          <a:xfrm flipV="1">
-            <a:off x="4863905" y="13236071"/>
-            <a:ext cx="83703" cy="36073"/>
+          <p:cNvPr id="129" name="Shape 126"/>
+          <p:cNvSpPr/>
+          <p:nvPr/>
+        </p:nvSpPr>
+        <p:spPr>
+          <a:xfrm flipV="1">
+            <a:off x="4863905" y="12475377"/>
+            <a:ext cx="83703" cy="33999"/>
           </a:xfrm>
           <a:prstGeom prst="line">
             <a:avLst/>
@@ -4897,14 +5007,14 @@
       </p:sp>
       <p:sp>
         <p:nvSpPr>
-          <p:cNvPr id="127" name="Shape 124"/>
-          <p:cNvSpPr/>
-          <p:nvPr/>
-        </p:nvSpPr>
-        <p:spPr>
-          <a:xfrm flipV="1">
-            <a:off x="4947607" y="13198082"/>
-            <a:ext cx="83703" cy="37989"/>
+          <p:cNvPr id="130" name="Shape 127"/>
+          <p:cNvSpPr/>
+          <p:nvPr/>
+        </p:nvSpPr>
+        <p:spPr>
+          <a:xfrm flipV="1">
+            <a:off x="4947607" y="12439571"/>
+            <a:ext cx="83703" cy="35806"/>
           </a:xfrm>
           <a:prstGeom prst="line">
             <a:avLst/>
@@ -4920,14 +5030,14 @@
       </p:sp>
       <p:sp>
         <p:nvSpPr>
-          <p:cNvPr id="128" name="Shape 125"/>
-          <p:cNvSpPr/>
-          <p:nvPr/>
-        </p:nvSpPr>
-        <p:spPr>
-          <a:xfrm flipV="1">
-            <a:off x="5031310" y="13157994"/>
-            <a:ext cx="83703" cy="40088"/>
+          <p:cNvPr id="131" name="Shape 128"/>
+          <p:cNvSpPr/>
+          <p:nvPr/>
+        </p:nvSpPr>
+        <p:spPr>
+          <a:xfrm flipV="1">
+            <a:off x="5031310" y="12401788"/>
+            <a:ext cx="83703" cy="37784"/>
           </a:xfrm>
           <a:prstGeom prst="line">
             <a:avLst/>
@@ -4943,14 +5053,14 @@
       </p:sp>
       <p:sp>
         <p:nvSpPr>
-          <p:cNvPr id="129" name="Shape 126"/>
-          <p:cNvSpPr/>
-          <p:nvPr/>
-        </p:nvSpPr>
-        <p:spPr>
-          <a:xfrm flipV="1">
-            <a:off x="5115013" y="13115603"/>
-            <a:ext cx="83703" cy="42392"/>
+          <p:cNvPr id="132" name="Shape 129"/>
+          <p:cNvSpPr/>
+          <p:nvPr/>
+        </p:nvSpPr>
+        <p:spPr>
+          <a:xfrm flipV="1">
+            <a:off x="5115013" y="12361832"/>
+            <a:ext cx="83703" cy="39955"/>
           </a:xfrm>
           <a:prstGeom prst="line">
             <a:avLst/>
@@ -4966,14 +5076,14 @@
       </p:sp>
       <p:sp>
         <p:nvSpPr>
-          <p:cNvPr id="130" name="Shape 127"/>
-          <p:cNvSpPr/>
-          <p:nvPr/>
-        </p:nvSpPr>
-        <p:spPr>
-          <a:xfrm flipV="1">
-            <a:off x="5198716" y="13070674"/>
-            <a:ext cx="83703" cy="44928"/>
+          <p:cNvPr id="133" name="Shape 130"/>
+          <p:cNvSpPr/>
+          <p:nvPr/>
+        </p:nvSpPr>
+        <p:spPr>
+          <a:xfrm flipV="1">
+            <a:off x="5198716" y="12319486"/>
+            <a:ext cx="83703" cy="42346"/>
           </a:xfrm>
           <a:prstGeom prst="line">
             <a:avLst/>
@@ -4989,14 +5099,14 @@
       </p:sp>
       <p:sp>
         <p:nvSpPr>
-          <p:cNvPr id="131" name="Shape 128"/>
-          <p:cNvSpPr/>
-          <p:nvPr/>
-        </p:nvSpPr>
-        <p:spPr>
-          <a:xfrm flipV="1">
-            <a:off x="5282418" y="13022945"/>
-            <a:ext cx="83703" cy="47730"/>
+          <p:cNvPr id="134" name="Shape 131"/>
+          <p:cNvSpPr/>
+          <p:nvPr/>
+        </p:nvSpPr>
+        <p:spPr>
+          <a:xfrm flipV="1">
+            <a:off x="5282418" y="12274499"/>
+            <a:ext cx="83703" cy="44987"/>
           </a:xfrm>
           <a:prstGeom prst="line">
             <a:avLst/>
@@ -5012,14 +5122,14 @@
       </p:sp>
       <p:sp>
         <p:nvSpPr>
-          <p:cNvPr id="132" name="Shape 129"/>
-          <p:cNvSpPr/>
-          <p:nvPr/>
-        </p:nvSpPr>
-        <p:spPr>
-          <a:xfrm flipV="1">
-            <a:off x="5366121" y="12972111"/>
-            <a:ext cx="83703" cy="50833"/>
+          <p:cNvPr id="135" name="Shape 132"/>
+          <p:cNvSpPr/>
+          <p:nvPr/>
+        </p:nvSpPr>
+        <p:spPr>
+          <a:xfrm flipV="1">
+            <a:off x="5366121" y="12226588"/>
+            <a:ext cx="83703" cy="47912"/>
           </a:xfrm>
           <a:prstGeom prst="line">
             <a:avLst/>
@@ -5035,14 +5145,14 @@
       </p:sp>
       <p:sp>
         <p:nvSpPr>
-          <p:cNvPr id="133" name="Shape 130"/>
-          <p:cNvSpPr/>
-          <p:nvPr/>
-        </p:nvSpPr>
-        <p:spPr>
-          <a:xfrm flipV="1">
-            <a:off x="5449824" y="12917827"/>
-            <a:ext cx="83703" cy="54284"/>
+          <p:cNvPr id="136" name="Shape 133"/>
+          <p:cNvSpPr/>
+          <p:nvPr/>
+        </p:nvSpPr>
+        <p:spPr>
+          <a:xfrm flipV="1">
+            <a:off x="5449824" y="12175423"/>
+            <a:ext cx="83703" cy="51164"/>
           </a:xfrm>
           <a:prstGeom prst="line">
             <a:avLst/>
@@ -5058,14 +5168,14 @@
       </p:sp>
       <p:sp>
         <p:nvSpPr>
-          <p:cNvPr id="134" name="Shape 131"/>
-          <p:cNvSpPr/>
-          <p:nvPr/>
-        </p:nvSpPr>
-        <p:spPr>
-          <a:xfrm flipV="1">
-            <a:off x="5533527" y="12859692"/>
-            <a:ext cx="83703" cy="58135"/>
+          <p:cNvPr id="137" name="Shape 134"/>
+          <p:cNvSpPr/>
+          <p:nvPr/>
+        </p:nvSpPr>
+        <p:spPr>
+          <a:xfrm flipV="1">
+            <a:off x="5533527" y="12120629"/>
+            <a:ext cx="83703" cy="54794"/>
           </a:xfrm>
           <a:prstGeom prst="line">
             <a:avLst/>
@@ -5081,14 +5191,14 @@
       </p:sp>
       <p:sp>
         <p:nvSpPr>
-          <p:cNvPr id="135" name="Shape 132"/>
-          <p:cNvSpPr/>
-          <p:nvPr/>
-        </p:nvSpPr>
-        <p:spPr>
-          <a:xfrm flipV="1">
-            <a:off x="5617230" y="12797241"/>
-            <a:ext cx="83703" cy="62451"/>
+          <p:cNvPr id="138" name="Shape 135"/>
+          <p:cNvSpPr/>
+          <p:nvPr/>
+        </p:nvSpPr>
+        <p:spPr>
+          <a:xfrm flipV="1">
+            <a:off x="5617230" y="12061767"/>
+            <a:ext cx="83703" cy="58862"/>
           </a:xfrm>
           <a:prstGeom prst="line">
             <a:avLst/>
@@ -5104,14 +5214,14 @@
       </p:sp>
       <p:sp>
         <p:nvSpPr>
-          <p:cNvPr id="136" name="Shape 133"/>
-          <p:cNvSpPr/>
-          <p:nvPr/>
-        </p:nvSpPr>
-        <p:spPr>
-          <a:xfrm flipV="1">
-            <a:off x="5700932" y="12729932"/>
-            <a:ext cx="83703" cy="67308"/>
+          <p:cNvPr id="139" name="Shape 136"/>
+          <p:cNvSpPr/>
+          <p:nvPr/>
+        </p:nvSpPr>
+        <p:spPr>
+          <a:xfrm flipV="1">
+            <a:off x="5700932" y="11998327"/>
+            <a:ext cx="83703" cy="63440"/>
           </a:xfrm>
           <a:prstGeom prst="line">
             <a:avLst/>
@@ -5127,14 +5237,14 @@
       </p:sp>
       <p:sp>
         <p:nvSpPr>
-          <p:cNvPr id="137" name="Shape 134"/>
-          <p:cNvSpPr/>
-          <p:nvPr/>
-        </p:nvSpPr>
-        <p:spPr>
-          <a:xfrm flipV="1">
-            <a:off x="5784635" y="12657131"/>
-            <a:ext cx="83703" cy="72801"/>
+          <p:cNvPr id="140" name="Shape 137"/>
+          <p:cNvSpPr/>
+          <p:nvPr/>
+        </p:nvSpPr>
+        <p:spPr>
+          <a:xfrm flipV="1">
+            <a:off x="5784635" y="11929710"/>
+            <a:ext cx="83703" cy="68617"/>
           </a:xfrm>
           <a:prstGeom prst="line">
             <a:avLst/>
@@ -5150,14 +5260,14 @@
       </p:sp>
       <p:sp>
         <p:nvSpPr>
-          <p:cNvPr id="138" name="Shape 135"/>
-          <p:cNvSpPr/>
-          <p:nvPr/>
-        </p:nvSpPr>
-        <p:spPr>
-          <a:xfrm flipV="1">
-            <a:off x="5868338" y="12578086"/>
-            <a:ext cx="83703" cy="79045"/>
+          <p:cNvPr id="141" name="Shape 138"/>
+          <p:cNvSpPr/>
+          <p:nvPr/>
+        </p:nvSpPr>
+        <p:spPr>
+          <a:xfrm flipV="1">
+            <a:off x="5868338" y="11855207"/>
+            <a:ext cx="83703" cy="74502"/>
           </a:xfrm>
           <a:prstGeom prst="line">
             <a:avLst/>
@@ -5173,14 +5283,14 @@
       </p:sp>
       <p:sp>
         <p:nvSpPr>
-          <p:cNvPr id="139" name="Shape 136"/>
-          <p:cNvSpPr/>
-          <p:nvPr/>
-        </p:nvSpPr>
-        <p:spPr>
-          <a:xfrm flipV="1">
-            <a:off x="5952041" y="12491902"/>
-            <a:ext cx="83703" cy="86184"/>
+          <p:cNvPr id="142" name="Shape 139"/>
+          <p:cNvSpPr/>
+          <p:nvPr/>
+        </p:nvSpPr>
+        <p:spPr>
+          <a:xfrm flipV="1">
+            <a:off x="5952041" y="11773977"/>
+            <a:ext cx="83703" cy="81231"/>
           </a:xfrm>
           <a:prstGeom prst="line">
             <a:avLst/>
@@ -5196,14 +5306,14 @@
       </p:sp>
       <p:sp>
         <p:nvSpPr>
-          <p:cNvPr id="140" name="Shape 137"/>
-          <p:cNvSpPr/>
-          <p:nvPr/>
-        </p:nvSpPr>
-        <p:spPr>
-          <a:xfrm flipV="1">
-            <a:off x="6035743" y="12397507"/>
-            <a:ext cx="83703" cy="94395"/>
+          <p:cNvPr id="143" name="Shape 140"/>
+          <p:cNvSpPr/>
+          <p:nvPr/>
+        </p:nvSpPr>
+        <p:spPr>
+          <a:xfrm flipV="1">
+            <a:off x="6035743" y="11685007"/>
+            <a:ext cx="83703" cy="88970"/>
           </a:xfrm>
           <a:prstGeom prst="line">
             <a:avLst/>
@@ -5219,14 +5329,14 @@
       </p:sp>
       <p:sp>
         <p:nvSpPr>
-          <p:cNvPr id="141" name="Shape 138"/>
-          <p:cNvSpPr/>
-          <p:nvPr/>
-        </p:nvSpPr>
-        <p:spPr>
-          <a:xfrm flipV="1">
-            <a:off x="6119446" y="12293602"/>
-            <a:ext cx="83703" cy="103905"/>
+          <p:cNvPr id="144" name="Shape 141"/>
+          <p:cNvSpPr/>
+          <p:nvPr/>
+        </p:nvSpPr>
+        <p:spPr>
+          <a:xfrm flipV="1">
+            <a:off x="6119446" y="11587074"/>
+            <a:ext cx="83703" cy="97933"/>
           </a:xfrm>
           <a:prstGeom prst="line">
             <a:avLst/>
@@ -5242,14 +5352,14 @@
       </p:sp>
       <p:sp>
         <p:nvSpPr>
-          <p:cNvPr id="142" name="Shape 139"/>
-          <p:cNvSpPr/>
-          <p:nvPr/>
-        </p:nvSpPr>
-        <p:spPr>
-          <a:xfrm flipV="1">
-            <a:off x="6203149" y="12178600"/>
-            <a:ext cx="83703" cy="115002"/>
+          <p:cNvPr id="145" name="Shape 142"/>
+          <p:cNvSpPr/>
+          <p:nvPr/>
+        </p:nvSpPr>
+        <p:spPr>
+          <a:xfrm flipV="1">
+            <a:off x="6203149" y="11478681"/>
+            <a:ext cx="83703" cy="108393"/>
           </a:xfrm>
           <a:prstGeom prst="line">
             <a:avLst/>
@@ -5265,14 +5375,14 @@
       </p:sp>
       <p:sp>
         <p:nvSpPr>
-          <p:cNvPr id="143" name="Shape 140"/>
-          <p:cNvSpPr/>
-          <p:nvPr/>
-        </p:nvSpPr>
-        <p:spPr>
-          <a:xfrm flipV="1">
-            <a:off x="6286852" y="12050541"/>
-            <a:ext cx="83703" cy="128060"/>
+          <p:cNvPr id="146" name="Shape 143"/>
+          <p:cNvSpPr/>
+          <p:nvPr/>
+        </p:nvSpPr>
+        <p:spPr>
+          <a:xfrm flipV="1">
+            <a:off x="6286852" y="11357981"/>
+            <a:ext cx="83703" cy="120700"/>
           </a:xfrm>
           <a:prstGeom prst="line">
             <a:avLst/>
@@ -5288,14 +5398,14 @@
       </p:sp>
       <p:sp>
         <p:nvSpPr>
-          <p:cNvPr id="144" name="Shape 141"/>
-          <p:cNvSpPr/>
-          <p:nvPr/>
-        </p:nvSpPr>
-        <p:spPr>
-          <a:xfrm flipV="1">
-            <a:off x="6370554" y="11906973"/>
-            <a:ext cx="83703" cy="143567"/>
+          <p:cNvPr id="147" name="Shape 144"/>
+          <p:cNvSpPr/>
+          <p:nvPr/>
+        </p:nvSpPr>
+        <p:spPr>
+          <a:xfrm flipV="1">
+            <a:off x="6370554" y="11222665"/>
+            <a:ext cx="83703" cy="135316"/>
           </a:xfrm>
           <a:prstGeom prst="line">
             <a:avLst/>
@@ -5311,14 +5421,14 @@
       </p:sp>
       <p:sp>
         <p:nvSpPr>
-          <p:cNvPr id="145" name="Shape 142"/>
-          <p:cNvSpPr/>
-          <p:nvPr/>
-        </p:nvSpPr>
-        <p:spPr>
-          <a:xfrm flipV="1">
-            <a:off x="6454257" y="11744794"/>
-            <a:ext cx="83703" cy="162179"/>
+          <p:cNvPr id="148" name="Shape 145"/>
+          <p:cNvSpPr/>
+          <p:nvPr/>
+        </p:nvSpPr>
+        <p:spPr>
+          <a:xfrm flipV="1">
+            <a:off x="6454257" y="11069806"/>
+            <a:ext cx="83703" cy="152859"/>
           </a:xfrm>
           <a:prstGeom prst="line">
             <a:avLst/>
@@ -5334,14 +5444,14 @@
       </p:sp>
       <p:sp>
         <p:nvSpPr>
-          <p:cNvPr id="146" name="Shape 143"/>
-          <p:cNvSpPr/>
-          <p:nvPr/>
-        </p:nvSpPr>
-        <p:spPr>
-          <a:xfrm flipV="1">
-            <a:off x="1097280" y="14211188"/>
-            <a:ext cx="83703" cy="718"/>
+          <p:cNvPr id="149" name="Shape 146"/>
+          <p:cNvSpPr/>
+          <p:nvPr/>
+        </p:nvSpPr>
+        <p:spPr>
+          <a:xfrm flipV="1">
+            <a:off x="1097280" y="13394453"/>
+            <a:ext cx="83703" cy="677"/>
           </a:xfrm>
           <a:prstGeom prst="line">
             <a:avLst/>
@@ -5357,14 +5467,14 @@
       </p:sp>
       <p:sp>
         <p:nvSpPr>
-          <p:cNvPr id="147" name="Shape 144"/>
-          <p:cNvSpPr/>
-          <p:nvPr/>
-        </p:nvSpPr>
-        <p:spPr>
-          <a:xfrm flipV="1">
-            <a:off x="1180983" y="14210465"/>
-            <a:ext cx="83703" cy="723"/>
+          <p:cNvPr id="150" name="Shape 147"/>
+          <p:cNvSpPr/>
+          <p:nvPr/>
+        </p:nvSpPr>
+        <p:spPr>
+          <a:xfrm flipV="1">
+            <a:off x="1180983" y="13393772"/>
+            <a:ext cx="83703" cy="681"/>
           </a:xfrm>
           <a:prstGeom prst="line">
             <a:avLst/>
@@ -5380,13 +5490,151 @@
       </p:sp>
       <p:sp>
         <p:nvSpPr>
-          <p:cNvPr id="148" name="Shape 145"/>
-          <p:cNvSpPr/>
-          <p:nvPr/>
-        </p:nvSpPr>
-        <p:spPr>
-          <a:xfrm flipV="1">
-            <a:off x="1264686" y="14209737"/>
+          <p:cNvPr id="151" name="Shape 148"/>
+          <p:cNvSpPr/>
+          <p:nvPr/>
+        </p:nvSpPr>
+        <p:spPr>
+          <a:xfrm flipV="1">
+            <a:off x="1264686" y="13393085"/>
+            <a:ext cx="83703" cy="687"/>
+          </a:xfrm>
+          <a:prstGeom prst="line">
+            <a:avLst/>
+          </a:prstGeom>
+          <a:noFill/>
+          <a:ln w="21590">
+            <a:solidFill>
+              <a:srgbClr val="321B40"/>
+            </a:solidFill>
+            <a:prstDash val="solid"/>
+          </a:ln>
+        </p:spPr>
+      </p:sp>
+      <p:sp>
+        <p:nvSpPr>
+          <p:cNvPr id="152" name="Shape 149"/>
+          <p:cNvSpPr/>
+          <p:nvPr/>
+        </p:nvSpPr>
+        <p:spPr>
+          <a:xfrm flipV="1">
+            <a:off x="1348388" y="13392393"/>
+            <a:ext cx="83703" cy="692"/>
+          </a:xfrm>
+          <a:prstGeom prst="line">
+            <a:avLst/>
+          </a:prstGeom>
+          <a:noFill/>
+          <a:ln w="21590">
+            <a:solidFill>
+              <a:srgbClr val="321B40"/>
+            </a:solidFill>
+            <a:prstDash val="solid"/>
+          </a:ln>
+        </p:spPr>
+      </p:sp>
+      <p:sp>
+        <p:nvSpPr>
+          <p:cNvPr id="153" name="Shape 150"/>
+          <p:cNvSpPr/>
+          <p:nvPr/>
+        </p:nvSpPr>
+        <p:spPr>
+          <a:xfrm flipV="1">
+            <a:off x="1432091" y="13391695"/>
+            <a:ext cx="83703" cy="698"/>
+          </a:xfrm>
+          <a:prstGeom prst="line">
+            <a:avLst/>
+          </a:prstGeom>
+          <a:noFill/>
+          <a:ln w="21590">
+            <a:solidFill>
+              <a:srgbClr val="321B40"/>
+            </a:solidFill>
+            <a:prstDash val="solid"/>
+          </a:ln>
+        </p:spPr>
+      </p:sp>
+      <p:sp>
+        <p:nvSpPr>
+          <p:cNvPr id="154" name="Shape 151"/>
+          <p:cNvSpPr/>
+          <p:nvPr/>
+        </p:nvSpPr>
+        <p:spPr>
+          <a:xfrm flipV="1">
+            <a:off x="1515794" y="13390990"/>
+            <a:ext cx="83703" cy="705"/>
+          </a:xfrm>
+          <a:prstGeom prst="line">
+            <a:avLst/>
+          </a:prstGeom>
+          <a:noFill/>
+          <a:ln w="21590">
+            <a:solidFill>
+              <a:srgbClr val="321B40"/>
+            </a:solidFill>
+            <a:prstDash val="solid"/>
+          </a:ln>
+        </p:spPr>
+      </p:sp>
+      <p:sp>
+        <p:nvSpPr>
+          <p:cNvPr id="155" name="Shape 152"/>
+          <p:cNvSpPr/>
+          <p:nvPr/>
+        </p:nvSpPr>
+        <p:spPr>
+          <a:xfrm flipV="1">
+            <a:off x="1599497" y="13390279"/>
+            <a:ext cx="83703" cy="712"/>
+          </a:xfrm>
+          <a:prstGeom prst="line">
+            <a:avLst/>
+          </a:prstGeom>
+          <a:noFill/>
+          <a:ln w="21590">
+            <a:solidFill>
+              <a:srgbClr val="321B40"/>
+            </a:solidFill>
+            <a:prstDash val="solid"/>
+          </a:ln>
+        </p:spPr>
+      </p:sp>
+      <p:sp>
+        <p:nvSpPr>
+          <p:cNvPr id="156" name="Shape 153"/>
+          <p:cNvSpPr/>
+          <p:nvPr/>
+        </p:nvSpPr>
+        <p:spPr>
+          <a:xfrm flipV="1">
+            <a:off x="1683199" y="13389559"/>
+            <a:ext cx="83703" cy="719"/>
+          </a:xfrm>
+          <a:prstGeom prst="line">
+            <a:avLst/>
+          </a:prstGeom>
+          <a:noFill/>
+          <a:ln w="21590">
+            <a:solidFill>
+              <a:srgbClr val="321B40"/>
+            </a:solidFill>
+            <a:prstDash val="solid"/>
+          </a:ln>
+        </p:spPr>
+      </p:sp>
+      <p:sp>
+        <p:nvSpPr>
+          <p:cNvPr id="157" name="Shape 154"/>
+          <p:cNvSpPr/>
+          <p:nvPr/>
+        </p:nvSpPr>
+        <p:spPr>
+          <a:xfrm flipV="1">
+            <a:off x="1766902" y="13388832"/>
             <a:ext cx="83703" cy="728"/>
           </a:xfrm>
           <a:prstGeom prst="line">
@@ -5403,14 +5651,14 @@
       </p:sp>
       <p:sp>
         <p:nvSpPr>
-          <p:cNvPr id="149" name="Shape 146"/>
-          <p:cNvSpPr/>
-          <p:nvPr/>
-        </p:nvSpPr>
-        <p:spPr>
-          <a:xfrm flipV="1">
-            <a:off x="1348388" y="14209003"/>
-            <a:ext cx="83703" cy="734"/>
+          <p:cNvPr id="158" name="Shape 155"/>
+          <p:cNvSpPr/>
+          <p:nvPr/>
+        </p:nvSpPr>
+        <p:spPr>
+          <a:xfrm flipV="1">
+            <a:off x="1850605" y="13388095"/>
+            <a:ext cx="83703" cy="736"/>
           </a:xfrm>
           <a:prstGeom prst="line">
             <a:avLst/>
@@ -5426,14 +5674,14 @@
       </p:sp>
       <p:sp>
         <p:nvSpPr>
-          <p:cNvPr id="150" name="Shape 147"/>
-          <p:cNvSpPr/>
-          <p:nvPr/>
-        </p:nvSpPr>
-        <p:spPr>
-          <a:xfrm flipV="1">
-            <a:off x="1432091" y="14208262"/>
-            <a:ext cx="83703" cy="741"/>
+          <p:cNvPr id="159" name="Shape 156"/>
+          <p:cNvSpPr/>
+          <p:nvPr/>
+        </p:nvSpPr>
+        <p:spPr>
+          <a:xfrm flipV="1">
+            <a:off x="1934308" y="13387349"/>
+            <a:ext cx="83703" cy="746"/>
           </a:xfrm>
           <a:prstGeom prst="line">
             <a:avLst/>
@@ -5449,14 +5697,14 @@
       </p:sp>
       <p:sp>
         <p:nvSpPr>
-          <p:cNvPr id="151" name="Shape 148"/>
-          <p:cNvSpPr/>
-          <p:nvPr/>
-        </p:nvSpPr>
-        <p:spPr>
-          <a:xfrm flipV="1">
-            <a:off x="1515794" y="14207514"/>
-            <a:ext cx="83703" cy="748"/>
+          <p:cNvPr id="160" name="Shape 157"/>
+          <p:cNvSpPr/>
+          <p:nvPr/>
+        </p:nvSpPr>
+        <p:spPr>
+          <a:xfrm flipV="1">
+            <a:off x="2018010" y="13386594"/>
+            <a:ext cx="83703" cy="756"/>
           </a:xfrm>
           <a:prstGeom prst="line">
             <a:avLst/>
@@ -5472,14 +5720,14 @@
       </p:sp>
       <p:sp>
         <p:nvSpPr>
-          <p:cNvPr id="152" name="Shape 149"/>
-          <p:cNvSpPr/>
-          <p:nvPr/>
-        </p:nvSpPr>
-        <p:spPr>
-          <a:xfrm flipV="1">
-            <a:off x="1599497" y="14206759"/>
-            <a:ext cx="83703" cy="755"/>
+          <p:cNvPr id="161" name="Shape 158"/>
+          <p:cNvSpPr/>
+          <p:nvPr/>
+        </p:nvSpPr>
+        <p:spPr>
+          <a:xfrm flipV="1">
+            <a:off x="2101713" y="13385827"/>
+            <a:ext cx="83703" cy="767"/>
           </a:xfrm>
           <a:prstGeom prst="line">
             <a:avLst/>
@@ -5495,14 +5743,14 @@
       </p:sp>
       <p:sp>
         <p:nvSpPr>
-          <p:cNvPr id="153" name="Shape 150"/>
-          <p:cNvSpPr/>
-          <p:nvPr/>
-        </p:nvSpPr>
-        <p:spPr>
-          <a:xfrm flipV="1">
-            <a:off x="1683199" y="14205996"/>
-            <a:ext cx="83703" cy="763"/>
+          <p:cNvPr id="162" name="Shape 159"/>
+          <p:cNvSpPr/>
+          <p:nvPr/>
+        </p:nvSpPr>
+        <p:spPr>
+          <a:xfrm flipV="1">
+            <a:off x="2185416" y="13385049"/>
+            <a:ext cx="83703" cy="778"/>
           </a:xfrm>
           <a:prstGeom prst="line">
             <a:avLst/>
@@ -5518,14 +5766,14 @@
       </p:sp>
       <p:sp>
         <p:nvSpPr>
-          <p:cNvPr id="154" name="Shape 151"/>
-          <p:cNvSpPr/>
-          <p:nvPr/>
-        </p:nvSpPr>
-        <p:spPr>
-          <a:xfrm flipV="1">
-            <a:off x="1766902" y="14205224"/>
-            <a:ext cx="83703" cy="772"/>
+          <p:cNvPr id="163" name="Shape 160"/>
+          <p:cNvSpPr/>
+          <p:nvPr/>
+        </p:nvSpPr>
+        <p:spPr>
+          <a:xfrm flipV="1">
+            <a:off x="2269119" y="13384259"/>
+            <a:ext cx="83703" cy="790"/>
           </a:xfrm>
           <a:prstGeom prst="line">
             <a:avLst/>
@@ -5541,14 +5789,14 @@
       </p:sp>
       <p:sp>
         <p:nvSpPr>
-          <p:cNvPr id="155" name="Shape 152"/>
-          <p:cNvSpPr/>
-          <p:nvPr/>
-        </p:nvSpPr>
-        <p:spPr>
-          <a:xfrm flipV="1">
-            <a:off x="1850605" y="14204443"/>
-            <a:ext cx="83703" cy="781"/>
+          <p:cNvPr id="164" name="Shape 161"/>
+          <p:cNvSpPr/>
+          <p:nvPr/>
+        </p:nvSpPr>
+        <p:spPr>
+          <a:xfrm flipV="1">
+            <a:off x="2352822" y="13383455"/>
+            <a:ext cx="83703" cy="803"/>
           </a:xfrm>
           <a:prstGeom prst="line">
             <a:avLst/>
@@ -5564,14 +5812,14 @@
       </p:sp>
       <p:sp>
         <p:nvSpPr>
-          <p:cNvPr id="156" name="Shape 153"/>
-          <p:cNvSpPr/>
-          <p:nvPr/>
-        </p:nvSpPr>
-        <p:spPr>
-          <a:xfrm flipV="1">
-            <a:off x="1934308" y="14203651"/>
-            <a:ext cx="83703" cy="791"/>
+          <p:cNvPr id="165" name="Shape 162"/>
+          <p:cNvSpPr/>
+          <p:nvPr/>
+        </p:nvSpPr>
+        <p:spPr>
+          <a:xfrm flipV="1">
+            <a:off x="2436524" y="13382638"/>
+            <a:ext cx="83703" cy="817"/>
           </a:xfrm>
           <a:prstGeom prst="line">
             <a:avLst/>
@@ -5587,14 +5835,14 @@
       </p:sp>
       <p:sp>
         <p:nvSpPr>
-          <p:cNvPr id="157" name="Shape 154"/>
-          <p:cNvSpPr/>
-          <p:nvPr/>
-        </p:nvSpPr>
-        <p:spPr>
-          <a:xfrm flipV="1">
-            <a:off x="2018010" y="14202849"/>
-            <a:ext cx="83703" cy="802"/>
+          <p:cNvPr id="166" name="Shape 163"/>
+          <p:cNvSpPr/>
+          <p:nvPr/>
+        </p:nvSpPr>
+        <p:spPr>
+          <a:xfrm flipV="1">
+            <a:off x="2520227" y="13381807"/>
+            <a:ext cx="83703" cy="832"/>
           </a:xfrm>
           <a:prstGeom prst="line">
             <a:avLst/>
@@ -5610,14 +5858,14 @@
       </p:sp>
       <p:sp>
         <p:nvSpPr>
-          <p:cNvPr id="158" name="Shape 155"/>
-          <p:cNvSpPr/>
-          <p:nvPr/>
-        </p:nvSpPr>
-        <p:spPr>
-          <a:xfrm flipV="1">
-            <a:off x="2101713" y="14202036"/>
-            <a:ext cx="83703" cy="813"/>
+          <p:cNvPr id="167" name="Shape 164"/>
+          <p:cNvSpPr/>
+          <p:nvPr/>
+        </p:nvSpPr>
+        <p:spPr>
+          <a:xfrm flipV="1">
+            <a:off x="2603930" y="13380959"/>
+            <a:ext cx="83703" cy="847"/>
           </a:xfrm>
           <a:prstGeom prst="line">
             <a:avLst/>
@@ -5633,14 +5881,14 @@
       </p:sp>
       <p:sp>
         <p:nvSpPr>
-          <p:cNvPr id="159" name="Shape 156"/>
-          <p:cNvSpPr/>
-          <p:nvPr/>
-        </p:nvSpPr>
-        <p:spPr>
-          <a:xfrm flipV="1">
-            <a:off x="2185416" y="14201210"/>
-            <a:ext cx="83703" cy="826"/>
+          <p:cNvPr id="168" name="Shape 165"/>
+          <p:cNvSpPr/>
+          <p:nvPr/>
+        </p:nvSpPr>
+        <p:spPr>
+          <a:xfrm flipV="1">
+            <a:off x="2687633" y="13380096"/>
+            <a:ext cx="83703" cy="864"/>
           </a:xfrm>
           <a:prstGeom prst="line">
             <a:avLst/>
@@ -5656,14 +5904,14 @@
       </p:sp>
       <p:sp>
         <p:nvSpPr>
-          <p:cNvPr id="160" name="Shape 157"/>
-          <p:cNvSpPr/>
-          <p:nvPr/>
-        </p:nvSpPr>
-        <p:spPr>
-          <a:xfrm flipV="1">
-            <a:off x="2269119" y="14200372"/>
-            <a:ext cx="83703" cy="838"/>
+          <p:cNvPr id="169" name="Shape 166"/>
+          <p:cNvSpPr/>
+          <p:nvPr/>
+        </p:nvSpPr>
+        <p:spPr>
+          <a:xfrm flipV="1">
+            <a:off x="2771335" y="13379214"/>
+            <a:ext cx="83703" cy="881"/>
           </a:xfrm>
           <a:prstGeom prst="line">
             <a:avLst/>
@@ -5679,14 +5927,14 @@
       </p:sp>
       <p:sp>
         <p:nvSpPr>
-          <p:cNvPr id="161" name="Shape 158"/>
-          <p:cNvSpPr/>
-          <p:nvPr/>
-        </p:nvSpPr>
-        <p:spPr>
-          <a:xfrm flipV="1">
-            <a:off x="2352822" y="14199520"/>
-            <a:ext cx="83703" cy="852"/>
+          <p:cNvPr id="170" name="Shape 167"/>
+          <p:cNvSpPr/>
+          <p:nvPr/>
+        </p:nvSpPr>
+        <p:spPr>
+          <a:xfrm flipV="1">
+            <a:off x="2855038" y="13378314"/>
+            <a:ext cx="83703" cy="900"/>
           </a:xfrm>
           <a:prstGeom prst="line">
             <a:avLst/>
@@ -5702,14 +5950,14 @@
       </p:sp>
       <p:sp>
         <p:nvSpPr>
-          <p:cNvPr id="162" name="Shape 159"/>
-          <p:cNvSpPr/>
-          <p:nvPr/>
-        </p:nvSpPr>
-        <p:spPr>
-          <a:xfrm flipV="1">
-            <a:off x="2436524" y="14198653"/>
-            <a:ext cx="83703" cy="867"/>
+          <p:cNvPr id="171" name="Shape 168"/>
+          <p:cNvSpPr/>
+          <p:nvPr/>
+        </p:nvSpPr>
+        <p:spPr>
+          <a:xfrm flipV="1">
+            <a:off x="2938741" y="13377394"/>
+            <a:ext cx="83703" cy="920"/>
           </a:xfrm>
           <a:prstGeom prst="line">
             <a:avLst/>
@@ -5725,14 +5973,14 @@
       </p:sp>
       <p:sp>
         <p:nvSpPr>
-          <p:cNvPr id="163" name="Shape 160"/>
-          <p:cNvSpPr/>
-          <p:nvPr/>
-        </p:nvSpPr>
-        <p:spPr>
-          <a:xfrm flipV="1">
-            <a:off x="2520227" y="14197771"/>
-            <a:ext cx="83703" cy="882"/>
+          <p:cNvPr id="172" name="Shape 169"/>
+          <p:cNvSpPr/>
+          <p:nvPr/>
+        </p:nvSpPr>
+        <p:spPr>
+          <a:xfrm flipV="1">
+            <a:off x="3022444" y="13376453"/>
+            <a:ext cx="83703" cy="941"/>
           </a:xfrm>
           <a:prstGeom prst="line">
             <a:avLst/>
@@ -5748,14 +5996,14 @@
       </p:sp>
       <p:sp>
         <p:nvSpPr>
-          <p:cNvPr id="164" name="Shape 161"/>
-          <p:cNvSpPr/>
-          <p:nvPr/>
-        </p:nvSpPr>
-        <p:spPr>
-          <a:xfrm flipV="1">
-            <a:off x="2603930" y="14196872"/>
-            <a:ext cx="83703" cy="899"/>
+          <p:cNvPr id="173" name="Shape 170"/>
+          <p:cNvSpPr/>
+          <p:nvPr/>
+        </p:nvSpPr>
+        <p:spPr>
+          <a:xfrm flipV="1">
+            <a:off x="3106146" y="13375490"/>
+            <a:ext cx="83703" cy="963"/>
           </a:xfrm>
           <a:prstGeom prst="line">
             <a:avLst/>
@@ -5771,14 +6019,14 @@
       </p:sp>
       <p:sp>
         <p:nvSpPr>
-          <p:cNvPr id="165" name="Shape 162"/>
-          <p:cNvSpPr/>
-          <p:nvPr/>
-        </p:nvSpPr>
-        <p:spPr>
-          <a:xfrm flipV="1">
-            <a:off x="2687633" y="14195955"/>
-            <a:ext cx="83703" cy="916"/>
+          <p:cNvPr id="174" name="Shape 171"/>
+          <p:cNvSpPr/>
+          <p:nvPr/>
+        </p:nvSpPr>
+        <p:spPr>
+          <a:xfrm flipV="1">
+            <a:off x="3189849" y="13374502"/>
+            <a:ext cx="83703" cy="987"/>
           </a:xfrm>
           <a:prstGeom prst="line">
             <a:avLst/>
@@ -5794,14 +6042,14 @@
       </p:sp>
       <p:sp>
         <p:nvSpPr>
-          <p:cNvPr id="166" name="Shape 163"/>
-          <p:cNvSpPr/>
-          <p:nvPr/>
-        </p:nvSpPr>
-        <p:spPr>
-          <a:xfrm flipV="1">
-            <a:off x="2771335" y="14195020"/>
-            <a:ext cx="83703" cy="935"/>
+          <p:cNvPr id="175" name="Shape 172"/>
+          <p:cNvSpPr/>
+          <p:nvPr/>
+        </p:nvSpPr>
+        <p:spPr>
+          <a:xfrm flipV="1">
+            <a:off x="3273552" y="13373490"/>
+            <a:ext cx="83703" cy="1013"/>
           </a:xfrm>
           <a:prstGeom prst="line">
             <a:avLst/>
@@ -5817,14 +6065,14 @@
       </p:sp>
       <p:sp>
         <p:nvSpPr>
-          <p:cNvPr id="167" name="Shape 164"/>
-          <p:cNvSpPr/>
-          <p:nvPr/>
-        </p:nvSpPr>
-        <p:spPr>
-          <a:xfrm flipV="1">
-            <a:off x="2855038" y="14194065"/>
-            <a:ext cx="83703" cy="955"/>
+          <p:cNvPr id="176" name="Shape 173"/>
+          <p:cNvSpPr/>
+          <p:nvPr/>
+        </p:nvSpPr>
+        <p:spPr>
+          <a:xfrm flipV="1">
+            <a:off x="3357255" y="13372450"/>
+            <a:ext cx="83703" cy="1040"/>
           </a:xfrm>
           <a:prstGeom prst="line">
             <a:avLst/>
@@ -5840,14 +6088,14 @@
       </p:sp>
       <p:sp>
         <p:nvSpPr>
-          <p:cNvPr id="168" name="Shape 165"/>
-          <p:cNvSpPr/>
-          <p:nvPr/>
-        </p:nvSpPr>
-        <p:spPr>
-          <a:xfrm flipV="1">
-            <a:off x="2938741" y="14193089"/>
-            <a:ext cx="83703" cy="976"/>
+          <p:cNvPr id="177" name="Shape 174"/>
+          <p:cNvSpPr/>
+          <p:nvPr/>
+        </p:nvSpPr>
+        <p:spPr>
+          <a:xfrm flipV="1">
+            <a:off x="3440958" y="13371382"/>
+            <a:ext cx="83703" cy="1068"/>
           </a:xfrm>
           <a:prstGeom prst="line">
             <a:avLst/>
@@ -5863,14 +6111,14 @@
       </p:sp>
       <p:sp>
         <p:nvSpPr>
-          <p:cNvPr id="169" name="Shape 166"/>
-          <p:cNvSpPr/>
-          <p:nvPr/>
-        </p:nvSpPr>
-        <p:spPr>
-          <a:xfrm flipV="1">
-            <a:off x="3022444" y="14192090"/>
-            <a:ext cx="83703" cy="998"/>
+          <p:cNvPr id="178" name="Shape 175"/>
+          <p:cNvSpPr/>
+          <p:nvPr/>
+        </p:nvSpPr>
+        <p:spPr>
+          <a:xfrm flipV="1">
+            <a:off x="3524660" y="13370283"/>
+            <a:ext cx="83703" cy="1099"/>
           </a:xfrm>
           <a:prstGeom prst="line">
             <a:avLst/>
@@ -5886,14 +6134,14 @@
       </p:sp>
       <p:sp>
         <p:nvSpPr>
-          <p:cNvPr id="170" name="Shape 167"/>
-          <p:cNvSpPr/>
-          <p:nvPr/>
-        </p:nvSpPr>
-        <p:spPr>
-          <a:xfrm flipV="1">
-            <a:off x="3106146" y="14191068"/>
-            <a:ext cx="83703" cy="1022"/>
+          <p:cNvPr id="179" name="Shape 176"/>
+          <p:cNvSpPr/>
+          <p:nvPr/>
+        </p:nvSpPr>
+        <p:spPr>
+          <a:xfrm flipV="1">
+            <a:off x="3608363" y="13369151"/>
+            <a:ext cx="83703" cy="1132"/>
           </a:xfrm>
           <a:prstGeom prst="line">
             <a:avLst/>
@@ -5909,14 +6157,14 @@
       </p:sp>
       <p:sp>
         <p:nvSpPr>
-          <p:cNvPr id="171" name="Shape 168"/>
-          <p:cNvSpPr/>
-          <p:nvPr/>
-        </p:nvSpPr>
-        <p:spPr>
-          <a:xfrm flipV="1">
-            <a:off x="3189849" y="14190021"/>
-            <a:ext cx="83703" cy="1048"/>
+          <p:cNvPr id="180" name="Shape 177"/>
+          <p:cNvSpPr/>
+          <p:nvPr/>
+        </p:nvSpPr>
+        <p:spPr>
+          <a:xfrm flipV="1">
+            <a:off x="3692066" y="13367984"/>
+            <a:ext cx="83703" cy="1167"/>
           </a:xfrm>
           <a:prstGeom prst="line">
             <a:avLst/>
@@ -5932,14 +6180,14 @@
       </p:sp>
       <p:sp>
         <p:nvSpPr>
-          <p:cNvPr id="172" name="Shape 169"/>
-          <p:cNvSpPr/>
-          <p:nvPr/>
-        </p:nvSpPr>
-        <p:spPr>
-          <a:xfrm flipV="1">
-            <a:off x="3273552" y="14188946"/>
-            <a:ext cx="83703" cy="1074"/>
+          <p:cNvPr id="181" name="Shape 178"/>
+          <p:cNvSpPr/>
+          <p:nvPr/>
+        </p:nvSpPr>
+        <p:spPr>
+          <a:xfrm flipV="1">
+            <a:off x="3775769" y="13366780"/>
+            <a:ext cx="83703" cy="1204"/>
           </a:xfrm>
           <a:prstGeom prst="line">
             <a:avLst/>
@@ -5955,14 +6203,14 @@
       </p:sp>
       <p:sp>
         <p:nvSpPr>
-          <p:cNvPr id="173" name="Shape 170"/>
-          <p:cNvSpPr/>
-          <p:nvPr/>
-        </p:nvSpPr>
-        <p:spPr>
-          <a:xfrm flipV="1">
-            <a:off x="3357255" y="14187843"/>
-            <a:ext cx="83703" cy="1103"/>
+          <p:cNvPr id="182" name="Shape 179"/>
+          <p:cNvSpPr/>
+          <p:nvPr/>
+        </p:nvSpPr>
+        <p:spPr>
+          <a:xfrm flipV="1">
+            <a:off x="3859471" y="13365537"/>
+            <a:ext cx="83703" cy="1244"/>
           </a:xfrm>
           <a:prstGeom prst="line">
             <a:avLst/>
@@ -5978,14 +6226,14 @@
       </p:sp>
       <p:sp>
         <p:nvSpPr>
-          <p:cNvPr id="174" name="Shape 171"/>
-          <p:cNvSpPr/>
-          <p:nvPr/>
-        </p:nvSpPr>
-        <p:spPr>
-          <a:xfrm flipV="1">
-            <a:off x="3440958" y="14186710"/>
-            <a:ext cx="83703" cy="1134"/>
+          <p:cNvPr id="183" name="Shape 180"/>
+          <p:cNvSpPr/>
+          <p:nvPr/>
+        </p:nvSpPr>
+        <p:spPr>
+          <a:xfrm flipV="1">
+            <a:off x="3943174" y="13364250"/>
+            <a:ext cx="83703" cy="1286"/>
           </a:xfrm>
           <a:prstGeom prst="line">
             <a:avLst/>
@@ -6001,14 +6249,14 @@
       </p:sp>
       <p:sp>
         <p:nvSpPr>
-          <p:cNvPr id="175" name="Shape 172"/>
-          <p:cNvSpPr/>
-          <p:nvPr/>
-        </p:nvSpPr>
-        <p:spPr>
-          <a:xfrm flipV="1">
-            <a:off x="3524660" y="14185544"/>
-            <a:ext cx="83703" cy="1166"/>
+          <p:cNvPr id="184" name="Shape 181"/>
+          <p:cNvSpPr/>
+          <p:nvPr/>
+        </p:nvSpPr>
+        <p:spPr>
+          <a:xfrm flipV="1">
+            <a:off x="4026877" y="13362918"/>
+            <a:ext cx="83703" cy="1332"/>
           </a:xfrm>
           <a:prstGeom prst="line">
             <a:avLst/>
@@ -6024,14 +6272,14 @@
       </p:sp>
       <p:sp>
         <p:nvSpPr>
-          <p:cNvPr id="176" name="Shape 173"/>
-          <p:cNvSpPr/>
-          <p:nvPr/>
-        </p:nvSpPr>
-        <p:spPr>
-          <a:xfrm flipV="1">
-            <a:off x="3608363" y="14184343"/>
-            <a:ext cx="83703" cy="1201"/>
+          <p:cNvPr id="185" name="Shape 182"/>
+          <p:cNvSpPr/>
+          <p:nvPr/>
+        </p:nvSpPr>
+        <p:spPr>
+          <a:xfrm flipV="1">
+            <a:off x="4110580" y="13361537"/>
+            <a:ext cx="83703" cy="1381"/>
           </a:xfrm>
           <a:prstGeom prst="line">
             <a:avLst/>
@@ -6047,14 +6295,14 @@
       </p:sp>
       <p:sp>
         <p:nvSpPr>
-          <p:cNvPr id="177" name="Shape 174"/>
-          <p:cNvSpPr/>
-          <p:nvPr/>
-        </p:nvSpPr>
-        <p:spPr>
-          <a:xfrm flipV="1">
-            <a:off x="3692066" y="14183105"/>
-            <a:ext cx="83703" cy="1238"/>
+          <p:cNvPr id="186" name="Shape 183"/>
+          <p:cNvSpPr/>
+          <p:nvPr/>
+        </p:nvSpPr>
+        <p:spPr>
+          <a:xfrm flipV="1">
+            <a:off x="4194282" y="13360103"/>
+            <a:ext cx="83703" cy="1434"/>
           </a:xfrm>
           <a:prstGeom prst="line">
             <a:avLst/>
@@ -6070,14 +6318,14 @@
       </p:sp>
       <p:sp>
         <p:nvSpPr>
-          <p:cNvPr id="178" name="Shape 175"/>
-          <p:cNvSpPr/>
-          <p:nvPr/>
-        </p:nvSpPr>
-        <p:spPr>
-          <a:xfrm flipV="1">
-            <a:off x="3775769" y="14181828"/>
-            <a:ext cx="83703" cy="1277"/>
+          <p:cNvPr id="187" name="Shape 184"/>
+          <p:cNvSpPr/>
+          <p:nvPr/>
+        </p:nvSpPr>
+        <p:spPr>
+          <a:xfrm flipV="1">
+            <a:off x="4277985" y="13358613"/>
+            <a:ext cx="83703" cy="1490"/>
           </a:xfrm>
           <a:prstGeom prst="line">
             <a:avLst/>
@@ -6093,14 +6341,14 @@
       </p:sp>
       <p:sp>
         <p:nvSpPr>
-          <p:cNvPr id="179" name="Shape 176"/>
-          <p:cNvSpPr/>
-          <p:nvPr/>
-        </p:nvSpPr>
-        <p:spPr>
-          <a:xfrm flipV="1">
-            <a:off x="3859471" y="14180508"/>
-            <a:ext cx="83703" cy="1320"/>
+          <p:cNvPr id="188" name="Shape 185"/>
+          <p:cNvSpPr/>
+          <p:nvPr/>
+        </p:nvSpPr>
+        <p:spPr>
+          <a:xfrm flipV="1">
+            <a:off x="4361688" y="13357061"/>
+            <a:ext cx="83703" cy="1552"/>
           </a:xfrm>
           <a:prstGeom prst="line">
             <a:avLst/>
@@ -6116,14 +6364,14 @@
       </p:sp>
       <p:sp>
         <p:nvSpPr>
-          <p:cNvPr id="180" name="Shape 177"/>
-          <p:cNvSpPr/>
-          <p:nvPr/>
-        </p:nvSpPr>
-        <p:spPr>
-          <a:xfrm flipV="1">
-            <a:off x="3943174" y="14179144"/>
-            <a:ext cx="83703" cy="1365"/>
+          <p:cNvPr id="189" name="Shape 186"/>
+          <p:cNvSpPr/>
+          <p:nvPr/>
+        </p:nvSpPr>
+        <p:spPr>
+          <a:xfrm flipV="1">
+            <a:off x="4445391" y="13355444"/>
+            <a:ext cx="83703" cy="1617"/>
           </a:xfrm>
           <a:prstGeom prst="line">
             <a:avLst/>
@@ -6139,14 +6387,14 @@
       </p:sp>
       <p:sp>
         <p:nvSpPr>
-          <p:cNvPr id="181" name="Shape 178"/>
-          <p:cNvSpPr/>
-          <p:nvPr/>
-        </p:nvSpPr>
-        <p:spPr>
-          <a:xfrm flipV="1">
-            <a:off x="4026877" y="14177730"/>
-            <a:ext cx="83703" cy="1413"/>
+          <p:cNvPr id="190" name="Shape 187"/>
+          <p:cNvSpPr/>
+          <p:nvPr/>
+        </p:nvSpPr>
+        <p:spPr>
+          <a:xfrm flipV="1">
+            <a:off x="4529094" y="13353755"/>
+            <a:ext cx="83703" cy="1689"/>
           </a:xfrm>
           <a:prstGeom prst="line">
             <a:avLst/>
@@ -6162,14 +6410,14 @@
       </p:sp>
       <p:sp>
         <p:nvSpPr>
-          <p:cNvPr id="182" name="Shape 179"/>
-          <p:cNvSpPr/>
-          <p:nvPr/>
-        </p:nvSpPr>
-        <p:spPr>
-          <a:xfrm flipV="1">
-            <a:off x="4110580" y="14176265"/>
-            <a:ext cx="83703" cy="1465"/>
+          <p:cNvPr id="191" name="Shape 188"/>
+          <p:cNvSpPr/>
+          <p:nvPr/>
+        </p:nvSpPr>
+        <p:spPr>
+          <a:xfrm flipV="1">
+            <a:off x="4612796" y="13351989"/>
+            <a:ext cx="83703" cy="1766"/>
           </a:xfrm>
           <a:prstGeom prst="line">
             <a:avLst/>
@@ -6185,14 +6433,14 @@
       </p:sp>
       <p:sp>
         <p:nvSpPr>
-          <p:cNvPr id="183" name="Shape 180"/>
-          <p:cNvSpPr/>
-          <p:nvPr/>
-        </p:nvSpPr>
-        <p:spPr>
-          <a:xfrm flipV="1">
-            <a:off x="4194282" y="14174744"/>
-            <a:ext cx="83703" cy="1521"/>
+          <p:cNvPr id="192" name="Shape 189"/>
+          <p:cNvSpPr/>
+          <p:nvPr/>
+        </p:nvSpPr>
+        <p:spPr>
+          <a:xfrm flipV="1">
+            <a:off x="4696499" y="13350140"/>
+            <a:ext cx="83703" cy="1850"/>
           </a:xfrm>
           <a:prstGeom prst="line">
             <a:avLst/>
@@ -6208,14 +6456,14 @@
       </p:sp>
       <p:sp>
         <p:nvSpPr>
-          <p:cNvPr id="184" name="Shape 181"/>
-          <p:cNvSpPr/>
-          <p:nvPr/>
-        </p:nvSpPr>
-        <p:spPr>
-          <a:xfrm flipV="1">
-            <a:off x="4277985" y="14173162"/>
-            <a:ext cx="83703" cy="1581"/>
+          <p:cNvPr id="193" name="Shape 190"/>
+          <p:cNvSpPr/>
+          <p:nvPr/>
+        </p:nvSpPr>
+        <p:spPr>
+          <a:xfrm flipV="1">
+            <a:off x="4780202" y="13348199"/>
+            <a:ext cx="83703" cy="1941"/>
           </a:xfrm>
           <a:prstGeom prst="line">
             <a:avLst/>
@@ -6231,14 +6479,14 @@
       </p:sp>
       <p:sp>
         <p:nvSpPr>
-          <p:cNvPr id="185" name="Shape 182"/>
-          <p:cNvSpPr/>
-          <p:nvPr/>
-        </p:nvSpPr>
-        <p:spPr>
-          <a:xfrm flipV="1">
-            <a:off x="4361688" y="14171516"/>
-            <a:ext cx="83703" cy="1646"/>
+          <p:cNvPr id="194" name="Shape 191"/>
+          <p:cNvSpPr/>
+          <p:nvPr/>
+        </p:nvSpPr>
+        <p:spPr>
+          <a:xfrm flipV="1">
+            <a:off x="4863905" y="13346159"/>
+            <a:ext cx="83703" cy="2040"/>
           </a:xfrm>
           <a:prstGeom prst="line">
             <a:avLst/>
@@ -6254,14 +6502,14 @@
       </p:sp>
       <p:sp>
         <p:nvSpPr>
-          <p:cNvPr id="186" name="Shape 183"/>
-          <p:cNvSpPr/>
-          <p:nvPr/>
-        </p:nvSpPr>
-        <p:spPr>
-          <a:xfrm flipV="1">
-            <a:off x="4445391" y="14169800"/>
-            <a:ext cx="83703" cy="1716"/>
+          <p:cNvPr id="195" name="Shape 192"/>
+          <p:cNvSpPr/>
+          <p:nvPr/>
+        </p:nvSpPr>
+        <p:spPr>
+          <a:xfrm flipV="1">
+            <a:off x="4947607" y="13344011"/>
+            <a:ext cx="83703" cy="2148"/>
           </a:xfrm>
           <a:prstGeom prst="line">
             <a:avLst/>
@@ -6277,14 +6525,14 @@
       </p:sp>
       <p:sp>
         <p:nvSpPr>
-          <p:cNvPr id="187" name="Shape 184"/>
-          <p:cNvSpPr/>
-          <p:nvPr/>
-        </p:nvSpPr>
-        <p:spPr>
-          <a:xfrm flipV="1">
-            <a:off x="4529094" y="14168009"/>
-            <a:ext cx="83703" cy="1792"/>
+          <p:cNvPr id="196" name="Shape 193"/>
+          <p:cNvSpPr/>
+          <p:nvPr/>
+        </p:nvSpPr>
+        <p:spPr>
+          <a:xfrm flipV="1">
+            <a:off x="5031310" y="13341744"/>
+            <a:ext cx="83703" cy="2267"/>
           </a:xfrm>
           <a:prstGeom prst="line">
             <a:avLst/>
@@ -6300,14 +6548,14 @@
       </p:sp>
       <p:sp>
         <p:nvSpPr>
-          <p:cNvPr id="188" name="Shape 185"/>
-          <p:cNvSpPr/>
-          <p:nvPr/>
-        </p:nvSpPr>
-        <p:spPr>
-          <a:xfrm flipV="1">
-            <a:off x="4612796" y="14166135"/>
-            <a:ext cx="83703" cy="1874"/>
+          <p:cNvPr id="197" name="Shape 194"/>
+          <p:cNvSpPr/>
+          <p:nvPr/>
+        </p:nvSpPr>
+        <p:spPr>
+          <a:xfrm flipV="1">
+            <a:off x="5115013" y="13339346"/>
+            <a:ext cx="83703" cy="2397"/>
           </a:xfrm>
           <a:prstGeom prst="line">
             <a:avLst/>
@@ -6323,14 +6571,14 @@
       </p:sp>
       <p:sp>
         <p:nvSpPr>
-          <p:cNvPr id="189" name="Shape 186"/>
-          <p:cNvSpPr/>
-          <p:nvPr/>
-        </p:nvSpPr>
-        <p:spPr>
-          <a:xfrm flipV="1">
-            <a:off x="4696499" y="14164172"/>
-            <a:ext cx="83703" cy="1962"/>
+          <p:cNvPr id="198" name="Shape 195"/>
+          <p:cNvSpPr/>
+          <p:nvPr/>
+        </p:nvSpPr>
+        <p:spPr>
+          <a:xfrm flipV="1">
+            <a:off x="5198716" y="13336805"/>
+            <a:ext cx="83703" cy="2541"/>
           </a:xfrm>
           <a:prstGeom prst="line">
             <a:avLst/>
@@ -6346,14 +6594,14 @@
       </p:sp>
       <p:sp>
         <p:nvSpPr>
-          <p:cNvPr id="190" name="Shape 187"/>
-          <p:cNvSpPr/>
-          <p:nvPr/>
-        </p:nvSpPr>
-        <p:spPr>
-          <a:xfrm flipV="1">
-            <a:off x="4780202" y="14162113"/>
-            <a:ext cx="83703" cy="2059"/>
+          <p:cNvPr id="199" name="Shape 196"/>
+          <p:cNvSpPr/>
+          <p:nvPr/>
+        </p:nvSpPr>
+        <p:spPr>
+          <a:xfrm flipV="1">
+            <a:off x="5282418" y="13334106"/>
+            <a:ext cx="83703" cy="2699"/>
           </a:xfrm>
           <a:prstGeom prst="line">
             <a:avLst/>
@@ -6369,14 +6617,14 @@
       </p:sp>
       <p:sp>
         <p:nvSpPr>
-          <p:cNvPr id="191" name="Shape 188"/>
-          <p:cNvSpPr/>
-          <p:nvPr/>
-        </p:nvSpPr>
-        <p:spPr>
-          <a:xfrm flipV="1">
-            <a:off x="4863905" y="14159949"/>
-            <a:ext cx="83703" cy="2164"/>
+          <p:cNvPr id="200" name="Shape 197"/>
+          <p:cNvSpPr/>
+          <p:nvPr/>
+        </p:nvSpPr>
+        <p:spPr>
+          <a:xfrm flipV="1">
+            <a:off x="5366121" y="13331232"/>
+            <a:ext cx="83703" cy="2875"/>
           </a:xfrm>
           <a:prstGeom prst="line">
             <a:avLst/>
@@ -6392,14 +6640,14 @@
       </p:sp>
       <p:sp>
         <p:nvSpPr>
-          <p:cNvPr id="192" name="Shape 189"/>
-          <p:cNvSpPr/>
-          <p:nvPr/>
-        </p:nvSpPr>
-        <p:spPr>
-          <a:xfrm flipV="1">
-            <a:off x="4947607" y="14157670"/>
-            <a:ext cx="83703" cy="2279"/>
+          <p:cNvPr id="201" name="Shape 198"/>
+          <p:cNvSpPr/>
+          <p:nvPr/>
+        </p:nvSpPr>
+        <p:spPr>
+          <a:xfrm flipV="1">
+            <a:off x="5449824" y="13328162"/>
+            <a:ext cx="83703" cy="3070"/>
           </a:xfrm>
           <a:prstGeom prst="line">
             <a:avLst/>
@@ -6415,14 +6663,14 @@
       </p:sp>
       <p:sp>
         <p:nvSpPr>
-          <p:cNvPr id="193" name="Shape 190"/>
-          <p:cNvSpPr/>
-          <p:nvPr/>
-        </p:nvSpPr>
-        <p:spPr>
-          <a:xfrm flipV="1">
-            <a:off x="5031310" y="14155264"/>
-            <a:ext cx="83703" cy="2405"/>
+          <p:cNvPr id="202" name="Shape 199"/>
+          <p:cNvSpPr/>
+          <p:nvPr/>
+        </p:nvSpPr>
+        <p:spPr>
+          <a:xfrm flipV="1">
+            <a:off x="5533527" y="13324874"/>
+            <a:ext cx="83703" cy="3288"/>
           </a:xfrm>
           <a:prstGeom prst="line">
             <a:avLst/>
@@ -6438,14 +6686,14 @@
       </p:sp>
       <p:sp>
         <p:nvSpPr>
-          <p:cNvPr id="194" name="Shape 191"/>
-          <p:cNvSpPr/>
-          <p:nvPr/>
-        </p:nvSpPr>
-        <p:spPr>
-          <a:xfrm flipV="1">
-            <a:off x="5115013" y="14152721"/>
-            <a:ext cx="83703" cy="2544"/>
+          <p:cNvPr id="203" name="Shape 200"/>
+          <p:cNvSpPr/>
+          <p:nvPr/>
+        </p:nvSpPr>
+        <p:spPr>
+          <a:xfrm flipV="1">
+            <a:off x="5617230" y="13321342"/>
+            <a:ext cx="83703" cy="3532"/>
           </a:xfrm>
           <a:prstGeom prst="line">
             <a:avLst/>
@@ -6461,14 +6709,14 @@
       </p:sp>
       <p:sp>
         <p:nvSpPr>
-          <p:cNvPr id="195" name="Shape 192"/>
-          <p:cNvSpPr/>
-          <p:nvPr/>
-        </p:nvSpPr>
-        <p:spPr>
-          <a:xfrm flipV="1">
-            <a:off x="5198716" y="14150025"/>
-            <a:ext cx="83703" cy="2696"/>
+          <p:cNvPr id="204" name="Shape 201"/>
+          <p:cNvSpPr/>
+          <p:nvPr/>
+        </p:nvSpPr>
+        <p:spPr>
+          <a:xfrm flipV="1">
+            <a:off x="5700932" y="13317536"/>
+            <a:ext cx="83703" cy="3806"/>
           </a:xfrm>
           <a:prstGeom prst="line">
             <a:avLst/>
@@ -6484,14 +6732,14 @@
       </p:sp>
       <p:sp>
         <p:nvSpPr>
-          <p:cNvPr id="196" name="Shape 193"/>
-          <p:cNvSpPr/>
-          <p:nvPr/>
-        </p:nvSpPr>
-        <p:spPr>
-          <a:xfrm flipV="1">
-            <a:off x="5282418" y="14147161"/>
-            <a:ext cx="83703" cy="2864"/>
+          <p:cNvPr id="205" name="Shape 202"/>
+          <p:cNvSpPr/>
+          <p:nvPr/>
+        </p:nvSpPr>
+        <p:spPr>
+          <a:xfrm flipV="1">
+            <a:off x="5784635" y="13313419"/>
+            <a:ext cx="83703" cy="4117"/>
           </a:xfrm>
           <a:prstGeom prst="line">
             <a:avLst/>
@@ -6507,14 +6755,14 @@
       </p:sp>
       <p:sp>
         <p:nvSpPr>
-          <p:cNvPr id="197" name="Shape 194"/>
-          <p:cNvSpPr/>
-          <p:nvPr/>
-        </p:nvSpPr>
-        <p:spPr>
-          <a:xfrm flipV="1">
-            <a:off x="5366121" y="14144111"/>
-            <a:ext cx="83703" cy="3050"/>
+          <p:cNvPr id="206" name="Shape 203"/>
+          <p:cNvSpPr/>
+          <p:nvPr/>
+        </p:nvSpPr>
+        <p:spPr>
+          <a:xfrm flipV="1">
+            <a:off x="5868338" y="13308949"/>
+            <a:ext cx="83703" cy="4470"/>
           </a:xfrm>
           <a:prstGeom prst="line">
             <a:avLst/>
@@ -6530,14 +6778,14 @@
       </p:sp>
       <p:sp>
         <p:nvSpPr>
-          <p:cNvPr id="198" name="Shape 195"/>
-          <p:cNvSpPr/>
-          <p:nvPr/>
-        </p:nvSpPr>
-        <p:spPr>
-          <a:xfrm flipV="1">
-            <a:off x="5449824" y="14140854"/>
-            <a:ext cx="83703" cy="3257"/>
+          <p:cNvPr id="207" name="Shape 204"/>
+          <p:cNvSpPr/>
+          <p:nvPr/>
+        </p:nvSpPr>
+        <p:spPr>
+          <a:xfrm flipV="1">
+            <a:off x="5952041" y="13304075"/>
+            <a:ext cx="83703" cy="4874"/>
           </a:xfrm>
           <a:prstGeom prst="line">
             <a:avLst/>
@@ -6553,14 +6801,14 @@
       </p:sp>
       <p:sp>
         <p:nvSpPr>
-          <p:cNvPr id="199" name="Shape 196"/>
-          <p:cNvSpPr/>
-          <p:nvPr/>
-        </p:nvSpPr>
-        <p:spPr>
-          <a:xfrm flipV="1">
-            <a:off x="5533527" y="14137366"/>
-            <a:ext cx="83703" cy="3488"/>
+          <p:cNvPr id="208" name="Shape 205"/>
+          <p:cNvSpPr/>
+          <p:nvPr/>
+        </p:nvSpPr>
+        <p:spPr>
+          <a:xfrm flipV="1">
+            <a:off x="6035743" y="13298737"/>
+            <a:ext cx="83703" cy="5338"/>
           </a:xfrm>
           <a:prstGeom prst="line">
             <a:avLst/>
@@ -6576,14 +6824,14 @@
       </p:sp>
       <p:sp>
         <p:nvSpPr>
-          <p:cNvPr id="200" name="Shape 197"/>
-          <p:cNvSpPr/>
-          <p:nvPr/>
-        </p:nvSpPr>
-        <p:spPr>
-          <a:xfrm flipV="1">
-            <a:off x="5617230" y="14133619"/>
-            <a:ext cx="83703" cy="3747"/>
+          <p:cNvPr id="209" name="Shape 206"/>
+          <p:cNvSpPr/>
+          <p:nvPr/>
+        </p:nvSpPr>
+        <p:spPr>
+          <a:xfrm flipV="1">
+            <a:off x="6119446" y="13292861"/>
+            <a:ext cx="83703" cy="5876"/>
           </a:xfrm>
           <a:prstGeom prst="line">
             <a:avLst/>
@@ -6599,14 +6847,14 @@
       </p:sp>
       <p:sp>
         <p:nvSpPr>
-          <p:cNvPr id="201" name="Shape 198"/>
-          <p:cNvSpPr/>
-          <p:nvPr/>
-        </p:nvSpPr>
-        <p:spPr>
-          <a:xfrm flipV="1">
-            <a:off x="5700932" y="14129581"/>
-            <a:ext cx="83703" cy="4038"/>
+          <p:cNvPr id="210" name="Shape 207"/>
+          <p:cNvSpPr/>
+          <p:nvPr/>
+        </p:nvSpPr>
+        <p:spPr>
+          <a:xfrm flipV="1">
+            <a:off x="6203149" y="13286357"/>
+            <a:ext cx="83703" cy="6504"/>
           </a:xfrm>
           <a:prstGeom prst="line">
             <a:avLst/>
@@ -6622,14 +6870,14 @@
       </p:sp>
       <p:sp>
         <p:nvSpPr>
-          <p:cNvPr id="202" name="Shape 199"/>
-          <p:cNvSpPr/>
-          <p:nvPr/>
-        </p:nvSpPr>
-        <p:spPr>
-          <a:xfrm flipV="1">
-            <a:off x="5784635" y="14125213"/>
-            <a:ext cx="83703" cy="4368"/>
+          <p:cNvPr id="211" name="Shape 208"/>
+          <p:cNvSpPr/>
+          <p:nvPr/>
+        </p:nvSpPr>
+        <p:spPr>
+          <a:xfrm flipV="1">
+            <a:off x="6286852" y="13279115"/>
+            <a:ext cx="83703" cy="7242"/>
           </a:xfrm>
           <a:prstGeom prst="line">
             <a:avLst/>
@@ -6645,14 +6893,14 @@
       </p:sp>
       <p:sp>
         <p:nvSpPr>
-          <p:cNvPr id="203" name="Shape 200"/>
-          <p:cNvSpPr/>
-          <p:nvPr/>
-        </p:nvSpPr>
-        <p:spPr>
-          <a:xfrm flipV="1">
-            <a:off x="5868338" y="14120470"/>
-            <a:ext cx="83703" cy="4743"/>
+          <p:cNvPr id="212" name="Shape 209"/>
+          <p:cNvSpPr/>
+          <p:nvPr/>
+        </p:nvSpPr>
+        <p:spPr>
+          <a:xfrm flipV="1">
+            <a:off x="6370554" y="13270996"/>
+            <a:ext cx="83703" cy="8119"/>
           </a:xfrm>
           <a:prstGeom prst="line">
             <a:avLst/>
@@ -6668,14 +6916,14 @@
       </p:sp>
       <p:sp>
         <p:nvSpPr>
-          <p:cNvPr id="204" name="Shape 201"/>
-          <p:cNvSpPr/>
-          <p:nvPr/>
-        </p:nvSpPr>
-        <p:spPr>
-          <a:xfrm flipV="1">
-            <a:off x="5952041" y="14115299"/>
-            <a:ext cx="83703" cy="5171"/>
+          <p:cNvPr id="213" name="Shape 210"/>
+          <p:cNvSpPr/>
+          <p:nvPr/>
+        </p:nvSpPr>
+        <p:spPr>
+          <a:xfrm flipV="1">
+            <a:off x="6454257" y="13261825"/>
+            <a:ext cx="83703" cy="9172"/>
           </a:xfrm>
           <a:prstGeom prst="line">
             <a:avLst/>
@@ -6691,152 +6939,14 @@
       </p:sp>
       <p:sp>
         <p:nvSpPr>
-          <p:cNvPr id="205" name="Shape 202"/>
-          <p:cNvSpPr/>
-          <p:nvPr/>
-        </p:nvSpPr>
-        <p:spPr>
-          <a:xfrm flipV="1">
-            <a:off x="6035743" y="14109635"/>
-            <a:ext cx="83703" cy="5664"/>
-          </a:xfrm>
-          <a:prstGeom prst="line">
-            <a:avLst/>
-          </a:prstGeom>
-          <a:noFill/>
-          <a:ln w="21590">
-            <a:solidFill>
-              <a:srgbClr val="321B40"/>
-            </a:solidFill>
-            <a:prstDash val="solid"/>
-          </a:ln>
-        </p:spPr>
-      </p:sp>
-      <p:sp>
-        <p:nvSpPr>
-          <p:cNvPr id="206" name="Shape 203"/>
-          <p:cNvSpPr/>
-          <p:nvPr/>
-        </p:nvSpPr>
-        <p:spPr>
-          <a:xfrm flipV="1">
-            <a:off x="6119446" y="14103401"/>
-            <a:ext cx="83703" cy="6234"/>
-          </a:xfrm>
-          <a:prstGeom prst="line">
-            <a:avLst/>
-          </a:prstGeom>
-          <a:noFill/>
-          <a:ln w="21590">
-            <a:solidFill>
-              <a:srgbClr val="321B40"/>
-            </a:solidFill>
-            <a:prstDash val="solid"/>
-          </a:ln>
-        </p:spPr>
-      </p:sp>
-      <p:sp>
-        <p:nvSpPr>
-          <p:cNvPr id="207" name="Shape 204"/>
-          <p:cNvSpPr/>
-          <p:nvPr/>
-        </p:nvSpPr>
-        <p:spPr>
-          <a:xfrm flipV="1">
-            <a:off x="6203149" y="14096501"/>
-            <a:ext cx="83703" cy="6900"/>
-          </a:xfrm>
-          <a:prstGeom prst="line">
-            <a:avLst/>
-          </a:prstGeom>
-          <a:noFill/>
-          <a:ln w="21590">
-            <a:solidFill>
-              <a:srgbClr val="321B40"/>
-            </a:solidFill>
-            <a:prstDash val="solid"/>
-          </a:ln>
-        </p:spPr>
-      </p:sp>
-      <p:sp>
-        <p:nvSpPr>
-          <p:cNvPr id="208" name="Shape 205"/>
-          <p:cNvSpPr/>
-          <p:nvPr/>
-        </p:nvSpPr>
-        <p:spPr>
-          <a:xfrm flipV="1">
-            <a:off x="6286852" y="14088817"/>
-            <a:ext cx="83703" cy="7684"/>
-          </a:xfrm>
-          <a:prstGeom prst="line">
-            <a:avLst/>
-          </a:prstGeom>
-          <a:noFill/>
-          <a:ln w="21590">
-            <a:solidFill>
-              <a:srgbClr val="321B40"/>
-            </a:solidFill>
-            <a:prstDash val="solid"/>
-          </a:ln>
-        </p:spPr>
-      </p:sp>
-      <p:sp>
-        <p:nvSpPr>
-          <p:cNvPr id="209" name="Shape 206"/>
-          <p:cNvSpPr/>
-          <p:nvPr/>
-        </p:nvSpPr>
-        <p:spPr>
-          <a:xfrm flipV="1">
-            <a:off x="6370554" y="14080203"/>
-            <a:ext cx="83703" cy="8614"/>
-          </a:xfrm>
-          <a:prstGeom prst="line">
-            <a:avLst/>
-          </a:prstGeom>
-          <a:noFill/>
-          <a:ln w="21590">
-            <a:solidFill>
-              <a:srgbClr val="321B40"/>
-            </a:solidFill>
-            <a:prstDash val="solid"/>
-          </a:ln>
-        </p:spPr>
-      </p:sp>
-      <p:sp>
-        <p:nvSpPr>
-          <p:cNvPr id="210" name="Shape 207"/>
-          <p:cNvSpPr/>
-          <p:nvPr/>
-        </p:nvSpPr>
-        <p:spPr>
-          <a:xfrm flipV="1">
-            <a:off x="6454257" y="14070472"/>
-            <a:ext cx="83703" cy="9731"/>
-          </a:xfrm>
-          <a:prstGeom prst="line">
-            <a:avLst/>
-          </a:prstGeom>
-          <a:noFill/>
-          <a:ln w="21590">
-            <a:solidFill>
-              <a:srgbClr val="321B40"/>
-            </a:solidFill>
-            <a:prstDash val="solid"/>
-          </a:ln>
-        </p:spPr>
-      </p:sp>
-      <p:sp>
-        <p:nvSpPr>
-          <p:cNvPr id="211" name="Text 208"/>
-          <p:cNvSpPr/>
-          <p:nvPr/>
-        </p:nvSpPr>
-        <p:spPr>
-          <a:xfrm>
-            <a:off x="1115568" y="10991088"/>
-            <a:ext cx="2560320" cy="228600"/>
+          <p:cNvPr id="214" name="Text 211"/>
+          <p:cNvSpPr/>
+          <p:nvPr/>
+        </p:nvSpPr>
+        <p:spPr>
+          <a:xfrm>
+            <a:off x="1115568" y="10359416"/>
+            <a:ext cx="2560320" cy="215462"/>
           </a:xfrm>
           <a:prstGeom prst="rect">
             <a:avLst/>
@@ -6854,7 +6964,7 @@
               <a:buNone/>
             </a:pPr>
             <a:r>
-              <a:rPr lang="en-US" sz="1000" dirty="0">
+              <a:rPr lang="en-US" sz="1100" dirty="0">
                 <a:solidFill>
                   <a:srgbClr val="B84419"/>
                 </a:solidFill>
@@ -6864,20 +6974,20 @@
               </a:rPr>
               <a:t>GPS: δL = 5 m (ipoteză)</a:t>
             </a:r>
-            <a:endParaRPr lang="en-US" sz="1000" dirty="0"/>
-          </a:p>
-        </p:txBody>
-      </p:sp>
-      <p:sp>
-        <p:nvSpPr>
-          <p:cNvPr id="212" name="Text 209"/>
-          <p:cNvSpPr/>
-          <p:nvPr/>
-        </p:nvSpPr>
-        <p:spPr>
-          <a:xfrm>
-            <a:off x="3703320" y="10991088"/>
-            <a:ext cx="2743200" cy="228600"/>
+            <a:endParaRPr lang="en-US" sz="1100" dirty="0"/>
+          </a:p>
+        </p:txBody>
+      </p:sp>
+      <p:sp>
+        <p:nvSpPr>
+          <p:cNvPr id="215" name="Text 212"/>
+          <p:cNvSpPr/>
+          <p:nvPr/>
+        </p:nvSpPr>
+        <p:spPr>
+          <a:xfrm>
+            <a:off x="3703320" y="10359416"/>
+            <a:ext cx="2743200" cy="215462"/>
           </a:xfrm>
           <a:prstGeom prst="rect">
             <a:avLst/>
@@ -6895,7 +7005,7 @@
               <a:buNone/>
             </a:pPr>
             <a:r>
-              <a:rPr lang="en-US" sz="1000" dirty="0">
+              <a:rPr lang="en-US" sz="1100" dirty="0">
                 <a:solidFill>
                   <a:srgbClr val="321B40"/>
                 </a:solidFill>
@@ -6905,20 +7015,20 @@
               </a:rPr>
               <a:t>Telemetru: δL = 0,3 m (ipoteză)</a:t>
             </a:r>
-            <a:endParaRPr lang="en-US" sz="1000" dirty="0"/>
-          </a:p>
-        </p:txBody>
-      </p:sp>
-      <p:sp>
-        <p:nvSpPr>
-          <p:cNvPr id="213" name="Text 210"/>
-          <p:cNvSpPr/>
-          <p:nvPr/>
-        </p:nvSpPr>
-        <p:spPr>
-          <a:xfrm>
-            <a:off x="1965960" y="14538960"/>
-            <a:ext cx="4023360" cy="237744"/>
+            <a:endParaRPr lang="en-US" sz="1100" dirty="0"/>
+          </a:p>
+        </p:txBody>
+      </p:sp>
+      <p:sp>
+        <p:nvSpPr>
+          <p:cNvPr id="216" name="Text 213"/>
+          <p:cNvSpPr/>
+          <p:nvPr/>
+        </p:nvSpPr>
+        <p:spPr>
+          <a:xfrm>
+            <a:off x="1965960" y="13703388"/>
+            <a:ext cx="4023360" cy="224081"/>
           </a:xfrm>
           <a:prstGeom prst="rect">
             <a:avLst/>
@@ -6952,14 +7062,14 @@
       </p:sp>
       <p:sp>
         <p:nvSpPr>
-          <p:cNvPr id="214" name="Text 211"/>
-          <p:cNvSpPr/>
-          <p:nvPr/>
-        </p:nvSpPr>
-        <p:spPr>
-          <a:xfrm>
-            <a:off x="713232" y="14941296"/>
-            <a:ext cx="4572000" cy="347472"/>
+          <p:cNvPr id="217" name="Text 214"/>
+          <p:cNvSpPr/>
+          <p:nvPr/>
+        </p:nvSpPr>
+        <p:spPr>
+          <a:xfrm>
+            <a:off x="713232" y="14082601"/>
+            <a:ext cx="4572000" cy="327502"/>
           </a:xfrm>
           <a:prstGeom prst="rect">
             <a:avLst/>
@@ -6993,14 +7103,14 @@
       </p:sp>
       <p:sp>
         <p:nvSpPr>
-          <p:cNvPr id="215" name="Text 212"/>
-          <p:cNvSpPr/>
-          <p:nvPr/>
-        </p:nvSpPr>
-        <p:spPr>
-          <a:xfrm>
-            <a:off x="713232" y="15380208"/>
-            <a:ext cx="6035040" cy="566928"/>
+          <p:cNvPr id="218" name="Text 215"/>
+          <p:cNvSpPr/>
+          <p:nvPr/>
+        </p:nvSpPr>
+        <p:spPr>
+          <a:xfrm>
+            <a:off x="713232" y="14496288"/>
+            <a:ext cx="6035040" cy="534346"/>
           </a:xfrm>
           <a:prstGeom prst="rect">
             <a:avLst/>
@@ -7034,14 +7144,14 @@
       </p:sp>
       <p:sp>
         <p:nvSpPr>
-          <p:cNvPr id="216" name="Text 213"/>
-          <p:cNvSpPr/>
-          <p:nvPr/>
-        </p:nvSpPr>
-        <p:spPr>
-          <a:xfrm>
-            <a:off x="7909560" y="11237976"/>
-            <a:ext cx="5669280" cy="201168"/>
+          <p:cNvPr id="219" name="Text 216"/>
+          <p:cNvSpPr/>
+          <p:nvPr/>
+        </p:nvSpPr>
+        <p:spPr>
+          <a:xfrm>
+            <a:off x="7909560" y="10592115"/>
+            <a:ext cx="5669280" cy="189607"/>
           </a:xfrm>
           <a:prstGeom prst="rect">
             <a:avLst/>
@@ -7059,7 +7169,7 @@
               <a:buNone/>
             </a:pPr>
             <a:r>
-              <a:rPr lang="en-US" sz="1000" dirty="0">
+              <a:rPr lang="en-US" sz="1100" dirty="0">
                 <a:solidFill>
                   <a:srgbClr val="625A6A"/>
                 </a:solidFill>
@@ -7069,19 +7179,19 @@
               </a:rPr>
               <a:t>Clădiri eligibile în simulare (%)</a:t>
             </a:r>
-            <a:endParaRPr lang="en-US" sz="1000" dirty="0"/>
-          </a:p>
-        </p:txBody>
-      </p:sp>
-      <p:sp>
-        <p:nvSpPr>
-          <p:cNvPr id="217" name="Shape 214"/>
-          <p:cNvSpPr/>
-          <p:nvPr/>
-        </p:nvSpPr>
-        <p:spPr>
-          <a:xfrm>
-            <a:off x="7909560" y="14200632"/>
+            <a:endParaRPr lang="en-US" sz="1100" dirty="0"/>
+          </a:p>
+        </p:txBody>
+      </p:sp>
+      <p:sp>
+        <p:nvSpPr>
+          <p:cNvPr id="220" name="Shape 217"/>
+          <p:cNvSpPr/>
+          <p:nvPr/>
+        </p:nvSpPr>
+        <p:spPr>
+          <a:xfrm>
+            <a:off x="7909560" y="13384504"/>
             <a:ext cx="5669280" cy="914"/>
           </a:xfrm>
           <a:prstGeom prst="line">
@@ -7098,14 +7208,14 @@
       </p:sp>
       <p:sp>
         <p:nvSpPr>
-          <p:cNvPr id="218" name="Text 215"/>
-          <p:cNvSpPr/>
-          <p:nvPr/>
-        </p:nvSpPr>
-        <p:spPr>
-          <a:xfrm>
-            <a:off x="7498080" y="14109192"/>
-            <a:ext cx="347472" cy="182880"/>
+          <p:cNvPr id="221" name="Text 218"/>
+          <p:cNvSpPr/>
+          <p:nvPr/>
+        </p:nvSpPr>
+        <p:spPr>
+          <a:xfrm>
+            <a:off x="7498080" y="13298319"/>
+            <a:ext cx="347472" cy="172370"/>
           </a:xfrm>
           <a:prstGeom prst="rect">
             <a:avLst/>
@@ -7123,7 +7233,7 @@
               <a:buNone/>
             </a:pPr>
             <a:r>
-              <a:rPr lang="en-US" sz="1000" dirty="0">
+              <a:rPr lang="en-US" sz="1100" dirty="0">
                 <a:solidFill>
                   <a:srgbClr val="625A6A"/>
                 </a:solidFill>
@@ -7133,19 +7243,19 @@
               </a:rPr>
               <a:t>0</a:t>
             </a:r>
-            <a:endParaRPr lang="en-US" sz="1000" dirty="0"/>
-          </a:p>
-        </p:txBody>
-      </p:sp>
-      <p:sp>
-        <p:nvSpPr>
-          <p:cNvPr id="219" name="Shape 216"/>
-          <p:cNvSpPr/>
-          <p:nvPr/>
-        </p:nvSpPr>
-        <p:spPr>
-          <a:xfrm>
-            <a:off x="7909560" y="13673938"/>
+            <a:endParaRPr lang="en-US" sz="1100" dirty="0"/>
+          </a:p>
+        </p:txBody>
+      </p:sp>
+      <p:sp>
+        <p:nvSpPr>
+          <p:cNvPr id="222" name="Shape 219"/>
+          <p:cNvSpPr/>
+          <p:nvPr/>
+        </p:nvSpPr>
+        <p:spPr>
+          <a:xfrm>
+            <a:off x="7909560" y="12888079"/>
             <a:ext cx="5669280" cy="914"/>
           </a:xfrm>
           <a:prstGeom prst="line">
@@ -7162,14 +7272,14 @@
       </p:sp>
       <p:sp>
         <p:nvSpPr>
-          <p:cNvPr id="220" name="Text 217"/>
-          <p:cNvSpPr/>
-          <p:nvPr/>
-        </p:nvSpPr>
-        <p:spPr>
-          <a:xfrm>
-            <a:off x="7498080" y="13582498"/>
-            <a:ext cx="347472" cy="182880"/>
+          <p:cNvPr id="223" name="Text 220"/>
+          <p:cNvSpPr/>
+          <p:nvPr/>
+        </p:nvSpPr>
+        <p:spPr>
+          <a:xfrm>
+            <a:off x="7498080" y="12801894"/>
+            <a:ext cx="347472" cy="172370"/>
           </a:xfrm>
           <a:prstGeom prst="rect">
             <a:avLst/>
@@ -7187,7 +7297,7 @@
               <a:buNone/>
             </a:pPr>
             <a:r>
-              <a:rPr lang="en-US" sz="1000" dirty="0">
+              <a:rPr lang="en-US" sz="1100" dirty="0">
                 <a:solidFill>
                   <a:srgbClr val="625A6A"/>
                 </a:solidFill>
@@ -7197,19 +7307,19 @@
               </a:rPr>
               <a:t>20</a:t>
             </a:r>
-            <a:endParaRPr lang="en-US" sz="1000" dirty="0"/>
-          </a:p>
-        </p:txBody>
-      </p:sp>
-      <p:sp>
-        <p:nvSpPr>
-          <p:cNvPr id="221" name="Shape 218"/>
-          <p:cNvSpPr/>
-          <p:nvPr/>
-        </p:nvSpPr>
-        <p:spPr>
-          <a:xfrm>
-            <a:off x="7909560" y="13147243"/>
+            <a:endParaRPr lang="en-US" sz="1100" dirty="0"/>
+          </a:p>
+        </p:txBody>
+      </p:sp>
+      <p:sp>
+        <p:nvSpPr>
+          <p:cNvPr id="224" name="Shape 221"/>
+          <p:cNvSpPr/>
+          <p:nvPr/>
+        </p:nvSpPr>
+        <p:spPr>
+          <a:xfrm>
+            <a:off x="7909560" y="12391655"/>
             <a:ext cx="5669280" cy="914"/>
           </a:xfrm>
           <a:prstGeom prst="line">
@@ -7226,14 +7336,14 @@
       </p:sp>
       <p:sp>
         <p:nvSpPr>
-          <p:cNvPr id="222" name="Text 219"/>
-          <p:cNvSpPr/>
-          <p:nvPr/>
-        </p:nvSpPr>
-        <p:spPr>
-          <a:xfrm>
-            <a:off x="7498080" y="13055803"/>
-            <a:ext cx="347472" cy="182880"/>
+          <p:cNvPr id="225" name="Text 222"/>
+          <p:cNvSpPr/>
+          <p:nvPr/>
+        </p:nvSpPr>
+        <p:spPr>
+          <a:xfrm>
+            <a:off x="7498080" y="12305470"/>
+            <a:ext cx="347472" cy="172370"/>
           </a:xfrm>
           <a:prstGeom prst="rect">
             <a:avLst/>
@@ -7251,7 +7361,7 @@
               <a:buNone/>
             </a:pPr>
             <a:r>
-              <a:rPr lang="en-US" sz="1000" dirty="0">
+              <a:rPr lang="en-US" sz="1100" dirty="0">
                 <a:solidFill>
                   <a:srgbClr val="625A6A"/>
                 </a:solidFill>
@@ -7261,19 +7371,19 @@
               </a:rPr>
               <a:t>40</a:t>
             </a:r>
-            <a:endParaRPr lang="en-US" sz="1000" dirty="0"/>
-          </a:p>
-        </p:txBody>
-      </p:sp>
-      <p:sp>
-        <p:nvSpPr>
-          <p:cNvPr id="223" name="Shape 220"/>
-          <p:cNvSpPr/>
-          <p:nvPr/>
-        </p:nvSpPr>
-        <p:spPr>
-          <a:xfrm>
-            <a:off x="7909560" y="12620549"/>
+            <a:endParaRPr lang="en-US" sz="1100" dirty="0"/>
+          </a:p>
+        </p:txBody>
+      </p:sp>
+      <p:sp>
+        <p:nvSpPr>
+          <p:cNvPr id="226" name="Shape 223"/>
+          <p:cNvSpPr/>
+          <p:nvPr/>
+        </p:nvSpPr>
+        <p:spPr>
+          <a:xfrm>
+            <a:off x="7909560" y="11895230"/>
             <a:ext cx="5669280" cy="914"/>
           </a:xfrm>
           <a:prstGeom prst="line">
@@ -7290,14 +7400,14 @@
       </p:sp>
       <p:sp>
         <p:nvSpPr>
-          <p:cNvPr id="224" name="Text 221"/>
-          <p:cNvSpPr/>
-          <p:nvPr/>
-        </p:nvSpPr>
-        <p:spPr>
-          <a:xfrm>
-            <a:off x="7498080" y="12529109"/>
-            <a:ext cx="347472" cy="182880"/>
+          <p:cNvPr id="227" name="Text 224"/>
+          <p:cNvSpPr/>
+          <p:nvPr/>
+        </p:nvSpPr>
+        <p:spPr>
+          <a:xfrm>
+            <a:off x="7498080" y="11809045"/>
+            <a:ext cx="347472" cy="172370"/>
           </a:xfrm>
           <a:prstGeom prst="rect">
             <a:avLst/>
@@ -7315,7 +7425,7 @@
               <a:buNone/>
             </a:pPr>
             <a:r>
-              <a:rPr lang="en-US" sz="1000" dirty="0">
+              <a:rPr lang="en-US" sz="1100" dirty="0">
                 <a:solidFill>
                   <a:srgbClr val="625A6A"/>
                 </a:solidFill>
@@ -7325,19 +7435,19 @@
               </a:rPr>
               <a:t>60</a:t>
             </a:r>
-            <a:endParaRPr lang="en-US" sz="1000" dirty="0"/>
-          </a:p>
-        </p:txBody>
-      </p:sp>
-      <p:sp>
-        <p:nvSpPr>
-          <p:cNvPr id="225" name="Shape 222"/>
-          <p:cNvSpPr/>
-          <p:nvPr/>
-        </p:nvSpPr>
-        <p:spPr>
-          <a:xfrm>
-            <a:off x="7909560" y="12093854"/>
+            <a:endParaRPr lang="en-US" sz="1100" dirty="0"/>
+          </a:p>
+        </p:txBody>
+      </p:sp>
+      <p:sp>
+        <p:nvSpPr>
+          <p:cNvPr id="228" name="Shape 225"/>
+          <p:cNvSpPr/>
+          <p:nvPr/>
+        </p:nvSpPr>
+        <p:spPr>
+          <a:xfrm>
+            <a:off x="7909560" y="11398805"/>
             <a:ext cx="5669280" cy="914"/>
           </a:xfrm>
           <a:prstGeom prst="line">
@@ -7354,14 +7464,14 @@
       </p:sp>
       <p:sp>
         <p:nvSpPr>
-          <p:cNvPr id="226" name="Text 223"/>
-          <p:cNvSpPr/>
-          <p:nvPr/>
-        </p:nvSpPr>
-        <p:spPr>
-          <a:xfrm>
-            <a:off x="7498080" y="12002414"/>
-            <a:ext cx="347472" cy="182880"/>
+          <p:cNvPr id="229" name="Text 226"/>
+          <p:cNvSpPr/>
+          <p:nvPr/>
+        </p:nvSpPr>
+        <p:spPr>
+          <a:xfrm>
+            <a:off x="7498080" y="11312620"/>
+            <a:ext cx="347472" cy="172370"/>
           </a:xfrm>
           <a:prstGeom prst="rect">
             <a:avLst/>
@@ -7379,7 +7489,7 @@
               <a:buNone/>
             </a:pPr>
             <a:r>
-              <a:rPr lang="en-US" sz="1000" dirty="0">
+              <a:rPr lang="en-US" sz="1100" dirty="0">
                 <a:solidFill>
                   <a:srgbClr val="625A6A"/>
                 </a:solidFill>
@@ -7389,19 +7499,19 @@
               </a:rPr>
               <a:t>80</a:t>
             </a:r>
-            <a:endParaRPr lang="en-US" sz="1000" dirty="0"/>
-          </a:p>
-        </p:txBody>
-      </p:sp>
-      <p:sp>
-        <p:nvSpPr>
-          <p:cNvPr id="227" name="Shape 224"/>
-          <p:cNvSpPr/>
-          <p:nvPr/>
-        </p:nvSpPr>
-        <p:spPr>
-          <a:xfrm>
-            <a:off x="7909560" y="11567160"/>
+            <a:endParaRPr lang="en-US" sz="1100" dirty="0"/>
+          </a:p>
+        </p:txBody>
+      </p:sp>
+      <p:sp>
+        <p:nvSpPr>
+          <p:cNvPr id="230" name="Shape 227"/>
+          <p:cNvSpPr/>
+          <p:nvPr/>
+        </p:nvSpPr>
+        <p:spPr>
+          <a:xfrm>
+            <a:off x="7909560" y="10902381"/>
             <a:ext cx="5669280" cy="914"/>
           </a:xfrm>
           <a:prstGeom prst="line">
@@ -7418,14 +7528,14 @@
       </p:sp>
       <p:sp>
         <p:nvSpPr>
-          <p:cNvPr id="228" name="Text 225"/>
-          <p:cNvSpPr/>
-          <p:nvPr/>
-        </p:nvSpPr>
-        <p:spPr>
-          <a:xfrm>
-            <a:off x="7498080" y="11475720"/>
-            <a:ext cx="347472" cy="182880"/>
+          <p:cNvPr id="231" name="Text 228"/>
+          <p:cNvSpPr/>
+          <p:nvPr/>
+        </p:nvSpPr>
+        <p:spPr>
+          <a:xfrm>
+            <a:off x="7498080" y="10816196"/>
+            <a:ext cx="347472" cy="172370"/>
           </a:xfrm>
           <a:prstGeom prst="rect">
             <a:avLst/>
@@ -7443,7 +7553,7 @@
               <a:buNone/>
             </a:pPr>
             <a:r>
-              <a:rPr lang="en-US" sz="1000" dirty="0">
+              <a:rPr lang="en-US" sz="1100" dirty="0">
                 <a:solidFill>
                   <a:srgbClr val="625A6A"/>
                 </a:solidFill>
@@ -7453,20 +7563,20 @@
               </a:rPr>
               <a:t>100</a:t>
             </a:r>
-            <a:endParaRPr lang="en-US" sz="1000" dirty="0"/>
-          </a:p>
-        </p:txBody>
-      </p:sp>
-      <p:sp>
-        <p:nvSpPr>
-          <p:cNvPr id="229" name="Shape 226"/>
-          <p:cNvSpPr/>
-          <p:nvPr/>
-        </p:nvSpPr>
-        <p:spPr>
-          <a:xfrm>
-            <a:off x="8037576" y="11885810"/>
-            <a:ext cx="274320" cy="2314822"/>
+            <a:endParaRPr lang="en-US" sz="1100" dirty="0"/>
+          </a:p>
+        </p:txBody>
+      </p:sp>
+      <p:sp>
+        <p:nvSpPr>
+          <p:cNvPr id="232" name="Shape 229"/>
+          <p:cNvSpPr/>
+          <p:nvPr/>
+        </p:nvSpPr>
+        <p:spPr>
+          <a:xfrm>
+            <a:off x="8037576" y="11202718"/>
+            <a:ext cx="274320" cy="2181786"/>
           </a:xfrm>
           <a:prstGeom prst="rect">
             <a:avLst/>
@@ -7486,14 +7596,14 @@
       </p:sp>
       <p:sp>
         <p:nvSpPr>
-          <p:cNvPr id="230" name="Shape 227"/>
-          <p:cNvSpPr/>
-          <p:nvPr/>
-        </p:nvSpPr>
-        <p:spPr>
-          <a:xfrm>
-            <a:off x="8330184" y="12538911"/>
-            <a:ext cx="274320" cy="1661721"/>
+          <p:cNvPr id="233" name="Shape 230"/>
+          <p:cNvSpPr/>
+          <p:nvPr/>
+        </p:nvSpPr>
+        <p:spPr>
+          <a:xfrm>
+            <a:off x="8330184" y="11818284"/>
+            <a:ext cx="274320" cy="1566220"/>
           </a:xfrm>
           <a:prstGeom prst="rect">
             <a:avLst/>
@@ -7513,14 +7623,14 @@
       </p:sp>
       <p:sp>
         <p:nvSpPr>
-          <p:cNvPr id="231" name="Text 228"/>
-          <p:cNvSpPr/>
-          <p:nvPr/>
-        </p:nvSpPr>
-        <p:spPr>
-          <a:xfrm>
-            <a:off x="8001000" y="11675498"/>
-            <a:ext cx="365760" cy="182880"/>
+          <p:cNvPr id="234" name="Text 231"/>
+          <p:cNvSpPr/>
+          <p:nvPr/>
+        </p:nvSpPr>
+        <p:spPr>
+          <a:xfrm>
+            <a:off x="8001000" y="11004492"/>
+            <a:ext cx="365760" cy="172370"/>
           </a:xfrm>
           <a:prstGeom prst="rect">
             <a:avLst/>
@@ -7538,7 +7648,7 @@
               <a:buNone/>
             </a:pPr>
             <a:r>
-              <a:rPr lang="en-US" sz="900" dirty="0">
+              <a:rPr lang="en-US" sz="1100" dirty="0">
                 <a:solidFill>
                   <a:srgbClr val="321B40"/>
                 </a:solidFill>
@@ -7548,20 +7658,20 @@
               </a:rPr>
               <a:t>87,9</a:t>
             </a:r>
-            <a:endParaRPr lang="en-US" sz="900" dirty="0"/>
-          </a:p>
-        </p:txBody>
-      </p:sp>
-      <p:sp>
-        <p:nvSpPr>
-          <p:cNvPr id="232" name="Text 229"/>
-          <p:cNvSpPr/>
-          <p:nvPr/>
-        </p:nvSpPr>
-        <p:spPr>
-          <a:xfrm>
-            <a:off x="7927848" y="14282928"/>
-            <a:ext cx="822960" cy="438912"/>
+            <a:endParaRPr lang="en-US" sz="1100" dirty="0"/>
+          </a:p>
+        </p:txBody>
+      </p:sp>
+      <p:sp>
+        <p:nvSpPr>
+          <p:cNvPr id="235" name="Text 232"/>
+          <p:cNvSpPr/>
+          <p:nvPr/>
+        </p:nvSpPr>
+        <p:spPr>
+          <a:xfrm>
+            <a:off x="7927848" y="13462070"/>
+            <a:ext cx="822960" cy="413687"/>
           </a:xfrm>
           <a:prstGeom prst="rect">
             <a:avLst/>
@@ -7579,7 +7689,7 @@
               <a:buNone/>
             </a:pPr>
             <a:r>
-              <a:rPr lang="en-US" sz="900" dirty="0">
+              <a:rPr lang="en-US" sz="1100" dirty="0">
                 <a:solidFill>
                   <a:srgbClr val="321B40"/>
                 </a:solidFill>
@@ -7589,14 +7699,14 @@
               </a:rPr>
               <a:t>27</a:t>
             </a:r>
-            <a:endParaRPr lang="en-US" sz="900" dirty="0"/>
+            <a:endParaRPr lang="en-US" sz="1100" dirty="0"/>
           </a:p>
           <a:p>
             <a:pPr algn="ctr" indent="0" marL="0">
               <a:buNone/>
             </a:pPr>
             <a:r>
-              <a:rPr lang="en-US" sz="900" dirty="0">
+              <a:rPr lang="en-US" sz="1100" dirty="0">
                 <a:solidFill>
                   <a:srgbClr val="321B40"/>
                 </a:solidFill>
@@ -7606,20 +7716,20 @@
               </a:rPr>
               <a:t>oct 10:00</a:t>
             </a:r>
-            <a:endParaRPr lang="en-US" sz="900" dirty="0"/>
-          </a:p>
-        </p:txBody>
-      </p:sp>
-      <p:sp>
-        <p:nvSpPr>
-          <p:cNvPr id="233" name="Shape 230"/>
-          <p:cNvSpPr/>
-          <p:nvPr/>
-        </p:nvSpPr>
-        <p:spPr>
-          <a:xfrm>
-            <a:off x="8951976" y="11827874"/>
-            <a:ext cx="274320" cy="2372758"/>
+            <a:endParaRPr lang="en-US" sz="1100" dirty="0"/>
+          </a:p>
+        </p:txBody>
+      </p:sp>
+      <p:sp>
+        <p:nvSpPr>
+          <p:cNvPr id="236" name="Shape 233"/>
+          <p:cNvSpPr/>
+          <p:nvPr/>
+        </p:nvSpPr>
+        <p:spPr>
+          <a:xfrm>
+            <a:off x="8951976" y="11148111"/>
+            <a:ext cx="274320" cy="2236393"/>
           </a:xfrm>
           <a:prstGeom prst="rect">
             <a:avLst/>
@@ -7639,14 +7749,14 @@
       </p:sp>
       <p:sp>
         <p:nvSpPr>
-          <p:cNvPr id="234" name="Shape 231"/>
-          <p:cNvSpPr/>
-          <p:nvPr/>
-        </p:nvSpPr>
-        <p:spPr>
-          <a:xfrm>
-            <a:off x="9244584" y="12333500"/>
-            <a:ext cx="274320" cy="1867132"/>
+          <p:cNvPr id="237" name="Shape 234"/>
+          <p:cNvSpPr/>
+          <p:nvPr/>
+        </p:nvSpPr>
+        <p:spPr>
+          <a:xfrm>
+            <a:off x="9244584" y="11624678"/>
+            <a:ext cx="274320" cy="1759825"/>
           </a:xfrm>
           <a:prstGeom prst="rect">
             <a:avLst/>
@@ -7666,14 +7776,14 @@
       </p:sp>
       <p:sp>
         <p:nvSpPr>
-          <p:cNvPr id="235" name="Text 232"/>
-          <p:cNvSpPr/>
-          <p:nvPr/>
-        </p:nvSpPr>
-        <p:spPr>
-          <a:xfrm>
-            <a:off x="8915400" y="11617562"/>
-            <a:ext cx="365760" cy="182880"/>
+          <p:cNvPr id="238" name="Text 235"/>
+          <p:cNvSpPr/>
+          <p:nvPr/>
+        </p:nvSpPr>
+        <p:spPr>
+          <a:xfrm>
+            <a:off x="8915400" y="10949886"/>
+            <a:ext cx="365760" cy="172370"/>
           </a:xfrm>
           <a:prstGeom prst="rect">
             <a:avLst/>
@@ -7691,7 +7801,7 @@
               <a:buNone/>
             </a:pPr>
             <a:r>
-              <a:rPr lang="en-US" sz="900" dirty="0">
+              <a:rPr lang="en-US" sz="1100" dirty="0">
                 <a:solidFill>
                   <a:srgbClr val="321B40"/>
                 </a:solidFill>
@@ -7701,20 +7811,20 @@
               </a:rPr>
               <a:t>90,1</a:t>
             </a:r>
-            <a:endParaRPr lang="en-US" sz="900" dirty="0"/>
-          </a:p>
-        </p:txBody>
-      </p:sp>
-      <p:sp>
-        <p:nvSpPr>
-          <p:cNvPr id="236" name="Text 233"/>
-          <p:cNvSpPr/>
-          <p:nvPr/>
-        </p:nvSpPr>
-        <p:spPr>
-          <a:xfrm>
-            <a:off x="8842248" y="14282928"/>
-            <a:ext cx="822960" cy="438912"/>
+            <a:endParaRPr lang="en-US" sz="1100" dirty="0"/>
+          </a:p>
+        </p:txBody>
+      </p:sp>
+      <p:sp>
+        <p:nvSpPr>
+          <p:cNvPr id="239" name="Text 236"/>
+          <p:cNvSpPr/>
+          <p:nvPr/>
+        </p:nvSpPr>
+        <p:spPr>
+          <a:xfrm>
+            <a:off x="8842248" y="13462070"/>
+            <a:ext cx="822960" cy="413687"/>
           </a:xfrm>
           <a:prstGeom prst="rect">
             <a:avLst/>
@@ -7732,7 +7842,7 @@
               <a:buNone/>
             </a:pPr>
             <a:r>
-              <a:rPr lang="en-US" sz="900" dirty="0">
+              <a:rPr lang="en-US" sz="1100" dirty="0">
                 <a:solidFill>
                   <a:srgbClr val="321B40"/>
                 </a:solidFill>
@@ -7742,14 +7852,14 @@
               </a:rPr>
               <a:t>27</a:t>
             </a:r>
-            <a:endParaRPr lang="en-US" sz="900" dirty="0"/>
+            <a:endParaRPr lang="en-US" sz="1100" dirty="0"/>
           </a:p>
           <a:p>
             <a:pPr algn="ctr" indent="0" marL="0">
               <a:buNone/>
             </a:pPr>
             <a:r>
-              <a:rPr lang="en-US" sz="900" dirty="0">
+              <a:rPr lang="en-US" sz="1100" dirty="0">
                 <a:solidFill>
                   <a:srgbClr val="321B40"/>
                 </a:solidFill>
@@ -7759,20 +7869,20 @@
               </a:rPr>
               <a:t>oct 12:00</a:t>
             </a:r>
-            <a:endParaRPr lang="en-US" sz="900" dirty="0"/>
-          </a:p>
-        </p:txBody>
-      </p:sp>
-      <p:sp>
-        <p:nvSpPr>
-          <p:cNvPr id="237" name="Shape 234"/>
-          <p:cNvSpPr/>
-          <p:nvPr/>
-        </p:nvSpPr>
-        <p:spPr>
-          <a:xfrm>
-            <a:off x="9866376" y="11956914"/>
-            <a:ext cx="274320" cy="2243718"/>
+            <a:endParaRPr lang="en-US" sz="1100" dirty="0"/>
+          </a:p>
+        </p:txBody>
+      </p:sp>
+      <p:sp>
+        <p:nvSpPr>
+          <p:cNvPr id="240" name="Shape 237"/>
+          <p:cNvSpPr/>
+          <p:nvPr/>
+        </p:nvSpPr>
+        <p:spPr>
+          <a:xfrm>
+            <a:off x="9866376" y="11269735"/>
+            <a:ext cx="274320" cy="2114769"/>
           </a:xfrm>
           <a:prstGeom prst="rect">
             <a:avLst/>
@@ -7792,14 +7902,14 @@
       </p:sp>
       <p:sp>
         <p:nvSpPr>
-          <p:cNvPr id="238" name="Shape 235"/>
-          <p:cNvSpPr/>
-          <p:nvPr/>
-        </p:nvSpPr>
-        <p:spPr>
-          <a:xfrm>
-            <a:off x="10158984" y="12631083"/>
-            <a:ext cx="274320" cy="1569549"/>
+          <p:cNvPr id="241" name="Shape 238"/>
+          <p:cNvSpPr/>
+          <p:nvPr/>
+        </p:nvSpPr>
+        <p:spPr>
+          <a:xfrm>
+            <a:off x="10158984" y="11905158"/>
+            <a:ext cx="274320" cy="1479345"/>
           </a:xfrm>
           <a:prstGeom prst="rect">
             <a:avLst/>
@@ -7819,14 +7929,14 @@
       </p:sp>
       <p:sp>
         <p:nvSpPr>
-          <p:cNvPr id="239" name="Text 236"/>
-          <p:cNvSpPr/>
-          <p:nvPr/>
-        </p:nvSpPr>
-        <p:spPr>
-          <a:xfrm>
-            <a:off x="9829800" y="11746602"/>
-            <a:ext cx="365760" cy="182880"/>
+          <p:cNvPr id="242" name="Text 239"/>
+          <p:cNvSpPr/>
+          <p:nvPr/>
+        </p:nvSpPr>
+        <p:spPr>
+          <a:xfrm>
+            <a:off x="9829800" y="11071510"/>
+            <a:ext cx="365760" cy="172370"/>
           </a:xfrm>
           <a:prstGeom prst="rect">
             <a:avLst/>
@@ -7844,7 +7954,7 @@
               <a:buNone/>
             </a:pPr>
             <a:r>
-              <a:rPr lang="en-US" sz="900" dirty="0">
+              <a:rPr lang="en-US" sz="1100" dirty="0">
                 <a:solidFill>
                   <a:srgbClr val="321B40"/>
                 </a:solidFill>
@@ -7854,20 +7964,20 @@
               </a:rPr>
               <a:t>85,2</a:t>
             </a:r>
-            <a:endParaRPr lang="en-US" sz="900" dirty="0"/>
-          </a:p>
-        </p:txBody>
-      </p:sp>
-      <p:sp>
-        <p:nvSpPr>
-          <p:cNvPr id="240" name="Text 237"/>
-          <p:cNvSpPr/>
-          <p:nvPr/>
-        </p:nvSpPr>
-        <p:spPr>
-          <a:xfrm>
-            <a:off x="9756648" y="14282928"/>
-            <a:ext cx="822960" cy="438912"/>
+            <a:endParaRPr lang="en-US" sz="1100" dirty="0"/>
+          </a:p>
+        </p:txBody>
+      </p:sp>
+      <p:sp>
+        <p:nvSpPr>
+          <p:cNvPr id="243" name="Text 240"/>
+          <p:cNvSpPr/>
+          <p:nvPr/>
+        </p:nvSpPr>
+        <p:spPr>
+          <a:xfrm>
+            <a:off x="9756648" y="13462070"/>
+            <a:ext cx="822960" cy="413687"/>
           </a:xfrm>
           <a:prstGeom prst="rect">
             <a:avLst/>
@@ -7885,7 +7995,7 @@
               <a:buNone/>
             </a:pPr>
             <a:r>
-              <a:rPr lang="en-US" sz="900" dirty="0">
+              <a:rPr lang="en-US" sz="1100" dirty="0">
                 <a:solidFill>
                   <a:srgbClr val="321B40"/>
                 </a:solidFill>
@@ -7895,14 +8005,14 @@
               </a:rPr>
               <a:t>27</a:t>
             </a:r>
-            <a:endParaRPr lang="en-US" sz="900" dirty="0"/>
+            <a:endParaRPr lang="en-US" sz="1100" dirty="0"/>
           </a:p>
           <a:p>
             <a:pPr algn="ctr" indent="0" marL="0">
               <a:buNone/>
             </a:pPr>
             <a:r>
-              <a:rPr lang="en-US" sz="900" dirty="0">
+              <a:rPr lang="en-US" sz="1100" dirty="0">
                 <a:solidFill>
                   <a:srgbClr val="321B40"/>
                 </a:solidFill>
@@ -7912,20 +8022,20 @@
               </a:rPr>
               <a:t>oct 14:00</a:t>
             </a:r>
-            <a:endParaRPr lang="en-US" sz="900" dirty="0"/>
-          </a:p>
-        </p:txBody>
-      </p:sp>
-      <p:sp>
-        <p:nvSpPr>
-          <p:cNvPr id="241" name="Shape 238"/>
-          <p:cNvSpPr/>
-          <p:nvPr/>
-        </p:nvSpPr>
-        <p:spPr>
-          <a:xfrm>
-            <a:off x="10780776" y="11796272"/>
-            <a:ext cx="274320" cy="2404360"/>
+            <a:endParaRPr lang="en-US" sz="1100" dirty="0"/>
+          </a:p>
+        </p:txBody>
+      </p:sp>
+      <p:sp>
+        <p:nvSpPr>
+          <p:cNvPr id="244" name="Shape 241"/>
+          <p:cNvSpPr/>
+          <p:nvPr/>
+        </p:nvSpPr>
+        <p:spPr>
+          <a:xfrm>
+            <a:off x="10780776" y="11118325"/>
+            <a:ext cx="274320" cy="2266178"/>
           </a:xfrm>
           <a:prstGeom prst="rect">
             <a:avLst/>
@@ -7945,14 +8055,14 @@
       </p:sp>
       <p:sp>
         <p:nvSpPr>
-          <p:cNvPr id="242" name="Shape 239"/>
-          <p:cNvSpPr/>
-          <p:nvPr/>
-        </p:nvSpPr>
-        <p:spPr>
-          <a:xfrm>
-            <a:off x="11073384" y="12367735"/>
-            <a:ext cx="274320" cy="1832897"/>
+          <p:cNvPr id="245" name="Shape 242"/>
+          <p:cNvSpPr/>
+          <p:nvPr/>
+        </p:nvSpPr>
+        <p:spPr>
+          <a:xfrm>
+            <a:off x="11073384" y="11656946"/>
+            <a:ext cx="274320" cy="1727558"/>
           </a:xfrm>
           <a:prstGeom prst="rect">
             <a:avLst/>
@@ -7972,14 +8082,14 @@
       </p:sp>
       <p:sp>
         <p:nvSpPr>
-          <p:cNvPr id="243" name="Text 240"/>
-          <p:cNvSpPr/>
-          <p:nvPr/>
-        </p:nvSpPr>
-        <p:spPr>
-          <a:xfrm>
-            <a:off x="10744200" y="11585960"/>
-            <a:ext cx="365760" cy="182880"/>
+          <p:cNvPr id="246" name="Text 243"/>
+          <p:cNvSpPr/>
+          <p:nvPr/>
+        </p:nvSpPr>
+        <p:spPr>
+          <a:xfrm>
+            <a:off x="10744200" y="10920100"/>
+            <a:ext cx="365760" cy="172370"/>
           </a:xfrm>
           <a:prstGeom prst="rect">
             <a:avLst/>
@@ -7997,7 +8107,7 @@
               <a:buNone/>
             </a:pPr>
             <a:r>
-              <a:rPr lang="en-US" sz="900" dirty="0">
+              <a:rPr lang="en-US" sz="1100" dirty="0">
                 <a:solidFill>
                   <a:srgbClr val="321B40"/>
                 </a:solidFill>
@@ -8007,20 +8117,20 @@
               </a:rPr>
               <a:t>91,3</a:t>
             </a:r>
-            <a:endParaRPr lang="en-US" sz="900" dirty="0"/>
-          </a:p>
-        </p:txBody>
-      </p:sp>
-      <p:sp>
-        <p:nvSpPr>
-          <p:cNvPr id="244" name="Text 241"/>
-          <p:cNvSpPr/>
-          <p:nvPr/>
-        </p:nvSpPr>
-        <p:spPr>
-          <a:xfrm>
-            <a:off x="10671048" y="14282928"/>
-            <a:ext cx="822960" cy="438912"/>
+            <a:endParaRPr lang="en-US" sz="1100" dirty="0"/>
+          </a:p>
+        </p:txBody>
+      </p:sp>
+      <p:sp>
+        <p:nvSpPr>
+          <p:cNvPr id="247" name="Text 244"/>
+          <p:cNvSpPr/>
+          <p:nvPr/>
+        </p:nvSpPr>
+        <p:spPr>
+          <a:xfrm>
+            <a:off x="10671048" y="13462070"/>
+            <a:ext cx="822960" cy="413687"/>
           </a:xfrm>
           <a:prstGeom prst="rect">
             <a:avLst/>
@@ -8038,7 +8148,7 @@
               <a:buNone/>
             </a:pPr>
             <a:r>
-              <a:rPr lang="en-US" sz="900" dirty="0">
+              <a:rPr lang="en-US" sz="1100" dirty="0">
                 <a:solidFill>
                   <a:srgbClr val="321B40"/>
                 </a:solidFill>
@@ -8048,14 +8158,14 @@
               </a:rPr>
               <a:t>21</a:t>
             </a:r>
-            <a:endParaRPr lang="en-US" sz="900" dirty="0"/>
+            <a:endParaRPr lang="en-US" sz="1100" dirty="0"/>
           </a:p>
           <a:p>
             <a:pPr algn="ctr" indent="0" marL="0">
               <a:buNone/>
             </a:pPr>
             <a:r>
-              <a:rPr lang="en-US" sz="900" dirty="0">
+              <a:rPr lang="en-US" sz="1100" dirty="0">
                 <a:solidFill>
                   <a:srgbClr val="321B40"/>
                 </a:solidFill>
@@ -8065,20 +8175,20 @@
               </a:rPr>
               <a:t>iun 09:00</a:t>
             </a:r>
-            <a:endParaRPr lang="en-US" sz="900" dirty="0"/>
-          </a:p>
-        </p:txBody>
-      </p:sp>
-      <p:sp>
-        <p:nvSpPr>
-          <p:cNvPr id="245" name="Shape 242"/>
-          <p:cNvSpPr/>
-          <p:nvPr/>
-        </p:nvSpPr>
-        <p:spPr>
-          <a:xfrm>
-            <a:off x="11695176" y="11672499"/>
-            <a:ext cx="274320" cy="2528133"/>
+            <a:endParaRPr lang="en-US" sz="1100" dirty="0"/>
+          </a:p>
+        </p:txBody>
+      </p:sp>
+      <p:sp>
+        <p:nvSpPr>
+          <p:cNvPr id="248" name="Shape 245"/>
+          <p:cNvSpPr/>
+          <p:nvPr/>
+        </p:nvSpPr>
+        <p:spPr>
+          <a:xfrm>
+            <a:off x="11695176" y="11001666"/>
+            <a:ext cx="274320" cy="2382838"/>
           </a:xfrm>
           <a:prstGeom prst="rect">
             <a:avLst/>
@@ -8098,14 +8208,14 @@
       </p:sp>
       <p:sp>
         <p:nvSpPr>
-          <p:cNvPr id="246" name="Shape 243"/>
-          <p:cNvSpPr/>
-          <p:nvPr/>
-        </p:nvSpPr>
-        <p:spPr>
-          <a:xfrm>
-            <a:off x="11987784" y="12125456"/>
-            <a:ext cx="274320" cy="2075176"/>
+          <p:cNvPr id="249" name="Shape 246"/>
+          <p:cNvSpPr/>
+          <p:nvPr/>
+        </p:nvSpPr>
+        <p:spPr>
+          <a:xfrm>
+            <a:off x="11987784" y="11428591"/>
+            <a:ext cx="274320" cy="1955913"/>
           </a:xfrm>
           <a:prstGeom prst="rect">
             <a:avLst/>
@@ -8125,14 +8235,14 @@
       </p:sp>
       <p:sp>
         <p:nvSpPr>
-          <p:cNvPr id="247" name="Text 244"/>
-          <p:cNvSpPr/>
-          <p:nvPr/>
-        </p:nvSpPr>
-        <p:spPr>
-          <a:xfrm>
-            <a:off x="11658600" y="11462187"/>
-            <a:ext cx="365760" cy="182880"/>
+          <p:cNvPr id="250" name="Text 247"/>
+          <p:cNvSpPr/>
+          <p:nvPr/>
+        </p:nvSpPr>
+        <p:spPr>
+          <a:xfrm>
+            <a:off x="11658600" y="10803441"/>
+            <a:ext cx="365760" cy="172370"/>
           </a:xfrm>
           <a:prstGeom prst="rect">
             <a:avLst/>
@@ -8150,7 +8260,7 @@
               <a:buNone/>
             </a:pPr>
             <a:r>
-              <a:rPr lang="en-US" sz="900" dirty="0">
+              <a:rPr lang="en-US" sz="1100" dirty="0">
                 <a:solidFill>
                   <a:srgbClr val="321B40"/>
                 </a:solidFill>
@@ -8160,20 +8270,20 @@
               </a:rPr>
               <a:t>96,0</a:t>
             </a:r>
-            <a:endParaRPr lang="en-US" sz="900" dirty="0"/>
-          </a:p>
-        </p:txBody>
-      </p:sp>
-      <p:sp>
-        <p:nvSpPr>
-          <p:cNvPr id="248" name="Text 245"/>
-          <p:cNvSpPr/>
-          <p:nvPr/>
-        </p:nvSpPr>
-        <p:spPr>
-          <a:xfrm>
-            <a:off x="11585448" y="14282928"/>
-            <a:ext cx="822960" cy="438912"/>
+            <a:endParaRPr lang="en-US" sz="1100" dirty="0"/>
+          </a:p>
+        </p:txBody>
+      </p:sp>
+      <p:sp>
+        <p:nvSpPr>
+          <p:cNvPr id="251" name="Text 248"/>
+          <p:cNvSpPr/>
+          <p:nvPr/>
+        </p:nvSpPr>
+        <p:spPr>
+          <a:xfrm>
+            <a:off x="11585448" y="13462070"/>
+            <a:ext cx="822960" cy="413687"/>
           </a:xfrm>
           <a:prstGeom prst="rect">
             <a:avLst/>
@@ -8191,7 +8301,7 @@
               <a:buNone/>
             </a:pPr>
             <a:r>
-              <a:rPr lang="en-US" sz="900" dirty="0">
+              <a:rPr lang="en-US" sz="1100" dirty="0">
                 <a:solidFill>
                   <a:srgbClr val="321B40"/>
                 </a:solidFill>
@@ -8201,14 +8311,14 @@
               </a:rPr>
               <a:t>21</a:t>
             </a:r>
-            <a:endParaRPr lang="en-US" sz="900" dirty="0"/>
+            <a:endParaRPr lang="en-US" sz="1100" dirty="0"/>
           </a:p>
           <a:p>
             <a:pPr algn="ctr" indent="0" marL="0">
               <a:buNone/>
             </a:pPr>
             <a:r>
-              <a:rPr lang="en-US" sz="900" dirty="0">
+              <a:rPr lang="en-US" sz="1100" dirty="0">
                 <a:solidFill>
                   <a:srgbClr val="321B40"/>
                 </a:solidFill>
@@ -8218,20 +8328,20 @@
               </a:rPr>
               <a:t>iun 13:00</a:t>
             </a:r>
-            <a:endParaRPr lang="en-US" sz="900" dirty="0"/>
-          </a:p>
-        </p:txBody>
-      </p:sp>
-      <p:sp>
-        <p:nvSpPr>
-          <p:cNvPr id="249" name="Shape 246"/>
-          <p:cNvSpPr/>
-          <p:nvPr/>
-        </p:nvSpPr>
-        <p:spPr>
-          <a:xfrm>
-            <a:off x="12609576" y="11785738"/>
-            <a:ext cx="274320" cy="2414894"/>
+            <a:endParaRPr lang="en-US" sz="1100" dirty="0"/>
+          </a:p>
+        </p:txBody>
+      </p:sp>
+      <p:sp>
+        <p:nvSpPr>
+          <p:cNvPr id="252" name="Shape 249"/>
+          <p:cNvSpPr/>
+          <p:nvPr/>
+        </p:nvSpPr>
+        <p:spPr>
+          <a:xfrm>
+            <a:off x="12609576" y="11108397"/>
+            <a:ext cx="274320" cy="2276107"/>
           </a:xfrm>
           <a:prstGeom prst="rect">
             <a:avLst/>
@@ -8251,14 +8361,14 @@
       </p:sp>
       <p:sp>
         <p:nvSpPr>
-          <p:cNvPr id="250" name="Shape 247"/>
-          <p:cNvSpPr/>
-          <p:nvPr/>
-        </p:nvSpPr>
-        <p:spPr>
-          <a:xfrm>
-            <a:off x="12902184" y="12309799"/>
-            <a:ext cx="274320" cy="1890833"/>
+          <p:cNvPr id="253" name="Shape 250"/>
+          <p:cNvSpPr/>
+          <p:nvPr/>
+        </p:nvSpPr>
+        <p:spPr>
+          <a:xfrm>
+            <a:off x="12902184" y="11602339"/>
+            <a:ext cx="274320" cy="1782164"/>
           </a:xfrm>
           <a:prstGeom prst="rect">
             <a:avLst/>
@@ -8278,14 +8388,14 @@
       </p:sp>
       <p:sp>
         <p:nvSpPr>
-          <p:cNvPr id="251" name="Text 248"/>
-          <p:cNvSpPr/>
-          <p:nvPr/>
-        </p:nvSpPr>
-        <p:spPr>
-          <a:xfrm>
-            <a:off x="12573000" y="11575426"/>
-            <a:ext cx="365760" cy="182880"/>
+          <p:cNvPr id="254" name="Text 251"/>
+          <p:cNvSpPr/>
+          <p:nvPr/>
+        </p:nvSpPr>
+        <p:spPr>
+          <a:xfrm>
+            <a:off x="12573000" y="10910172"/>
+            <a:ext cx="365760" cy="172370"/>
           </a:xfrm>
           <a:prstGeom prst="rect">
             <a:avLst/>
@@ -8303,7 +8413,7 @@
               <a:buNone/>
             </a:pPr>
             <a:r>
-              <a:rPr lang="en-US" sz="900" dirty="0">
+              <a:rPr lang="en-US" sz="1100" dirty="0">
                 <a:solidFill>
                   <a:srgbClr val="321B40"/>
                 </a:solidFill>
@@ -8313,20 +8423,20 @@
               </a:rPr>
               <a:t>91,7</a:t>
             </a:r>
-            <a:endParaRPr lang="en-US" sz="900" dirty="0"/>
-          </a:p>
-        </p:txBody>
-      </p:sp>
-      <p:sp>
-        <p:nvSpPr>
-          <p:cNvPr id="252" name="Text 249"/>
-          <p:cNvSpPr/>
-          <p:nvPr/>
-        </p:nvSpPr>
-        <p:spPr>
-          <a:xfrm>
-            <a:off x="12499848" y="14282928"/>
-            <a:ext cx="822960" cy="438912"/>
+            <a:endParaRPr lang="en-US" sz="1100" dirty="0"/>
+          </a:p>
+        </p:txBody>
+      </p:sp>
+      <p:sp>
+        <p:nvSpPr>
+          <p:cNvPr id="255" name="Text 252"/>
+          <p:cNvSpPr/>
+          <p:nvPr/>
+        </p:nvSpPr>
+        <p:spPr>
+          <a:xfrm>
+            <a:off x="12499848" y="13462070"/>
+            <a:ext cx="822960" cy="413687"/>
           </a:xfrm>
           <a:prstGeom prst="rect">
             <a:avLst/>
@@ -8344,7 +8454,7 @@
               <a:buNone/>
             </a:pPr>
             <a:r>
-              <a:rPr lang="en-US" sz="900" dirty="0">
+              <a:rPr lang="en-US" sz="1100" dirty="0">
                 <a:solidFill>
                   <a:srgbClr val="321B40"/>
                 </a:solidFill>
@@ -8354,14 +8464,14 @@
               </a:rPr>
               <a:t>21</a:t>
             </a:r>
-            <a:endParaRPr lang="en-US" sz="900" dirty="0"/>
+            <a:endParaRPr lang="en-US" sz="1100" dirty="0"/>
           </a:p>
           <a:p>
             <a:pPr algn="ctr" indent="0" marL="0">
               <a:buNone/>
             </a:pPr>
             <a:r>
-              <a:rPr lang="en-US" sz="900" dirty="0">
+              <a:rPr lang="en-US" sz="1100" dirty="0">
                 <a:solidFill>
                   <a:srgbClr val="321B40"/>
                 </a:solidFill>
@@ -8371,20 +8481,20 @@
               </a:rPr>
               <a:t>iun 17:00</a:t>
             </a:r>
-            <a:endParaRPr lang="en-US" sz="900" dirty="0"/>
-          </a:p>
-        </p:txBody>
-      </p:sp>
-      <p:sp>
-        <p:nvSpPr>
-          <p:cNvPr id="253" name="Shape 250"/>
-          <p:cNvSpPr/>
-          <p:nvPr/>
-        </p:nvSpPr>
-        <p:spPr>
-          <a:xfrm>
-            <a:off x="7909560" y="11045952"/>
-            <a:ext cx="137160" cy="82296"/>
+            <a:endParaRPr lang="en-US" sz="1100" dirty="0"/>
+          </a:p>
+        </p:txBody>
+      </p:sp>
+      <p:sp>
+        <p:nvSpPr>
+          <p:cNvPr id="256" name="Shape 253"/>
+          <p:cNvSpPr/>
+          <p:nvPr/>
+        </p:nvSpPr>
+        <p:spPr>
+          <a:xfrm>
+            <a:off x="7909560" y="10411127"/>
+            <a:ext cx="137160" cy="77566"/>
           </a:xfrm>
           <a:prstGeom prst="rect">
             <a:avLst/>
@@ -8404,14 +8514,14 @@
       </p:sp>
       <p:sp>
         <p:nvSpPr>
-          <p:cNvPr id="254" name="Text 251"/>
-          <p:cNvSpPr/>
-          <p:nvPr/>
-        </p:nvSpPr>
-        <p:spPr>
-          <a:xfrm>
-            <a:off x="8138160" y="11009376"/>
-            <a:ext cx="2651760" cy="201168"/>
+          <p:cNvPr id="257" name="Text 254"/>
+          <p:cNvSpPr/>
+          <p:nvPr/>
+        </p:nvSpPr>
+        <p:spPr>
+          <a:xfrm>
+            <a:off x="8138160" y="10376653"/>
+            <a:ext cx="2651760" cy="189607"/>
           </a:xfrm>
           <a:prstGeom prst="rect">
             <a:avLst/>
@@ -8429,7 +8539,7 @@
               <a:buNone/>
             </a:pPr>
             <a:r>
-              <a:rPr lang="en-US" sz="1000" dirty="0">
+              <a:rPr lang="en-US" sz="1100" dirty="0">
                 <a:solidFill>
                   <a:srgbClr val="625A6A"/>
                 </a:solidFill>
@@ -8439,20 +8549,20 @@
               </a:rPr>
               <a:t>Toate clădirile (n = 38.913)</a:t>
             </a:r>
-            <a:endParaRPr lang="en-US" sz="1000" dirty="0"/>
-          </a:p>
-        </p:txBody>
-      </p:sp>
-      <p:sp>
-        <p:nvSpPr>
-          <p:cNvPr id="255" name="Shape 252"/>
-          <p:cNvSpPr/>
-          <p:nvPr/>
-        </p:nvSpPr>
-        <p:spPr>
-          <a:xfrm>
-            <a:off x="10789920" y="11045952"/>
-            <a:ext cx="137160" cy="82296"/>
+            <a:endParaRPr lang="en-US" sz="1100" dirty="0"/>
+          </a:p>
+        </p:txBody>
+      </p:sp>
+      <p:sp>
+        <p:nvSpPr>
+          <p:cNvPr id="258" name="Shape 255"/>
+          <p:cNvSpPr/>
+          <p:nvPr/>
+        </p:nvSpPr>
+        <p:spPr>
+          <a:xfrm>
+            <a:off x="10789920" y="10411127"/>
+            <a:ext cx="137160" cy="77566"/>
           </a:xfrm>
           <a:prstGeom prst="rect">
             <a:avLst/>
@@ -8472,14 +8582,14 @@
       </p:sp>
       <p:sp>
         <p:nvSpPr>
-          <p:cNvPr id="256" name="Text 253"/>
-          <p:cNvSpPr/>
-          <p:nvPr/>
-        </p:nvSpPr>
-        <p:spPr>
-          <a:xfrm>
-            <a:off x="11018520" y="11009376"/>
-            <a:ext cx="2560320" cy="201168"/>
+          <p:cNvPr id="259" name="Text 256"/>
+          <p:cNvSpPr/>
+          <p:nvPr/>
+        </p:nvSpPr>
+        <p:spPr>
+          <a:xfrm>
+            <a:off x="11018520" y="10376653"/>
+            <a:ext cx="2560320" cy="189607"/>
           </a:xfrm>
           <a:prstGeom prst="rect">
             <a:avLst/>
@@ -8497,7 +8607,7 @@
               <a:buNone/>
             </a:pPr>
             <a:r>
-              <a:rPr lang="en-US" sz="1000" dirty="0">
+              <a:rPr lang="en-US" sz="1100" dirty="0">
                 <a:solidFill>
                   <a:srgbClr val="321B40"/>
                 </a:solidFill>
@@ -8507,20 +8617,20 @@
               </a:rPr>
               <a:t>Înălțime ≥ 20 m (n = 805)</a:t>
             </a:r>
-            <a:endParaRPr lang="en-US" sz="1000" dirty="0"/>
-          </a:p>
-        </p:txBody>
-      </p:sp>
-      <p:sp>
-        <p:nvSpPr>
-          <p:cNvPr id="257" name="Text 254"/>
-          <p:cNvSpPr/>
-          <p:nvPr/>
-        </p:nvSpPr>
-        <p:spPr>
-          <a:xfrm>
-            <a:off x="7635240" y="14941296"/>
-            <a:ext cx="6126480" cy="320040"/>
+            <a:endParaRPr lang="en-US" sz="1100" dirty="0"/>
+          </a:p>
+        </p:txBody>
+      </p:sp>
+      <p:sp>
+        <p:nvSpPr>
+          <p:cNvPr id="260" name="Text 257"/>
+          <p:cNvSpPr/>
+          <p:nvPr/>
+        </p:nvSpPr>
+        <p:spPr>
+          <a:xfrm>
+            <a:off x="7635240" y="14082601"/>
+            <a:ext cx="6126480" cy="301647"/>
           </a:xfrm>
           <a:prstGeom prst="rect">
             <a:avLst/>
@@ -8554,14 +8664,14 @@
       </p:sp>
       <p:sp>
         <p:nvSpPr>
-          <p:cNvPr id="258" name="Text 255"/>
-          <p:cNvSpPr/>
-          <p:nvPr/>
-        </p:nvSpPr>
-        <p:spPr>
-          <a:xfrm>
-            <a:off x="7635240" y="15380208"/>
-            <a:ext cx="6126480" cy="566928"/>
+          <p:cNvPr id="261" name="Text 258"/>
+          <p:cNvSpPr/>
+          <p:nvPr/>
+        </p:nvSpPr>
+        <p:spPr>
+          <a:xfrm>
+            <a:off x="7635240" y="14496288"/>
+            <a:ext cx="6126480" cy="534346"/>
           </a:xfrm>
           <a:prstGeom prst="rect">
             <a:avLst/>
@@ -8595,14 +8705,14 @@
       </p:sp>
       <p:sp>
         <p:nvSpPr>
-          <p:cNvPr id="259" name="Shape 256"/>
-          <p:cNvSpPr/>
-          <p:nvPr/>
-        </p:nvSpPr>
-        <p:spPr>
-          <a:xfrm>
-            <a:off x="548640" y="16230600"/>
-            <a:ext cx="6492240" cy="310896"/>
+          <p:cNvPr id="262" name="Shape 259"/>
+          <p:cNvSpPr/>
+          <p:nvPr/>
+        </p:nvSpPr>
+        <p:spPr>
+          <a:xfrm>
+            <a:off x="548640" y="15297807"/>
+            <a:ext cx="6492240" cy="293028"/>
           </a:xfrm>
           <a:prstGeom prst="rect">
             <a:avLst/>
@@ -8622,14 +8732,14 @@
       </p:sp>
       <p:sp>
         <p:nvSpPr>
-          <p:cNvPr id="260" name="Text 257"/>
-          <p:cNvSpPr/>
-          <p:nvPr/>
-        </p:nvSpPr>
-        <p:spPr>
-          <a:xfrm>
-            <a:off x="658368" y="16262604"/>
-            <a:ext cx="6309360" cy="219456"/>
+          <p:cNvPr id="263" name="Text 260"/>
+          <p:cNvSpPr/>
+          <p:nvPr/>
+        </p:nvSpPr>
+        <p:spPr>
+          <a:xfrm>
+            <a:off x="658368" y="15327972"/>
+            <a:ext cx="6309360" cy="206844"/>
           </a:xfrm>
           <a:prstGeom prst="rect">
             <a:avLst/>
@@ -8663,14 +8773,14 @@
       </p:sp>
       <p:sp>
         <p:nvSpPr>
-          <p:cNvPr id="261" name="Shape 258"/>
-          <p:cNvSpPr/>
-          <p:nvPr/>
-        </p:nvSpPr>
-        <p:spPr>
-          <a:xfrm>
-            <a:off x="7498080" y="16230600"/>
-            <a:ext cx="6583680" cy="310896"/>
+          <p:cNvPr id="264" name="Shape 261"/>
+          <p:cNvSpPr/>
+          <p:nvPr/>
+        </p:nvSpPr>
+        <p:spPr>
+          <a:xfrm>
+            <a:off x="7498080" y="15297807"/>
+            <a:ext cx="6583680" cy="293028"/>
           </a:xfrm>
           <a:prstGeom prst="rect">
             <a:avLst/>
@@ -8690,14 +8800,14 @@
       </p:sp>
       <p:sp>
         <p:nvSpPr>
-          <p:cNvPr id="262" name="Text 259"/>
-          <p:cNvSpPr/>
-          <p:nvPr/>
-        </p:nvSpPr>
-        <p:spPr>
-          <a:xfrm>
-            <a:off x="7607808" y="16262604"/>
-            <a:ext cx="6400800" cy="219456"/>
+          <p:cNvPr id="265" name="Text 262"/>
+          <p:cNvSpPr/>
+          <p:nvPr/>
+        </p:nvSpPr>
+        <p:spPr>
+          <a:xfrm>
+            <a:off x="7607808" y="15327972"/>
+            <a:ext cx="6400800" cy="206844"/>
           </a:xfrm>
           <a:prstGeom prst="rect">
             <a:avLst/>
@@ -8723,7 +8833,7 @@
                 <a:ea typeface="Noto Sans" pitchFamily="34" charset="-122"/>
                 <a:cs typeface="Noto Sans" pitchFamily="34" charset="-120"/>
               </a:rPr>
-              <a:t>07  CERCETAREA SUSȚINE APLICAȚIA</a:t>
+              <a:t>07  DE LA DATE LA TRASEU</a:t>
             </a:r>
             <a:endParaRPr lang="en-US" sz="1300" dirty="0"/>
           </a:p>
@@ -8731,14 +8841,14 @@
       </p:sp>
       <p:sp>
         <p:nvSpPr>
-          <p:cNvPr id="263" name="Text 260"/>
-          <p:cNvSpPr/>
-          <p:nvPr/>
-        </p:nvSpPr>
-        <p:spPr>
-          <a:xfrm>
-            <a:off x="594360" y="16660368"/>
-            <a:ext cx="6400800" cy="292608"/>
+          <p:cNvPr id="266" name="Text 263"/>
+          <p:cNvSpPr/>
+          <p:nvPr/>
+        </p:nvSpPr>
+        <p:spPr>
+          <a:xfrm>
+            <a:off x="594360" y="15702876"/>
+            <a:ext cx="6400800" cy="275791"/>
           </a:xfrm>
           <a:prstGeom prst="rect">
             <a:avLst/>
@@ -8772,14 +8882,14 @@
       </p:sp>
       <p:sp>
         <p:nvSpPr>
-          <p:cNvPr id="264" name="Shape 261"/>
-          <p:cNvSpPr/>
-          <p:nvPr/>
-        </p:nvSpPr>
-        <p:spPr>
-          <a:xfrm>
-            <a:off x="685800" y="17135856"/>
-            <a:ext cx="1508760" cy="347472"/>
+          <p:cNvPr id="267" name="Shape 264"/>
+          <p:cNvSpPr/>
+          <p:nvPr/>
+        </p:nvSpPr>
+        <p:spPr>
+          <a:xfrm>
+            <a:off x="685800" y="16151037"/>
+            <a:ext cx="1508760" cy="327502"/>
           </a:xfrm>
           <a:prstGeom prst="rect">
             <a:avLst/>
@@ -8799,14 +8909,14 @@
       </p:sp>
       <p:sp>
         <p:nvSpPr>
-          <p:cNvPr id="265" name="Text 262"/>
-          <p:cNvSpPr/>
-          <p:nvPr/>
-        </p:nvSpPr>
-        <p:spPr>
-          <a:xfrm>
-            <a:off x="713232" y="17190720"/>
-            <a:ext cx="1453896" cy="228600"/>
+          <p:cNvPr id="268" name="Text 265"/>
+          <p:cNvSpPr/>
+          <p:nvPr/>
+        </p:nvSpPr>
+        <p:spPr>
+          <a:xfrm>
+            <a:off x="713232" y="16202748"/>
+            <a:ext cx="1453896" cy="215462"/>
           </a:xfrm>
           <a:prstGeom prst="rect">
             <a:avLst/>
@@ -8840,14 +8950,14 @@
       </p:sp>
       <p:sp>
         <p:nvSpPr>
-          <p:cNvPr id="266" name="Shape 263"/>
-          <p:cNvSpPr/>
-          <p:nvPr/>
-        </p:nvSpPr>
-        <p:spPr>
-          <a:xfrm>
-            <a:off x="2240280" y="17135856"/>
-            <a:ext cx="640080" cy="347472"/>
+          <p:cNvPr id="269" name="Shape 266"/>
+          <p:cNvSpPr/>
+          <p:nvPr/>
+        </p:nvSpPr>
+        <p:spPr>
+          <a:xfrm>
+            <a:off x="2240280" y="16151037"/>
+            <a:ext cx="640080" cy="327502"/>
           </a:xfrm>
           <a:prstGeom prst="rect">
             <a:avLst/>
@@ -8867,14 +8977,14 @@
       </p:sp>
       <p:sp>
         <p:nvSpPr>
-          <p:cNvPr id="267" name="Text 264"/>
-          <p:cNvSpPr/>
-          <p:nvPr/>
-        </p:nvSpPr>
-        <p:spPr>
-          <a:xfrm>
-            <a:off x="2267712" y="17190720"/>
-            <a:ext cx="585216" cy="228600"/>
+          <p:cNvPr id="270" name="Text 267"/>
+          <p:cNvSpPr/>
+          <p:nvPr/>
+        </p:nvSpPr>
+        <p:spPr>
+          <a:xfrm>
+            <a:off x="2267712" y="16202748"/>
+            <a:ext cx="585216" cy="215462"/>
           </a:xfrm>
           <a:prstGeom prst="rect">
             <a:avLst/>
@@ -8908,14 +9018,14 @@
       </p:sp>
       <p:sp>
         <p:nvSpPr>
-          <p:cNvPr id="268" name="Shape 265"/>
-          <p:cNvSpPr/>
-          <p:nvPr/>
-        </p:nvSpPr>
-        <p:spPr>
-          <a:xfrm>
-            <a:off x="2880360" y="17135856"/>
-            <a:ext cx="1234440" cy="347472"/>
+          <p:cNvPr id="271" name="Shape 268"/>
+          <p:cNvSpPr/>
+          <p:nvPr/>
+        </p:nvSpPr>
+        <p:spPr>
+          <a:xfrm>
+            <a:off x="2880360" y="16151037"/>
+            <a:ext cx="1234440" cy="327502"/>
           </a:xfrm>
           <a:prstGeom prst="rect">
             <a:avLst/>
@@ -8935,14 +9045,14 @@
       </p:sp>
       <p:sp>
         <p:nvSpPr>
-          <p:cNvPr id="269" name="Text 266"/>
-          <p:cNvSpPr/>
-          <p:nvPr/>
-        </p:nvSpPr>
-        <p:spPr>
-          <a:xfrm>
-            <a:off x="2907792" y="17190720"/>
-            <a:ext cx="1179576" cy="228600"/>
+          <p:cNvPr id="272" name="Text 269"/>
+          <p:cNvSpPr/>
+          <p:nvPr/>
+        </p:nvSpPr>
+        <p:spPr>
+          <a:xfrm>
+            <a:off x="2907792" y="16202748"/>
+            <a:ext cx="1179576" cy="215462"/>
           </a:xfrm>
           <a:prstGeom prst="rect">
             <a:avLst/>
@@ -8976,14 +9086,14 @@
       </p:sp>
       <p:sp>
         <p:nvSpPr>
-          <p:cNvPr id="270" name="Shape 267"/>
-          <p:cNvSpPr/>
-          <p:nvPr/>
-        </p:nvSpPr>
-        <p:spPr>
-          <a:xfrm>
-            <a:off x="4160520" y="17135856"/>
-            <a:ext cx="1097280" cy="347472"/>
+          <p:cNvPr id="273" name="Shape 270"/>
+          <p:cNvSpPr/>
+          <p:nvPr/>
+        </p:nvSpPr>
+        <p:spPr>
+          <a:xfrm>
+            <a:off x="4160520" y="16151037"/>
+            <a:ext cx="1097280" cy="327502"/>
           </a:xfrm>
           <a:prstGeom prst="rect">
             <a:avLst/>
@@ -9003,14 +9113,14 @@
       </p:sp>
       <p:sp>
         <p:nvSpPr>
-          <p:cNvPr id="271" name="Text 268"/>
-          <p:cNvSpPr/>
-          <p:nvPr/>
-        </p:nvSpPr>
-        <p:spPr>
-          <a:xfrm>
-            <a:off x="4187952" y="17190720"/>
-            <a:ext cx="1042416" cy="228600"/>
+          <p:cNvPr id="274" name="Text 271"/>
+          <p:cNvSpPr/>
+          <p:nvPr/>
+        </p:nvSpPr>
+        <p:spPr>
+          <a:xfrm>
+            <a:off x="4187952" y="16202748"/>
+            <a:ext cx="1042416" cy="215462"/>
           </a:xfrm>
           <a:prstGeom prst="rect">
             <a:avLst/>
@@ -9044,14 +9154,14 @@
       </p:sp>
       <p:sp>
         <p:nvSpPr>
-          <p:cNvPr id="272" name="Shape 269"/>
-          <p:cNvSpPr/>
-          <p:nvPr/>
-        </p:nvSpPr>
-        <p:spPr>
-          <a:xfrm>
-            <a:off x="5303520" y="17135856"/>
-            <a:ext cx="960120" cy="347472"/>
+          <p:cNvPr id="275" name="Shape 272"/>
+          <p:cNvSpPr/>
+          <p:nvPr/>
+        </p:nvSpPr>
+        <p:spPr>
+          <a:xfrm>
+            <a:off x="5303520" y="16151037"/>
+            <a:ext cx="960120" cy="327502"/>
           </a:xfrm>
           <a:prstGeom prst="rect">
             <a:avLst/>
@@ -9071,14 +9181,14 @@
       </p:sp>
       <p:sp>
         <p:nvSpPr>
-          <p:cNvPr id="273" name="Text 270"/>
-          <p:cNvSpPr/>
-          <p:nvPr/>
-        </p:nvSpPr>
-        <p:spPr>
-          <a:xfrm>
-            <a:off x="5330952" y="17190720"/>
-            <a:ext cx="905256" cy="228600"/>
+          <p:cNvPr id="276" name="Text 273"/>
+          <p:cNvSpPr/>
+          <p:nvPr/>
+        </p:nvSpPr>
+        <p:spPr>
+          <a:xfrm>
+            <a:off x="5330952" y="16202748"/>
+            <a:ext cx="905256" cy="215462"/>
           </a:xfrm>
           <a:prstGeom prst="rect">
             <a:avLst/>
@@ -9112,14 +9222,14 @@
       </p:sp>
       <p:sp>
         <p:nvSpPr>
-          <p:cNvPr id="274" name="Shape 271"/>
-          <p:cNvSpPr/>
-          <p:nvPr/>
-        </p:nvSpPr>
-        <p:spPr>
-          <a:xfrm>
-            <a:off x="685800" y="17501616"/>
-            <a:ext cx="1508760" cy="347472"/>
+          <p:cNvPr id="277" name="Shape 274"/>
+          <p:cNvSpPr/>
+          <p:nvPr/>
+        </p:nvSpPr>
+        <p:spPr>
+          <a:xfrm>
+            <a:off x="685800" y="16495776"/>
+            <a:ext cx="1508760" cy="327502"/>
           </a:xfrm>
           <a:prstGeom prst="rect">
             <a:avLst/>
@@ -9139,14 +9249,14 @@
       </p:sp>
       <p:sp>
         <p:nvSpPr>
-          <p:cNvPr id="275" name="Text 272"/>
-          <p:cNvSpPr/>
-          <p:nvPr/>
-        </p:nvSpPr>
-        <p:spPr>
-          <a:xfrm>
-            <a:off x="713232" y="17556480"/>
-            <a:ext cx="1453896" cy="228600"/>
+          <p:cNvPr id="278" name="Text 275"/>
+          <p:cNvSpPr/>
+          <p:nvPr/>
+        </p:nvSpPr>
+        <p:spPr>
+          <a:xfrm>
+            <a:off x="713232" y="16547487"/>
+            <a:ext cx="1453896" cy="215462"/>
           </a:xfrm>
           <a:prstGeom prst="rect">
             <a:avLst/>
@@ -9180,14 +9290,14 @@
       </p:sp>
       <p:sp>
         <p:nvSpPr>
-          <p:cNvPr id="276" name="Shape 273"/>
-          <p:cNvSpPr/>
-          <p:nvPr/>
-        </p:nvSpPr>
-        <p:spPr>
-          <a:xfrm>
-            <a:off x="2240280" y="17501616"/>
-            <a:ext cx="640080" cy="347472"/>
+          <p:cNvPr id="279" name="Shape 276"/>
+          <p:cNvSpPr/>
+          <p:nvPr/>
+        </p:nvSpPr>
+        <p:spPr>
+          <a:xfrm>
+            <a:off x="2240280" y="16495776"/>
+            <a:ext cx="640080" cy="327502"/>
           </a:xfrm>
           <a:prstGeom prst="rect">
             <a:avLst/>
@@ -9207,14 +9317,14 @@
       </p:sp>
       <p:sp>
         <p:nvSpPr>
-          <p:cNvPr id="277" name="Text 274"/>
-          <p:cNvSpPr/>
-          <p:nvPr/>
-        </p:nvSpPr>
-        <p:spPr>
-          <a:xfrm>
-            <a:off x="2267712" y="17556480"/>
-            <a:ext cx="585216" cy="228600"/>
+          <p:cNvPr id="280" name="Text 277"/>
+          <p:cNvSpPr/>
+          <p:nvPr/>
+        </p:nvSpPr>
+        <p:spPr>
+          <a:xfrm>
+            <a:off x="2267712" y="16547487"/>
+            <a:ext cx="585216" cy="215462"/>
           </a:xfrm>
           <a:prstGeom prst="rect">
             <a:avLst/>
@@ -9248,14 +9358,14 @@
       </p:sp>
       <p:sp>
         <p:nvSpPr>
-          <p:cNvPr id="278" name="Shape 275"/>
-          <p:cNvSpPr/>
-          <p:nvPr/>
-        </p:nvSpPr>
-        <p:spPr>
-          <a:xfrm>
-            <a:off x="2880360" y="17501616"/>
-            <a:ext cx="1234440" cy="347472"/>
+          <p:cNvPr id="281" name="Shape 278"/>
+          <p:cNvSpPr/>
+          <p:nvPr/>
+        </p:nvSpPr>
+        <p:spPr>
+          <a:xfrm>
+            <a:off x="2880360" y="16495776"/>
+            <a:ext cx="1234440" cy="327502"/>
           </a:xfrm>
           <a:prstGeom prst="rect">
             <a:avLst/>
@@ -9275,14 +9385,14 @@
       </p:sp>
       <p:sp>
         <p:nvSpPr>
-          <p:cNvPr id="279" name="Text 276"/>
-          <p:cNvSpPr/>
-          <p:nvPr/>
-        </p:nvSpPr>
-        <p:spPr>
-          <a:xfrm>
-            <a:off x="2907792" y="17556480"/>
-            <a:ext cx="1179576" cy="228600"/>
+          <p:cNvPr id="282" name="Text 279"/>
+          <p:cNvSpPr/>
+          <p:nvPr/>
+        </p:nvSpPr>
+        <p:spPr>
+          <a:xfrm>
+            <a:off x="2907792" y="16547487"/>
+            <a:ext cx="1179576" cy="215462"/>
           </a:xfrm>
           <a:prstGeom prst="rect">
             <a:avLst/>
@@ -9316,14 +9426,14 @@
       </p:sp>
       <p:sp>
         <p:nvSpPr>
-          <p:cNvPr id="280" name="Shape 277"/>
-          <p:cNvSpPr/>
-          <p:nvPr/>
-        </p:nvSpPr>
-        <p:spPr>
-          <a:xfrm>
-            <a:off x="4160520" y="17501616"/>
-            <a:ext cx="1097280" cy="347472"/>
+          <p:cNvPr id="283" name="Shape 280"/>
+          <p:cNvSpPr/>
+          <p:nvPr/>
+        </p:nvSpPr>
+        <p:spPr>
+          <a:xfrm>
+            <a:off x="4160520" y="16495776"/>
+            <a:ext cx="1097280" cy="327502"/>
           </a:xfrm>
           <a:prstGeom prst="rect">
             <a:avLst/>
@@ -9343,14 +9453,14 @@
       </p:sp>
       <p:sp>
         <p:nvSpPr>
-          <p:cNvPr id="281" name="Text 278"/>
-          <p:cNvSpPr/>
-          <p:nvPr/>
-        </p:nvSpPr>
-        <p:spPr>
-          <a:xfrm>
-            <a:off x="4187952" y="17556480"/>
-            <a:ext cx="1042416" cy="228600"/>
+          <p:cNvPr id="284" name="Text 281"/>
+          <p:cNvSpPr/>
+          <p:nvPr/>
+        </p:nvSpPr>
+        <p:spPr>
+          <a:xfrm>
+            <a:off x="4187952" y="16547487"/>
+            <a:ext cx="1042416" cy="215462"/>
           </a:xfrm>
           <a:prstGeom prst="rect">
             <a:avLst/>
@@ -9384,14 +9494,14 @@
       </p:sp>
       <p:sp>
         <p:nvSpPr>
-          <p:cNvPr id="282" name="Shape 279"/>
-          <p:cNvSpPr/>
-          <p:nvPr/>
-        </p:nvSpPr>
-        <p:spPr>
-          <a:xfrm>
-            <a:off x="5303520" y="17501616"/>
-            <a:ext cx="960120" cy="347472"/>
+          <p:cNvPr id="285" name="Shape 282"/>
+          <p:cNvSpPr/>
+          <p:nvPr/>
+        </p:nvSpPr>
+        <p:spPr>
+          <a:xfrm>
+            <a:off x="5303520" y="16495776"/>
+            <a:ext cx="960120" cy="327502"/>
           </a:xfrm>
           <a:prstGeom prst="rect">
             <a:avLst/>
@@ -9411,14 +9521,14 @@
       </p:sp>
       <p:sp>
         <p:nvSpPr>
-          <p:cNvPr id="283" name="Text 280"/>
-          <p:cNvSpPr/>
-          <p:nvPr/>
-        </p:nvSpPr>
-        <p:spPr>
-          <a:xfrm>
-            <a:off x="5330952" y="17556480"/>
-            <a:ext cx="905256" cy="228600"/>
+          <p:cNvPr id="286" name="Text 283"/>
+          <p:cNvSpPr/>
+          <p:nvPr/>
+        </p:nvSpPr>
+        <p:spPr>
+          <a:xfrm>
+            <a:off x="5330952" y="16547487"/>
+            <a:ext cx="905256" cy="215462"/>
           </a:xfrm>
           <a:prstGeom prst="rect">
             <a:avLst/>
@@ -9452,14 +9562,14 @@
       </p:sp>
       <p:sp>
         <p:nvSpPr>
-          <p:cNvPr id="284" name="Shape 281"/>
-          <p:cNvSpPr/>
-          <p:nvPr/>
-        </p:nvSpPr>
-        <p:spPr>
-          <a:xfrm>
-            <a:off x="685800" y="17867376"/>
-            <a:ext cx="1508760" cy="347472"/>
+          <p:cNvPr id="287" name="Shape 284"/>
+          <p:cNvSpPr/>
+          <p:nvPr/>
+        </p:nvSpPr>
+        <p:spPr>
+          <a:xfrm>
+            <a:off x="685800" y="16840515"/>
+            <a:ext cx="1508760" cy="327502"/>
           </a:xfrm>
           <a:prstGeom prst="rect">
             <a:avLst/>
@@ -9479,14 +9589,14 @@
       </p:sp>
       <p:sp>
         <p:nvSpPr>
-          <p:cNvPr id="285" name="Text 282"/>
-          <p:cNvSpPr/>
-          <p:nvPr/>
-        </p:nvSpPr>
-        <p:spPr>
-          <a:xfrm>
-            <a:off x="713232" y="17922240"/>
-            <a:ext cx="1453896" cy="228600"/>
+          <p:cNvPr id="288" name="Text 285"/>
+          <p:cNvSpPr/>
+          <p:nvPr/>
+        </p:nvSpPr>
+        <p:spPr>
+          <a:xfrm>
+            <a:off x="713232" y="16892226"/>
+            <a:ext cx="1453896" cy="215462"/>
           </a:xfrm>
           <a:prstGeom prst="rect">
             <a:avLst/>
@@ -9520,14 +9630,14 @@
       </p:sp>
       <p:sp>
         <p:nvSpPr>
-          <p:cNvPr id="286" name="Shape 283"/>
-          <p:cNvSpPr/>
-          <p:nvPr/>
-        </p:nvSpPr>
-        <p:spPr>
-          <a:xfrm>
-            <a:off x="2240280" y="17867376"/>
-            <a:ext cx="640080" cy="347472"/>
+          <p:cNvPr id="289" name="Shape 286"/>
+          <p:cNvSpPr/>
+          <p:nvPr/>
+        </p:nvSpPr>
+        <p:spPr>
+          <a:xfrm>
+            <a:off x="2240280" y="16840515"/>
+            <a:ext cx="640080" cy="327502"/>
           </a:xfrm>
           <a:prstGeom prst="rect">
             <a:avLst/>
@@ -9547,14 +9657,14 @@
       </p:sp>
       <p:sp>
         <p:nvSpPr>
-          <p:cNvPr id="287" name="Text 284"/>
-          <p:cNvSpPr/>
-          <p:nvPr/>
-        </p:nvSpPr>
-        <p:spPr>
-          <a:xfrm>
-            <a:off x="2267712" y="17922240"/>
-            <a:ext cx="585216" cy="228600"/>
+          <p:cNvPr id="290" name="Text 287"/>
+          <p:cNvSpPr/>
+          <p:nvPr/>
+        </p:nvSpPr>
+        <p:spPr>
+          <a:xfrm>
+            <a:off x="2267712" y="16892226"/>
+            <a:ext cx="585216" cy="215462"/>
           </a:xfrm>
           <a:prstGeom prst="rect">
             <a:avLst/>
@@ -9588,14 +9698,14 @@
       </p:sp>
       <p:sp>
         <p:nvSpPr>
-          <p:cNvPr id="288" name="Shape 285"/>
-          <p:cNvSpPr/>
-          <p:nvPr/>
-        </p:nvSpPr>
-        <p:spPr>
-          <a:xfrm>
-            <a:off x="2880360" y="17867376"/>
-            <a:ext cx="1234440" cy="347472"/>
+          <p:cNvPr id="291" name="Shape 288"/>
+          <p:cNvSpPr/>
+          <p:nvPr/>
+        </p:nvSpPr>
+        <p:spPr>
+          <a:xfrm>
+            <a:off x="2880360" y="16840515"/>
+            <a:ext cx="1234440" cy="327502"/>
           </a:xfrm>
           <a:prstGeom prst="rect">
             <a:avLst/>
@@ -9615,14 +9725,14 @@
       </p:sp>
       <p:sp>
         <p:nvSpPr>
-          <p:cNvPr id="289" name="Text 286"/>
-          <p:cNvSpPr/>
-          <p:nvPr/>
-        </p:nvSpPr>
-        <p:spPr>
-          <a:xfrm>
-            <a:off x="2907792" y="17922240"/>
-            <a:ext cx="1179576" cy="228600"/>
+          <p:cNvPr id="292" name="Text 289"/>
+          <p:cNvSpPr/>
+          <p:nvPr/>
+        </p:nvSpPr>
+        <p:spPr>
+          <a:xfrm>
+            <a:off x="2907792" y="16892226"/>
+            <a:ext cx="1179576" cy="215462"/>
           </a:xfrm>
           <a:prstGeom prst="rect">
             <a:avLst/>
@@ -9656,14 +9766,14 @@
       </p:sp>
       <p:sp>
         <p:nvSpPr>
-          <p:cNvPr id="290" name="Shape 287"/>
-          <p:cNvSpPr/>
-          <p:nvPr/>
-        </p:nvSpPr>
-        <p:spPr>
-          <a:xfrm>
-            <a:off x="4160520" y="17867376"/>
-            <a:ext cx="1097280" cy="347472"/>
+          <p:cNvPr id="293" name="Shape 290"/>
+          <p:cNvSpPr/>
+          <p:nvPr/>
+        </p:nvSpPr>
+        <p:spPr>
+          <a:xfrm>
+            <a:off x="4160520" y="16840515"/>
+            <a:ext cx="1097280" cy="327502"/>
           </a:xfrm>
           <a:prstGeom prst="rect">
             <a:avLst/>
@@ -9683,14 +9793,14 @@
       </p:sp>
       <p:sp>
         <p:nvSpPr>
-          <p:cNvPr id="291" name="Text 288"/>
-          <p:cNvSpPr/>
-          <p:nvPr/>
-        </p:nvSpPr>
-        <p:spPr>
-          <a:xfrm>
-            <a:off x="4187952" y="17922240"/>
-            <a:ext cx="1042416" cy="228600"/>
+          <p:cNvPr id="294" name="Text 291"/>
+          <p:cNvSpPr/>
+          <p:nvPr/>
+        </p:nvSpPr>
+        <p:spPr>
+          <a:xfrm>
+            <a:off x="4187952" y="16892226"/>
+            <a:ext cx="1042416" cy="215462"/>
           </a:xfrm>
           <a:prstGeom prst="rect">
             <a:avLst/>
@@ -9724,14 +9834,14 @@
       </p:sp>
       <p:sp>
         <p:nvSpPr>
-          <p:cNvPr id="292" name="Shape 289"/>
-          <p:cNvSpPr/>
-          <p:nvPr/>
-        </p:nvSpPr>
-        <p:spPr>
-          <a:xfrm>
-            <a:off x="5303520" y="17867376"/>
-            <a:ext cx="960120" cy="347472"/>
+          <p:cNvPr id="295" name="Shape 292"/>
+          <p:cNvSpPr/>
+          <p:nvPr/>
+        </p:nvSpPr>
+        <p:spPr>
+          <a:xfrm>
+            <a:off x="5303520" y="16840515"/>
+            <a:ext cx="960120" cy="327502"/>
           </a:xfrm>
           <a:prstGeom prst="rect">
             <a:avLst/>
@@ -9751,14 +9861,14 @@
       </p:sp>
       <p:sp>
         <p:nvSpPr>
-          <p:cNvPr id="293" name="Text 290"/>
-          <p:cNvSpPr/>
-          <p:nvPr/>
-        </p:nvSpPr>
-        <p:spPr>
-          <a:xfrm>
-            <a:off x="5330952" y="17922240"/>
-            <a:ext cx="905256" cy="228600"/>
+          <p:cNvPr id="296" name="Text 293"/>
+          <p:cNvSpPr/>
+          <p:nvPr/>
+        </p:nvSpPr>
+        <p:spPr>
+          <a:xfrm>
+            <a:off x="5330952" y="16892226"/>
+            <a:ext cx="905256" cy="215462"/>
           </a:xfrm>
           <a:prstGeom prst="rect">
             <a:avLst/>
@@ -9792,14 +9902,14 @@
       </p:sp>
       <p:sp>
         <p:nvSpPr>
-          <p:cNvPr id="294" name="Shape 291"/>
-          <p:cNvSpPr/>
-          <p:nvPr/>
-        </p:nvSpPr>
-        <p:spPr>
-          <a:xfrm>
-            <a:off x="685800" y="18233136"/>
-            <a:ext cx="1508760" cy="347472"/>
+          <p:cNvPr id="297" name="Shape 294"/>
+          <p:cNvSpPr/>
+          <p:nvPr/>
+        </p:nvSpPr>
+        <p:spPr>
+          <a:xfrm>
+            <a:off x="685800" y="17185255"/>
+            <a:ext cx="1508760" cy="327502"/>
           </a:xfrm>
           <a:prstGeom prst="rect">
             <a:avLst/>
@@ -9819,14 +9929,14 @@
       </p:sp>
       <p:sp>
         <p:nvSpPr>
-          <p:cNvPr id="295" name="Text 292"/>
-          <p:cNvSpPr/>
-          <p:nvPr/>
-        </p:nvSpPr>
-        <p:spPr>
-          <a:xfrm>
-            <a:off x="713232" y="18288000"/>
-            <a:ext cx="1453896" cy="228600"/>
+          <p:cNvPr id="298" name="Text 295"/>
+          <p:cNvSpPr/>
+          <p:nvPr/>
+        </p:nvSpPr>
+        <p:spPr>
+          <a:xfrm>
+            <a:off x="713232" y="17236966"/>
+            <a:ext cx="1453896" cy="215462"/>
           </a:xfrm>
           <a:prstGeom prst="rect">
             <a:avLst/>
@@ -9860,14 +9970,14 @@
       </p:sp>
       <p:sp>
         <p:nvSpPr>
-          <p:cNvPr id="296" name="Shape 293"/>
-          <p:cNvSpPr/>
-          <p:nvPr/>
-        </p:nvSpPr>
-        <p:spPr>
-          <a:xfrm>
-            <a:off x="2240280" y="18233136"/>
-            <a:ext cx="640080" cy="347472"/>
+          <p:cNvPr id="299" name="Shape 296"/>
+          <p:cNvSpPr/>
+          <p:nvPr/>
+        </p:nvSpPr>
+        <p:spPr>
+          <a:xfrm>
+            <a:off x="2240280" y="17185255"/>
+            <a:ext cx="640080" cy="327502"/>
           </a:xfrm>
           <a:prstGeom prst="rect">
             <a:avLst/>
@@ -9887,14 +9997,14 @@
       </p:sp>
       <p:sp>
         <p:nvSpPr>
-          <p:cNvPr id="297" name="Text 294"/>
-          <p:cNvSpPr/>
-          <p:nvPr/>
-        </p:nvSpPr>
-        <p:spPr>
-          <a:xfrm>
-            <a:off x="2267712" y="18288000"/>
-            <a:ext cx="585216" cy="228600"/>
+          <p:cNvPr id="300" name="Text 297"/>
+          <p:cNvSpPr/>
+          <p:nvPr/>
+        </p:nvSpPr>
+        <p:spPr>
+          <a:xfrm>
+            <a:off x="2267712" y="17236966"/>
+            <a:ext cx="585216" cy="215462"/>
           </a:xfrm>
           <a:prstGeom prst="rect">
             <a:avLst/>
@@ -9928,14 +10038,14 @@
       </p:sp>
       <p:sp>
         <p:nvSpPr>
-          <p:cNvPr id="298" name="Shape 295"/>
-          <p:cNvSpPr/>
-          <p:nvPr/>
-        </p:nvSpPr>
-        <p:spPr>
-          <a:xfrm>
-            <a:off x="2880360" y="18233136"/>
-            <a:ext cx="1234440" cy="347472"/>
+          <p:cNvPr id="301" name="Shape 298"/>
+          <p:cNvSpPr/>
+          <p:nvPr/>
+        </p:nvSpPr>
+        <p:spPr>
+          <a:xfrm>
+            <a:off x="2880360" y="17185255"/>
+            <a:ext cx="1234440" cy="327502"/>
           </a:xfrm>
           <a:prstGeom prst="rect">
             <a:avLst/>
@@ -9955,14 +10065,14 @@
       </p:sp>
       <p:sp>
         <p:nvSpPr>
-          <p:cNvPr id="299" name="Text 296"/>
-          <p:cNvSpPr/>
-          <p:nvPr/>
-        </p:nvSpPr>
-        <p:spPr>
-          <a:xfrm>
-            <a:off x="2907792" y="18288000"/>
-            <a:ext cx="1179576" cy="228600"/>
+          <p:cNvPr id="302" name="Text 299"/>
+          <p:cNvSpPr/>
+          <p:nvPr/>
+        </p:nvSpPr>
+        <p:spPr>
+          <a:xfrm>
+            <a:off x="2907792" y="17236966"/>
+            <a:ext cx="1179576" cy="215462"/>
           </a:xfrm>
           <a:prstGeom prst="rect">
             <a:avLst/>
@@ -9996,14 +10106,14 @@
       </p:sp>
       <p:sp>
         <p:nvSpPr>
-          <p:cNvPr id="300" name="Shape 297"/>
-          <p:cNvSpPr/>
-          <p:nvPr/>
-        </p:nvSpPr>
-        <p:spPr>
-          <a:xfrm>
-            <a:off x="4160520" y="18233136"/>
-            <a:ext cx="1097280" cy="347472"/>
+          <p:cNvPr id="303" name="Shape 300"/>
+          <p:cNvSpPr/>
+          <p:nvPr/>
+        </p:nvSpPr>
+        <p:spPr>
+          <a:xfrm>
+            <a:off x="4160520" y="17185255"/>
+            <a:ext cx="1097280" cy="327502"/>
           </a:xfrm>
           <a:prstGeom prst="rect">
             <a:avLst/>
@@ -10023,14 +10133,14 @@
       </p:sp>
       <p:sp>
         <p:nvSpPr>
-          <p:cNvPr id="301" name="Text 298"/>
-          <p:cNvSpPr/>
-          <p:nvPr/>
-        </p:nvSpPr>
-        <p:spPr>
-          <a:xfrm>
-            <a:off x="4187952" y="18288000"/>
-            <a:ext cx="1042416" cy="228600"/>
+          <p:cNvPr id="304" name="Text 301"/>
+          <p:cNvSpPr/>
+          <p:nvPr/>
+        </p:nvSpPr>
+        <p:spPr>
+          <a:xfrm>
+            <a:off x="4187952" y="17236966"/>
+            <a:ext cx="1042416" cy="215462"/>
           </a:xfrm>
           <a:prstGeom prst="rect">
             <a:avLst/>
@@ -10064,14 +10174,14 @@
       </p:sp>
       <p:sp>
         <p:nvSpPr>
-          <p:cNvPr id="302" name="Shape 299"/>
-          <p:cNvSpPr/>
-          <p:nvPr/>
-        </p:nvSpPr>
-        <p:spPr>
-          <a:xfrm>
-            <a:off x="5303520" y="18233136"/>
-            <a:ext cx="960120" cy="347472"/>
+          <p:cNvPr id="305" name="Shape 302"/>
+          <p:cNvSpPr/>
+          <p:nvPr/>
+        </p:nvSpPr>
+        <p:spPr>
+          <a:xfrm>
+            <a:off x="5303520" y="17185255"/>
+            <a:ext cx="960120" cy="327502"/>
           </a:xfrm>
           <a:prstGeom prst="rect">
             <a:avLst/>
@@ -10091,14 +10201,14 @@
       </p:sp>
       <p:sp>
         <p:nvSpPr>
-          <p:cNvPr id="303" name="Text 300"/>
-          <p:cNvSpPr/>
-          <p:nvPr/>
-        </p:nvSpPr>
-        <p:spPr>
-          <a:xfrm>
-            <a:off x="5330952" y="18288000"/>
-            <a:ext cx="905256" cy="228600"/>
+          <p:cNvPr id="306" name="Text 303"/>
+          <p:cNvSpPr/>
+          <p:nvPr/>
+        </p:nvSpPr>
+        <p:spPr>
+          <a:xfrm>
+            <a:off x="5330952" y="17236966"/>
+            <a:ext cx="905256" cy="215462"/>
           </a:xfrm>
           <a:prstGeom prst="rect">
             <a:avLst/>
@@ -10132,14 +10242,14 @@
       </p:sp>
       <p:sp>
         <p:nvSpPr>
-          <p:cNvPr id="304" name="Text 301"/>
-          <p:cNvSpPr/>
-          <p:nvPr/>
-        </p:nvSpPr>
-        <p:spPr>
-          <a:xfrm>
-            <a:off x="713232" y="18790920"/>
-            <a:ext cx="6080760" cy="502920"/>
+          <p:cNvPr id="307" name="Text 304"/>
+          <p:cNvSpPr/>
+          <p:nvPr/>
+        </p:nvSpPr>
+        <p:spPr>
+          <a:xfrm>
+            <a:off x="713232" y="17710982"/>
+            <a:ext cx="6080760" cy="474017"/>
           </a:xfrm>
           <a:prstGeom prst="rect">
             <a:avLst/>
@@ -10173,14 +10283,14 @@
       </p:sp>
       <p:sp>
         <p:nvSpPr>
-          <p:cNvPr id="305" name="Text 302"/>
-          <p:cNvSpPr/>
-          <p:nvPr/>
-        </p:nvSpPr>
-        <p:spPr>
-          <a:xfrm>
-            <a:off x="713232" y="19366992"/>
-            <a:ext cx="6080760" cy="502920"/>
+          <p:cNvPr id="308" name="Text 305"/>
+          <p:cNvSpPr/>
+          <p:nvPr/>
+        </p:nvSpPr>
+        <p:spPr>
+          <a:xfrm>
+            <a:off x="713232" y="18253946"/>
+            <a:ext cx="6080760" cy="474017"/>
           </a:xfrm>
           <a:prstGeom prst="rect">
             <a:avLst/>
@@ -10214,14 +10324,14 @@
       </p:sp>
       <p:sp>
         <p:nvSpPr>
-          <p:cNvPr id="306" name="Text 303"/>
-          <p:cNvSpPr/>
-          <p:nvPr/>
-        </p:nvSpPr>
-        <p:spPr>
-          <a:xfrm>
-            <a:off x="7635240" y="16678656"/>
-            <a:ext cx="6126480" cy="274320"/>
+          <p:cNvPr id="309" name="Text 306"/>
+          <p:cNvSpPr/>
+          <p:nvPr/>
+        </p:nvSpPr>
+        <p:spPr>
+          <a:xfrm>
+            <a:off x="7635240" y="15702876"/>
+            <a:ext cx="6309360" cy="275791"/>
           </a:xfrm>
           <a:prstGeom prst="rect">
             <a:avLst/>
@@ -10239,7 +10349,7 @@
               <a:buNone/>
             </a:pPr>
             <a:r>
-              <a:rPr lang="en-US" sz="1300" b="1" dirty="0">
+              <a:rPr lang="en-US" sz="1400" b="1" dirty="0">
                 <a:solidFill>
                   <a:srgbClr val="321B40"/>
                 </a:solidFill>
@@ -10247,22 +10357,22 @@
                 <a:ea typeface="Noto Sans" pitchFamily="34" charset="-122"/>
                 <a:cs typeface="Noto Sans" pitchFamily="34" charset="-120"/>
               </a:rPr>
-              <a:t>Întrebarea științifică</a:t>
-            </a:r>
-            <a:endParaRPr lang="en-US" sz="1300" dirty="0"/>
-          </a:p>
-        </p:txBody>
-      </p:sp>
-      <p:sp>
-        <p:nvSpPr>
-          <p:cNvPr id="307" name="Text 304"/>
-          <p:cNvSpPr/>
-          <p:nvPr/>
-        </p:nvSpPr>
-        <p:spPr>
-          <a:xfrm>
-            <a:off x="7635240" y="17044416"/>
-            <a:ext cx="6126480" cy="640080"/>
+              <a:t>1. Mai multe înălțimi disponibile</a:t>
+            </a:r>
+            <a:endParaRPr lang="en-US" sz="1400" dirty="0"/>
+          </a:p>
+        </p:txBody>
+      </p:sp>
+      <p:sp>
+        <p:nvSpPr>
+          <p:cNvPr id="310" name="Text 307"/>
+          <p:cNvSpPr/>
+          <p:nvPr/>
+        </p:nvSpPr>
+        <p:spPr>
+          <a:xfrm>
+            <a:off x="7635240" y="16013141"/>
+            <a:ext cx="6309360" cy="482635"/>
           </a:xfrm>
           <a:prstGeom prst="rect">
             <a:avLst/>
@@ -10280,6 +10390,47 @@
               <a:buNone/>
             </a:pPr>
             <a:r>
+              <a:rPr lang="en-US" sz="1200" dirty="0">
+                <a:solidFill>
+                  <a:srgbClr val="321B40"/>
+                </a:solidFill>
+                <a:latin typeface="Noto Sans" pitchFamily="34" charset="0"/>
+                <a:ea typeface="Noto Sans" pitchFamily="34" charset="-122"/>
+                <a:cs typeface="Noto Sans" pitchFamily="34" charset="-120"/>
+              </a:rPr>
+              <a:t>Date OSM în 41 orașe; Copernicus 2012 completează înălțimi lipsă unde are acoperire. Măsurătorile confirmate au prioritate.</a:t>
+            </a:r>
+            <a:endParaRPr lang="en-US" sz="1200" dirty="0"/>
+          </a:p>
+        </p:txBody>
+      </p:sp>
+      <p:sp>
+        <p:nvSpPr>
+          <p:cNvPr id="311" name="Text 308"/>
+          <p:cNvSpPr/>
+          <p:nvPr/>
+        </p:nvSpPr>
+        <p:spPr>
+          <a:xfrm>
+            <a:off x="7635240" y="16547487"/>
+            <a:ext cx="6309360" cy="275791"/>
+          </a:xfrm>
+          <a:prstGeom prst="rect">
+            <a:avLst/>
+          </a:prstGeom>
+          <a:noFill/>
+          <a:ln/>
+        </p:spPr>
+        <p:txBody>
+          <a:bodyPr wrap="square" lIns="0" tIns="0" rIns="0" bIns="0" rtlCol="0" anchor="ctr">
+            <a:normAutofit/>
+          </a:bodyPr>
+          <a:lstStyle/>
+          <a:p>
+            <a:pPr algn="l" indent="0" marL="0">
+              <a:buNone/>
+            </a:pPr>
+            <a:r>
               <a:rPr lang="en-US" sz="1400" b="1" dirty="0">
                 <a:solidFill>
                   <a:srgbClr val="321B40"/>
@@ -10288,7 +10439,7 @@
                 <a:ea typeface="Noto Sans" pitchFamily="34" charset="-122"/>
                 <a:cs typeface="Noto Sans" pitchFamily="34" charset="-120"/>
               </a:rPr>
-              <a:t>Cât de precis putem estima înălțimea unei clădiri din umbră și cum alegem momentul măsurării?</a:t>
+              <a:t>2. Recomandare adaptată vremii</a:t>
             </a:r>
             <a:endParaRPr lang="en-US" sz="1400" dirty="0"/>
           </a:p>
@@ -10296,14 +10447,14 @@
       </p:sp>
       <p:sp>
         <p:nvSpPr>
-          <p:cNvPr id="308" name="Text 305"/>
-          <p:cNvSpPr/>
-          <p:nvPr/>
-        </p:nvSpPr>
-        <p:spPr>
-          <a:xfrm>
-            <a:off x="7635240" y="17876520"/>
-            <a:ext cx="6126480" cy="292608"/>
+          <p:cNvPr id="312" name="Text 309"/>
+          <p:cNvSpPr/>
+          <p:nvPr/>
+        </p:nvSpPr>
+        <p:spPr>
+          <a:xfrm>
+            <a:off x="7635240" y="16857752"/>
+            <a:ext cx="6309360" cy="482635"/>
           </a:xfrm>
           <a:prstGeom prst="rect">
             <a:avLst/>
@@ -10321,7 +10472,130 @@
               <a:buNone/>
             </a:pPr>
             <a:r>
-              <a:rPr lang="en-US" sz="1300" b="1" dirty="0">
+              <a:rPr lang="en-US" sz="1200" dirty="0">
+                <a:solidFill>
+                  <a:srgbClr val="321B40"/>
+                </a:solidFill>
+                <a:latin typeface="Noto Sans" pitchFamily="34" charset="0"/>
+                <a:ea typeface="Noto Sans" pitchFamily="34" charset="-122"/>
+                <a:cs typeface="Noto Sans" pitchFamily="34" charset="-120"/>
+              </a:rPr>
+              <a:t>Prognoza Open-Meteo ajustează alegerea între alternative, în funcție de radiația directă și durata mersului.</a:t>
+            </a:r>
+            <a:endParaRPr lang="en-US" sz="1200" dirty="0"/>
+          </a:p>
+        </p:txBody>
+      </p:sp>
+      <p:sp>
+        <p:nvSpPr>
+          <p:cNvPr id="313" name="Text 310"/>
+          <p:cNvSpPr/>
+          <p:nvPr/>
+        </p:nvSpPr>
+        <p:spPr>
+          <a:xfrm>
+            <a:off x="7635240" y="17392098"/>
+            <a:ext cx="6309360" cy="275791"/>
+          </a:xfrm>
+          <a:prstGeom prst="rect">
+            <a:avLst/>
+          </a:prstGeom>
+          <a:noFill/>
+          <a:ln/>
+        </p:spPr>
+        <p:txBody>
+          <a:bodyPr wrap="square" lIns="0" tIns="0" rIns="0" bIns="0" rtlCol="0" anchor="ctr">
+            <a:normAutofit/>
+          </a:bodyPr>
+          <a:lstStyle/>
+          <a:p>
+            <a:pPr algn="l" indent="0" marL="0">
+              <a:buNone/>
+            </a:pPr>
+            <a:r>
+              <a:rPr lang="en-US" sz="1400" b="1" dirty="0">
+                <a:solidFill>
+                  <a:srgbClr val="321B40"/>
+                </a:solidFill>
+                <a:latin typeface="Noto Sans" pitchFamily="34" charset="0"/>
+                <a:ea typeface="Noto Sans" pitchFamily="34" charset="-122"/>
+                <a:cs typeface="Noto Sans" pitchFamily="34" charset="-120"/>
+              </a:rPr>
+              <a:t>3. Măsurare → hartă → traseu</a:t>
+            </a:r>
+            <a:endParaRPr lang="en-US" sz="1400" dirty="0"/>
+          </a:p>
+        </p:txBody>
+      </p:sp>
+      <p:sp>
+        <p:nvSpPr>
+          <p:cNvPr id="314" name="Text 311"/>
+          <p:cNvSpPr/>
+          <p:nvPr/>
+        </p:nvSpPr>
+        <p:spPr>
+          <a:xfrm>
+            <a:off x="7635240" y="17702364"/>
+            <a:ext cx="6309360" cy="482635"/>
+          </a:xfrm>
+          <a:prstGeom prst="rect">
+            <a:avLst/>
+          </a:prstGeom>
+          <a:noFill/>
+          <a:ln/>
+        </p:spPr>
+        <p:txBody>
+          <a:bodyPr wrap="square" lIns="0" tIns="0" rIns="0" bIns="0" rtlCol="0" anchor="ctr">
+            <a:normAutofit/>
+          </a:bodyPr>
+          <a:lstStyle/>
+          <a:p>
+            <a:pPr algn="l" indent="0" marL="0">
+              <a:buNone/>
+            </a:pPr>
+            <a:r>
+              <a:rPr lang="en-US" sz="1200" dirty="0">
+                <a:solidFill>
+                  <a:srgbClr val="321B40"/>
+                </a:solidFill>
+                <a:latin typeface="Noto Sans" pitchFamily="34" charset="0"/>
+                <a:ea typeface="Noto Sans" pitchFamily="34" charset="-122"/>
+                <a:cs typeface="Noto Sans" pitchFamily="34" charset="-120"/>
+              </a:rPr>
+              <a:t>Telefonul salvează măsurători; baza comună este opțională. Serverul recalculează înălțimile și actualizează umbrele.</a:t>
+            </a:r>
+            <a:endParaRPr lang="en-US" sz="1200" dirty="0"/>
+          </a:p>
+        </p:txBody>
+      </p:sp>
+      <p:sp>
+        <p:nvSpPr>
+          <p:cNvPr id="315" name="Text 312"/>
+          <p:cNvSpPr/>
+          <p:nvPr/>
+        </p:nvSpPr>
+        <p:spPr>
+          <a:xfrm>
+            <a:off x="7635240" y="18253946"/>
+            <a:ext cx="6309360" cy="474017"/>
+          </a:xfrm>
+          <a:prstGeom prst="rect">
+            <a:avLst/>
+          </a:prstGeom>
+          <a:noFill/>
+          <a:ln/>
+        </p:spPr>
+        <p:txBody>
+          <a:bodyPr wrap="square" lIns="0" tIns="0" rIns="0" bIns="0" rtlCol="0" anchor="ctr">
+            <a:normAutofit/>
+          </a:bodyPr>
+          <a:lstStyle/>
+          <a:p>
+            <a:pPr algn="l" indent="0" marL="0">
+              <a:buNone/>
+            </a:pPr>
+            <a:r>
+              <a:rPr lang="en-US" sz="1200" b="1" dirty="0">
                 <a:solidFill>
                   <a:srgbClr val="B84419"/>
                 </a:solidFill>
@@ -10329,48 +10603,7 @@
                 <a:ea typeface="Noto Sans" pitchFamily="34" charset="-122"/>
                 <a:cs typeface="Noto Sans" pitchFamily="34" charset="-120"/>
               </a:rPr>
-              <a:t>De la măsurare la recomandare</a:t>
-            </a:r>
-            <a:endParaRPr lang="en-US" sz="1300" dirty="0"/>
-          </a:p>
-        </p:txBody>
-      </p:sp>
-      <p:sp>
-        <p:nvSpPr>
-          <p:cNvPr id="309" name="Text 306"/>
-          <p:cNvSpPr/>
-          <p:nvPr/>
-        </p:nvSpPr>
-        <p:spPr>
-          <a:xfrm>
-            <a:off x="7635240" y="18269712"/>
-            <a:ext cx="6126480" cy="713232"/>
-          </a:xfrm>
-          <a:prstGeom prst="rect">
-            <a:avLst/>
-          </a:prstGeom>
-          <a:noFill/>
-          <a:ln/>
-        </p:spPr>
-        <p:txBody>
-          <a:bodyPr wrap="square" lIns="0" tIns="0" rIns="0" bIns="0" rtlCol="0" anchor="ctr">
-            <a:normAutofit/>
-          </a:bodyPr>
-          <a:lstStyle/>
-          <a:p>
-            <a:pPr algn="l" indent="0" marL="0">
-              <a:buNone/>
-            </a:pPr>
-            <a:r>
-              <a:rPr lang="en-US" sz="1200" dirty="0">
-                <a:solidFill>
-                  <a:srgbClr val="321B40"/>
-                </a:solidFill>
-                <a:latin typeface="Noto Sans" pitchFamily="34" charset="0"/>
-                <a:ea typeface="Noto Sans" pitchFamily="34" charset="-122"/>
-                <a:cs typeface="Noto Sans" pitchFamily="34" charset="-120"/>
-              </a:rPr>
-              <a:t>Lungimea umbrei + poziția Soarelui → înălțime estimată → confirmare în aplicație → actualizarea umbrelor și traseelor.</a:t>
+              <a:t>Testată pe teren în Constanța. Rutare în 41 orașe publicate; extindere automată prin catalogul de date.</a:t>
             </a:r>
             <a:endParaRPr lang="en-US" sz="1200" dirty="0"/>
           </a:p>
@@ -10378,55 +10611,14 @@
       </p:sp>
       <p:sp>
         <p:nvSpPr>
-          <p:cNvPr id="310" name="Text 307"/>
-          <p:cNvSpPr/>
-          <p:nvPr/>
-        </p:nvSpPr>
-        <p:spPr>
-          <a:xfrm>
-            <a:off x="7635240" y="19138392"/>
-            <a:ext cx="6126480" cy="612648"/>
-          </a:xfrm>
-          <a:prstGeom prst="rect">
-            <a:avLst/>
-          </a:prstGeom>
-          <a:noFill/>
-          <a:ln/>
-        </p:spPr>
-        <p:txBody>
-          <a:bodyPr wrap="square" lIns="0" tIns="0" rIns="0" bIns="0" rtlCol="0" anchor="ctr">
-            <a:normAutofit/>
-          </a:bodyPr>
-          <a:lstStyle/>
-          <a:p>
-            <a:pPr algn="l" indent="0" marL="0">
-              <a:buNone/>
-            </a:pPr>
-            <a:r>
-              <a:rPr lang="en-US" sz="1200" b="1" dirty="0">
-                <a:solidFill>
-                  <a:srgbClr val="321B40"/>
-                </a:solidFill>
-                <a:latin typeface="Noto Sans" pitchFamily="34" charset="0"/>
-                <a:ea typeface="Noto Sans" pitchFamily="34" charset="-122"/>
-                <a:cs typeface="Noto Sans" pitchFamily="34" charset="-120"/>
-              </a:rPr>
-              <a:t>Testată pe teren în Constanța. Trasee umbrite în București și în toate reședințele de județ; înălțimi confirmate de utilizatori.</a:t>
-            </a:r>
-            <a:endParaRPr lang="en-US" sz="1200" dirty="0"/>
-          </a:p>
-        </p:txBody>
-      </p:sp>
-      <p:sp>
-        <p:nvSpPr>
-          <p:cNvPr id="311" name="Shape 308"/>
-          <p:cNvSpPr/>
-          <p:nvPr/>
-        </p:nvSpPr>
-        <p:spPr>
-          <a:xfrm>
-            <a:off x="548640" y="20116800"/>
-            <a:ext cx="13533120" cy="438912"/>
+          <p:cNvPr id="316" name="Shape 313"/>
+          <p:cNvSpPr/>
+          <p:nvPr/>
+        </p:nvSpPr>
+        <p:spPr>
+          <a:xfrm>
+            <a:off x="548640" y="18960662"/>
+            <a:ext cx="13533120" cy="413687"/>
           </a:xfrm>
           <a:prstGeom prst="rect">
             <a:avLst/>
@@ -10446,14 +10638,14 @@
       </p:sp>
       <p:sp>
         <p:nvSpPr>
-          <p:cNvPr id="312" name="Text 309"/>
-          <p:cNvSpPr/>
-          <p:nvPr/>
-        </p:nvSpPr>
-        <p:spPr>
-          <a:xfrm>
-            <a:off x="713232" y="20199096"/>
-            <a:ext cx="13075920" cy="237744"/>
+          <p:cNvPr id="317" name="Text 314"/>
+          <p:cNvSpPr/>
+          <p:nvPr/>
+        </p:nvSpPr>
+        <p:spPr>
+          <a:xfrm>
+            <a:off x="713232" y="19038228"/>
+            <a:ext cx="13075920" cy="224081"/>
           </a:xfrm>
           <a:prstGeom prst="rect">
             <a:avLst/>
@@ -10471,7 +10663,7 @@
               <a:buNone/>
             </a:pPr>
             <a:r>
-              <a:rPr lang="en-US" sz="1300" b="1" dirty="0">
+              <a:rPr lang="en-US" sz="1400" b="1" dirty="0">
                 <a:solidFill>
                   <a:srgbClr val="FFFFFF"/>
                 </a:solidFill>
@@ -10479,22 +10671,22 @@
                 <a:ea typeface="Noto Sans" pitchFamily="34" charset="-122"/>
                 <a:cs typeface="Noto Sans" pitchFamily="34" charset="-120"/>
               </a:rPr>
-              <a:t>REZULTATE COMPUTAȚIONALE: ANALIZA DATELOR OSM / GBA ȘI SIMULAREA UMBRELOR</a:t>
-            </a:r>
-            <a:endParaRPr lang="en-US" sz="1300" dirty="0"/>
-          </a:p>
-        </p:txBody>
-      </p:sp>
-      <p:sp>
-        <p:nvSpPr>
-          <p:cNvPr id="313" name="Text 310"/>
-          <p:cNvSpPr/>
-          <p:nvPr/>
-        </p:nvSpPr>
-        <p:spPr>
-          <a:xfrm>
-            <a:off x="594360" y="20720304"/>
-            <a:ext cx="13258800" cy="438912"/>
+              <a:t>CONCLUZIE: ÎNĂLȚIMILE LOCALE ȘI MOMENTUL MĂSURĂRII CONTEAZĂ ÎN MODELAREA UMBRELOR.</a:t>
+            </a:r>
+            <a:endParaRPr lang="en-US" sz="1400" dirty="0"/>
+          </a:p>
+        </p:txBody>
+      </p:sp>
+      <p:sp>
+        <p:nvSpPr>
+          <p:cNvPr id="318" name="Text 315"/>
+          <p:cNvSpPr/>
+          <p:nvPr/>
+        </p:nvSpPr>
+        <p:spPr>
+          <a:xfrm>
+            <a:off x="594360" y="19529482"/>
+            <a:ext cx="12070080" cy="413687"/>
           </a:xfrm>
           <a:prstGeom prst="rect">
             <a:avLst/>
@@ -10512,7 +10704,7 @@
               <a:buNone/>
             </a:pPr>
             <a:r>
-              <a:rPr lang="en-US" sz="1000" dirty="0">
+              <a:rPr lang="en-US" sz="1100" dirty="0">
                 <a:solidFill>
                   <a:srgbClr val="625A6A"/>
                 </a:solidFill>
@@ -10520,22 +10712,39 @@
                 <a:ea typeface="Noto Sans" pitchFamily="34" charset="-122"/>
                 <a:cs typeface="Noto Sans" pitchFamily="34" charset="-120"/>
               </a:rPr>
-              <a:t>Surse: OpenStreetMap contributors (ODbL); Zhu et al., GlobalBuildingAtlas, ESSD 2025; NOAA/Meeus; Reda &amp; Andreas, Solar Energy 2004.</a:t>
-            </a:r>
-            <a:endParaRPr lang="en-US" sz="1000" dirty="0"/>
-          </a:p>
-        </p:txBody>
-      </p:sp>
-      <p:sp>
-        <p:nvSpPr>
-          <p:cNvPr id="314" name="Shape 311"/>
-          <p:cNvSpPr/>
-          <p:nvPr/>
-        </p:nvSpPr>
-        <p:spPr>
-          <a:xfrm>
-            <a:off x="594360" y="21232368"/>
-            <a:ext cx="13441680" cy="914"/>
+              <a:t>Surse: © OpenStreetMap contributors (ODbL); GlobalBuildingAtlas (ESSD 2025); Open-Meteo (CC BY 4.0); NOAA/Meeus.</a:t>
+            </a:r>
+            <a:endParaRPr lang="en-US" sz="1100" dirty="0"/>
+          </a:p>
+          <a:p>
+            <a:pPr algn="l" indent="0" marL="0">
+              <a:buNone/>
+            </a:pPr>
+            <a:r>
+              <a:rPr lang="en-US" sz="1100" dirty="0">
+                <a:solidFill>
+                  <a:srgbClr val="625A6A"/>
+                </a:solidFill>
+                <a:latin typeface="Noto Sans" pitchFamily="34" charset="0"/>
+                <a:ea typeface="Noto Sans" pitchFamily="34" charset="-122"/>
+                <a:cs typeface="Noto Sans" pitchFamily="34" charset="-120"/>
+              </a:rPr>
+              <a:t>Copernicus: © European Union, Copernicus Land Monitoring Service 2022, European Environment Agency (EEA).</a:t>
+            </a:r>
+            <a:endParaRPr lang="en-US" sz="1100" dirty="0"/>
+          </a:p>
+        </p:txBody>
+      </p:sp>
+      <p:sp>
+        <p:nvSpPr>
+          <p:cNvPr id="319" name="Shape 316"/>
+          <p:cNvSpPr/>
+          <p:nvPr/>
+        </p:nvSpPr>
+        <p:spPr>
+          <a:xfrm>
+            <a:off x="594360" y="20012117"/>
+            <a:ext cx="12298680" cy="914"/>
           </a:xfrm>
           <a:prstGeom prst="line">
             <a:avLst/>
@@ -10549,16 +10758,40 @@
           </a:ln>
         </p:spPr>
       </p:sp>
-      <p:sp>
-        <p:nvSpPr>
-          <p:cNvPr id="315" name="Text 312"/>
-          <p:cNvSpPr/>
-          <p:nvPr/>
-        </p:nvSpPr>
-        <p:spPr>
-          <a:xfrm>
-            <a:off x="594360" y="21305520"/>
-            <a:ext cx="13350240" cy="228600"/>
+      <p:pic>
+        <p:nvPicPr>
+          <p:cNvPr id="320" name="Image 1" descr="/home/kawase/Documents/GitHub/umbra/docs/poster/qr-github.png">    </p:cNvPr>
+          <p:cNvPicPr>
+            <a:picLocks noChangeAspect="1"/>
+          </p:cNvPicPr>
+          <p:nvPr/>
+        </p:nvPicPr>
+        <p:blipFill>
+          <a:blip r:embed="rId2"/>
+          <a:stretch>
+            <a:fillRect/>
+          </a:stretch>
+        </p:blipFill>
+        <p:spPr>
+          <a:xfrm>
+            <a:off x="13167360" y="19460534"/>
+            <a:ext cx="914400" cy="914400"/>
+          </a:xfrm>
+          <a:prstGeom prst="rect">
+            <a:avLst/>
+          </a:prstGeom>
+        </p:spPr>
+      </p:pic>
+      <p:sp>
+        <p:nvSpPr>
+          <p:cNvPr id="321" name="Text 317"/>
+          <p:cNvSpPr/>
+          <p:nvPr/>
+        </p:nvSpPr>
+        <p:spPr>
+          <a:xfrm>
+            <a:off x="594360" y="20081065"/>
+            <a:ext cx="12252960" cy="215462"/>
           </a:xfrm>
           <a:prstGeom prst="rect">
             <a:avLst/>
@@ -10576,7 +10809,7 @@
               <a:buNone/>
             </a:pPr>
             <a:r>
-              <a:rPr lang="en-US" sz="900" dirty="0">
+              <a:rPr lang="en-US" sz="1100" dirty="0">
                 <a:solidFill>
                   <a:srgbClr val="321B40"/>
                 </a:solidFill>
@@ -10586,20 +10819,20 @@
               </a:rPr>
               <a:t>Liceul Tehnologic de Marină · Liceul Internațional de Informatică Constanța · Liceul Tehnologic de Electrotehnică și Telecomunicații</a:t>
             </a:r>
-            <a:endParaRPr lang="en-US" sz="900" dirty="0"/>
-          </a:p>
-        </p:txBody>
-      </p:sp>
-      <p:sp>
-        <p:nvSpPr>
-          <p:cNvPr id="316" name="Text 313"/>
-          <p:cNvSpPr/>
-          <p:nvPr/>
-        </p:nvSpPr>
-        <p:spPr>
-          <a:xfrm>
-            <a:off x="594360" y="21570696"/>
-            <a:ext cx="13350240" cy="228600"/>
+            <a:endParaRPr lang="en-US" sz="1100" dirty="0"/>
+          </a:p>
+        </p:txBody>
+      </p:sp>
+      <p:sp>
+        <p:nvSpPr>
+          <p:cNvPr id="322" name="Text 318"/>
+          <p:cNvSpPr/>
+          <p:nvPr/>
+        </p:nvSpPr>
+        <p:spPr>
+          <a:xfrm>
+            <a:off x="594360" y="20331001"/>
+            <a:ext cx="12252960" cy="215462"/>
           </a:xfrm>
           <a:prstGeom prst="rect">
             <a:avLst/>
@@ -10617,7 +10850,7 @@
               <a:buNone/>
             </a:pPr>
             <a:r>
-              <a:rPr lang="en-US" sz="900" dirty="0">
+              <a:rPr lang="en-US" sz="1100" dirty="0">
                 <a:solidFill>
                   <a:srgbClr val="625A6A"/>
                 </a:solidFill>
@@ -10627,7 +10860,7 @@
               </a:rPr>
               <a:t>Coordonator: prof. Ramona Rădulescu · Informatică pentru Viitor · radramra@gmail.com     |     github.com/Ieditzu/umbra</a:t>
             </a:r>
-            <a:endParaRPr lang="en-US" sz="900" dirty="0"/>
+            <a:endParaRPr lang="en-US" sz="1100" dirty="0"/>
           </a:p>
         </p:txBody>
       </p:sp>

--- a/docs/poster/scientific/umbra-poster-editable.pptx
+++ b/docs/poster/scientific/umbra-poster-editable.pptx
@@ -10,8 +10,8 @@
   <p:notesMasterIdLst>
     <p:notesMasterId r:id="rId3"/>
   </p:notesMasterIdLst>
-  <p:sldSz cx="14630400" cy="20684359"/>
-  <p:notesSz cx="20684359" cy="14630400"/>
+  <p:sldSz cx="14630400" cy="21945600"/>
+  <p:notesSz cx="21945600" cy="14630400"/>
   <p:defaultTextStyle>
     <a:lvl1pPr marL="0" algn="l" defTabSz="914400" rtl="0" eaLnBrk="1" latinLnBrk="0" hangingPunct="1">
       <a:defRPr sz="1800" kern="1200">
@@ -883,8 +883,8 @@
         </p:nvSpPr>
         <p:spPr>
           <a:xfrm>
-            <a:off x="548640" y="198225"/>
-            <a:ext cx="13533120" cy="215462"/>
+            <a:off x="548640" y="210312"/>
+            <a:ext cx="13533120" cy="228600"/>
           </a:xfrm>
           <a:prstGeom prst="rect">
             <a:avLst/>
@@ -924,8 +924,8 @@
         </p:nvSpPr>
         <p:spPr>
           <a:xfrm>
-            <a:off x="502920" y="413687"/>
-            <a:ext cx="7772400" cy="1120403"/>
+            <a:off x="502920" y="438912"/>
+            <a:ext cx="7772400" cy="1188720"/>
           </a:xfrm>
           <a:prstGeom prst="rect">
             <a:avLst/>
@@ -965,8 +965,8 @@
         </p:nvSpPr>
         <p:spPr>
           <a:xfrm>
-            <a:off x="8641080" y="551583"/>
-            <a:ext cx="5303520" cy="904941"/>
+            <a:off x="8641080" y="585216"/>
+            <a:ext cx="5303520" cy="960120"/>
           </a:xfrm>
           <a:prstGeom prst="rect">
             <a:avLst/>
@@ -1023,8 +1023,8 @@
         </p:nvSpPr>
         <p:spPr>
           <a:xfrm>
-            <a:off x="594360" y="1646130"/>
-            <a:ext cx="13350240" cy="258554"/>
+            <a:off x="594360" y="1691640"/>
+            <a:ext cx="4297680" cy="246888"/>
           </a:xfrm>
           <a:prstGeom prst="rect">
             <a:avLst/>
@@ -1050,7 +1050,7 @@
                 <a:ea typeface="Noto Sans" pitchFamily="34" charset="-122"/>
                 <a:cs typeface="Noto Sans" pitchFamily="34" charset="-120"/>
               </a:rPr>
-              <a:t>Eduard-Mihai Perjoc · Eduard-Andrei Haivas · Cezar-Ștefan Manea</a:t>
+              <a:t>Eduard-Mihai Perjoc</a:t>
             </a:r>
             <a:endParaRPr lang="en-US" sz="1400" dirty="0"/>
           </a:p>
@@ -1064,8 +1064,8 @@
         </p:nvSpPr>
         <p:spPr>
           <a:xfrm>
-            <a:off x="594360" y="1956396"/>
-            <a:ext cx="13350240" cy="215462"/>
+            <a:off x="594360" y="1993392"/>
+            <a:ext cx="4297680" cy="393192"/>
           </a:xfrm>
           <a:prstGeom prst="rect">
             <a:avLst/>
@@ -1083,7 +1083,7 @@
               <a:buNone/>
             </a:pPr>
             <a:r>
-              <a:rPr lang="en-US" sz="1200" dirty="0">
+              <a:rPr lang="en-US" sz="1100" dirty="0">
                 <a:solidFill>
                   <a:srgbClr val="625A6A"/>
                 </a:solidFill>
@@ -1091,22 +1091,237 @@
                 <a:ea typeface="Noto Sans" pitchFamily="34" charset="-122"/>
                 <a:cs typeface="Noto Sans" pitchFamily="34" charset="-120"/>
               </a:rPr>
-              <a:t>Clasa a X-a · Constanța    |    Coordonator: prof. Ramona Rădulescu</a:t>
-            </a:r>
-            <a:endParaRPr lang="en-US" sz="1200" dirty="0"/>
-          </a:p>
-        </p:txBody>
-      </p:sp>
-      <p:sp>
-        <p:nvSpPr>
-          <p:cNvPr id="7" name="Shape 5"/>
-          <p:cNvSpPr/>
-          <p:nvPr/>
-        </p:nvSpPr>
-        <p:spPr>
-          <a:xfrm>
-            <a:off x="548640" y="2309753"/>
-            <a:ext cx="13533120" cy="930796"/>
+              <a:t>Liceul Tehnologic de Marină</a:t>
+            </a:r>
+            <a:endParaRPr lang="en-US" sz="1100" dirty="0"/>
+          </a:p>
+          <a:p>
+            <a:pPr algn="l" indent="0" marL="0">
+              <a:buNone/>
+            </a:pPr>
+            <a:r>
+              <a:rPr lang="en-US" sz="1100" dirty="0">
+                <a:solidFill>
+                  <a:srgbClr val="625A6A"/>
+                </a:solidFill>
+                <a:latin typeface="Noto Sans" pitchFamily="34" charset="0"/>
+                <a:ea typeface="Noto Sans" pitchFamily="34" charset="-122"/>
+                <a:cs typeface="Noto Sans" pitchFamily="34" charset="-120"/>
+              </a:rPr>
+              <a:t>Constanța</a:t>
+            </a:r>
+            <a:endParaRPr lang="en-US" sz="1100" dirty="0"/>
+          </a:p>
+        </p:txBody>
+      </p:sp>
+      <p:sp>
+        <p:nvSpPr>
+          <p:cNvPr id="7" name="Text 5"/>
+          <p:cNvSpPr/>
+          <p:nvPr/>
+        </p:nvSpPr>
+        <p:spPr>
+          <a:xfrm>
+            <a:off x="5148072" y="1691640"/>
+            <a:ext cx="4297680" cy="246888"/>
+          </a:xfrm>
+          <a:prstGeom prst="rect">
+            <a:avLst/>
+          </a:prstGeom>
+          <a:noFill/>
+          <a:ln/>
+        </p:spPr>
+        <p:txBody>
+          <a:bodyPr wrap="square" lIns="0" tIns="0" rIns="0" bIns="0" rtlCol="0" anchor="ctr">
+            <a:normAutofit/>
+          </a:bodyPr>
+          <a:lstStyle/>
+          <a:p>
+            <a:pPr algn="l" indent="0" marL="0">
+              <a:buNone/>
+            </a:pPr>
+            <a:r>
+              <a:rPr lang="en-US" sz="1400" b="1" dirty="0">
+                <a:solidFill>
+                  <a:srgbClr val="321B40"/>
+                </a:solidFill>
+                <a:latin typeface="Noto Sans" pitchFamily="34" charset="0"/>
+                <a:ea typeface="Noto Sans" pitchFamily="34" charset="-122"/>
+                <a:cs typeface="Noto Sans" pitchFamily="34" charset="-120"/>
+              </a:rPr>
+              <a:t>Eduard-Andrei Haivas</a:t>
+            </a:r>
+            <a:endParaRPr lang="en-US" sz="1400" dirty="0"/>
+          </a:p>
+        </p:txBody>
+      </p:sp>
+      <p:sp>
+        <p:nvSpPr>
+          <p:cNvPr id="8" name="Text 6"/>
+          <p:cNvSpPr/>
+          <p:nvPr/>
+        </p:nvSpPr>
+        <p:spPr>
+          <a:xfrm>
+            <a:off x="5148072" y="1993392"/>
+            <a:ext cx="4297680" cy="393192"/>
+          </a:xfrm>
+          <a:prstGeom prst="rect">
+            <a:avLst/>
+          </a:prstGeom>
+          <a:noFill/>
+          <a:ln/>
+        </p:spPr>
+        <p:txBody>
+          <a:bodyPr wrap="square" lIns="0" tIns="0" rIns="0" bIns="0" rtlCol="0" anchor="ctr">
+            <a:normAutofit/>
+          </a:bodyPr>
+          <a:lstStyle/>
+          <a:p>
+            <a:pPr algn="l" indent="0" marL="0">
+              <a:buNone/>
+            </a:pPr>
+            <a:r>
+              <a:rPr lang="en-US" sz="1100" dirty="0">
+                <a:solidFill>
+                  <a:srgbClr val="625A6A"/>
+                </a:solidFill>
+                <a:latin typeface="Noto Sans" pitchFamily="34" charset="0"/>
+                <a:ea typeface="Noto Sans" pitchFamily="34" charset="-122"/>
+                <a:cs typeface="Noto Sans" pitchFamily="34" charset="-120"/>
+              </a:rPr>
+              <a:t>Liceul Internațional de Informatică</a:t>
+            </a:r>
+            <a:endParaRPr lang="en-US" sz="1100" dirty="0"/>
+          </a:p>
+          <a:p>
+            <a:pPr algn="l" indent="0" marL="0">
+              <a:buNone/>
+            </a:pPr>
+            <a:r>
+              <a:rPr lang="en-US" sz="1100" dirty="0">
+                <a:solidFill>
+                  <a:srgbClr val="625A6A"/>
+                </a:solidFill>
+                <a:latin typeface="Noto Sans" pitchFamily="34" charset="0"/>
+                <a:ea typeface="Noto Sans" pitchFamily="34" charset="-122"/>
+                <a:cs typeface="Noto Sans" pitchFamily="34" charset="-120"/>
+              </a:rPr>
+              <a:t>Constanța</a:t>
+            </a:r>
+            <a:endParaRPr lang="en-US" sz="1100" dirty="0"/>
+          </a:p>
+        </p:txBody>
+      </p:sp>
+      <p:sp>
+        <p:nvSpPr>
+          <p:cNvPr id="9" name="Text 7"/>
+          <p:cNvSpPr/>
+          <p:nvPr/>
+        </p:nvSpPr>
+        <p:spPr>
+          <a:xfrm>
+            <a:off x="9701784" y="1691640"/>
+            <a:ext cx="4297680" cy="246888"/>
+          </a:xfrm>
+          <a:prstGeom prst="rect">
+            <a:avLst/>
+          </a:prstGeom>
+          <a:noFill/>
+          <a:ln/>
+        </p:spPr>
+        <p:txBody>
+          <a:bodyPr wrap="square" lIns="0" tIns="0" rIns="0" bIns="0" rtlCol="0" anchor="ctr">
+            <a:normAutofit/>
+          </a:bodyPr>
+          <a:lstStyle/>
+          <a:p>
+            <a:pPr algn="l" indent="0" marL="0">
+              <a:buNone/>
+            </a:pPr>
+            <a:r>
+              <a:rPr lang="en-US" sz="1400" b="1" dirty="0">
+                <a:solidFill>
+                  <a:srgbClr val="321B40"/>
+                </a:solidFill>
+                <a:latin typeface="Noto Sans" pitchFamily="34" charset="0"/>
+                <a:ea typeface="Noto Sans" pitchFamily="34" charset="-122"/>
+                <a:cs typeface="Noto Sans" pitchFamily="34" charset="-120"/>
+              </a:rPr>
+              <a:t>Cezar-Ștefan Manea</a:t>
+            </a:r>
+            <a:endParaRPr lang="en-US" sz="1400" dirty="0"/>
+          </a:p>
+        </p:txBody>
+      </p:sp>
+      <p:sp>
+        <p:nvSpPr>
+          <p:cNvPr id="10" name="Text 8"/>
+          <p:cNvSpPr/>
+          <p:nvPr/>
+        </p:nvSpPr>
+        <p:spPr>
+          <a:xfrm>
+            <a:off x="9701784" y="1993392"/>
+            <a:ext cx="4297680" cy="393192"/>
+          </a:xfrm>
+          <a:prstGeom prst="rect">
+            <a:avLst/>
+          </a:prstGeom>
+          <a:noFill/>
+          <a:ln/>
+        </p:spPr>
+        <p:txBody>
+          <a:bodyPr wrap="square" lIns="0" tIns="0" rIns="0" bIns="0" rtlCol="0" anchor="ctr">
+            <a:normAutofit/>
+          </a:bodyPr>
+          <a:lstStyle/>
+          <a:p>
+            <a:pPr algn="l" indent="0" marL="0">
+              <a:buNone/>
+            </a:pPr>
+            <a:r>
+              <a:rPr lang="en-US" sz="1100" dirty="0">
+                <a:solidFill>
+                  <a:srgbClr val="625A6A"/>
+                </a:solidFill>
+                <a:latin typeface="Noto Sans" pitchFamily="34" charset="0"/>
+                <a:ea typeface="Noto Sans" pitchFamily="34" charset="-122"/>
+                <a:cs typeface="Noto Sans" pitchFamily="34" charset="-120"/>
+              </a:rPr>
+              <a:t>Liceul Tehnologic de Electrotehnică</a:t>
+            </a:r>
+            <a:endParaRPr lang="en-US" sz="1100" dirty="0"/>
+          </a:p>
+          <a:p>
+            <a:pPr algn="l" indent="0" marL="0">
+              <a:buNone/>
+            </a:pPr>
+            <a:r>
+              <a:rPr lang="en-US" sz="1100" dirty="0">
+                <a:solidFill>
+                  <a:srgbClr val="625A6A"/>
+                </a:solidFill>
+                <a:latin typeface="Noto Sans" pitchFamily="34" charset="0"/>
+                <a:ea typeface="Noto Sans" pitchFamily="34" charset="-122"/>
+                <a:cs typeface="Noto Sans" pitchFamily="34" charset="-120"/>
+              </a:rPr>
+              <a:t>și Telecomunicații · Constanța</a:t>
+            </a:r>
+            <a:endParaRPr lang="en-US" sz="1100" dirty="0"/>
+          </a:p>
+        </p:txBody>
+      </p:sp>
+      <p:sp>
+        <p:nvSpPr>
+          <p:cNvPr id="11" name="Shape 9"/>
+          <p:cNvSpPr/>
+          <p:nvPr/>
+        </p:nvSpPr>
+        <p:spPr>
+          <a:xfrm>
+            <a:off x="548640" y="2450592"/>
+            <a:ext cx="13533120" cy="987552"/>
           </a:xfrm>
           <a:prstGeom prst="rect">
             <a:avLst/>
@@ -1126,14 +1341,14 @@
       </p:sp>
       <p:sp>
         <p:nvSpPr>
-          <p:cNvPr id="8" name="Text 6"/>
-          <p:cNvSpPr/>
-          <p:nvPr/>
-        </p:nvSpPr>
-        <p:spPr>
-          <a:xfrm>
-            <a:off x="731520" y="2387320"/>
-            <a:ext cx="13075920" cy="198225"/>
+          <p:cNvPr id="12" name="Text 10"/>
+          <p:cNvSpPr/>
+          <p:nvPr/>
+        </p:nvSpPr>
+        <p:spPr>
+          <a:xfrm>
+            <a:off x="731520" y="2532888"/>
+            <a:ext cx="13075920" cy="210312"/>
           </a:xfrm>
           <a:prstGeom prst="rect">
             <a:avLst/>
@@ -1167,14 +1382,14 @@
       </p:sp>
       <p:sp>
         <p:nvSpPr>
-          <p:cNvPr id="9" name="Text 7"/>
-          <p:cNvSpPr/>
-          <p:nvPr/>
-        </p:nvSpPr>
-        <p:spPr>
-          <a:xfrm>
-            <a:off x="731520" y="2645874"/>
-            <a:ext cx="13075920" cy="301647"/>
+          <p:cNvPr id="13" name="Text 11"/>
+          <p:cNvSpPr/>
+          <p:nvPr/>
+        </p:nvSpPr>
+        <p:spPr>
+          <a:xfrm>
+            <a:off x="731520" y="2807208"/>
+            <a:ext cx="13075920" cy="320040"/>
           </a:xfrm>
           <a:prstGeom prst="rect">
             <a:avLst/>
@@ -1208,14 +1423,14 @@
       </p:sp>
       <p:sp>
         <p:nvSpPr>
-          <p:cNvPr id="10" name="Text 8"/>
-          <p:cNvSpPr/>
-          <p:nvPr/>
-        </p:nvSpPr>
-        <p:spPr>
-          <a:xfrm>
-            <a:off x="731520" y="3007850"/>
-            <a:ext cx="13075920" cy="189607"/>
+          <p:cNvPr id="14" name="Text 12"/>
+          <p:cNvSpPr/>
+          <p:nvPr/>
+        </p:nvSpPr>
+        <p:spPr>
+          <a:xfrm>
+            <a:off x="731520" y="3191256"/>
+            <a:ext cx="13075920" cy="201168"/>
           </a:xfrm>
           <a:prstGeom prst="rect">
             <a:avLst/>
@@ -1249,14 +1464,14 @@
       </p:sp>
       <p:sp>
         <p:nvSpPr>
-          <p:cNvPr id="11" name="Shape 9"/>
-          <p:cNvSpPr/>
-          <p:nvPr/>
-        </p:nvSpPr>
-        <p:spPr>
-          <a:xfrm>
-            <a:off x="548640" y="3387064"/>
-            <a:ext cx="4251960" cy="293028"/>
+          <p:cNvPr id="15" name="Shape 13"/>
+          <p:cNvSpPr/>
+          <p:nvPr/>
+        </p:nvSpPr>
+        <p:spPr>
+          <a:xfrm>
+            <a:off x="548640" y="3593592"/>
+            <a:ext cx="4251960" cy="310896"/>
           </a:xfrm>
           <a:prstGeom prst="rect">
             <a:avLst/>
@@ -1276,14 +1491,14 @@
       </p:sp>
       <p:sp>
         <p:nvSpPr>
-          <p:cNvPr id="12" name="Text 10"/>
-          <p:cNvSpPr/>
-          <p:nvPr/>
-        </p:nvSpPr>
-        <p:spPr>
-          <a:xfrm>
-            <a:off x="658368" y="3417228"/>
-            <a:ext cx="4069080" cy="206844"/>
+          <p:cNvPr id="16" name="Text 14"/>
+          <p:cNvSpPr/>
+          <p:nvPr/>
+        </p:nvSpPr>
+        <p:spPr>
+          <a:xfrm>
+            <a:off x="658368" y="3625596"/>
+            <a:ext cx="4069080" cy="219456"/>
           </a:xfrm>
           <a:prstGeom prst="rect">
             <a:avLst/>
@@ -1317,14 +1532,14 @@
       </p:sp>
       <p:sp>
         <p:nvSpPr>
-          <p:cNvPr id="13" name="Text 11"/>
-          <p:cNvSpPr/>
-          <p:nvPr/>
-        </p:nvSpPr>
-        <p:spPr>
-          <a:xfrm>
-            <a:off x="594360" y="3783514"/>
-            <a:ext cx="4114800" cy="344739"/>
+          <p:cNvPr id="17" name="Text 15"/>
+          <p:cNvSpPr/>
+          <p:nvPr/>
+        </p:nvSpPr>
+        <p:spPr>
+          <a:xfrm>
+            <a:off x="594360" y="4014216"/>
+            <a:ext cx="4114800" cy="365760"/>
           </a:xfrm>
           <a:prstGeom prst="rect">
             <a:avLst/>
@@ -1358,14 +1573,14 @@
       </p:sp>
       <p:sp>
         <p:nvSpPr>
-          <p:cNvPr id="14" name="Text 12"/>
-          <p:cNvSpPr/>
-          <p:nvPr/>
-        </p:nvSpPr>
-        <p:spPr>
-          <a:xfrm>
-            <a:off x="594360" y="4300623"/>
-            <a:ext cx="4069080" cy="655005"/>
+          <p:cNvPr id="18" name="Text 16"/>
+          <p:cNvSpPr/>
+          <p:nvPr/>
+        </p:nvSpPr>
+        <p:spPr>
+          <a:xfrm>
+            <a:off x="594360" y="4562856"/>
+            <a:ext cx="4069080" cy="694944"/>
           </a:xfrm>
           <a:prstGeom prst="rect">
             <a:avLst/>
@@ -1399,14 +1614,14 @@
       </p:sp>
       <p:sp>
         <p:nvSpPr>
-          <p:cNvPr id="15" name="Text 13"/>
-          <p:cNvSpPr/>
-          <p:nvPr/>
-        </p:nvSpPr>
-        <p:spPr>
-          <a:xfrm>
-            <a:off x="594360" y="5084905"/>
-            <a:ext cx="4069080" cy="663623"/>
+          <p:cNvPr id="19" name="Text 17"/>
+          <p:cNvSpPr/>
+          <p:nvPr/>
+        </p:nvSpPr>
+        <p:spPr>
+          <a:xfrm>
+            <a:off x="594360" y="5394960"/>
+            <a:ext cx="4069080" cy="704088"/>
           </a:xfrm>
           <a:prstGeom prst="rect">
             <a:avLst/>
@@ -1440,14 +1655,14 @@
       </p:sp>
       <p:sp>
         <p:nvSpPr>
-          <p:cNvPr id="16" name="Text 14"/>
-          <p:cNvSpPr/>
-          <p:nvPr/>
-        </p:nvSpPr>
-        <p:spPr>
-          <a:xfrm>
-            <a:off x="594360" y="5860568"/>
-            <a:ext cx="4069080" cy="568820"/>
+          <p:cNvPr id="20" name="Text 18"/>
+          <p:cNvSpPr/>
+          <p:nvPr/>
+        </p:nvSpPr>
+        <p:spPr>
+          <a:xfrm>
+            <a:off x="594360" y="6217920"/>
+            <a:ext cx="4069080" cy="603504"/>
           </a:xfrm>
           <a:prstGeom prst="rect">
             <a:avLst/>
@@ -1481,14 +1696,14 @@
       </p:sp>
       <p:sp>
         <p:nvSpPr>
-          <p:cNvPr id="17" name="Text 15"/>
-          <p:cNvSpPr/>
-          <p:nvPr/>
-        </p:nvSpPr>
-        <p:spPr>
-          <a:xfrm>
-            <a:off x="594360" y="6506954"/>
-            <a:ext cx="4114800" cy="370595"/>
+          <p:cNvPr id="21" name="Text 19"/>
+          <p:cNvSpPr/>
+          <p:nvPr/>
+        </p:nvSpPr>
+        <p:spPr>
+          <a:xfrm>
+            <a:off x="594360" y="6903720"/>
+            <a:ext cx="4114800" cy="393192"/>
           </a:xfrm>
           <a:prstGeom prst="rect">
             <a:avLst/>
@@ -1522,14 +1737,14 @@
       </p:sp>
       <p:sp>
         <p:nvSpPr>
-          <p:cNvPr id="18" name="Shape 16"/>
-          <p:cNvSpPr/>
-          <p:nvPr/>
-        </p:nvSpPr>
-        <p:spPr>
-          <a:xfrm>
-            <a:off x="548640" y="6998208"/>
-            <a:ext cx="4251960" cy="293028"/>
+          <p:cNvPr id="22" name="Shape 20"/>
+          <p:cNvSpPr/>
+          <p:nvPr/>
+        </p:nvSpPr>
+        <p:spPr>
+          <a:xfrm>
+            <a:off x="548640" y="7424928"/>
+            <a:ext cx="4251960" cy="310896"/>
           </a:xfrm>
           <a:prstGeom prst="rect">
             <a:avLst/>
@@ -1549,14 +1764,14 @@
       </p:sp>
       <p:sp>
         <p:nvSpPr>
-          <p:cNvPr id="19" name="Text 17"/>
-          <p:cNvSpPr/>
-          <p:nvPr/>
-        </p:nvSpPr>
-        <p:spPr>
-          <a:xfrm>
-            <a:off x="658368" y="7028373"/>
-            <a:ext cx="4069080" cy="206844"/>
+          <p:cNvPr id="23" name="Text 21"/>
+          <p:cNvSpPr/>
+          <p:nvPr/>
+        </p:nvSpPr>
+        <p:spPr>
+          <a:xfrm>
+            <a:off x="658368" y="7456932"/>
+            <a:ext cx="4069080" cy="219456"/>
           </a:xfrm>
           <a:prstGeom prst="rect">
             <a:avLst/>
@@ -1590,7 +1805,7 @@
       </p:sp>
       <p:pic>
         <p:nvPicPr>
-          <p:cNvPr id="20" name="Image 0" descr="/home/kawase/Documents/GitHub/umbra/docs/poster/scientific/building-3d.png">    </p:cNvPr>
+          <p:cNvPr id="24" name="Image 0" descr="/home/kawase/Documents/GitHub/umbra/docs/poster/scientific/building-3d.png">    </p:cNvPr>
           <p:cNvPicPr>
             <a:picLocks noChangeAspect="1"/>
           </p:cNvPicPr>
@@ -1604,8 +1819,8 @@
         </p:blipFill>
         <p:spPr>
           <a:xfrm>
-            <a:off x="1053399" y="7386040"/>
-            <a:ext cx="3059561" cy="1525471"/>
+            <a:off x="960120" y="7836408"/>
+            <a:ext cx="3246120" cy="1618488"/>
           </a:xfrm>
           <a:prstGeom prst="rect">
             <a:avLst/>
@@ -1614,14 +1829,14 @@
       </p:pic>
       <p:sp>
         <p:nvSpPr>
-          <p:cNvPr id="21" name="Text 18"/>
-          <p:cNvSpPr/>
-          <p:nvPr/>
-        </p:nvSpPr>
-        <p:spPr>
-          <a:xfrm>
-            <a:off x="1298448" y="8075518"/>
-            <a:ext cx="274320" cy="258554"/>
+          <p:cNvPr id="25" name="Text 22"/>
+          <p:cNvSpPr/>
+          <p:nvPr/>
+        </p:nvSpPr>
+        <p:spPr>
+          <a:xfrm>
+            <a:off x="1298448" y="8567928"/>
+            <a:ext cx="274320" cy="274320"/>
           </a:xfrm>
           <a:prstGeom prst="rect">
             <a:avLst/>
@@ -1655,14 +1870,14 @@
       </p:sp>
       <p:sp>
         <p:nvSpPr>
-          <p:cNvPr id="22" name="Text 19"/>
-          <p:cNvSpPr/>
-          <p:nvPr/>
-        </p:nvSpPr>
-        <p:spPr>
-          <a:xfrm>
-            <a:off x="2761488" y="8687431"/>
-            <a:ext cx="274320" cy="258554"/>
+          <p:cNvPr id="26" name="Text 23"/>
+          <p:cNvSpPr/>
+          <p:nvPr/>
+        </p:nvSpPr>
+        <p:spPr>
+          <a:xfrm>
+            <a:off x="2761488" y="9217152"/>
+            <a:ext cx="274320" cy="274320"/>
           </a:xfrm>
           <a:prstGeom prst="rect">
             <a:avLst/>
@@ -1696,14 +1911,14 @@
       </p:sp>
       <p:sp>
         <p:nvSpPr>
-          <p:cNvPr id="23" name="Text 20"/>
-          <p:cNvSpPr/>
-          <p:nvPr/>
-        </p:nvSpPr>
-        <p:spPr>
-          <a:xfrm>
-            <a:off x="3346704" y="8385784"/>
-            <a:ext cx="274320" cy="258554"/>
+          <p:cNvPr id="27" name="Text 24"/>
+          <p:cNvSpPr/>
+          <p:nvPr/>
+        </p:nvSpPr>
+        <p:spPr>
+          <a:xfrm>
+            <a:off x="3346704" y="8897112"/>
+            <a:ext cx="274320" cy="274320"/>
           </a:xfrm>
           <a:prstGeom prst="rect">
             <a:avLst/>
@@ -1737,14 +1952,14 @@
       </p:sp>
       <p:sp>
         <p:nvSpPr>
-          <p:cNvPr id="24" name="Text 21"/>
-          <p:cNvSpPr/>
-          <p:nvPr/>
-        </p:nvSpPr>
-        <p:spPr>
-          <a:xfrm>
-            <a:off x="658368" y="8868419"/>
-            <a:ext cx="3931920" cy="336121"/>
+          <p:cNvPr id="28" name="Text 25"/>
+          <p:cNvSpPr/>
+          <p:nvPr/>
+        </p:nvSpPr>
+        <p:spPr>
+          <a:xfrm>
+            <a:off x="658368" y="9409176"/>
+            <a:ext cx="3931920" cy="356616"/>
           </a:xfrm>
           <a:prstGeom prst="rect">
             <a:avLst/>
@@ -1778,14 +1993,14 @@
       </p:sp>
       <p:sp>
         <p:nvSpPr>
-          <p:cNvPr id="25" name="Text 22"/>
-          <p:cNvSpPr/>
-          <p:nvPr/>
-        </p:nvSpPr>
-        <p:spPr>
-          <a:xfrm>
-            <a:off x="658368" y="9247632"/>
-            <a:ext cx="4069080" cy="198225"/>
+          <p:cNvPr id="29" name="Text 26"/>
+          <p:cNvSpPr/>
+          <p:nvPr/>
+        </p:nvSpPr>
+        <p:spPr>
+          <a:xfrm>
+            <a:off x="658368" y="9811512"/>
+            <a:ext cx="4069080" cy="210312"/>
           </a:xfrm>
           <a:prstGeom prst="rect">
             <a:avLst/>
@@ -1819,14 +2034,14 @@
       </p:sp>
       <p:sp>
         <p:nvSpPr>
-          <p:cNvPr id="26" name="Shape 23"/>
-          <p:cNvSpPr/>
-          <p:nvPr/>
-        </p:nvSpPr>
-        <p:spPr>
-          <a:xfrm>
-            <a:off x="5257800" y="3387064"/>
-            <a:ext cx="8823960" cy="293028"/>
+          <p:cNvPr id="30" name="Shape 27"/>
+          <p:cNvSpPr/>
+          <p:nvPr/>
+        </p:nvSpPr>
+        <p:spPr>
+          <a:xfrm>
+            <a:off x="5257800" y="3593592"/>
+            <a:ext cx="8823960" cy="310896"/>
           </a:xfrm>
           <a:prstGeom prst="rect">
             <a:avLst/>
@@ -1846,14 +2061,14 @@
       </p:sp>
       <p:sp>
         <p:nvSpPr>
-          <p:cNvPr id="27" name="Text 24"/>
-          <p:cNvSpPr/>
-          <p:nvPr/>
-        </p:nvSpPr>
-        <p:spPr>
-          <a:xfrm>
-            <a:off x="5367528" y="3417228"/>
-            <a:ext cx="8641080" cy="206844"/>
+          <p:cNvPr id="31" name="Text 28"/>
+          <p:cNvSpPr/>
+          <p:nvPr/>
+        </p:nvSpPr>
+        <p:spPr>
+          <a:xfrm>
+            <a:off x="5367528" y="3625596"/>
+            <a:ext cx="8641080" cy="219456"/>
           </a:xfrm>
           <a:prstGeom prst="rect">
             <a:avLst/>
@@ -1887,14 +2102,14 @@
       </p:sp>
       <p:sp>
         <p:nvSpPr>
-          <p:cNvPr id="28" name="Text 25"/>
-          <p:cNvSpPr/>
-          <p:nvPr/>
-        </p:nvSpPr>
-        <p:spPr>
-          <a:xfrm>
-            <a:off x="5303520" y="3783514"/>
-            <a:ext cx="8686800" cy="327502"/>
+          <p:cNvPr id="32" name="Text 29"/>
+          <p:cNvSpPr/>
+          <p:nvPr/>
+        </p:nvSpPr>
+        <p:spPr>
+          <a:xfrm>
+            <a:off x="5303520" y="4014216"/>
+            <a:ext cx="8686800" cy="347472"/>
           </a:xfrm>
           <a:prstGeom prst="rect">
             <a:avLst/>
@@ -1928,14 +2143,14 @@
       </p:sp>
       <p:sp>
         <p:nvSpPr>
-          <p:cNvPr id="29" name="Shape 26"/>
-          <p:cNvSpPr/>
-          <p:nvPr/>
-        </p:nvSpPr>
-        <p:spPr>
-          <a:xfrm>
-            <a:off x="5440680" y="4326478"/>
-            <a:ext cx="42884" cy="448161"/>
+          <p:cNvPr id="33" name="Shape 30"/>
+          <p:cNvSpPr/>
+          <p:nvPr/>
+        </p:nvSpPr>
+        <p:spPr>
+          <a:xfrm>
+            <a:off x="5440680" y="4590288"/>
+            <a:ext cx="42884" cy="475488"/>
           </a:xfrm>
           <a:prstGeom prst="rect">
             <a:avLst/>
@@ -1955,14 +2170,14 @@
       </p:sp>
       <p:sp>
         <p:nvSpPr>
-          <p:cNvPr id="30" name="Shape 27"/>
-          <p:cNvSpPr/>
-          <p:nvPr/>
-        </p:nvSpPr>
-        <p:spPr>
-          <a:xfrm>
-            <a:off x="5483564" y="4326478"/>
-            <a:ext cx="935695" cy="448161"/>
+          <p:cNvPr id="34" name="Shape 31"/>
+          <p:cNvSpPr/>
+          <p:nvPr/>
+        </p:nvSpPr>
+        <p:spPr>
+          <a:xfrm>
+            <a:off x="5483564" y="4590288"/>
+            <a:ext cx="935695" cy="475488"/>
           </a:xfrm>
           <a:prstGeom prst="rect">
             <a:avLst/>
@@ -1982,14 +2197,14 @@
       </p:sp>
       <p:sp>
         <p:nvSpPr>
-          <p:cNvPr id="31" name="Shape 28"/>
-          <p:cNvSpPr/>
-          <p:nvPr/>
-        </p:nvSpPr>
-        <p:spPr>
-          <a:xfrm>
-            <a:off x="6419259" y="4326478"/>
-            <a:ext cx="7146130" cy="448161"/>
+          <p:cNvPr id="35" name="Shape 32"/>
+          <p:cNvSpPr/>
+          <p:nvPr/>
+        </p:nvSpPr>
+        <p:spPr>
+          <a:xfrm>
+            <a:off x="6419259" y="4590288"/>
+            <a:ext cx="7146130" cy="475488"/>
           </a:xfrm>
           <a:prstGeom prst="rect">
             <a:avLst/>
@@ -2009,14 +2224,14 @@
       </p:sp>
       <p:sp>
         <p:nvSpPr>
-          <p:cNvPr id="32" name="Shape 29"/>
-          <p:cNvSpPr/>
-          <p:nvPr/>
-        </p:nvSpPr>
-        <p:spPr>
-          <a:xfrm>
-            <a:off x="13565389" y="4326478"/>
-            <a:ext cx="13451" cy="448161"/>
+          <p:cNvPr id="36" name="Shape 33"/>
+          <p:cNvSpPr/>
+          <p:nvPr/>
+        </p:nvSpPr>
+        <p:spPr>
+          <a:xfrm>
+            <a:off x="13565389" y="4590288"/>
+            <a:ext cx="13451" cy="475488"/>
           </a:xfrm>
           <a:prstGeom prst="rect">
             <a:avLst/>
@@ -2036,14 +2251,14 @@
       </p:sp>
       <p:sp>
         <p:nvSpPr>
-          <p:cNvPr id="33" name="Text 30"/>
-          <p:cNvSpPr/>
-          <p:nvPr/>
-        </p:nvSpPr>
-        <p:spPr>
-          <a:xfrm>
-            <a:off x="7772400" y="4386808"/>
-            <a:ext cx="5029200" cy="275791"/>
+          <p:cNvPr id="37" name="Text 34"/>
+          <p:cNvSpPr/>
+          <p:nvPr/>
+        </p:nvSpPr>
+        <p:spPr>
+          <a:xfrm>
+            <a:off x="7772400" y="4654296"/>
+            <a:ext cx="5029200" cy="292608"/>
           </a:xfrm>
           <a:prstGeom prst="rect">
             <a:avLst/>
@@ -2077,14 +2292,14 @@
       </p:sp>
       <p:sp>
         <p:nvSpPr>
-          <p:cNvPr id="34" name="Text 31"/>
-          <p:cNvSpPr/>
-          <p:nvPr/>
-        </p:nvSpPr>
-        <p:spPr>
-          <a:xfrm>
-            <a:off x="5440680" y="4929772"/>
-            <a:ext cx="8229600" cy="258554"/>
+          <p:cNvPr id="38" name="Text 35"/>
+          <p:cNvSpPr/>
+          <p:nvPr/>
+        </p:nvSpPr>
+        <p:spPr>
+          <a:xfrm>
+            <a:off x="5440680" y="5230368"/>
+            <a:ext cx="8229600" cy="274320"/>
           </a:xfrm>
           <a:prstGeom prst="rect">
             <a:avLst/>
@@ -2118,14 +2333,14 @@
       </p:sp>
       <p:sp>
         <p:nvSpPr>
-          <p:cNvPr id="35" name="Text 32"/>
-          <p:cNvSpPr/>
-          <p:nvPr/>
-        </p:nvSpPr>
-        <p:spPr>
-          <a:xfrm>
-            <a:off x="5440680" y="5265893"/>
-            <a:ext cx="8229600" cy="258554"/>
+          <p:cNvPr id="39" name="Text 36"/>
+          <p:cNvSpPr/>
+          <p:nvPr/>
+        </p:nvSpPr>
+        <p:spPr>
+          <a:xfrm>
+            <a:off x="5440680" y="5586984"/>
+            <a:ext cx="8229600" cy="274320"/>
           </a:xfrm>
           <a:prstGeom prst="rect">
             <a:avLst/>
@@ -2159,14 +2374,14 @@
       </p:sp>
       <p:sp>
         <p:nvSpPr>
-          <p:cNvPr id="36" name="Text 33"/>
-          <p:cNvSpPr/>
-          <p:nvPr/>
-        </p:nvSpPr>
-        <p:spPr>
-          <a:xfrm>
-            <a:off x="5440680" y="5610632"/>
-            <a:ext cx="8229600" cy="275791"/>
+          <p:cNvPr id="40" name="Text 37"/>
+          <p:cNvSpPr/>
+          <p:nvPr/>
+        </p:nvSpPr>
+        <p:spPr>
+          <a:xfrm>
+            <a:off x="5440680" y="5952744"/>
+            <a:ext cx="8229600" cy="292608"/>
           </a:xfrm>
           <a:prstGeom prst="rect">
             <a:avLst/>
@@ -2200,14 +2415,14 @@
       </p:sp>
       <p:sp>
         <p:nvSpPr>
-          <p:cNvPr id="37" name="Text 34"/>
-          <p:cNvSpPr/>
-          <p:nvPr/>
-        </p:nvSpPr>
-        <p:spPr>
-          <a:xfrm>
-            <a:off x="5303520" y="6076030"/>
-            <a:ext cx="8686800" cy="301647"/>
+          <p:cNvPr id="41" name="Text 38"/>
+          <p:cNvSpPr/>
+          <p:nvPr/>
+        </p:nvSpPr>
+        <p:spPr>
+          <a:xfrm>
+            <a:off x="5303520" y="6446520"/>
+            <a:ext cx="8686800" cy="320040"/>
           </a:xfrm>
           <a:prstGeom prst="rect">
             <a:avLst/>
@@ -2241,13 +2456,13 @@
       </p:sp>
       <p:sp>
         <p:nvSpPr>
-          <p:cNvPr id="38" name="Shape 35"/>
-          <p:cNvSpPr/>
-          <p:nvPr/>
-        </p:nvSpPr>
-        <p:spPr>
-          <a:xfrm>
-            <a:off x="5989320" y="8325454"/>
+          <p:cNvPr id="42" name="Shape 39"/>
+          <p:cNvSpPr/>
+          <p:nvPr/>
+        </p:nvSpPr>
+        <p:spPr>
+          <a:xfrm>
+            <a:off x="5989320" y="8833104"/>
             <a:ext cx="7589520" cy="914"/>
           </a:xfrm>
           <a:prstGeom prst="line">
@@ -2264,14 +2479,14 @@
       </p:sp>
       <p:sp>
         <p:nvSpPr>
-          <p:cNvPr id="39" name="Text 36"/>
-          <p:cNvSpPr/>
-          <p:nvPr/>
-        </p:nvSpPr>
-        <p:spPr>
-          <a:xfrm>
-            <a:off x="5669280" y="8222033"/>
-            <a:ext cx="237744" cy="189607"/>
+          <p:cNvPr id="43" name="Text 40"/>
+          <p:cNvSpPr/>
+          <p:nvPr/>
+        </p:nvSpPr>
+        <p:spPr>
+          <a:xfrm>
+            <a:off x="5669280" y="8723376"/>
+            <a:ext cx="237744" cy="201168"/>
           </a:xfrm>
           <a:prstGeom prst="rect">
             <a:avLst/>
@@ -2305,13 +2520,13 @@
       </p:sp>
       <p:sp>
         <p:nvSpPr>
-          <p:cNvPr id="40" name="Shape 37"/>
-          <p:cNvSpPr/>
-          <p:nvPr/>
-        </p:nvSpPr>
-        <p:spPr>
-          <a:xfrm>
-            <a:off x="5989320" y="7920386"/>
+          <p:cNvPr id="44" name="Shape 41"/>
+          <p:cNvSpPr/>
+          <p:nvPr/>
+        </p:nvSpPr>
+        <p:spPr>
+          <a:xfrm>
+            <a:off x="5989320" y="8403336"/>
             <a:ext cx="7589520" cy="914"/>
           </a:xfrm>
           <a:prstGeom prst="line">
@@ -2328,14 +2543,14 @@
       </p:sp>
       <p:sp>
         <p:nvSpPr>
-          <p:cNvPr id="41" name="Text 38"/>
-          <p:cNvSpPr/>
-          <p:nvPr/>
-        </p:nvSpPr>
-        <p:spPr>
-          <a:xfrm>
-            <a:off x="5669280" y="7816964"/>
-            <a:ext cx="237744" cy="189607"/>
+          <p:cNvPr id="45" name="Text 42"/>
+          <p:cNvSpPr/>
+          <p:nvPr/>
+        </p:nvSpPr>
+        <p:spPr>
+          <a:xfrm>
+            <a:off x="5669280" y="8293608"/>
+            <a:ext cx="237744" cy="201168"/>
           </a:xfrm>
           <a:prstGeom prst="rect">
             <a:avLst/>
@@ -2369,13 +2584,13 @@
       </p:sp>
       <p:sp>
         <p:nvSpPr>
-          <p:cNvPr id="42" name="Shape 39"/>
-          <p:cNvSpPr/>
-          <p:nvPr/>
-        </p:nvSpPr>
-        <p:spPr>
-          <a:xfrm>
-            <a:off x="5989320" y="7515317"/>
+          <p:cNvPr id="46" name="Shape 43"/>
+          <p:cNvSpPr/>
+          <p:nvPr/>
+        </p:nvSpPr>
+        <p:spPr>
+          <a:xfrm>
+            <a:off x="5989320" y="7973568"/>
             <a:ext cx="7589520" cy="914"/>
           </a:xfrm>
           <a:prstGeom prst="line">
@@ -2392,14 +2607,14 @@
       </p:sp>
       <p:sp>
         <p:nvSpPr>
-          <p:cNvPr id="43" name="Text 40"/>
-          <p:cNvSpPr/>
-          <p:nvPr/>
-        </p:nvSpPr>
-        <p:spPr>
-          <a:xfrm>
-            <a:off x="5669280" y="7411895"/>
-            <a:ext cx="237744" cy="189607"/>
+          <p:cNvPr id="47" name="Text 44"/>
+          <p:cNvSpPr/>
+          <p:nvPr/>
+        </p:nvSpPr>
+        <p:spPr>
+          <a:xfrm>
+            <a:off x="5669280" y="7863840"/>
+            <a:ext cx="237744" cy="201168"/>
           </a:xfrm>
           <a:prstGeom prst="rect">
             <a:avLst/>
@@ -2433,13 +2648,13 @@
       </p:sp>
       <p:sp>
         <p:nvSpPr>
-          <p:cNvPr id="44" name="Shape 41"/>
-          <p:cNvSpPr/>
-          <p:nvPr/>
-        </p:nvSpPr>
-        <p:spPr>
-          <a:xfrm>
-            <a:off x="5989320" y="7110248"/>
+          <p:cNvPr id="48" name="Shape 45"/>
+          <p:cNvSpPr/>
+          <p:nvPr/>
+        </p:nvSpPr>
+        <p:spPr>
+          <a:xfrm>
+            <a:off x="5989320" y="7543800"/>
             <a:ext cx="7589520" cy="914"/>
           </a:xfrm>
           <a:prstGeom prst="line">
@@ -2456,14 +2671,14 @@
       </p:sp>
       <p:sp>
         <p:nvSpPr>
-          <p:cNvPr id="45" name="Text 42"/>
-          <p:cNvSpPr/>
-          <p:nvPr/>
-        </p:nvSpPr>
-        <p:spPr>
-          <a:xfrm>
-            <a:off x="5669280" y="7006826"/>
-            <a:ext cx="237744" cy="189607"/>
+          <p:cNvPr id="49" name="Text 46"/>
+          <p:cNvSpPr/>
+          <p:nvPr/>
+        </p:nvSpPr>
+        <p:spPr>
+          <a:xfrm>
+            <a:off x="5669280" y="7434072"/>
+            <a:ext cx="237744" cy="201168"/>
           </a:xfrm>
           <a:prstGeom prst="rect">
             <a:avLst/>
@@ -2497,13 +2712,13 @@
       </p:sp>
       <p:sp>
         <p:nvSpPr>
-          <p:cNvPr id="46" name="Shape 43"/>
-          <p:cNvSpPr/>
-          <p:nvPr/>
-        </p:nvSpPr>
-        <p:spPr>
-          <a:xfrm>
-            <a:off x="5989320" y="6705180"/>
+          <p:cNvPr id="50" name="Shape 47"/>
+          <p:cNvSpPr/>
+          <p:nvPr/>
+        </p:nvSpPr>
+        <p:spPr>
+          <a:xfrm>
+            <a:off x="5989320" y="7114032"/>
             <a:ext cx="7589520" cy="914"/>
           </a:xfrm>
           <a:prstGeom prst="line">
@@ -2520,14 +2735,14 @@
       </p:sp>
       <p:sp>
         <p:nvSpPr>
-          <p:cNvPr id="47" name="Text 44"/>
-          <p:cNvSpPr/>
-          <p:nvPr/>
-        </p:nvSpPr>
-        <p:spPr>
-          <a:xfrm>
-            <a:off x="5669280" y="6601758"/>
-            <a:ext cx="237744" cy="189607"/>
+          <p:cNvPr id="51" name="Text 48"/>
+          <p:cNvSpPr/>
+          <p:nvPr/>
+        </p:nvSpPr>
+        <p:spPr>
+          <a:xfrm>
+            <a:off x="5669280" y="7004304"/>
+            <a:ext cx="237744" cy="201168"/>
           </a:xfrm>
           <a:prstGeom prst="rect">
             <a:avLst/>
@@ -2561,14 +2776,14 @@
       </p:sp>
       <p:sp>
         <p:nvSpPr>
-          <p:cNvPr id="48" name="Shape 45"/>
-          <p:cNvSpPr/>
-          <p:nvPr/>
-        </p:nvSpPr>
-        <p:spPr>
-          <a:xfrm>
-            <a:off x="6519672" y="6721382"/>
-            <a:ext cx="822960" cy="1604072"/>
+          <p:cNvPr id="52" name="Shape 49"/>
+          <p:cNvSpPr/>
+          <p:nvPr/>
+        </p:nvSpPr>
+        <p:spPr>
+          <a:xfrm>
+            <a:off x="6519672" y="7131223"/>
+            <a:ext cx="822960" cy="1701881"/>
           </a:xfrm>
           <a:prstGeom prst="rect">
             <a:avLst/>
@@ -2588,14 +2803,14 @@
       </p:sp>
       <p:sp>
         <p:nvSpPr>
-          <p:cNvPr id="49" name="Text 46"/>
-          <p:cNvSpPr/>
-          <p:nvPr/>
-        </p:nvSpPr>
-        <p:spPr>
-          <a:xfrm>
-            <a:off x="6519672" y="6462828"/>
-            <a:ext cx="822960" cy="206844"/>
+          <p:cNvPr id="53" name="Text 50"/>
+          <p:cNvSpPr/>
+          <p:nvPr/>
+        </p:nvSpPr>
+        <p:spPr>
+          <a:xfrm>
+            <a:off x="6519672" y="6856903"/>
+            <a:ext cx="822960" cy="219456"/>
           </a:xfrm>
           <a:prstGeom prst="rect">
             <a:avLst/>
@@ -2629,14 +2844,14 @@
       </p:sp>
       <p:sp>
         <p:nvSpPr>
-          <p:cNvPr id="50" name="Text 47"/>
-          <p:cNvSpPr/>
-          <p:nvPr/>
-        </p:nvSpPr>
-        <p:spPr>
-          <a:xfrm>
-            <a:off x="6291072" y="8385784"/>
-            <a:ext cx="1280160" cy="413687"/>
+          <p:cNvPr id="54" name="Text 51"/>
+          <p:cNvSpPr/>
+          <p:nvPr/>
+        </p:nvSpPr>
+        <p:spPr>
+          <a:xfrm>
+            <a:off x="6291072" y="8897112"/>
+            <a:ext cx="1280160" cy="438912"/>
           </a:xfrm>
           <a:prstGeom prst="rect">
             <a:avLst/>
@@ -2687,14 +2902,14 @@
       </p:sp>
       <p:sp>
         <p:nvSpPr>
-          <p:cNvPr id="51" name="Shape 48"/>
-          <p:cNvSpPr/>
-          <p:nvPr/>
-        </p:nvSpPr>
-        <p:spPr>
-          <a:xfrm>
-            <a:off x="8330184" y="7458607"/>
-            <a:ext cx="822960" cy="866847"/>
+          <p:cNvPr id="55" name="Shape 52"/>
+          <p:cNvSpPr/>
+          <p:nvPr/>
+        </p:nvSpPr>
+        <p:spPr>
+          <a:xfrm>
+            <a:off x="8330184" y="7913400"/>
+            <a:ext cx="822960" cy="919704"/>
           </a:xfrm>
           <a:prstGeom prst="rect">
             <a:avLst/>
@@ -2714,14 +2929,14 @@
       </p:sp>
       <p:sp>
         <p:nvSpPr>
-          <p:cNvPr id="52" name="Text 49"/>
-          <p:cNvSpPr/>
-          <p:nvPr/>
-        </p:nvSpPr>
-        <p:spPr>
-          <a:xfrm>
-            <a:off x="8330184" y="7200053"/>
-            <a:ext cx="822960" cy="206844"/>
+          <p:cNvPr id="56" name="Text 53"/>
+          <p:cNvSpPr/>
+          <p:nvPr/>
+        </p:nvSpPr>
+        <p:spPr>
+          <a:xfrm>
+            <a:off x="8330184" y="7639080"/>
+            <a:ext cx="822960" cy="219456"/>
           </a:xfrm>
           <a:prstGeom prst="rect">
             <a:avLst/>
@@ -2755,14 +2970,14 @@
       </p:sp>
       <p:sp>
         <p:nvSpPr>
-          <p:cNvPr id="53" name="Text 50"/>
-          <p:cNvSpPr/>
-          <p:nvPr/>
-        </p:nvSpPr>
-        <p:spPr>
-          <a:xfrm>
-            <a:off x="8101584" y="8385784"/>
-            <a:ext cx="1280160" cy="413687"/>
+          <p:cNvPr id="57" name="Text 54"/>
+          <p:cNvSpPr/>
+          <p:nvPr/>
+        </p:nvSpPr>
+        <p:spPr>
+          <a:xfrm>
+            <a:off x="8101584" y="8897112"/>
+            <a:ext cx="1280160" cy="438912"/>
           </a:xfrm>
           <a:prstGeom prst="rect">
             <a:avLst/>
@@ -2813,14 +3028,14 @@
       </p:sp>
       <p:sp>
         <p:nvSpPr>
-          <p:cNvPr id="54" name="Shape 51"/>
-          <p:cNvSpPr/>
-          <p:nvPr/>
-        </p:nvSpPr>
-        <p:spPr>
-          <a:xfrm>
-            <a:off x="10140696" y="7600381"/>
-            <a:ext cx="822960" cy="725073"/>
+          <p:cNvPr id="58" name="Shape 55"/>
+          <p:cNvSpPr/>
+          <p:nvPr/>
+        </p:nvSpPr>
+        <p:spPr>
+          <a:xfrm>
+            <a:off x="10140696" y="8063819"/>
+            <a:ext cx="822960" cy="769285"/>
           </a:xfrm>
           <a:prstGeom prst="rect">
             <a:avLst/>
@@ -2840,14 +3055,14 @@
       </p:sp>
       <p:sp>
         <p:nvSpPr>
-          <p:cNvPr id="55" name="Text 52"/>
-          <p:cNvSpPr/>
-          <p:nvPr/>
-        </p:nvSpPr>
-        <p:spPr>
-          <a:xfrm>
-            <a:off x="10140696" y="7341827"/>
-            <a:ext cx="822960" cy="206844"/>
+          <p:cNvPr id="59" name="Text 56"/>
+          <p:cNvSpPr/>
+          <p:nvPr/>
+        </p:nvSpPr>
+        <p:spPr>
+          <a:xfrm>
+            <a:off x="10140696" y="7789499"/>
+            <a:ext cx="822960" cy="219456"/>
           </a:xfrm>
           <a:prstGeom prst="rect">
             <a:avLst/>
@@ -2881,14 +3096,14 @@
       </p:sp>
       <p:sp>
         <p:nvSpPr>
-          <p:cNvPr id="56" name="Text 53"/>
-          <p:cNvSpPr/>
-          <p:nvPr/>
-        </p:nvSpPr>
-        <p:spPr>
-          <a:xfrm>
-            <a:off x="9912096" y="8385784"/>
-            <a:ext cx="1280160" cy="413687"/>
+          <p:cNvPr id="60" name="Text 57"/>
+          <p:cNvSpPr/>
+          <p:nvPr/>
+        </p:nvSpPr>
+        <p:spPr>
+          <a:xfrm>
+            <a:off x="9912096" y="8897112"/>
+            <a:ext cx="1280160" cy="438912"/>
           </a:xfrm>
           <a:prstGeom prst="rect">
             <a:avLst/>
@@ -2939,14 +3154,14 @@
       </p:sp>
       <p:sp>
         <p:nvSpPr>
-          <p:cNvPr id="57" name="Shape 54"/>
-          <p:cNvSpPr/>
-          <p:nvPr/>
-        </p:nvSpPr>
-        <p:spPr>
-          <a:xfrm>
-            <a:off x="11951208" y="7774561"/>
-            <a:ext cx="822960" cy="550893"/>
+          <p:cNvPr id="61" name="Shape 58"/>
+          <p:cNvSpPr/>
+          <p:nvPr/>
+        </p:nvSpPr>
+        <p:spPr>
+          <a:xfrm>
+            <a:off x="11951208" y="8248620"/>
+            <a:ext cx="822960" cy="584484"/>
           </a:xfrm>
           <a:prstGeom prst="rect">
             <a:avLst/>
@@ -2966,14 +3181,14 @@
       </p:sp>
       <p:sp>
         <p:nvSpPr>
-          <p:cNvPr id="58" name="Text 55"/>
-          <p:cNvSpPr/>
-          <p:nvPr/>
-        </p:nvSpPr>
-        <p:spPr>
-          <a:xfrm>
-            <a:off x="11951208" y="7516006"/>
-            <a:ext cx="822960" cy="206844"/>
+          <p:cNvPr id="62" name="Text 59"/>
+          <p:cNvSpPr/>
+          <p:nvPr/>
+        </p:nvSpPr>
+        <p:spPr>
+          <a:xfrm>
+            <a:off x="11951208" y="7974300"/>
+            <a:ext cx="822960" cy="219456"/>
           </a:xfrm>
           <a:prstGeom prst="rect">
             <a:avLst/>
@@ -3007,14 +3222,14 @@
       </p:sp>
       <p:sp>
         <p:nvSpPr>
-          <p:cNvPr id="59" name="Text 56"/>
-          <p:cNvSpPr/>
-          <p:nvPr/>
-        </p:nvSpPr>
-        <p:spPr>
-          <a:xfrm>
-            <a:off x="11722608" y="8385784"/>
-            <a:ext cx="1280160" cy="413687"/>
+          <p:cNvPr id="63" name="Text 60"/>
+          <p:cNvSpPr/>
+          <p:nvPr/>
+        </p:nvSpPr>
+        <p:spPr>
+          <a:xfrm>
+            <a:off x="11722608" y="8897112"/>
+            <a:ext cx="1280160" cy="438912"/>
           </a:xfrm>
           <a:prstGeom prst="rect">
             <a:avLst/>
@@ -3065,14 +3280,14 @@
       </p:sp>
       <p:sp>
         <p:nvSpPr>
-          <p:cNvPr id="60" name="Text 57"/>
-          <p:cNvSpPr/>
-          <p:nvPr/>
-        </p:nvSpPr>
-        <p:spPr>
-          <a:xfrm>
-            <a:off x="5989320" y="8877037"/>
-            <a:ext cx="7498080" cy="215462"/>
+          <p:cNvPr id="64" name="Text 61"/>
+          <p:cNvSpPr/>
+          <p:nvPr/>
+        </p:nvSpPr>
+        <p:spPr>
+          <a:xfrm>
+            <a:off x="5989320" y="9418320"/>
+            <a:ext cx="7498080" cy="228600"/>
           </a:xfrm>
           <a:prstGeom prst="rect">
             <a:avLst/>
@@ -3106,14 +3321,14 @@
       </p:sp>
       <p:sp>
         <p:nvSpPr>
-          <p:cNvPr id="61" name="Text 58"/>
-          <p:cNvSpPr/>
-          <p:nvPr/>
-        </p:nvSpPr>
-        <p:spPr>
-          <a:xfrm>
-            <a:off x="5989320" y="9152829"/>
-            <a:ext cx="7680960" cy="258554"/>
+          <p:cNvPr id="65" name="Text 62"/>
+          <p:cNvSpPr/>
+          <p:nvPr/>
+        </p:nvSpPr>
+        <p:spPr>
+          <a:xfrm>
+            <a:off x="5989320" y="9710928"/>
+            <a:ext cx="7680960" cy="274320"/>
           </a:xfrm>
           <a:prstGeom prst="rect">
             <a:avLst/>
@@ -3147,14 +3362,14 @@
       </p:sp>
       <p:sp>
         <p:nvSpPr>
-          <p:cNvPr id="62" name="Shape 59"/>
-          <p:cNvSpPr/>
-          <p:nvPr/>
-        </p:nvSpPr>
-        <p:spPr>
-          <a:xfrm>
-            <a:off x="548640" y="9523423"/>
-            <a:ext cx="6492240" cy="293028"/>
+          <p:cNvPr id="66" name="Shape 63"/>
+          <p:cNvSpPr/>
+          <p:nvPr/>
+        </p:nvSpPr>
+        <p:spPr>
+          <a:xfrm>
+            <a:off x="548640" y="10104120"/>
+            <a:ext cx="6492240" cy="310896"/>
           </a:xfrm>
           <a:prstGeom prst="rect">
             <a:avLst/>
@@ -3174,14 +3389,14 @@
       </p:sp>
       <p:sp>
         <p:nvSpPr>
-          <p:cNvPr id="63" name="Text 60"/>
-          <p:cNvSpPr/>
-          <p:nvPr/>
-        </p:nvSpPr>
-        <p:spPr>
-          <a:xfrm>
-            <a:off x="658368" y="9553588"/>
-            <a:ext cx="6309360" cy="206844"/>
+          <p:cNvPr id="67" name="Text 64"/>
+          <p:cNvSpPr/>
+          <p:nvPr/>
+        </p:nvSpPr>
+        <p:spPr>
+          <a:xfrm>
+            <a:off x="658368" y="10136124"/>
+            <a:ext cx="6309360" cy="219456"/>
           </a:xfrm>
           <a:prstGeom prst="rect">
             <a:avLst/>
@@ -3215,14 +3430,14 @@
       </p:sp>
       <p:sp>
         <p:nvSpPr>
-          <p:cNvPr id="64" name="Shape 61"/>
-          <p:cNvSpPr/>
-          <p:nvPr/>
-        </p:nvSpPr>
-        <p:spPr>
-          <a:xfrm>
-            <a:off x="7498080" y="9523423"/>
-            <a:ext cx="6583680" cy="293028"/>
+          <p:cNvPr id="68" name="Shape 65"/>
+          <p:cNvSpPr/>
+          <p:nvPr/>
+        </p:nvSpPr>
+        <p:spPr>
+          <a:xfrm>
+            <a:off x="7498080" y="10104120"/>
+            <a:ext cx="6583680" cy="310896"/>
           </a:xfrm>
           <a:prstGeom prst="rect">
             <a:avLst/>
@@ -3242,14 +3457,14 @@
       </p:sp>
       <p:sp>
         <p:nvSpPr>
-          <p:cNvPr id="65" name="Text 62"/>
-          <p:cNvSpPr/>
-          <p:nvPr/>
-        </p:nvSpPr>
-        <p:spPr>
-          <a:xfrm>
-            <a:off x="7607808" y="9553588"/>
-            <a:ext cx="6400800" cy="206844"/>
+          <p:cNvPr id="69" name="Text 66"/>
+          <p:cNvSpPr/>
+          <p:nvPr/>
+        </p:nvSpPr>
+        <p:spPr>
+          <a:xfrm>
+            <a:off x="7607808" y="10136124"/>
+            <a:ext cx="6400800" cy="219456"/>
           </a:xfrm>
           <a:prstGeom prst="rect">
             <a:avLst/>
@@ -3283,14 +3498,14 @@
       </p:sp>
       <p:sp>
         <p:nvSpPr>
-          <p:cNvPr id="66" name="Text 63"/>
-          <p:cNvSpPr/>
-          <p:nvPr/>
-        </p:nvSpPr>
-        <p:spPr>
-          <a:xfrm>
-            <a:off x="594360" y="9928492"/>
-            <a:ext cx="6400800" cy="293028"/>
+          <p:cNvPr id="70" name="Text 67"/>
+          <p:cNvSpPr/>
+          <p:nvPr/>
+        </p:nvSpPr>
+        <p:spPr>
+          <a:xfrm>
+            <a:off x="594360" y="10533888"/>
+            <a:ext cx="6400800" cy="310896"/>
           </a:xfrm>
           <a:prstGeom prst="rect">
             <a:avLst/>
@@ -3324,14 +3539,14 @@
       </p:sp>
       <p:sp>
         <p:nvSpPr>
-          <p:cNvPr id="67" name="Text 64"/>
-          <p:cNvSpPr/>
-          <p:nvPr/>
-        </p:nvSpPr>
-        <p:spPr>
-          <a:xfrm>
-            <a:off x="7543800" y="9928492"/>
-            <a:ext cx="6400800" cy="293028"/>
+          <p:cNvPr id="71" name="Text 68"/>
+          <p:cNvSpPr/>
+          <p:nvPr/>
+        </p:nvSpPr>
+        <p:spPr>
+          <a:xfrm>
+            <a:off x="7543800" y="10533888"/>
+            <a:ext cx="6400800" cy="310896"/>
           </a:xfrm>
           <a:prstGeom prst="rect">
             <a:avLst/>
@@ -3365,14 +3580,14 @@
       </p:sp>
       <p:sp>
         <p:nvSpPr>
-          <p:cNvPr id="68" name="Text 65"/>
-          <p:cNvSpPr/>
-          <p:nvPr/>
-        </p:nvSpPr>
-        <p:spPr>
-          <a:xfrm>
-            <a:off x="1097280" y="10592115"/>
-            <a:ext cx="5440680" cy="189607"/>
+          <p:cNvPr id="72" name="Text 69"/>
+          <p:cNvSpPr/>
+          <p:nvPr/>
+        </p:nvSpPr>
+        <p:spPr>
+          <a:xfrm>
+            <a:off x="1097280" y="11237976"/>
+            <a:ext cx="5440680" cy="201168"/>
           </a:xfrm>
           <a:prstGeom prst="rect">
             <a:avLst/>
@@ -3406,13 +3621,13 @@
       </p:sp>
       <p:sp>
         <p:nvSpPr>
-          <p:cNvPr id="69" name="Shape 66"/>
-          <p:cNvSpPr/>
-          <p:nvPr/>
-        </p:nvSpPr>
-        <p:spPr>
-          <a:xfrm>
-            <a:off x="1097280" y="13401741"/>
+          <p:cNvPr id="73" name="Shape 70"/>
+          <p:cNvSpPr/>
+          <p:nvPr/>
+        </p:nvSpPr>
+        <p:spPr>
+          <a:xfrm>
+            <a:off x="1097280" y="14218920"/>
             <a:ext cx="5440680" cy="914"/>
           </a:xfrm>
           <a:prstGeom prst="line">
@@ -3429,14 +3644,14 @@
       </p:sp>
       <p:sp>
         <p:nvSpPr>
-          <p:cNvPr id="70" name="Text 67"/>
-          <p:cNvSpPr/>
-          <p:nvPr/>
-        </p:nvSpPr>
-        <p:spPr>
-          <a:xfrm>
-            <a:off x="768096" y="13315556"/>
-            <a:ext cx="228600" cy="172370"/>
+          <p:cNvPr id="74" name="Text 71"/>
+          <p:cNvSpPr/>
+          <p:nvPr/>
+        </p:nvSpPr>
+        <p:spPr>
+          <a:xfrm>
+            <a:off x="768096" y="14127480"/>
+            <a:ext cx="228600" cy="182880"/>
           </a:xfrm>
           <a:prstGeom prst="rect">
             <a:avLst/>
@@ -3470,13 +3685,13 @@
       </p:sp>
       <p:sp>
         <p:nvSpPr>
-          <p:cNvPr id="71" name="Shape 68"/>
-          <p:cNvSpPr/>
-          <p:nvPr/>
-        </p:nvSpPr>
-        <p:spPr>
-          <a:xfrm>
-            <a:off x="1097280" y="12776901"/>
+          <p:cNvPr id="75" name="Shape 72"/>
+          <p:cNvSpPr/>
+          <p:nvPr/>
+        </p:nvSpPr>
+        <p:spPr>
+          <a:xfrm>
+            <a:off x="1097280" y="13555980"/>
             <a:ext cx="5440680" cy="914"/>
           </a:xfrm>
           <a:prstGeom prst="line">
@@ -3493,14 +3708,14 @@
       </p:sp>
       <p:sp>
         <p:nvSpPr>
-          <p:cNvPr id="72" name="Text 69"/>
-          <p:cNvSpPr/>
-          <p:nvPr/>
-        </p:nvSpPr>
-        <p:spPr>
-          <a:xfrm>
-            <a:off x="768096" y="12690716"/>
-            <a:ext cx="228600" cy="172370"/>
+          <p:cNvPr id="76" name="Text 73"/>
+          <p:cNvSpPr/>
+          <p:nvPr/>
+        </p:nvSpPr>
+        <p:spPr>
+          <a:xfrm>
+            <a:off x="768096" y="13464540"/>
+            <a:ext cx="228600" cy="182880"/>
           </a:xfrm>
           <a:prstGeom prst="rect">
             <a:avLst/>
@@ -3534,13 +3749,13 @@
       </p:sp>
       <p:sp>
         <p:nvSpPr>
-          <p:cNvPr id="73" name="Shape 70"/>
-          <p:cNvSpPr/>
-          <p:nvPr/>
-        </p:nvSpPr>
-        <p:spPr>
-          <a:xfrm>
-            <a:off x="1097280" y="12152061"/>
+          <p:cNvPr id="77" name="Shape 74"/>
+          <p:cNvSpPr/>
+          <p:nvPr/>
+        </p:nvSpPr>
+        <p:spPr>
+          <a:xfrm>
+            <a:off x="1097280" y="12893040"/>
             <a:ext cx="5440680" cy="914"/>
           </a:xfrm>
           <a:prstGeom prst="line">
@@ -3557,14 +3772,14 @@
       </p:sp>
       <p:sp>
         <p:nvSpPr>
-          <p:cNvPr id="74" name="Text 71"/>
-          <p:cNvSpPr/>
-          <p:nvPr/>
-        </p:nvSpPr>
-        <p:spPr>
-          <a:xfrm>
-            <a:off x="768096" y="12065876"/>
-            <a:ext cx="228600" cy="172370"/>
+          <p:cNvPr id="78" name="Text 75"/>
+          <p:cNvSpPr/>
+          <p:nvPr/>
+        </p:nvSpPr>
+        <p:spPr>
+          <a:xfrm>
+            <a:off x="768096" y="12801600"/>
+            <a:ext cx="228600" cy="182880"/>
           </a:xfrm>
           <a:prstGeom prst="rect">
             <a:avLst/>
@@ -3598,13 +3813,13 @@
       </p:sp>
       <p:sp>
         <p:nvSpPr>
-          <p:cNvPr id="75" name="Shape 72"/>
-          <p:cNvSpPr/>
-          <p:nvPr/>
-        </p:nvSpPr>
-        <p:spPr>
-          <a:xfrm>
-            <a:off x="1097280" y="11527221"/>
+          <p:cNvPr id="79" name="Shape 76"/>
+          <p:cNvSpPr/>
+          <p:nvPr/>
+        </p:nvSpPr>
+        <p:spPr>
+          <a:xfrm>
+            <a:off x="1097280" y="12230100"/>
             <a:ext cx="5440680" cy="914"/>
           </a:xfrm>
           <a:prstGeom prst="line">
@@ -3621,14 +3836,14 @@
       </p:sp>
       <p:sp>
         <p:nvSpPr>
-          <p:cNvPr id="76" name="Text 73"/>
-          <p:cNvSpPr/>
-          <p:nvPr/>
-        </p:nvSpPr>
-        <p:spPr>
-          <a:xfrm>
-            <a:off x="768096" y="11441036"/>
-            <a:ext cx="228600" cy="172370"/>
+          <p:cNvPr id="80" name="Text 77"/>
+          <p:cNvSpPr/>
+          <p:nvPr/>
+        </p:nvSpPr>
+        <p:spPr>
+          <a:xfrm>
+            <a:off x="768096" y="12138660"/>
+            <a:ext cx="228600" cy="182880"/>
           </a:xfrm>
           <a:prstGeom prst="rect">
             <a:avLst/>
@@ -3662,14 +3877,14 @@
       </p:sp>
       <p:sp>
         <p:nvSpPr>
-          <p:cNvPr id="77" name="Text 74"/>
-          <p:cNvSpPr/>
-          <p:nvPr/>
-        </p:nvSpPr>
-        <p:spPr>
-          <a:xfrm>
-            <a:off x="941832" y="13505162"/>
-            <a:ext cx="320040" cy="198225"/>
+          <p:cNvPr id="81" name="Text 78"/>
+          <p:cNvSpPr/>
+          <p:nvPr/>
+        </p:nvSpPr>
+        <p:spPr>
+          <a:xfrm>
+            <a:off x="941832" y="14328648"/>
+            <a:ext cx="320040" cy="210312"/>
           </a:xfrm>
           <a:prstGeom prst="rect">
             <a:avLst/>
@@ -3703,14 +3918,14 @@
       </p:sp>
       <p:sp>
         <p:nvSpPr>
-          <p:cNvPr id="78" name="Text 75"/>
-          <p:cNvSpPr/>
-          <p:nvPr/>
-        </p:nvSpPr>
-        <p:spPr>
-          <a:xfrm>
-            <a:off x="1778860" y="13505162"/>
-            <a:ext cx="320040" cy="198225"/>
+          <p:cNvPr id="82" name="Text 79"/>
+          <p:cNvSpPr/>
+          <p:nvPr/>
+        </p:nvSpPr>
+        <p:spPr>
+          <a:xfrm>
+            <a:off x="1778860" y="14328648"/>
+            <a:ext cx="320040" cy="210312"/>
           </a:xfrm>
           <a:prstGeom prst="rect">
             <a:avLst/>
@@ -3744,14 +3959,14 @@
       </p:sp>
       <p:sp>
         <p:nvSpPr>
-          <p:cNvPr id="79" name="Text 76"/>
-          <p:cNvSpPr/>
-          <p:nvPr/>
-        </p:nvSpPr>
-        <p:spPr>
-          <a:xfrm>
-            <a:off x="2615887" y="13505162"/>
-            <a:ext cx="320040" cy="198225"/>
+          <p:cNvPr id="83" name="Text 80"/>
+          <p:cNvSpPr/>
+          <p:nvPr/>
+        </p:nvSpPr>
+        <p:spPr>
+          <a:xfrm>
+            <a:off x="2615887" y="14328648"/>
+            <a:ext cx="320040" cy="210312"/>
           </a:xfrm>
           <a:prstGeom prst="rect">
             <a:avLst/>
@@ -3785,14 +4000,14 @@
       </p:sp>
       <p:sp>
         <p:nvSpPr>
-          <p:cNvPr id="80" name="Text 77"/>
-          <p:cNvSpPr/>
-          <p:nvPr/>
-        </p:nvSpPr>
-        <p:spPr>
-          <a:xfrm>
-            <a:off x="3452915" y="13505162"/>
-            <a:ext cx="320040" cy="198225"/>
+          <p:cNvPr id="84" name="Text 81"/>
+          <p:cNvSpPr/>
+          <p:nvPr/>
+        </p:nvSpPr>
+        <p:spPr>
+          <a:xfrm>
+            <a:off x="3452915" y="14328648"/>
+            <a:ext cx="320040" cy="210312"/>
           </a:xfrm>
           <a:prstGeom prst="rect">
             <a:avLst/>
@@ -3826,14 +4041,14 @@
       </p:sp>
       <p:sp>
         <p:nvSpPr>
-          <p:cNvPr id="81" name="Text 78"/>
-          <p:cNvSpPr/>
-          <p:nvPr/>
-        </p:nvSpPr>
-        <p:spPr>
-          <a:xfrm>
-            <a:off x="4289943" y="13505162"/>
-            <a:ext cx="320040" cy="198225"/>
+          <p:cNvPr id="85" name="Text 82"/>
+          <p:cNvSpPr/>
+          <p:nvPr/>
+        </p:nvSpPr>
+        <p:spPr>
+          <a:xfrm>
+            <a:off x="4289943" y="14328648"/>
+            <a:ext cx="320040" cy="210312"/>
           </a:xfrm>
           <a:prstGeom prst="rect">
             <a:avLst/>
@@ -3867,14 +4082,14 @@
       </p:sp>
       <p:sp>
         <p:nvSpPr>
-          <p:cNvPr id="82" name="Text 79"/>
-          <p:cNvSpPr/>
-          <p:nvPr/>
-        </p:nvSpPr>
-        <p:spPr>
-          <a:xfrm>
-            <a:off x="5126970" y="13505162"/>
-            <a:ext cx="320040" cy="198225"/>
+          <p:cNvPr id="86" name="Text 83"/>
+          <p:cNvSpPr/>
+          <p:nvPr/>
+        </p:nvSpPr>
+        <p:spPr>
+          <a:xfrm>
+            <a:off x="5126970" y="14328648"/>
+            <a:ext cx="320040" cy="210312"/>
           </a:xfrm>
           <a:prstGeom prst="rect">
             <a:avLst/>
@@ -3908,14 +4123,14 @@
       </p:sp>
       <p:sp>
         <p:nvSpPr>
-          <p:cNvPr id="83" name="Text 80"/>
-          <p:cNvSpPr/>
-          <p:nvPr/>
-        </p:nvSpPr>
-        <p:spPr>
-          <a:xfrm>
-            <a:off x="5963998" y="13505162"/>
-            <a:ext cx="320040" cy="198225"/>
+          <p:cNvPr id="87" name="Text 84"/>
+          <p:cNvSpPr/>
+          <p:nvPr/>
+        </p:nvSpPr>
+        <p:spPr>
+          <a:xfrm>
+            <a:off x="5963998" y="14328648"/>
+            <a:ext cx="320040" cy="210312"/>
           </a:xfrm>
           <a:prstGeom prst="rect">
             <a:avLst/>
@@ -3949,14 +4164,14 @@
       </p:sp>
       <p:sp>
         <p:nvSpPr>
-          <p:cNvPr id="84" name="Shape 81"/>
-          <p:cNvSpPr/>
-          <p:nvPr/>
-        </p:nvSpPr>
-        <p:spPr>
-          <a:xfrm flipV="1">
-            <a:off x="1097280" y="13280284"/>
-            <a:ext cx="83703" cy="11280"/>
+          <p:cNvPr id="88" name="Shape 85"/>
+          <p:cNvSpPr/>
+          <p:nvPr/>
+        </p:nvSpPr>
+        <p:spPr>
+          <a:xfrm flipV="1">
+            <a:off x="1097280" y="14090058"/>
+            <a:ext cx="83703" cy="11968"/>
           </a:xfrm>
           <a:prstGeom prst="line">
             <a:avLst/>
@@ -3972,14 +4187,14 @@
       </p:sp>
       <p:sp>
         <p:nvSpPr>
-          <p:cNvPr id="85" name="Shape 82"/>
-          <p:cNvSpPr/>
-          <p:nvPr/>
-        </p:nvSpPr>
-        <p:spPr>
-          <a:xfrm flipV="1">
-            <a:off x="1180983" y="13268927"/>
-            <a:ext cx="83703" cy="11357"/>
+          <p:cNvPr id="89" name="Shape 86"/>
+          <p:cNvSpPr/>
+          <p:nvPr/>
+        </p:nvSpPr>
+        <p:spPr>
+          <a:xfrm flipV="1">
+            <a:off x="1180983" y="14078008"/>
+            <a:ext cx="83703" cy="12050"/>
           </a:xfrm>
           <a:prstGeom prst="line">
             <a:avLst/>
@@ -3995,14 +4210,14 @@
       </p:sp>
       <p:sp>
         <p:nvSpPr>
-          <p:cNvPr id="86" name="Shape 83"/>
-          <p:cNvSpPr/>
-          <p:nvPr/>
-        </p:nvSpPr>
-        <p:spPr>
-          <a:xfrm flipV="1">
-            <a:off x="1264686" y="13257485"/>
-            <a:ext cx="83703" cy="11442"/>
+          <p:cNvPr id="90" name="Shape 87"/>
+          <p:cNvSpPr/>
+          <p:nvPr/>
+        </p:nvSpPr>
+        <p:spPr>
+          <a:xfrm flipV="1">
+            <a:off x="1264686" y="14065868"/>
+            <a:ext cx="83703" cy="12140"/>
           </a:xfrm>
           <a:prstGeom prst="line">
             <a:avLst/>
@@ -4018,14 +4233,14 @@
       </p:sp>
       <p:sp>
         <p:nvSpPr>
-          <p:cNvPr id="87" name="Shape 84"/>
-          <p:cNvSpPr/>
-          <p:nvPr/>
-        </p:nvSpPr>
-        <p:spPr>
-          <a:xfrm flipV="1">
-            <a:off x="1348388" y="13245951"/>
-            <a:ext cx="83703" cy="11534"/>
+          <p:cNvPr id="91" name="Shape 88"/>
+          <p:cNvSpPr/>
+          <p:nvPr/>
+        </p:nvSpPr>
+        <p:spPr>
+          <a:xfrm flipV="1">
+            <a:off x="1348388" y="14053630"/>
+            <a:ext cx="83703" cy="12238"/>
           </a:xfrm>
           <a:prstGeom prst="line">
             <a:avLst/>
@@ -4041,14 +4256,14 @@
       </p:sp>
       <p:sp>
         <p:nvSpPr>
-          <p:cNvPr id="88" name="Shape 85"/>
-          <p:cNvSpPr/>
-          <p:nvPr/>
-        </p:nvSpPr>
-        <p:spPr>
-          <a:xfrm flipV="1">
-            <a:off x="1432091" y="13234315"/>
-            <a:ext cx="83703" cy="11635"/>
+          <p:cNvPr id="92" name="Shape 89"/>
+          <p:cNvSpPr/>
+          <p:nvPr/>
+        </p:nvSpPr>
+        <p:spPr>
+          <a:xfrm flipV="1">
+            <a:off x="1432091" y="14041286"/>
+            <a:ext cx="83703" cy="12345"/>
           </a:xfrm>
           <a:prstGeom prst="line">
             <a:avLst/>
@@ -4064,14 +4279,14 @@
       </p:sp>
       <p:sp>
         <p:nvSpPr>
-          <p:cNvPr id="89" name="Shape 86"/>
-          <p:cNvSpPr/>
-          <p:nvPr/>
-        </p:nvSpPr>
-        <p:spPr>
-          <a:xfrm flipV="1">
-            <a:off x="1515794" y="13222571"/>
-            <a:ext cx="83703" cy="11745"/>
+          <p:cNvPr id="93" name="Shape 90"/>
+          <p:cNvSpPr/>
+          <p:nvPr/>
+        </p:nvSpPr>
+        <p:spPr>
+          <a:xfrm flipV="1">
+            <a:off x="1515794" y="14028825"/>
+            <a:ext cx="83703" cy="12461"/>
           </a:xfrm>
           <a:prstGeom prst="line">
             <a:avLst/>
@@ -4087,14 +4302,14 @@
       </p:sp>
       <p:sp>
         <p:nvSpPr>
-          <p:cNvPr id="90" name="Shape 87"/>
-          <p:cNvSpPr/>
-          <p:nvPr/>
-        </p:nvSpPr>
-        <p:spPr>
-          <a:xfrm flipV="1">
-            <a:off x="1599497" y="13210708"/>
-            <a:ext cx="83703" cy="11863"/>
+          <p:cNvPr id="94" name="Shape 91"/>
+          <p:cNvSpPr/>
+          <p:nvPr/>
+        </p:nvSpPr>
+        <p:spPr>
+          <a:xfrm flipV="1">
+            <a:off x="1599497" y="14016239"/>
+            <a:ext cx="83703" cy="12586"/>
           </a:xfrm>
           <a:prstGeom prst="line">
             <a:avLst/>
@@ -4110,14 +4325,14 @@
       </p:sp>
       <p:sp>
         <p:nvSpPr>
-          <p:cNvPr id="91" name="Shape 88"/>
-          <p:cNvSpPr/>
-          <p:nvPr/>
-        </p:nvSpPr>
-        <p:spPr>
-          <a:xfrm flipV="1">
-            <a:off x="1683199" y="13198718"/>
-            <a:ext cx="83703" cy="11990"/>
+          <p:cNvPr id="95" name="Shape 92"/>
+          <p:cNvSpPr/>
+          <p:nvPr/>
+        </p:nvSpPr>
+        <p:spPr>
+          <a:xfrm flipV="1">
+            <a:off x="1683199" y="14003518"/>
+            <a:ext cx="83703" cy="12721"/>
           </a:xfrm>
           <a:prstGeom prst="line">
             <a:avLst/>
@@ -4133,14 +4348,14 @@
       </p:sp>
       <p:sp>
         <p:nvSpPr>
-          <p:cNvPr id="92" name="Shape 89"/>
-          <p:cNvSpPr/>
-          <p:nvPr/>
-        </p:nvSpPr>
-        <p:spPr>
-          <a:xfrm flipV="1">
-            <a:off x="1766902" y="13186591"/>
-            <a:ext cx="83703" cy="12127"/>
+          <p:cNvPr id="96" name="Shape 93"/>
+          <p:cNvSpPr/>
+          <p:nvPr/>
+        </p:nvSpPr>
+        <p:spPr>
+          <a:xfrm flipV="1">
+            <a:off x="1766902" y="13990651"/>
+            <a:ext cx="83703" cy="12866"/>
           </a:xfrm>
           <a:prstGeom prst="line">
             <a:avLst/>
@@ -4156,14 +4371,14 @@
       </p:sp>
       <p:sp>
         <p:nvSpPr>
-          <p:cNvPr id="93" name="Shape 90"/>
-          <p:cNvSpPr/>
-          <p:nvPr/>
-        </p:nvSpPr>
-        <p:spPr>
-          <a:xfrm flipV="1">
-            <a:off x="1850605" y="13174318"/>
-            <a:ext cx="83703" cy="12273"/>
+          <p:cNvPr id="97" name="Shape 94"/>
+          <p:cNvSpPr/>
+          <p:nvPr/>
+        </p:nvSpPr>
+        <p:spPr>
+          <a:xfrm flipV="1">
+            <a:off x="1850605" y="13977630"/>
+            <a:ext cx="83703" cy="13022"/>
           </a:xfrm>
           <a:prstGeom prst="line">
             <a:avLst/>
@@ -4179,14 +4394,14 @@
       </p:sp>
       <p:sp>
         <p:nvSpPr>
-          <p:cNvPr id="94" name="Shape 91"/>
-          <p:cNvSpPr/>
-          <p:nvPr/>
-        </p:nvSpPr>
-        <p:spPr>
-          <a:xfrm flipV="1">
-            <a:off x="1934308" y="13161887"/>
-            <a:ext cx="83703" cy="12430"/>
+          <p:cNvPr id="98" name="Shape 95"/>
+          <p:cNvSpPr/>
+          <p:nvPr/>
+        </p:nvSpPr>
+        <p:spPr>
+          <a:xfrm flipV="1">
+            <a:off x="1934308" y="13964441"/>
+            <a:ext cx="83703" cy="13188"/>
           </a:xfrm>
           <a:prstGeom prst="line">
             <a:avLst/>
@@ -4202,14 +4417,14 @@
       </p:sp>
       <p:sp>
         <p:nvSpPr>
-          <p:cNvPr id="95" name="Shape 92"/>
-          <p:cNvSpPr/>
-          <p:nvPr/>
-        </p:nvSpPr>
-        <p:spPr>
-          <a:xfrm flipV="1">
-            <a:off x="2018010" y="13149289"/>
-            <a:ext cx="83703" cy="12598"/>
+          <p:cNvPr id="99" name="Shape 96"/>
+          <p:cNvSpPr/>
+          <p:nvPr/>
+        </p:nvSpPr>
+        <p:spPr>
+          <a:xfrm flipV="1">
+            <a:off x="2018010" y="13951075"/>
+            <a:ext cx="83703" cy="13366"/>
           </a:xfrm>
           <a:prstGeom prst="line">
             <a:avLst/>
@@ -4225,14 +4440,14 @@
       </p:sp>
       <p:sp>
         <p:nvSpPr>
-          <p:cNvPr id="96" name="Shape 93"/>
-          <p:cNvSpPr/>
-          <p:nvPr/>
-        </p:nvSpPr>
-        <p:spPr>
-          <a:xfrm flipV="1">
-            <a:off x="2101713" y="13136512"/>
-            <a:ext cx="83703" cy="12777"/>
+          <p:cNvPr id="100" name="Shape 97"/>
+          <p:cNvSpPr/>
+          <p:nvPr/>
+        </p:nvSpPr>
+        <p:spPr>
+          <a:xfrm flipV="1">
+            <a:off x="2101713" y="13937519"/>
+            <a:ext cx="83703" cy="13556"/>
           </a:xfrm>
           <a:prstGeom prst="line">
             <a:avLst/>
@@ -4248,14 +4463,14 @@
       </p:sp>
       <p:sp>
         <p:nvSpPr>
-          <p:cNvPr id="97" name="Shape 94"/>
-          <p:cNvSpPr/>
-          <p:nvPr/>
-        </p:nvSpPr>
-        <p:spPr>
-          <a:xfrm flipV="1">
-            <a:off x="2185416" y="13123544"/>
-            <a:ext cx="83703" cy="12968"/>
+          <p:cNvPr id="101" name="Shape 98"/>
+          <p:cNvSpPr/>
+          <p:nvPr/>
+        </p:nvSpPr>
+        <p:spPr>
+          <a:xfrm flipV="1">
+            <a:off x="2185416" y="13923760"/>
+            <a:ext cx="83703" cy="13759"/>
           </a:xfrm>
           <a:prstGeom prst="line">
             <a:avLst/>
@@ -4271,14 +4486,14 @@
       </p:sp>
       <p:sp>
         <p:nvSpPr>
-          <p:cNvPr id="98" name="Shape 95"/>
-          <p:cNvSpPr/>
-          <p:nvPr/>
-        </p:nvSpPr>
-        <p:spPr>
-          <a:xfrm flipV="1">
-            <a:off x="2269119" y="13110373"/>
-            <a:ext cx="83703" cy="13171"/>
+          <p:cNvPr id="102" name="Shape 99"/>
+          <p:cNvSpPr/>
+          <p:nvPr/>
+        </p:nvSpPr>
+        <p:spPr>
+          <a:xfrm flipV="1">
+            <a:off x="2269119" y="13909786"/>
+            <a:ext cx="83703" cy="13974"/>
           </a:xfrm>
           <a:prstGeom prst="line">
             <a:avLst/>
@@ -4294,14 +4509,14 @@
       </p:sp>
       <p:sp>
         <p:nvSpPr>
-          <p:cNvPr id="99" name="Shape 96"/>
-          <p:cNvSpPr/>
-          <p:nvPr/>
-        </p:nvSpPr>
-        <p:spPr>
-          <a:xfrm flipV="1">
-            <a:off x="2352822" y="13096986"/>
-            <a:ext cx="83703" cy="13387"/>
+          <p:cNvPr id="103" name="Shape 100"/>
+          <p:cNvSpPr/>
+          <p:nvPr/>
+        </p:nvSpPr>
+        <p:spPr>
+          <a:xfrm flipV="1">
+            <a:off x="2352822" y="13895583"/>
+            <a:ext cx="83703" cy="14203"/>
           </a:xfrm>
           <a:prstGeom prst="line">
             <a:avLst/>
@@ -4317,14 +4532,14 @@
       </p:sp>
       <p:sp>
         <p:nvSpPr>
-          <p:cNvPr id="100" name="Shape 97"/>
-          <p:cNvSpPr/>
-          <p:nvPr/>
-        </p:nvSpPr>
-        <p:spPr>
-          <a:xfrm flipV="1">
-            <a:off x="2436524" y="13083369"/>
-            <a:ext cx="83703" cy="13617"/>
+          <p:cNvPr id="104" name="Shape 101"/>
+          <p:cNvSpPr/>
+          <p:nvPr/>
+        </p:nvSpPr>
+        <p:spPr>
+          <a:xfrm flipV="1">
+            <a:off x="2436524" y="13881135"/>
+            <a:ext cx="83703" cy="14447"/>
           </a:xfrm>
           <a:prstGeom prst="line">
             <a:avLst/>
@@ -4340,14 +4555,14 @@
       </p:sp>
       <p:sp>
         <p:nvSpPr>
-          <p:cNvPr id="101" name="Shape 98"/>
-          <p:cNvSpPr/>
-          <p:nvPr/>
-        </p:nvSpPr>
-        <p:spPr>
-          <a:xfrm flipV="1">
-            <a:off x="2520227" y="13069507"/>
-            <a:ext cx="83703" cy="13861"/>
+          <p:cNvPr id="105" name="Shape 102"/>
+          <p:cNvSpPr/>
+          <p:nvPr/>
+        </p:nvSpPr>
+        <p:spPr>
+          <a:xfrm flipV="1">
+            <a:off x="2520227" y="13866429"/>
+            <a:ext cx="83703" cy="14707"/>
           </a:xfrm>
           <a:prstGeom prst="line">
             <a:avLst/>
@@ -4363,14 +4578,14 @@
       </p:sp>
       <p:sp>
         <p:nvSpPr>
-          <p:cNvPr id="102" name="Shape 99"/>
-          <p:cNvSpPr/>
-          <p:nvPr/>
-        </p:nvSpPr>
-        <p:spPr>
-          <a:xfrm flipV="1">
-            <a:off x="2603930" y="13055386"/>
-            <a:ext cx="83703" cy="14121"/>
+          <p:cNvPr id="106" name="Shape 103"/>
+          <p:cNvSpPr/>
+          <p:nvPr/>
+        </p:nvSpPr>
+        <p:spPr>
+          <a:xfrm flipV="1">
+            <a:off x="2603930" y="13851446"/>
+            <a:ext cx="83703" cy="14982"/>
           </a:xfrm>
           <a:prstGeom prst="line">
             <a:avLst/>
@@ -4386,14 +4601,14 @@
       </p:sp>
       <p:sp>
         <p:nvSpPr>
-          <p:cNvPr id="103" name="Shape 100"/>
-          <p:cNvSpPr/>
-          <p:nvPr/>
-        </p:nvSpPr>
-        <p:spPr>
-          <a:xfrm flipV="1">
-            <a:off x="2687633" y="13040989"/>
-            <a:ext cx="83703" cy="14397"/>
+          <p:cNvPr id="107" name="Shape 104"/>
+          <p:cNvSpPr/>
+          <p:nvPr/>
+        </p:nvSpPr>
+        <p:spPr>
+          <a:xfrm flipV="1">
+            <a:off x="2687633" y="13836171"/>
+            <a:ext cx="83703" cy="15275"/>
           </a:xfrm>
           <a:prstGeom prst="line">
             <a:avLst/>
@@ -4409,14 +4624,14 @@
       </p:sp>
       <p:sp>
         <p:nvSpPr>
-          <p:cNvPr id="104" name="Shape 101"/>
-          <p:cNvSpPr/>
-          <p:nvPr/>
-        </p:nvSpPr>
-        <p:spPr>
-          <a:xfrm flipV="1">
-            <a:off x="2771335" y="13026299"/>
-            <a:ext cx="83703" cy="14690"/>
+          <p:cNvPr id="108" name="Shape 105"/>
+          <p:cNvSpPr/>
+          <p:nvPr/>
+        </p:nvSpPr>
+        <p:spPr>
+          <a:xfrm flipV="1">
+            <a:off x="2771335" y="13820585"/>
+            <a:ext cx="83703" cy="15586"/>
           </a:xfrm>
           <a:prstGeom prst="line">
             <a:avLst/>
@@ -4432,14 +4647,14 @@
       </p:sp>
       <p:sp>
         <p:nvSpPr>
-          <p:cNvPr id="105" name="Shape 102"/>
-          <p:cNvSpPr/>
-          <p:nvPr/>
-        </p:nvSpPr>
-        <p:spPr>
-          <a:xfrm flipV="1">
-            <a:off x="2855038" y="13011297"/>
-            <a:ext cx="83703" cy="15002"/>
+          <p:cNvPr id="109" name="Shape 106"/>
+          <p:cNvSpPr/>
+          <p:nvPr/>
+        </p:nvSpPr>
+        <p:spPr>
+          <a:xfrm flipV="1">
+            <a:off x="2855038" y="13804669"/>
+            <a:ext cx="83703" cy="15916"/>
           </a:xfrm>
           <a:prstGeom prst="line">
             <a:avLst/>
@@ -4455,14 +4670,14 @@
       </p:sp>
       <p:sp>
         <p:nvSpPr>
-          <p:cNvPr id="106" name="Shape 103"/>
-          <p:cNvSpPr/>
-          <p:nvPr/>
-        </p:nvSpPr>
-        <p:spPr>
-          <a:xfrm flipV="1">
-            <a:off x="2938741" y="12995965"/>
-            <a:ext cx="83703" cy="15332"/>
+          <p:cNvPr id="110" name="Shape 107"/>
+          <p:cNvSpPr/>
+          <p:nvPr/>
+        </p:nvSpPr>
+        <p:spPr>
+          <a:xfrm flipV="1">
+            <a:off x="2938741" y="13788402"/>
+            <a:ext cx="83703" cy="16267"/>
           </a:xfrm>
           <a:prstGeom prst="line">
             <a:avLst/>
@@ -4478,14 +4693,14 @@
       </p:sp>
       <p:sp>
         <p:nvSpPr>
-          <p:cNvPr id="107" name="Shape 104"/>
-          <p:cNvSpPr/>
-          <p:nvPr/>
-        </p:nvSpPr>
-        <p:spPr>
-          <a:xfrm flipV="1">
-            <a:off x="3022444" y="12980281"/>
-            <a:ext cx="83703" cy="15684"/>
+          <p:cNvPr id="111" name="Shape 108"/>
+          <p:cNvSpPr/>
+          <p:nvPr/>
+        </p:nvSpPr>
+        <p:spPr>
+          <a:xfrm flipV="1">
+            <a:off x="3022444" y="13771761"/>
+            <a:ext cx="83703" cy="16640"/>
           </a:xfrm>
           <a:prstGeom prst="line">
             <a:avLst/>
@@ -4501,14 +4716,14 @@
       </p:sp>
       <p:sp>
         <p:nvSpPr>
-          <p:cNvPr id="108" name="Shape 105"/>
-          <p:cNvSpPr/>
-          <p:nvPr/>
-        </p:nvSpPr>
-        <p:spPr>
-          <a:xfrm flipV="1">
-            <a:off x="3106146" y="12964223"/>
-            <a:ext cx="83703" cy="16058"/>
+          <p:cNvPr id="112" name="Shape 109"/>
+          <p:cNvSpPr/>
+          <p:nvPr/>
+        </p:nvSpPr>
+        <p:spPr>
+          <a:xfrm flipV="1">
+            <a:off x="3106146" y="13754724"/>
+            <a:ext cx="83703" cy="17037"/>
           </a:xfrm>
           <a:prstGeom prst="line">
             <a:avLst/>
@@ -4524,14 +4739,14 @@
       </p:sp>
       <p:sp>
         <p:nvSpPr>
-          <p:cNvPr id="109" name="Shape 106"/>
-          <p:cNvSpPr/>
-          <p:nvPr/>
-        </p:nvSpPr>
-        <p:spPr>
-          <a:xfrm flipV="1">
-            <a:off x="3189849" y="12947768"/>
-            <a:ext cx="83703" cy="16455"/>
+          <p:cNvPr id="113" name="Shape 110"/>
+          <p:cNvSpPr/>
+          <p:nvPr/>
+        </p:nvSpPr>
+        <p:spPr>
+          <a:xfrm flipV="1">
+            <a:off x="3189849" y="13737266"/>
+            <a:ext cx="83703" cy="17459"/>
           </a:xfrm>
           <a:prstGeom prst="line">
             <a:avLst/>
@@ -4547,14 +4762,14 @@
       </p:sp>
       <p:sp>
         <p:nvSpPr>
-          <p:cNvPr id="110" name="Shape 107"/>
-          <p:cNvSpPr/>
-          <p:nvPr/>
-        </p:nvSpPr>
-        <p:spPr>
-          <a:xfrm flipV="1">
-            <a:off x="3273552" y="12930890"/>
-            <a:ext cx="83703" cy="16878"/>
+          <p:cNvPr id="114" name="Shape 111"/>
+          <p:cNvSpPr/>
+          <p:nvPr/>
+        </p:nvSpPr>
+        <p:spPr>
+          <a:xfrm flipV="1">
+            <a:off x="3273552" y="13719359"/>
+            <a:ext cx="83703" cy="17907"/>
           </a:xfrm>
           <a:prstGeom prst="line">
             <a:avLst/>
@@ -4570,14 +4785,14 @@
       </p:sp>
       <p:sp>
         <p:nvSpPr>
-          <p:cNvPr id="111" name="Shape 108"/>
-          <p:cNvSpPr/>
-          <p:nvPr/>
-        </p:nvSpPr>
-        <p:spPr>
-          <a:xfrm flipV="1">
-            <a:off x="3357255" y="12913562"/>
-            <a:ext cx="83703" cy="17328"/>
+          <p:cNvPr id="115" name="Shape 112"/>
+          <p:cNvSpPr/>
+          <p:nvPr/>
+        </p:nvSpPr>
+        <p:spPr>
+          <a:xfrm flipV="1">
+            <a:off x="3357255" y="13700975"/>
+            <a:ext cx="83703" cy="18384"/>
           </a:xfrm>
           <a:prstGeom prst="line">
             <a:avLst/>
@@ -4593,14 +4808,14 @@
       </p:sp>
       <p:sp>
         <p:nvSpPr>
-          <p:cNvPr id="112" name="Shape 109"/>
-          <p:cNvSpPr/>
-          <p:nvPr/>
-        </p:nvSpPr>
-        <p:spPr>
-          <a:xfrm flipV="1">
-            <a:off x="3440958" y="12895755"/>
-            <a:ext cx="83703" cy="17807"/>
+          <p:cNvPr id="116" name="Shape 113"/>
+          <p:cNvSpPr/>
+          <p:nvPr/>
+        </p:nvSpPr>
+        <p:spPr>
+          <a:xfrm flipV="1">
+            <a:off x="3440958" y="13682082"/>
+            <a:ext cx="83703" cy="18893"/>
           </a:xfrm>
           <a:prstGeom prst="line">
             <a:avLst/>
@@ -4616,14 +4831,14 @@
       </p:sp>
       <p:sp>
         <p:nvSpPr>
-          <p:cNvPr id="113" name="Shape 110"/>
-          <p:cNvSpPr/>
-          <p:nvPr/>
-        </p:nvSpPr>
-        <p:spPr>
-          <a:xfrm flipV="1">
-            <a:off x="3524660" y="12877438"/>
-            <a:ext cx="83703" cy="18318"/>
+          <p:cNvPr id="117" name="Shape 114"/>
+          <p:cNvSpPr/>
+          <p:nvPr/>
+        </p:nvSpPr>
+        <p:spPr>
+          <a:xfrm flipV="1">
+            <a:off x="3524660" y="13662647"/>
+            <a:ext cx="83703" cy="19434"/>
           </a:xfrm>
           <a:prstGeom prst="line">
             <a:avLst/>
@@ -4639,14 +4854,14 @@
       </p:sp>
       <p:sp>
         <p:nvSpPr>
-          <p:cNvPr id="114" name="Shape 111"/>
-          <p:cNvSpPr/>
-          <p:nvPr/>
-        </p:nvSpPr>
-        <p:spPr>
-          <a:xfrm flipV="1">
-            <a:off x="3608363" y="12858576"/>
-            <a:ext cx="83703" cy="18862"/>
+          <p:cNvPr id="118" name="Shape 115"/>
+          <p:cNvSpPr/>
+          <p:nvPr/>
+        </p:nvSpPr>
+        <p:spPr>
+          <a:xfrm flipV="1">
+            <a:off x="3608363" y="13642635"/>
+            <a:ext cx="83703" cy="20012"/>
           </a:xfrm>
           <a:prstGeom prst="line">
             <a:avLst/>
@@ -4662,14 +4877,14 @@
       </p:sp>
       <p:sp>
         <p:nvSpPr>
-          <p:cNvPr id="115" name="Shape 112"/>
-          <p:cNvSpPr/>
-          <p:nvPr/>
-        </p:nvSpPr>
-        <p:spPr>
-          <a:xfrm flipV="1">
-            <a:off x="3692066" y="12839132"/>
-            <a:ext cx="83703" cy="19443"/>
+          <p:cNvPr id="119" name="Shape 116"/>
+          <p:cNvSpPr/>
+          <p:nvPr/>
+        </p:nvSpPr>
+        <p:spPr>
+          <a:xfrm flipV="1">
+            <a:off x="3692066" y="13622006"/>
+            <a:ext cx="83703" cy="20629"/>
           </a:xfrm>
           <a:prstGeom prst="line">
             <a:avLst/>
@@ -4685,14 +4900,14 @@
       </p:sp>
       <p:sp>
         <p:nvSpPr>
-          <p:cNvPr id="116" name="Shape 113"/>
-          <p:cNvSpPr/>
-          <p:nvPr/>
-        </p:nvSpPr>
-        <p:spPr>
-          <a:xfrm flipV="1">
-            <a:off x="3775769" y="12819068"/>
-            <a:ext cx="83703" cy="20064"/>
+          <p:cNvPr id="120" name="Shape 117"/>
+          <p:cNvSpPr/>
+          <p:nvPr/>
+        </p:nvSpPr>
+        <p:spPr>
+          <a:xfrm flipV="1">
+            <a:off x="3775769" y="13600718"/>
+            <a:ext cx="83703" cy="21288"/>
           </a:xfrm>
           <a:prstGeom prst="line">
             <a:avLst/>
@@ -4708,14 +4923,14 @@
       </p:sp>
       <p:sp>
         <p:nvSpPr>
-          <p:cNvPr id="117" name="Shape 114"/>
-          <p:cNvSpPr/>
-          <p:nvPr/>
-        </p:nvSpPr>
-        <p:spPr>
-          <a:xfrm flipV="1">
-            <a:off x="3859471" y="12798340"/>
-            <a:ext cx="83703" cy="20728"/>
+          <p:cNvPr id="121" name="Shape 118"/>
+          <p:cNvSpPr/>
+          <p:nvPr/>
+        </p:nvSpPr>
+        <p:spPr>
+          <a:xfrm flipV="1">
+            <a:off x="3859471" y="13578726"/>
+            <a:ext cx="83703" cy="21992"/>
           </a:xfrm>
           <a:prstGeom prst="line">
             <a:avLst/>
@@ -4731,14 +4946,14 @@
       </p:sp>
       <p:sp>
         <p:nvSpPr>
-          <p:cNvPr id="118" name="Shape 115"/>
-          <p:cNvSpPr/>
-          <p:nvPr/>
-        </p:nvSpPr>
-        <p:spPr>
-          <a:xfrm flipV="1">
-            <a:off x="3943174" y="12776901"/>
-            <a:ext cx="83703" cy="21439"/>
+          <p:cNvPr id="122" name="Shape 119"/>
+          <p:cNvSpPr/>
+          <p:nvPr/>
+        </p:nvSpPr>
+        <p:spPr>
+          <a:xfrm flipV="1">
+            <a:off x="3943174" y="13555980"/>
+            <a:ext cx="83703" cy="22746"/>
           </a:xfrm>
           <a:prstGeom prst="line">
             <a:avLst/>
@@ -4754,14 +4969,14 @@
       </p:sp>
       <p:sp>
         <p:nvSpPr>
-          <p:cNvPr id="119" name="Shape 116"/>
-          <p:cNvSpPr/>
-          <p:nvPr/>
-        </p:nvSpPr>
-        <p:spPr>
-          <a:xfrm flipV="1">
-            <a:off x="4026877" y="12754700"/>
-            <a:ext cx="83703" cy="22201"/>
+          <p:cNvPr id="123" name="Shape 120"/>
+          <p:cNvSpPr/>
+          <p:nvPr/>
+        </p:nvSpPr>
+        <p:spPr>
+          <a:xfrm flipV="1">
+            <a:off x="4026877" y="13532426"/>
+            <a:ext cx="83703" cy="23554"/>
           </a:xfrm>
           <a:prstGeom prst="line">
             <a:avLst/>
@@ -4777,14 +4992,14 @@
       </p:sp>
       <p:sp>
         <p:nvSpPr>
-          <p:cNvPr id="120" name="Shape 117"/>
-          <p:cNvSpPr/>
-          <p:nvPr/>
-        </p:nvSpPr>
-        <p:spPr>
-          <a:xfrm flipV="1">
-            <a:off x="4110580" y="12731682"/>
-            <a:ext cx="83703" cy="23018"/>
+          <p:cNvPr id="124" name="Shape 121"/>
+          <p:cNvSpPr/>
+          <p:nvPr/>
+        </p:nvSpPr>
+        <p:spPr>
+          <a:xfrm flipV="1">
+            <a:off x="4110580" y="13508004"/>
+            <a:ext cx="83703" cy="24422"/>
           </a:xfrm>
           <a:prstGeom prst="line">
             <a:avLst/>
@@ -4800,14 +5015,14 @@
       </p:sp>
       <p:sp>
         <p:nvSpPr>
-          <p:cNvPr id="121" name="Shape 118"/>
-          <p:cNvSpPr/>
-          <p:nvPr/>
-        </p:nvSpPr>
-        <p:spPr>
-          <a:xfrm flipV="1">
-            <a:off x="4194282" y="12707786"/>
-            <a:ext cx="83703" cy="23896"/>
+          <p:cNvPr id="125" name="Shape 122"/>
+          <p:cNvSpPr/>
+          <p:nvPr/>
+        </p:nvSpPr>
+        <p:spPr>
+          <a:xfrm flipV="1">
+            <a:off x="4194282" y="13482651"/>
+            <a:ext cx="83703" cy="25353"/>
           </a:xfrm>
           <a:prstGeom prst="line">
             <a:avLst/>
@@ -4823,14 +5038,14 @@
       </p:sp>
       <p:sp>
         <p:nvSpPr>
-          <p:cNvPr id="122" name="Shape 119"/>
-          <p:cNvSpPr/>
-          <p:nvPr/>
-        </p:nvSpPr>
-        <p:spPr>
-          <a:xfrm flipV="1">
-            <a:off x="4277985" y="12682944"/>
-            <a:ext cx="83703" cy="24841"/>
+          <p:cNvPr id="126" name="Shape 123"/>
+          <p:cNvSpPr/>
+          <p:nvPr/>
+        </p:nvSpPr>
+        <p:spPr>
+          <a:xfrm flipV="1">
+            <a:off x="4277985" y="13456295"/>
+            <a:ext cx="83703" cy="26356"/>
           </a:xfrm>
           <a:prstGeom prst="line">
             <a:avLst/>
@@ -4846,14 +5061,14 @@
       </p:sp>
       <p:sp>
         <p:nvSpPr>
-          <p:cNvPr id="123" name="Shape 120"/>
-          <p:cNvSpPr/>
-          <p:nvPr/>
-        </p:nvSpPr>
-        <p:spPr>
-          <a:xfrm flipV="1">
-            <a:off x="4361688" y="12657085"/>
-            <a:ext cx="83703" cy="25859"/>
+          <p:cNvPr id="127" name="Shape 124"/>
+          <p:cNvSpPr/>
+          <p:nvPr/>
+        </p:nvSpPr>
+        <p:spPr>
+          <a:xfrm flipV="1">
+            <a:off x="4361688" y="13428859"/>
+            <a:ext cx="83703" cy="27436"/>
           </a:xfrm>
           <a:prstGeom prst="line">
             <a:avLst/>
@@ -4869,14 +5084,14 @@
       </p:sp>
       <p:sp>
         <p:nvSpPr>
-          <p:cNvPr id="124" name="Shape 121"/>
-          <p:cNvSpPr/>
-          <p:nvPr/>
-        </p:nvSpPr>
-        <p:spPr>
-          <a:xfrm flipV="1">
-            <a:off x="4445391" y="12630128"/>
-            <a:ext cx="83703" cy="26958"/>
+          <p:cNvPr id="128" name="Shape 125"/>
+          <p:cNvSpPr/>
+          <p:nvPr/>
+        </p:nvSpPr>
+        <p:spPr>
+          <a:xfrm flipV="1">
+            <a:off x="4445391" y="13400257"/>
+            <a:ext cx="83703" cy="28602"/>
           </a:xfrm>
           <a:prstGeom prst="line">
             <a:avLst/>
@@ -4892,14 +5107,14 @@
       </p:sp>
       <p:sp>
         <p:nvSpPr>
-          <p:cNvPr id="125" name="Shape 122"/>
-          <p:cNvSpPr/>
-          <p:nvPr/>
-        </p:nvSpPr>
-        <p:spPr>
-          <a:xfrm flipV="1">
-            <a:off x="4529094" y="12601982"/>
-            <a:ext cx="83703" cy="28146"/>
+          <p:cNvPr id="129" name="Shape 126"/>
+          <p:cNvSpPr/>
+          <p:nvPr/>
+        </p:nvSpPr>
+        <p:spPr>
+          <a:xfrm flipV="1">
+            <a:off x="4529094" y="13370395"/>
+            <a:ext cx="83703" cy="29862"/>
           </a:xfrm>
           <a:prstGeom prst="line">
             <a:avLst/>
@@ -4915,14 +5130,14 @@
       </p:sp>
       <p:sp>
         <p:nvSpPr>
-          <p:cNvPr id="126" name="Shape 123"/>
-          <p:cNvSpPr/>
-          <p:nvPr/>
-        </p:nvSpPr>
-        <p:spPr>
-          <a:xfrm flipV="1">
-            <a:off x="4612796" y="12572550"/>
-            <a:ext cx="83703" cy="29432"/>
+          <p:cNvPr id="130" name="Shape 127"/>
+          <p:cNvSpPr/>
+          <p:nvPr/>
+        </p:nvSpPr>
+        <p:spPr>
+          <a:xfrm flipV="1">
+            <a:off x="4612796" y="13339169"/>
+            <a:ext cx="83703" cy="31227"/>
           </a:xfrm>
           <a:prstGeom prst="line">
             <a:avLst/>
@@ -4938,14 +5153,14 @@
       </p:sp>
       <p:sp>
         <p:nvSpPr>
-          <p:cNvPr id="127" name="Shape 124"/>
-          <p:cNvSpPr/>
-          <p:nvPr/>
-        </p:nvSpPr>
-        <p:spPr>
-          <a:xfrm flipV="1">
-            <a:off x="4696499" y="12541722"/>
-            <a:ext cx="83703" cy="30828"/>
+          <p:cNvPr id="131" name="Shape 128"/>
+          <p:cNvSpPr/>
+          <p:nvPr/>
+        </p:nvSpPr>
+        <p:spPr>
+          <a:xfrm flipV="1">
+            <a:off x="4696499" y="13306461"/>
+            <a:ext cx="83703" cy="32708"/>
           </a:xfrm>
           <a:prstGeom prst="line">
             <a:avLst/>
@@ -4961,14 +5176,14 @@
       </p:sp>
       <p:sp>
         <p:nvSpPr>
-          <p:cNvPr id="128" name="Shape 125"/>
-          <p:cNvSpPr/>
-          <p:nvPr/>
-        </p:nvSpPr>
-        <p:spPr>
-          <a:xfrm flipV="1">
-            <a:off x="4780202" y="12509377"/>
-            <a:ext cx="83703" cy="32346"/>
+          <p:cNvPr id="132" name="Shape 129"/>
+          <p:cNvSpPr/>
+          <p:nvPr/>
+        </p:nvSpPr>
+        <p:spPr>
+          <a:xfrm flipV="1">
+            <a:off x="4780202" y="13272144"/>
+            <a:ext cx="83703" cy="34318"/>
           </a:xfrm>
           <a:prstGeom prst="line">
             <a:avLst/>
@@ -4984,14 +5199,14 @@
       </p:sp>
       <p:sp>
         <p:nvSpPr>
-          <p:cNvPr id="129" name="Shape 126"/>
-          <p:cNvSpPr/>
-          <p:nvPr/>
-        </p:nvSpPr>
-        <p:spPr>
-          <a:xfrm flipV="1">
-            <a:off x="4863905" y="12475377"/>
-            <a:ext cx="83703" cy="33999"/>
+          <p:cNvPr id="133" name="Shape 130"/>
+          <p:cNvSpPr/>
+          <p:nvPr/>
+        </p:nvSpPr>
+        <p:spPr>
+          <a:xfrm flipV="1">
+            <a:off x="4863905" y="13236071"/>
+            <a:ext cx="83703" cy="36073"/>
           </a:xfrm>
           <a:prstGeom prst="line">
             <a:avLst/>
@@ -5007,14 +5222,14 @@
       </p:sp>
       <p:sp>
         <p:nvSpPr>
-          <p:cNvPr id="130" name="Shape 127"/>
-          <p:cNvSpPr/>
-          <p:nvPr/>
-        </p:nvSpPr>
-        <p:spPr>
-          <a:xfrm flipV="1">
-            <a:off x="4947607" y="12439571"/>
-            <a:ext cx="83703" cy="35806"/>
+          <p:cNvPr id="134" name="Shape 131"/>
+          <p:cNvSpPr/>
+          <p:nvPr/>
+        </p:nvSpPr>
+        <p:spPr>
+          <a:xfrm flipV="1">
+            <a:off x="4947607" y="13198082"/>
+            <a:ext cx="83703" cy="37989"/>
           </a:xfrm>
           <a:prstGeom prst="line">
             <a:avLst/>
@@ -5030,14 +5245,14 @@
       </p:sp>
       <p:sp>
         <p:nvSpPr>
-          <p:cNvPr id="131" name="Shape 128"/>
-          <p:cNvSpPr/>
-          <p:nvPr/>
-        </p:nvSpPr>
-        <p:spPr>
-          <a:xfrm flipV="1">
-            <a:off x="5031310" y="12401788"/>
-            <a:ext cx="83703" cy="37784"/>
+          <p:cNvPr id="135" name="Shape 132"/>
+          <p:cNvSpPr/>
+          <p:nvPr/>
+        </p:nvSpPr>
+        <p:spPr>
+          <a:xfrm flipV="1">
+            <a:off x="5031310" y="13157994"/>
+            <a:ext cx="83703" cy="40088"/>
           </a:xfrm>
           <a:prstGeom prst="line">
             <a:avLst/>
@@ -5053,14 +5268,14 @@
       </p:sp>
       <p:sp>
         <p:nvSpPr>
-          <p:cNvPr id="132" name="Shape 129"/>
-          <p:cNvSpPr/>
-          <p:nvPr/>
-        </p:nvSpPr>
-        <p:spPr>
-          <a:xfrm flipV="1">
-            <a:off x="5115013" y="12361832"/>
-            <a:ext cx="83703" cy="39955"/>
+          <p:cNvPr id="136" name="Shape 133"/>
+          <p:cNvSpPr/>
+          <p:nvPr/>
+        </p:nvSpPr>
+        <p:spPr>
+          <a:xfrm flipV="1">
+            <a:off x="5115013" y="13115603"/>
+            <a:ext cx="83703" cy="42392"/>
           </a:xfrm>
           <a:prstGeom prst="line">
             <a:avLst/>
@@ -5076,14 +5291,14 @@
       </p:sp>
       <p:sp>
         <p:nvSpPr>
-          <p:cNvPr id="133" name="Shape 130"/>
-          <p:cNvSpPr/>
-          <p:nvPr/>
-        </p:nvSpPr>
-        <p:spPr>
-          <a:xfrm flipV="1">
-            <a:off x="5198716" y="12319486"/>
-            <a:ext cx="83703" cy="42346"/>
+          <p:cNvPr id="137" name="Shape 134"/>
+          <p:cNvSpPr/>
+          <p:nvPr/>
+        </p:nvSpPr>
+        <p:spPr>
+          <a:xfrm flipV="1">
+            <a:off x="5198716" y="13070674"/>
+            <a:ext cx="83703" cy="44928"/>
           </a:xfrm>
           <a:prstGeom prst="line">
             <a:avLst/>
@@ -5099,14 +5314,14 @@
       </p:sp>
       <p:sp>
         <p:nvSpPr>
-          <p:cNvPr id="134" name="Shape 131"/>
-          <p:cNvSpPr/>
-          <p:nvPr/>
-        </p:nvSpPr>
-        <p:spPr>
-          <a:xfrm flipV="1">
-            <a:off x="5282418" y="12274499"/>
-            <a:ext cx="83703" cy="44987"/>
+          <p:cNvPr id="138" name="Shape 135"/>
+          <p:cNvSpPr/>
+          <p:nvPr/>
+        </p:nvSpPr>
+        <p:spPr>
+          <a:xfrm flipV="1">
+            <a:off x="5282418" y="13022945"/>
+            <a:ext cx="83703" cy="47730"/>
           </a:xfrm>
           <a:prstGeom prst="line">
             <a:avLst/>
@@ -5122,14 +5337,14 @@
       </p:sp>
       <p:sp>
         <p:nvSpPr>
-          <p:cNvPr id="135" name="Shape 132"/>
-          <p:cNvSpPr/>
-          <p:nvPr/>
-        </p:nvSpPr>
-        <p:spPr>
-          <a:xfrm flipV="1">
-            <a:off x="5366121" y="12226588"/>
-            <a:ext cx="83703" cy="47912"/>
+          <p:cNvPr id="139" name="Shape 136"/>
+          <p:cNvSpPr/>
+          <p:nvPr/>
+        </p:nvSpPr>
+        <p:spPr>
+          <a:xfrm flipV="1">
+            <a:off x="5366121" y="12972111"/>
+            <a:ext cx="83703" cy="50833"/>
           </a:xfrm>
           <a:prstGeom prst="line">
             <a:avLst/>
@@ -5145,14 +5360,14 @@
       </p:sp>
       <p:sp>
         <p:nvSpPr>
-          <p:cNvPr id="136" name="Shape 133"/>
-          <p:cNvSpPr/>
-          <p:nvPr/>
-        </p:nvSpPr>
-        <p:spPr>
-          <a:xfrm flipV="1">
-            <a:off x="5449824" y="12175423"/>
-            <a:ext cx="83703" cy="51164"/>
+          <p:cNvPr id="140" name="Shape 137"/>
+          <p:cNvSpPr/>
+          <p:nvPr/>
+        </p:nvSpPr>
+        <p:spPr>
+          <a:xfrm flipV="1">
+            <a:off x="5449824" y="12917827"/>
+            <a:ext cx="83703" cy="54284"/>
           </a:xfrm>
           <a:prstGeom prst="line">
             <a:avLst/>
@@ -5168,14 +5383,14 @@
       </p:sp>
       <p:sp>
         <p:nvSpPr>
-          <p:cNvPr id="137" name="Shape 134"/>
-          <p:cNvSpPr/>
-          <p:nvPr/>
-        </p:nvSpPr>
-        <p:spPr>
-          <a:xfrm flipV="1">
-            <a:off x="5533527" y="12120629"/>
-            <a:ext cx="83703" cy="54794"/>
+          <p:cNvPr id="141" name="Shape 138"/>
+          <p:cNvSpPr/>
+          <p:nvPr/>
+        </p:nvSpPr>
+        <p:spPr>
+          <a:xfrm flipV="1">
+            <a:off x="5533527" y="12859692"/>
+            <a:ext cx="83703" cy="58135"/>
           </a:xfrm>
           <a:prstGeom prst="line">
             <a:avLst/>
@@ -5191,14 +5406,14 @@
       </p:sp>
       <p:sp>
         <p:nvSpPr>
-          <p:cNvPr id="138" name="Shape 135"/>
-          <p:cNvSpPr/>
-          <p:nvPr/>
-        </p:nvSpPr>
-        <p:spPr>
-          <a:xfrm flipV="1">
-            <a:off x="5617230" y="12061767"/>
-            <a:ext cx="83703" cy="58862"/>
+          <p:cNvPr id="142" name="Shape 139"/>
+          <p:cNvSpPr/>
+          <p:nvPr/>
+        </p:nvSpPr>
+        <p:spPr>
+          <a:xfrm flipV="1">
+            <a:off x="5617230" y="12797241"/>
+            <a:ext cx="83703" cy="62451"/>
           </a:xfrm>
           <a:prstGeom prst="line">
             <a:avLst/>
@@ -5214,14 +5429,14 @@
       </p:sp>
       <p:sp>
         <p:nvSpPr>
-          <p:cNvPr id="139" name="Shape 136"/>
-          <p:cNvSpPr/>
-          <p:nvPr/>
-        </p:nvSpPr>
-        <p:spPr>
-          <a:xfrm flipV="1">
-            <a:off x="5700932" y="11998327"/>
-            <a:ext cx="83703" cy="63440"/>
+          <p:cNvPr id="143" name="Shape 140"/>
+          <p:cNvSpPr/>
+          <p:nvPr/>
+        </p:nvSpPr>
+        <p:spPr>
+          <a:xfrm flipV="1">
+            <a:off x="5700932" y="12729932"/>
+            <a:ext cx="83703" cy="67308"/>
           </a:xfrm>
           <a:prstGeom prst="line">
             <a:avLst/>
@@ -5237,14 +5452,14 @@
       </p:sp>
       <p:sp>
         <p:nvSpPr>
-          <p:cNvPr id="140" name="Shape 137"/>
-          <p:cNvSpPr/>
-          <p:nvPr/>
-        </p:nvSpPr>
-        <p:spPr>
-          <a:xfrm flipV="1">
-            <a:off x="5784635" y="11929710"/>
-            <a:ext cx="83703" cy="68617"/>
+          <p:cNvPr id="144" name="Shape 141"/>
+          <p:cNvSpPr/>
+          <p:nvPr/>
+        </p:nvSpPr>
+        <p:spPr>
+          <a:xfrm flipV="1">
+            <a:off x="5784635" y="12657131"/>
+            <a:ext cx="83703" cy="72801"/>
           </a:xfrm>
           <a:prstGeom prst="line">
             <a:avLst/>
@@ -5260,14 +5475,14 @@
       </p:sp>
       <p:sp>
         <p:nvSpPr>
-          <p:cNvPr id="141" name="Shape 138"/>
-          <p:cNvSpPr/>
-          <p:nvPr/>
-        </p:nvSpPr>
-        <p:spPr>
-          <a:xfrm flipV="1">
-            <a:off x="5868338" y="11855207"/>
-            <a:ext cx="83703" cy="74502"/>
+          <p:cNvPr id="145" name="Shape 142"/>
+          <p:cNvSpPr/>
+          <p:nvPr/>
+        </p:nvSpPr>
+        <p:spPr>
+          <a:xfrm flipV="1">
+            <a:off x="5868338" y="12578086"/>
+            <a:ext cx="83703" cy="79045"/>
           </a:xfrm>
           <a:prstGeom prst="line">
             <a:avLst/>
@@ -5283,14 +5498,14 @@
       </p:sp>
       <p:sp>
         <p:nvSpPr>
-          <p:cNvPr id="142" name="Shape 139"/>
-          <p:cNvSpPr/>
-          <p:nvPr/>
-        </p:nvSpPr>
-        <p:spPr>
-          <a:xfrm flipV="1">
-            <a:off x="5952041" y="11773977"/>
-            <a:ext cx="83703" cy="81231"/>
+          <p:cNvPr id="146" name="Shape 143"/>
+          <p:cNvSpPr/>
+          <p:nvPr/>
+        </p:nvSpPr>
+        <p:spPr>
+          <a:xfrm flipV="1">
+            <a:off x="5952041" y="12491902"/>
+            <a:ext cx="83703" cy="86184"/>
           </a:xfrm>
           <a:prstGeom prst="line">
             <a:avLst/>
@@ -5306,14 +5521,14 @@
       </p:sp>
       <p:sp>
         <p:nvSpPr>
-          <p:cNvPr id="143" name="Shape 140"/>
-          <p:cNvSpPr/>
-          <p:nvPr/>
-        </p:nvSpPr>
-        <p:spPr>
-          <a:xfrm flipV="1">
-            <a:off x="6035743" y="11685007"/>
-            <a:ext cx="83703" cy="88970"/>
+          <p:cNvPr id="147" name="Shape 144"/>
+          <p:cNvSpPr/>
+          <p:nvPr/>
+        </p:nvSpPr>
+        <p:spPr>
+          <a:xfrm flipV="1">
+            <a:off x="6035743" y="12397507"/>
+            <a:ext cx="83703" cy="94395"/>
           </a:xfrm>
           <a:prstGeom prst="line">
             <a:avLst/>
@@ -5329,14 +5544,14 @@
       </p:sp>
       <p:sp>
         <p:nvSpPr>
-          <p:cNvPr id="144" name="Shape 141"/>
-          <p:cNvSpPr/>
-          <p:nvPr/>
-        </p:nvSpPr>
-        <p:spPr>
-          <a:xfrm flipV="1">
-            <a:off x="6119446" y="11587074"/>
-            <a:ext cx="83703" cy="97933"/>
+          <p:cNvPr id="148" name="Shape 145"/>
+          <p:cNvSpPr/>
+          <p:nvPr/>
+        </p:nvSpPr>
+        <p:spPr>
+          <a:xfrm flipV="1">
+            <a:off x="6119446" y="12293602"/>
+            <a:ext cx="83703" cy="103905"/>
           </a:xfrm>
           <a:prstGeom prst="line">
             <a:avLst/>
@@ -5352,14 +5567,14 @@
       </p:sp>
       <p:sp>
         <p:nvSpPr>
-          <p:cNvPr id="145" name="Shape 142"/>
-          <p:cNvSpPr/>
-          <p:nvPr/>
-        </p:nvSpPr>
-        <p:spPr>
-          <a:xfrm flipV="1">
-            <a:off x="6203149" y="11478681"/>
-            <a:ext cx="83703" cy="108393"/>
+          <p:cNvPr id="149" name="Shape 146"/>
+          <p:cNvSpPr/>
+          <p:nvPr/>
+        </p:nvSpPr>
+        <p:spPr>
+          <a:xfrm flipV="1">
+            <a:off x="6203149" y="12178600"/>
+            <a:ext cx="83703" cy="115002"/>
           </a:xfrm>
           <a:prstGeom prst="line">
             <a:avLst/>
@@ -5375,14 +5590,14 @@
       </p:sp>
       <p:sp>
         <p:nvSpPr>
-          <p:cNvPr id="146" name="Shape 143"/>
-          <p:cNvSpPr/>
-          <p:nvPr/>
-        </p:nvSpPr>
-        <p:spPr>
-          <a:xfrm flipV="1">
-            <a:off x="6286852" y="11357981"/>
-            <a:ext cx="83703" cy="120700"/>
+          <p:cNvPr id="150" name="Shape 147"/>
+          <p:cNvSpPr/>
+          <p:nvPr/>
+        </p:nvSpPr>
+        <p:spPr>
+          <a:xfrm flipV="1">
+            <a:off x="6286852" y="12050541"/>
+            <a:ext cx="83703" cy="128060"/>
           </a:xfrm>
           <a:prstGeom prst="line">
             <a:avLst/>
@@ -5398,14 +5613,14 @@
       </p:sp>
       <p:sp>
         <p:nvSpPr>
-          <p:cNvPr id="147" name="Shape 144"/>
-          <p:cNvSpPr/>
-          <p:nvPr/>
-        </p:nvSpPr>
-        <p:spPr>
-          <a:xfrm flipV="1">
-            <a:off x="6370554" y="11222665"/>
-            <a:ext cx="83703" cy="135316"/>
+          <p:cNvPr id="151" name="Shape 148"/>
+          <p:cNvSpPr/>
+          <p:nvPr/>
+        </p:nvSpPr>
+        <p:spPr>
+          <a:xfrm flipV="1">
+            <a:off x="6370554" y="11906973"/>
+            <a:ext cx="83703" cy="143567"/>
           </a:xfrm>
           <a:prstGeom prst="line">
             <a:avLst/>
@@ -5421,14 +5636,14 @@
       </p:sp>
       <p:sp>
         <p:nvSpPr>
-          <p:cNvPr id="148" name="Shape 145"/>
-          <p:cNvSpPr/>
-          <p:nvPr/>
-        </p:nvSpPr>
-        <p:spPr>
-          <a:xfrm flipV="1">
-            <a:off x="6454257" y="11069806"/>
-            <a:ext cx="83703" cy="152859"/>
+          <p:cNvPr id="152" name="Shape 149"/>
+          <p:cNvSpPr/>
+          <p:nvPr/>
+        </p:nvSpPr>
+        <p:spPr>
+          <a:xfrm flipV="1">
+            <a:off x="6454257" y="11744794"/>
+            <a:ext cx="83703" cy="162179"/>
           </a:xfrm>
           <a:prstGeom prst="line">
             <a:avLst/>
@@ -5444,14 +5659,14 @@
       </p:sp>
       <p:sp>
         <p:nvSpPr>
-          <p:cNvPr id="149" name="Shape 146"/>
-          <p:cNvSpPr/>
-          <p:nvPr/>
-        </p:nvSpPr>
-        <p:spPr>
-          <a:xfrm flipV="1">
-            <a:off x="1097280" y="13394453"/>
-            <a:ext cx="83703" cy="677"/>
+          <p:cNvPr id="153" name="Shape 150"/>
+          <p:cNvSpPr/>
+          <p:nvPr/>
+        </p:nvSpPr>
+        <p:spPr>
+          <a:xfrm flipV="1">
+            <a:off x="1097280" y="14211188"/>
+            <a:ext cx="83703" cy="718"/>
           </a:xfrm>
           <a:prstGeom prst="line">
             <a:avLst/>
@@ -5467,14 +5682,14 @@
       </p:sp>
       <p:sp>
         <p:nvSpPr>
-          <p:cNvPr id="150" name="Shape 147"/>
-          <p:cNvSpPr/>
-          <p:nvPr/>
-        </p:nvSpPr>
-        <p:spPr>
-          <a:xfrm flipV="1">
-            <a:off x="1180983" y="13393772"/>
-            <a:ext cx="83703" cy="681"/>
+          <p:cNvPr id="154" name="Shape 151"/>
+          <p:cNvSpPr/>
+          <p:nvPr/>
+        </p:nvSpPr>
+        <p:spPr>
+          <a:xfrm flipV="1">
+            <a:off x="1180983" y="14210465"/>
+            <a:ext cx="83703" cy="723"/>
           </a:xfrm>
           <a:prstGeom prst="line">
             <a:avLst/>
@@ -5490,14 +5705,14 @@
       </p:sp>
       <p:sp>
         <p:nvSpPr>
-          <p:cNvPr id="151" name="Shape 148"/>
-          <p:cNvSpPr/>
-          <p:nvPr/>
-        </p:nvSpPr>
-        <p:spPr>
-          <a:xfrm flipV="1">
-            <a:off x="1264686" y="13393085"/>
-            <a:ext cx="83703" cy="687"/>
+          <p:cNvPr id="155" name="Shape 152"/>
+          <p:cNvSpPr/>
+          <p:nvPr/>
+        </p:nvSpPr>
+        <p:spPr>
+          <a:xfrm flipV="1">
+            <a:off x="1264686" y="14209737"/>
+            <a:ext cx="83703" cy="728"/>
           </a:xfrm>
           <a:prstGeom prst="line">
             <a:avLst/>
@@ -5513,14 +5728,14 @@
       </p:sp>
       <p:sp>
         <p:nvSpPr>
-          <p:cNvPr id="152" name="Shape 149"/>
-          <p:cNvSpPr/>
-          <p:nvPr/>
-        </p:nvSpPr>
-        <p:spPr>
-          <a:xfrm flipV="1">
-            <a:off x="1348388" y="13392393"/>
-            <a:ext cx="83703" cy="692"/>
+          <p:cNvPr id="156" name="Shape 153"/>
+          <p:cNvSpPr/>
+          <p:nvPr/>
+        </p:nvSpPr>
+        <p:spPr>
+          <a:xfrm flipV="1">
+            <a:off x="1348388" y="14209003"/>
+            <a:ext cx="83703" cy="734"/>
           </a:xfrm>
           <a:prstGeom prst="line">
             <a:avLst/>
@@ -5536,14 +5751,14 @@
       </p:sp>
       <p:sp>
         <p:nvSpPr>
-          <p:cNvPr id="153" name="Shape 150"/>
-          <p:cNvSpPr/>
-          <p:nvPr/>
-        </p:nvSpPr>
-        <p:spPr>
-          <a:xfrm flipV="1">
-            <a:off x="1432091" y="13391695"/>
-            <a:ext cx="83703" cy="698"/>
+          <p:cNvPr id="157" name="Shape 154"/>
+          <p:cNvSpPr/>
+          <p:nvPr/>
+        </p:nvSpPr>
+        <p:spPr>
+          <a:xfrm flipV="1">
+            <a:off x="1432091" y="14208262"/>
+            <a:ext cx="83703" cy="741"/>
           </a:xfrm>
           <a:prstGeom prst="line">
             <a:avLst/>
@@ -5559,14 +5774,14 @@
       </p:sp>
       <p:sp>
         <p:nvSpPr>
-          <p:cNvPr id="154" name="Shape 151"/>
-          <p:cNvSpPr/>
-          <p:nvPr/>
-        </p:nvSpPr>
-        <p:spPr>
-          <a:xfrm flipV="1">
-            <a:off x="1515794" y="13390990"/>
-            <a:ext cx="83703" cy="705"/>
+          <p:cNvPr id="158" name="Shape 155"/>
+          <p:cNvSpPr/>
+          <p:nvPr/>
+        </p:nvSpPr>
+        <p:spPr>
+          <a:xfrm flipV="1">
+            <a:off x="1515794" y="14207514"/>
+            <a:ext cx="83703" cy="748"/>
           </a:xfrm>
           <a:prstGeom prst="line">
             <a:avLst/>
@@ -5582,14 +5797,14 @@
       </p:sp>
       <p:sp>
         <p:nvSpPr>
-          <p:cNvPr id="155" name="Shape 152"/>
-          <p:cNvSpPr/>
-          <p:nvPr/>
-        </p:nvSpPr>
-        <p:spPr>
-          <a:xfrm flipV="1">
-            <a:off x="1599497" y="13390279"/>
-            <a:ext cx="83703" cy="712"/>
+          <p:cNvPr id="159" name="Shape 156"/>
+          <p:cNvSpPr/>
+          <p:nvPr/>
+        </p:nvSpPr>
+        <p:spPr>
+          <a:xfrm flipV="1">
+            <a:off x="1599497" y="14206759"/>
+            <a:ext cx="83703" cy="755"/>
           </a:xfrm>
           <a:prstGeom prst="line">
             <a:avLst/>
@@ -5605,14 +5820,14 @@
       </p:sp>
       <p:sp>
         <p:nvSpPr>
-          <p:cNvPr id="156" name="Shape 153"/>
-          <p:cNvSpPr/>
-          <p:nvPr/>
-        </p:nvSpPr>
-        <p:spPr>
-          <a:xfrm flipV="1">
-            <a:off x="1683199" y="13389559"/>
-            <a:ext cx="83703" cy="719"/>
+          <p:cNvPr id="160" name="Shape 157"/>
+          <p:cNvSpPr/>
+          <p:nvPr/>
+        </p:nvSpPr>
+        <p:spPr>
+          <a:xfrm flipV="1">
+            <a:off x="1683199" y="14205996"/>
+            <a:ext cx="83703" cy="763"/>
           </a:xfrm>
           <a:prstGeom prst="line">
             <a:avLst/>
@@ -5628,14 +5843,14 @@
       </p:sp>
       <p:sp>
         <p:nvSpPr>
-          <p:cNvPr id="157" name="Shape 154"/>
-          <p:cNvSpPr/>
-          <p:nvPr/>
-        </p:nvSpPr>
-        <p:spPr>
-          <a:xfrm flipV="1">
-            <a:off x="1766902" y="13388832"/>
-            <a:ext cx="83703" cy="728"/>
+          <p:cNvPr id="161" name="Shape 158"/>
+          <p:cNvSpPr/>
+          <p:nvPr/>
+        </p:nvSpPr>
+        <p:spPr>
+          <a:xfrm flipV="1">
+            <a:off x="1766902" y="14205224"/>
+            <a:ext cx="83703" cy="772"/>
           </a:xfrm>
           <a:prstGeom prst="line">
             <a:avLst/>
@@ -5651,14 +5866,14 @@
       </p:sp>
       <p:sp>
         <p:nvSpPr>
-          <p:cNvPr id="158" name="Shape 155"/>
-          <p:cNvSpPr/>
-          <p:nvPr/>
-        </p:nvSpPr>
-        <p:spPr>
-          <a:xfrm flipV="1">
-            <a:off x="1850605" y="13388095"/>
-            <a:ext cx="83703" cy="736"/>
+          <p:cNvPr id="162" name="Shape 159"/>
+          <p:cNvSpPr/>
+          <p:nvPr/>
+        </p:nvSpPr>
+        <p:spPr>
+          <a:xfrm flipV="1">
+            <a:off x="1850605" y="14204443"/>
+            <a:ext cx="83703" cy="781"/>
           </a:xfrm>
           <a:prstGeom prst="line">
             <a:avLst/>
@@ -5674,14 +5889,14 @@
       </p:sp>
       <p:sp>
         <p:nvSpPr>
-          <p:cNvPr id="159" name="Shape 156"/>
-          <p:cNvSpPr/>
-          <p:nvPr/>
-        </p:nvSpPr>
-        <p:spPr>
-          <a:xfrm flipV="1">
-            <a:off x="1934308" y="13387349"/>
-            <a:ext cx="83703" cy="746"/>
+          <p:cNvPr id="163" name="Shape 160"/>
+          <p:cNvSpPr/>
+          <p:nvPr/>
+        </p:nvSpPr>
+        <p:spPr>
+          <a:xfrm flipV="1">
+            <a:off x="1934308" y="14203651"/>
+            <a:ext cx="83703" cy="791"/>
           </a:xfrm>
           <a:prstGeom prst="line">
             <a:avLst/>
@@ -5697,14 +5912,14 @@
       </p:sp>
       <p:sp>
         <p:nvSpPr>
-          <p:cNvPr id="160" name="Shape 157"/>
-          <p:cNvSpPr/>
-          <p:nvPr/>
-        </p:nvSpPr>
-        <p:spPr>
-          <a:xfrm flipV="1">
-            <a:off x="2018010" y="13386594"/>
-            <a:ext cx="83703" cy="756"/>
+          <p:cNvPr id="164" name="Shape 161"/>
+          <p:cNvSpPr/>
+          <p:nvPr/>
+        </p:nvSpPr>
+        <p:spPr>
+          <a:xfrm flipV="1">
+            <a:off x="2018010" y="14202849"/>
+            <a:ext cx="83703" cy="802"/>
           </a:xfrm>
           <a:prstGeom prst="line">
             <a:avLst/>
@@ -5720,14 +5935,14 @@
       </p:sp>
       <p:sp>
         <p:nvSpPr>
-          <p:cNvPr id="161" name="Shape 158"/>
-          <p:cNvSpPr/>
-          <p:nvPr/>
-        </p:nvSpPr>
-        <p:spPr>
-          <a:xfrm flipV="1">
-            <a:off x="2101713" y="13385827"/>
-            <a:ext cx="83703" cy="767"/>
+          <p:cNvPr id="165" name="Shape 162"/>
+          <p:cNvSpPr/>
+          <p:nvPr/>
+        </p:nvSpPr>
+        <p:spPr>
+          <a:xfrm flipV="1">
+            <a:off x="2101713" y="14202036"/>
+            <a:ext cx="83703" cy="813"/>
           </a:xfrm>
           <a:prstGeom prst="line">
             <a:avLst/>
@@ -5743,14 +5958,14 @@
       </p:sp>
       <p:sp>
         <p:nvSpPr>
-          <p:cNvPr id="162" name="Shape 159"/>
-          <p:cNvSpPr/>
-          <p:nvPr/>
-        </p:nvSpPr>
-        <p:spPr>
-          <a:xfrm flipV="1">
-            <a:off x="2185416" y="13385049"/>
-            <a:ext cx="83703" cy="778"/>
+          <p:cNvPr id="166" name="Shape 163"/>
+          <p:cNvSpPr/>
+          <p:nvPr/>
+        </p:nvSpPr>
+        <p:spPr>
+          <a:xfrm flipV="1">
+            <a:off x="2185416" y="14201210"/>
+            <a:ext cx="83703" cy="826"/>
           </a:xfrm>
           <a:prstGeom prst="line">
             <a:avLst/>
@@ -5766,14 +5981,14 @@
       </p:sp>
       <p:sp>
         <p:nvSpPr>
-          <p:cNvPr id="163" name="Shape 160"/>
-          <p:cNvSpPr/>
-          <p:nvPr/>
-        </p:nvSpPr>
-        <p:spPr>
-          <a:xfrm flipV="1">
-            <a:off x="2269119" y="13384259"/>
-            <a:ext cx="83703" cy="790"/>
+          <p:cNvPr id="167" name="Shape 164"/>
+          <p:cNvSpPr/>
+          <p:nvPr/>
+        </p:nvSpPr>
+        <p:spPr>
+          <a:xfrm flipV="1">
+            <a:off x="2269119" y="14200372"/>
+            <a:ext cx="83703" cy="838"/>
           </a:xfrm>
           <a:prstGeom prst="line">
             <a:avLst/>
@@ -5789,14 +6004,14 @@
       </p:sp>
       <p:sp>
         <p:nvSpPr>
-          <p:cNvPr id="164" name="Shape 161"/>
-          <p:cNvSpPr/>
-          <p:nvPr/>
-        </p:nvSpPr>
-        <p:spPr>
-          <a:xfrm flipV="1">
-            <a:off x="2352822" y="13383455"/>
-            <a:ext cx="83703" cy="803"/>
+          <p:cNvPr id="168" name="Shape 165"/>
+          <p:cNvSpPr/>
+          <p:nvPr/>
+        </p:nvSpPr>
+        <p:spPr>
+          <a:xfrm flipV="1">
+            <a:off x="2352822" y="14199520"/>
+            <a:ext cx="83703" cy="852"/>
           </a:xfrm>
           <a:prstGeom prst="line">
             <a:avLst/>
@@ -5812,14 +6027,14 @@
       </p:sp>
       <p:sp>
         <p:nvSpPr>
-          <p:cNvPr id="165" name="Shape 162"/>
-          <p:cNvSpPr/>
-          <p:nvPr/>
-        </p:nvSpPr>
-        <p:spPr>
-          <a:xfrm flipV="1">
-            <a:off x="2436524" y="13382638"/>
-            <a:ext cx="83703" cy="817"/>
+          <p:cNvPr id="169" name="Shape 166"/>
+          <p:cNvSpPr/>
+          <p:nvPr/>
+        </p:nvSpPr>
+        <p:spPr>
+          <a:xfrm flipV="1">
+            <a:off x="2436524" y="14198653"/>
+            <a:ext cx="83703" cy="867"/>
           </a:xfrm>
           <a:prstGeom prst="line">
             <a:avLst/>
@@ -5835,14 +6050,14 @@
       </p:sp>
       <p:sp>
         <p:nvSpPr>
-          <p:cNvPr id="166" name="Shape 163"/>
-          <p:cNvSpPr/>
-          <p:nvPr/>
-        </p:nvSpPr>
-        <p:spPr>
-          <a:xfrm flipV="1">
-            <a:off x="2520227" y="13381807"/>
-            <a:ext cx="83703" cy="832"/>
+          <p:cNvPr id="170" name="Shape 167"/>
+          <p:cNvSpPr/>
+          <p:nvPr/>
+        </p:nvSpPr>
+        <p:spPr>
+          <a:xfrm flipV="1">
+            <a:off x="2520227" y="14197771"/>
+            <a:ext cx="83703" cy="882"/>
           </a:xfrm>
           <a:prstGeom prst="line">
             <a:avLst/>
@@ -5858,14 +6073,14 @@
       </p:sp>
       <p:sp>
         <p:nvSpPr>
-          <p:cNvPr id="167" name="Shape 164"/>
-          <p:cNvSpPr/>
-          <p:nvPr/>
-        </p:nvSpPr>
-        <p:spPr>
-          <a:xfrm flipV="1">
-            <a:off x="2603930" y="13380959"/>
-            <a:ext cx="83703" cy="847"/>
+          <p:cNvPr id="171" name="Shape 168"/>
+          <p:cNvSpPr/>
+          <p:nvPr/>
+        </p:nvSpPr>
+        <p:spPr>
+          <a:xfrm flipV="1">
+            <a:off x="2603930" y="14196872"/>
+            <a:ext cx="83703" cy="899"/>
           </a:xfrm>
           <a:prstGeom prst="line">
             <a:avLst/>
@@ -5881,14 +6096,14 @@
       </p:sp>
       <p:sp>
         <p:nvSpPr>
-          <p:cNvPr id="168" name="Shape 165"/>
-          <p:cNvSpPr/>
-          <p:nvPr/>
-        </p:nvSpPr>
-        <p:spPr>
-          <a:xfrm flipV="1">
-            <a:off x="2687633" y="13380096"/>
-            <a:ext cx="83703" cy="864"/>
+          <p:cNvPr id="172" name="Shape 169"/>
+          <p:cNvSpPr/>
+          <p:nvPr/>
+        </p:nvSpPr>
+        <p:spPr>
+          <a:xfrm flipV="1">
+            <a:off x="2687633" y="14195955"/>
+            <a:ext cx="83703" cy="916"/>
           </a:xfrm>
           <a:prstGeom prst="line">
             <a:avLst/>
@@ -5904,14 +6119,14 @@
       </p:sp>
       <p:sp>
         <p:nvSpPr>
-          <p:cNvPr id="169" name="Shape 166"/>
-          <p:cNvSpPr/>
-          <p:nvPr/>
-        </p:nvSpPr>
-        <p:spPr>
-          <a:xfrm flipV="1">
-            <a:off x="2771335" y="13379214"/>
-            <a:ext cx="83703" cy="881"/>
+          <p:cNvPr id="173" name="Shape 170"/>
+          <p:cNvSpPr/>
+          <p:nvPr/>
+        </p:nvSpPr>
+        <p:spPr>
+          <a:xfrm flipV="1">
+            <a:off x="2771335" y="14195020"/>
+            <a:ext cx="83703" cy="935"/>
           </a:xfrm>
           <a:prstGeom prst="line">
             <a:avLst/>
@@ -5927,14 +6142,14 @@
       </p:sp>
       <p:sp>
         <p:nvSpPr>
-          <p:cNvPr id="170" name="Shape 167"/>
-          <p:cNvSpPr/>
-          <p:nvPr/>
-        </p:nvSpPr>
-        <p:spPr>
-          <a:xfrm flipV="1">
-            <a:off x="2855038" y="13378314"/>
-            <a:ext cx="83703" cy="900"/>
+          <p:cNvPr id="174" name="Shape 171"/>
+          <p:cNvSpPr/>
+          <p:nvPr/>
+        </p:nvSpPr>
+        <p:spPr>
+          <a:xfrm flipV="1">
+            <a:off x="2855038" y="14194065"/>
+            <a:ext cx="83703" cy="955"/>
           </a:xfrm>
           <a:prstGeom prst="line">
             <a:avLst/>
@@ -5950,14 +6165,14 @@
       </p:sp>
       <p:sp>
         <p:nvSpPr>
-          <p:cNvPr id="171" name="Shape 168"/>
-          <p:cNvSpPr/>
-          <p:nvPr/>
-        </p:nvSpPr>
-        <p:spPr>
-          <a:xfrm flipV="1">
-            <a:off x="2938741" y="13377394"/>
-            <a:ext cx="83703" cy="920"/>
+          <p:cNvPr id="175" name="Shape 172"/>
+          <p:cNvSpPr/>
+          <p:nvPr/>
+        </p:nvSpPr>
+        <p:spPr>
+          <a:xfrm flipV="1">
+            <a:off x="2938741" y="14193089"/>
+            <a:ext cx="83703" cy="976"/>
           </a:xfrm>
           <a:prstGeom prst="line">
             <a:avLst/>
@@ -5973,14 +6188,14 @@
       </p:sp>
       <p:sp>
         <p:nvSpPr>
-          <p:cNvPr id="172" name="Shape 169"/>
-          <p:cNvSpPr/>
-          <p:nvPr/>
-        </p:nvSpPr>
-        <p:spPr>
-          <a:xfrm flipV="1">
-            <a:off x="3022444" y="13376453"/>
-            <a:ext cx="83703" cy="941"/>
+          <p:cNvPr id="176" name="Shape 173"/>
+          <p:cNvSpPr/>
+          <p:nvPr/>
+        </p:nvSpPr>
+        <p:spPr>
+          <a:xfrm flipV="1">
+            <a:off x="3022444" y="14192090"/>
+            <a:ext cx="83703" cy="998"/>
           </a:xfrm>
           <a:prstGeom prst="line">
             <a:avLst/>
@@ -5996,14 +6211,14 @@
       </p:sp>
       <p:sp>
         <p:nvSpPr>
-          <p:cNvPr id="173" name="Shape 170"/>
-          <p:cNvSpPr/>
-          <p:nvPr/>
-        </p:nvSpPr>
-        <p:spPr>
-          <a:xfrm flipV="1">
-            <a:off x="3106146" y="13375490"/>
-            <a:ext cx="83703" cy="963"/>
+          <p:cNvPr id="177" name="Shape 174"/>
+          <p:cNvSpPr/>
+          <p:nvPr/>
+        </p:nvSpPr>
+        <p:spPr>
+          <a:xfrm flipV="1">
+            <a:off x="3106146" y="14191068"/>
+            <a:ext cx="83703" cy="1022"/>
           </a:xfrm>
           <a:prstGeom prst="line">
             <a:avLst/>
@@ -6019,14 +6234,14 @@
       </p:sp>
       <p:sp>
         <p:nvSpPr>
-          <p:cNvPr id="174" name="Shape 171"/>
-          <p:cNvSpPr/>
-          <p:nvPr/>
-        </p:nvSpPr>
-        <p:spPr>
-          <a:xfrm flipV="1">
-            <a:off x="3189849" y="13374502"/>
-            <a:ext cx="83703" cy="987"/>
+          <p:cNvPr id="178" name="Shape 175"/>
+          <p:cNvSpPr/>
+          <p:nvPr/>
+        </p:nvSpPr>
+        <p:spPr>
+          <a:xfrm flipV="1">
+            <a:off x="3189849" y="14190021"/>
+            <a:ext cx="83703" cy="1048"/>
           </a:xfrm>
           <a:prstGeom prst="line">
             <a:avLst/>
@@ -6042,14 +6257,14 @@
       </p:sp>
       <p:sp>
         <p:nvSpPr>
-          <p:cNvPr id="175" name="Shape 172"/>
-          <p:cNvSpPr/>
-          <p:nvPr/>
-        </p:nvSpPr>
-        <p:spPr>
-          <a:xfrm flipV="1">
-            <a:off x="3273552" y="13373490"/>
-            <a:ext cx="83703" cy="1013"/>
+          <p:cNvPr id="179" name="Shape 176"/>
+          <p:cNvSpPr/>
+          <p:nvPr/>
+        </p:nvSpPr>
+        <p:spPr>
+          <a:xfrm flipV="1">
+            <a:off x="3273552" y="14188946"/>
+            <a:ext cx="83703" cy="1074"/>
           </a:xfrm>
           <a:prstGeom prst="line">
             <a:avLst/>
@@ -6065,14 +6280,14 @@
       </p:sp>
       <p:sp>
         <p:nvSpPr>
-          <p:cNvPr id="176" name="Shape 173"/>
-          <p:cNvSpPr/>
-          <p:nvPr/>
-        </p:nvSpPr>
-        <p:spPr>
-          <a:xfrm flipV="1">
-            <a:off x="3357255" y="13372450"/>
-            <a:ext cx="83703" cy="1040"/>
+          <p:cNvPr id="180" name="Shape 177"/>
+          <p:cNvSpPr/>
+          <p:nvPr/>
+        </p:nvSpPr>
+        <p:spPr>
+          <a:xfrm flipV="1">
+            <a:off x="3357255" y="14187843"/>
+            <a:ext cx="83703" cy="1103"/>
           </a:xfrm>
           <a:prstGeom prst="line">
             <a:avLst/>
@@ -6088,14 +6303,14 @@
       </p:sp>
       <p:sp>
         <p:nvSpPr>
-          <p:cNvPr id="177" name="Shape 174"/>
-          <p:cNvSpPr/>
-          <p:nvPr/>
-        </p:nvSpPr>
-        <p:spPr>
-          <a:xfrm flipV="1">
-            <a:off x="3440958" y="13371382"/>
-            <a:ext cx="83703" cy="1068"/>
+          <p:cNvPr id="181" name="Shape 178"/>
+          <p:cNvSpPr/>
+          <p:nvPr/>
+        </p:nvSpPr>
+        <p:spPr>
+          <a:xfrm flipV="1">
+            <a:off x="3440958" y="14186710"/>
+            <a:ext cx="83703" cy="1134"/>
           </a:xfrm>
           <a:prstGeom prst="line">
             <a:avLst/>
@@ -6111,14 +6326,14 @@
       </p:sp>
       <p:sp>
         <p:nvSpPr>
-          <p:cNvPr id="178" name="Shape 175"/>
-          <p:cNvSpPr/>
-          <p:nvPr/>
-        </p:nvSpPr>
-        <p:spPr>
-          <a:xfrm flipV="1">
-            <a:off x="3524660" y="13370283"/>
-            <a:ext cx="83703" cy="1099"/>
+          <p:cNvPr id="182" name="Shape 179"/>
+          <p:cNvSpPr/>
+          <p:nvPr/>
+        </p:nvSpPr>
+        <p:spPr>
+          <a:xfrm flipV="1">
+            <a:off x="3524660" y="14185544"/>
+            <a:ext cx="83703" cy="1166"/>
           </a:xfrm>
           <a:prstGeom prst="line">
             <a:avLst/>
@@ -6134,14 +6349,14 @@
       </p:sp>
       <p:sp>
         <p:nvSpPr>
-          <p:cNvPr id="179" name="Shape 176"/>
-          <p:cNvSpPr/>
-          <p:nvPr/>
-        </p:nvSpPr>
-        <p:spPr>
-          <a:xfrm flipV="1">
-            <a:off x="3608363" y="13369151"/>
-            <a:ext cx="83703" cy="1132"/>
+          <p:cNvPr id="183" name="Shape 180"/>
+          <p:cNvSpPr/>
+          <p:nvPr/>
+        </p:nvSpPr>
+        <p:spPr>
+          <a:xfrm flipV="1">
+            <a:off x="3608363" y="14184343"/>
+            <a:ext cx="83703" cy="1201"/>
           </a:xfrm>
           <a:prstGeom prst="line">
             <a:avLst/>
@@ -6157,14 +6372,14 @@
       </p:sp>
       <p:sp>
         <p:nvSpPr>
-          <p:cNvPr id="180" name="Shape 177"/>
-          <p:cNvSpPr/>
-          <p:nvPr/>
-        </p:nvSpPr>
-        <p:spPr>
-          <a:xfrm flipV="1">
-            <a:off x="3692066" y="13367984"/>
-            <a:ext cx="83703" cy="1167"/>
+          <p:cNvPr id="184" name="Shape 181"/>
+          <p:cNvSpPr/>
+          <p:nvPr/>
+        </p:nvSpPr>
+        <p:spPr>
+          <a:xfrm flipV="1">
+            <a:off x="3692066" y="14183105"/>
+            <a:ext cx="83703" cy="1238"/>
           </a:xfrm>
           <a:prstGeom prst="line">
             <a:avLst/>
@@ -6180,14 +6395,14 @@
       </p:sp>
       <p:sp>
         <p:nvSpPr>
-          <p:cNvPr id="181" name="Shape 178"/>
-          <p:cNvSpPr/>
-          <p:nvPr/>
-        </p:nvSpPr>
-        <p:spPr>
-          <a:xfrm flipV="1">
-            <a:off x="3775769" y="13366780"/>
-            <a:ext cx="83703" cy="1204"/>
+          <p:cNvPr id="185" name="Shape 182"/>
+          <p:cNvSpPr/>
+          <p:nvPr/>
+        </p:nvSpPr>
+        <p:spPr>
+          <a:xfrm flipV="1">
+            <a:off x="3775769" y="14181828"/>
+            <a:ext cx="83703" cy="1277"/>
           </a:xfrm>
           <a:prstGeom prst="line">
             <a:avLst/>
@@ -6203,14 +6418,14 @@
       </p:sp>
       <p:sp>
         <p:nvSpPr>
-          <p:cNvPr id="182" name="Shape 179"/>
-          <p:cNvSpPr/>
-          <p:nvPr/>
-        </p:nvSpPr>
-        <p:spPr>
-          <a:xfrm flipV="1">
-            <a:off x="3859471" y="13365537"/>
-            <a:ext cx="83703" cy="1244"/>
+          <p:cNvPr id="186" name="Shape 183"/>
+          <p:cNvSpPr/>
+          <p:nvPr/>
+        </p:nvSpPr>
+        <p:spPr>
+          <a:xfrm flipV="1">
+            <a:off x="3859471" y="14180508"/>
+            <a:ext cx="83703" cy="1320"/>
           </a:xfrm>
           <a:prstGeom prst="line">
             <a:avLst/>
@@ -6226,14 +6441,14 @@
       </p:sp>
       <p:sp>
         <p:nvSpPr>
-          <p:cNvPr id="183" name="Shape 180"/>
-          <p:cNvSpPr/>
-          <p:nvPr/>
-        </p:nvSpPr>
-        <p:spPr>
-          <a:xfrm flipV="1">
-            <a:off x="3943174" y="13364250"/>
-            <a:ext cx="83703" cy="1286"/>
+          <p:cNvPr id="187" name="Shape 184"/>
+          <p:cNvSpPr/>
+          <p:nvPr/>
+        </p:nvSpPr>
+        <p:spPr>
+          <a:xfrm flipV="1">
+            <a:off x="3943174" y="14179144"/>
+            <a:ext cx="83703" cy="1365"/>
           </a:xfrm>
           <a:prstGeom prst="line">
             <a:avLst/>
@@ -6249,14 +6464,14 @@
       </p:sp>
       <p:sp>
         <p:nvSpPr>
-          <p:cNvPr id="184" name="Shape 181"/>
-          <p:cNvSpPr/>
-          <p:nvPr/>
-        </p:nvSpPr>
-        <p:spPr>
-          <a:xfrm flipV="1">
-            <a:off x="4026877" y="13362918"/>
-            <a:ext cx="83703" cy="1332"/>
+          <p:cNvPr id="188" name="Shape 185"/>
+          <p:cNvSpPr/>
+          <p:nvPr/>
+        </p:nvSpPr>
+        <p:spPr>
+          <a:xfrm flipV="1">
+            <a:off x="4026877" y="14177730"/>
+            <a:ext cx="83703" cy="1413"/>
           </a:xfrm>
           <a:prstGeom prst="line">
             <a:avLst/>
@@ -6272,14 +6487,14 @@
       </p:sp>
       <p:sp>
         <p:nvSpPr>
-          <p:cNvPr id="185" name="Shape 182"/>
-          <p:cNvSpPr/>
-          <p:nvPr/>
-        </p:nvSpPr>
-        <p:spPr>
-          <a:xfrm flipV="1">
-            <a:off x="4110580" y="13361537"/>
-            <a:ext cx="83703" cy="1381"/>
+          <p:cNvPr id="189" name="Shape 186"/>
+          <p:cNvSpPr/>
+          <p:nvPr/>
+        </p:nvSpPr>
+        <p:spPr>
+          <a:xfrm flipV="1">
+            <a:off x="4110580" y="14176265"/>
+            <a:ext cx="83703" cy="1465"/>
           </a:xfrm>
           <a:prstGeom prst="line">
             <a:avLst/>
@@ -6295,14 +6510,14 @@
       </p:sp>
       <p:sp>
         <p:nvSpPr>
-          <p:cNvPr id="186" name="Shape 183"/>
-          <p:cNvSpPr/>
-          <p:nvPr/>
-        </p:nvSpPr>
-        <p:spPr>
-          <a:xfrm flipV="1">
-            <a:off x="4194282" y="13360103"/>
-            <a:ext cx="83703" cy="1434"/>
+          <p:cNvPr id="190" name="Shape 187"/>
+          <p:cNvSpPr/>
+          <p:nvPr/>
+        </p:nvSpPr>
+        <p:spPr>
+          <a:xfrm flipV="1">
+            <a:off x="4194282" y="14174744"/>
+            <a:ext cx="83703" cy="1521"/>
           </a:xfrm>
           <a:prstGeom prst="line">
             <a:avLst/>
@@ -6318,14 +6533,14 @@
       </p:sp>
       <p:sp>
         <p:nvSpPr>
-          <p:cNvPr id="187" name="Shape 184"/>
-          <p:cNvSpPr/>
-          <p:nvPr/>
-        </p:nvSpPr>
-        <p:spPr>
-          <a:xfrm flipV="1">
-            <a:off x="4277985" y="13358613"/>
-            <a:ext cx="83703" cy="1490"/>
+          <p:cNvPr id="191" name="Shape 188"/>
+          <p:cNvSpPr/>
+          <p:nvPr/>
+        </p:nvSpPr>
+        <p:spPr>
+          <a:xfrm flipV="1">
+            <a:off x="4277985" y="14173162"/>
+            <a:ext cx="83703" cy="1581"/>
           </a:xfrm>
           <a:prstGeom prst="line">
             <a:avLst/>
@@ -6341,14 +6556,14 @@
       </p:sp>
       <p:sp>
         <p:nvSpPr>
-          <p:cNvPr id="188" name="Shape 185"/>
-          <p:cNvSpPr/>
-          <p:nvPr/>
-        </p:nvSpPr>
-        <p:spPr>
-          <a:xfrm flipV="1">
-            <a:off x="4361688" y="13357061"/>
-            <a:ext cx="83703" cy="1552"/>
+          <p:cNvPr id="192" name="Shape 189"/>
+          <p:cNvSpPr/>
+          <p:nvPr/>
+        </p:nvSpPr>
+        <p:spPr>
+          <a:xfrm flipV="1">
+            <a:off x="4361688" y="14171516"/>
+            <a:ext cx="83703" cy="1646"/>
           </a:xfrm>
           <a:prstGeom prst="line">
             <a:avLst/>
@@ -6364,14 +6579,14 @@
       </p:sp>
       <p:sp>
         <p:nvSpPr>
-          <p:cNvPr id="189" name="Shape 186"/>
-          <p:cNvSpPr/>
-          <p:nvPr/>
-        </p:nvSpPr>
-        <p:spPr>
-          <a:xfrm flipV="1">
-            <a:off x="4445391" y="13355444"/>
-            <a:ext cx="83703" cy="1617"/>
+          <p:cNvPr id="193" name="Shape 190"/>
+          <p:cNvSpPr/>
+          <p:nvPr/>
+        </p:nvSpPr>
+        <p:spPr>
+          <a:xfrm flipV="1">
+            <a:off x="4445391" y="14169800"/>
+            <a:ext cx="83703" cy="1716"/>
           </a:xfrm>
           <a:prstGeom prst="line">
             <a:avLst/>
@@ -6387,14 +6602,14 @@
       </p:sp>
       <p:sp>
         <p:nvSpPr>
-          <p:cNvPr id="190" name="Shape 187"/>
-          <p:cNvSpPr/>
-          <p:nvPr/>
-        </p:nvSpPr>
-        <p:spPr>
-          <a:xfrm flipV="1">
-            <a:off x="4529094" y="13353755"/>
-            <a:ext cx="83703" cy="1689"/>
+          <p:cNvPr id="194" name="Shape 191"/>
+          <p:cNvSpPr/>
+          <p:nvPr/>
+        </p:nvSpPr>
+        <p:spPr>
+          <a:xfrm flipV="1">
+            <a:off x="4529094" y="14168009"/>
+            <a:ext cx="83703" cy="1792"/>
           </a:xfrm>
           <a:prstGeom prst="line">
             <a:avLst/>
@@ -6410,14 +6625,14 @@
       </p:sp>
       <p:sp>
         <p:nvSpPr>
-          <p:cNvPr id="191" name="Shape 188"/>
-          <p:cNvSpPr/>
-          <p:nvPr/>
-        </p:nvSpPr>
-        <p:spPr>
-          <a:xfrm flipV="1">
-            <a:off x="4612796" y="13351989"/>
-            <a:ext cx="83703" cy="1766"/>
+          <p:cNvPr id="195" name="Shape 192"/>
+          <p:cNvSpPr/>
+          <p:nvPr/>
+        </p:nvSpPr>
+        <p:spPr>
+          <a:xfrm flipV="1">
+            <a:off x="4612796" y="14166135"/>
+            <a:ext cx="83703" cy="1874"/>
           </a:xfrm>
           <a:prstGeom prst="line">
             <a:avLst/>
@@ -6433,14 +6648,14 @@
       </p:sp>
       <p:sp>
         <p:nvSpPr>
-          <p:cNvPr id="192" name="Shape 189"/>
-          <p:cNvSpPr/>
-          <p:nvPr/>
-        </p:nvSpPr>
-        <p:spPr>
-          <a:xfrm flipV="1">
-            <a:off x="4696499" y="13350140"/>
-            <a:ext cx="83703" cy="1850"/>
+          <p:cNvPr id="196" name="Shape 193"/>
+          <p:cNvSpPr/>
+          <p:nvPr/>
+        </p:nvSpPr>
+        <p:spPr>
+          <a:xfrm flipV="1">
+            <a:off x="4696499" y="14164172"/>
+            <a:ext cx="83703" cy="1962"/>
           </a:xfrm>
           <a:prstGeom prst="line">
             <a:avLst/>
@@ -6456,14 +6671,14 @@
       </p:sp>
       <p:sp>
         <p:nvSpPr>
-          <p:cNvPr id="193" name="Shape 190"/>
-          <p:cNvSpPr/>
-          <p:nvPr/>
-        </p:nvSpPr>
-        <p:spPr>
-          <a:xfrm flipV="1">
-            <a:off x="4780202" y="13348199"/>
-            <a:ext cx="83703" cy="1941"/>
+          <p:cNvPr id="197" name="Shape 194"/>
+          <p:cNvSpPr/>
+          <p:nvPr/>
+        </p:nvSpPr>
+        <p:spPr>
+          <a:xfrm flipV="1">
+            <a:off x="4780202" y="14162113"/>
+            <a:ext cx="83703" cy="2059"/>
           </a:xfrm>
           <a:prstGeom prst="line">
             <a:avLst/>
@@ -6479,14 +6694,14 @@
       </p:sp>
       <p:sp>
         <p:nvSpPr>
-          <p:cNvPr id="194" name="Shape 191"/>
-          <p:cNvSpPr/>
-          <p:nvPr/>
-        </p:nvSpPr>
-        <p:spPr>
-          <a:xfrm flipV="1">
-            <a:off x="4863905" y="13346159"/>
-            <a:ext cx="83703" cy="2040"/>
+          <p:cNvPr id="198" name="Shape 195"/>
+          <p:cNvSpPr/>
+          <p:nvPr/>
+        </p:nvSpPr>
+        <p:spPr>
+          <a:xfrm flipV="1">
+            <a:off x="4863905" y="14159949"/>
+            <a:ext cx="83703" cy="2164"/>
           </a:xfrm>
           <a:prstGeom prst="line">
             <a:avLst/>
@@ -6502,14 +6717,14 @@
       </p:sp>
       <p:sp>
         <p:nvSpPr>
-          <p:cNvPr id="195" name="Shape 192"/>
-          <p:cNvSpPr/>
-          <p:nvPr/>
-        </p:nvSpPr>
-        <p:spPr>
-          <a:xfrm flipV="1">
-            <a:off x="4947607" y="13344011"/>
-            <a:ext cx="83703" cy="2148"/>
+          <p:cNvPr id="199" name="Shape 196"/>
+          <p:cNvSpPr/>
+          <p:nvPr/>
+        </p:nvSpPr>
+        <p:spPr>
+          <a:xfrm flipV="1">
+            <a:off x="4947607" y="14157670"/>
+            <a:ext cx="83703" cy="2279"/>
           </a:xfrm>
           <a:prstGeom prst="line">
             <a:avLst/>
@@ -6525,14 +6740,14 @@
       </p:sp>
       <p:sp>
         <p:nvSpPr>
-          <p:cNvPr id="196" name="Shape 193"/>
-          <p:cNvSpPr/>
-          <p:nvPr/>
-        </p:nvSpPr>
-        <p:spPr>
-          <a:xfrm flipV="1">
-            <a:off x="5031310" y="13341744"/>
-            <a:ext cx="83703" cy="2267"/>
+          <p:cNvPr id="200" name="Shape 197"/>
+          <p:cNvSpPr/>
+          <p:nvPr/>
+        </p:nvSpPr>
+        <p:spPr>
+          <a:xfrm flipV="1">
+            <a:off x="5031310" y="14155264"/>
+            <a:ext cx="83703" cy="2405"/>
           </a:xfrm>
           <a:prstGeom prst="line">
             <a:avLst/>
@@ -6548,14 +6763,14 @@
       </p:sp>
       <p:sp>
         <p:nvSpPr>
-          <p:cNvPr id="197" name="Shape 194"/>
-          <p:cNvSpPr/>
-          <p:nvPr/>
-        </p:nvSpPr>
-        <p:spPr>
-          <a:xfrm flipV="1">
-            <a:off x="5115013" y="13339346"/>
-            <a:ext cx="83703" cy="2397"/>
+          <p:cNvPr id="201" name="Shape 198"/>
+          <p:cNvSpPr/>
+          <p:nvPr/>
+        </p:nvSpPr>
+        <p:spPr>
+          <a:xfrm flipV="1">
+            <a:off x="5115013" y="14152721"/>
+            <a:ext cx="83703" cy="2544"/>
           </a:xfrm>
           <a:prstGeom prst="line">
             <a:avLst/>
@@ -6571,14 +6786,14 @@
       </p:sp>
       <p:sp>
         <p:nvSpPr>
-          <p:cNvPr id="198" name="Shape 195"/>
-          <p:cNvSpPr/>
-          <p:nvPr/>
-        </p:nvSpPr>
-        <p:spPr>
-          <a:xfrm flipV="1">
-            <a:off x="5198716" y="13336805"/>
-            <a:ext cx="83703" cy="2541"/>
+          <p:cNvPr id="202" name="Shape 199"/>
+          <p:cNvSpPr/>
+          <p:nvPr/>
+        </p:nvSpPr>
+        <p:spPr>
+          <a:xfrm flipV="1">
+            <a:off x="5198716" y="14150025"/>
+            <a:ext cx="83703" cy="2696"/>
           </a:xfrm>
           <a:prstGeom prst="line">
             <a:avLst/>
@@ -6594,14 +6809,14 @@
       </p:sp>
       <p:sp>
         <p:nvSpPr>
-          <p:cNvPr id="199" name="Shape 196"/>
-          <p:cNvSpPr/>
-          <p:nvPr/>
-        </p:nvSpPr>
-        <p:spPr>
-          <a:xfrm flipV="1">
-            <a:off x="5282418" y="13334106"/>
-            <a:ext cx="83703" cy="2699"/>
+          <p:cNvPr id="203" name="Shape 200"/>
+          <p:cNvSpPr/>
+          <p:nvPr/>
+        </p:nvSpPr>
+        <p:spPr>
+          <a:xfrm flipV="1">
+            <a:off x="5282418" y="14147161"/>
+            <a:ext cx="83703" cy="2864"/>
           </a:xfrm>
           <a:prstGeom prst="line">
             <a:avLst/>
@@ -6617,14 +6832,14 @@
       </p:sp>
       <p:sp>
         <p:nvSpPr>
-          <p:cNvPr id="200" name="Shape 197"/>
-          <p:cNvSpPr/>
-          <p:nvPr/>
-        </p:nvSpPr>
-        <p:spPr>
-          <a:xfrm flipV="1">
-            <a:off x="5366121" y="13331232"/>
-            <a:ext cx="83703" cy="2875"/>
+          <p:cNvPr id="204" name="Shape 201"/>
+          <p:cNvSpPr/>
+          <p:nvPr/>
+        </p:nvSpPr>
+        <p:spPr>
+          <a:xfrm flipV="1">
+            <a:off x="5366121" y="14144111"/>
+            <a:ext cx="83703" cy="3050"/>
           </a:xfrm>
           <a:prstGeom prst="line">
             <a:avLst/>
@@ -6640,14 +6855,14 @@
       </p:sp>
       <p:sp>
         <p:nvSpPr>
-          <p:cNvPr id="201" name="Shape 198"/>
-          <p:cNvSpPr/>
-          <p:nvPr/>
-        </p:nvSpPr>
-        <p:spPr>
-          <a:xfrm flipV="1">
-            <a:off x="5449824" y="13328162"/>
-            <a:ext cx="83703" cy="3070"/>
+          <p:cNvPr id="205" name="Shape 202"/>
+          <p:cNvSpPr/>
+          <p:nvPr/>
+        </p:nvSpPr>
+        <p:spPr>
+          <a:xfrm flipV="1">
+            <a:off x="5449824" y="14140854"/>
+            <a:ext cx="83703" cy="3257"/>
           </a:xfrm>
           <a:prstGeom prst="line">
             <a:avLst/>
@@ -6663,14 +6878,14 @@
       </p:sp>
       <p:sp>
         <p:nvSpPr>
-          <p:cNvPr id="202" name="Shape 199"/>
-          <p:cNvSpPr/>
-          <p:nvPr/>
-        </p:nvSpPr>
-        <p:spPr>
-          <a:xfrm flipV="1">
-            <a:off x="5533527" y="13324874"/>
-            <a:ext cx="83703" cy="3288"/>
+          <p:cNvPr id="206" name="Shape 203"/>
+          <p:cNvSpPr/>
+          <p:nvPr/>
+        </p:nvSpPr>
+        <p:spPr>
+          <a:xfrm flipV="1">
+            <a:off x="5533527" y="14137366"/>
+            <a:ext cx="83703" cy="3488"/>
           </a:xfrm>
           <a:prstGeom prst="line">
             <a:avLst/>
@@ -6686,14 +6901,14 @@
       </p:sp>
       <p:sp>
         <p:nvSpPr>
-          <p:cNvPr id="203" name="Shape 200"/>
-          <p:cNvSpPr/>
-          <p:nvPr/>
-        </p:nvSpPr>
-        <p:spPr>
-          <a:xfrm flipV="1">
-            <a:off x="5617230" y="13321342"/>
-            <a:ext cx="83703" cy="3532"/>
+          <p:cNvPr id="207" name="Shape 204"/>
+          <p:cNvSpPr/>
+          <p:nvPr/>
+        </p:nvSpPr>
+        <p:spPr>
+          <a:xfrm flipV="1">
+            <a:off x="5617230" y="14133619"/>
+            <a:ext cx="83703" cy="3747"/>
           </a:xfrm>
           <a:prstGeom prst="line">
             <a:avLst/>
@@ -6709,14 +6924,14 @@
       </p:sp>
       <p:sp>
         <p:nvSpPr>
-          <p:cNvPr id="204" name="Shape 201"/>
-          <p:cNvSpPr/>
-          <p:nvPr/>
-        </p:nvSpPr>
-        <p:spPr>
-          <a:xfrm flipV="1">
-            <a:off x="5700932" y="13317536"/>
-            <a:ext cx="83703" cy="3806"/>
+          <p:cNvPr id="208" name="Shape 205"/>
+          <p:cNvSpPr/>
+          <p:nvPr/>
+        </p:nvSpPr>
+        <p:spPr>
+          <a:xfrm flipV="1">
+            <a:off x="5700932" y="14129581"/>
+            <a:ext cx="83703" cy="4038"/>
           </a:xfrm>
           <a:prstGeom prst="line">
             <a:avLst/>
@@ -6732,14 +6947,14 @@
       </p:sp>
       <p:sp>
         <p:nvSpPr>
-          <p:cNvPr id="205" name="Shape 202"/>
-          <p:cNvSpPr/>
-          <p:nvPr/>
-        </p:nvSpPr>
-        <p:spPr>
-          <a:xfrm flipV="1">
-            <a:off x="5784635" y="13313419"/>
-            <a:ext cx="83703" cy="4117"/>
+          <p:cNvPr id="209" name="Shape 206"/>
+          <p:cNvSpPr/>
+          <p:nvPr/>
+        </p:nvSpPr>
+        <p:spPr>
+          <a:xfrm flipV="1">
+            <a:off x="5784635" y="14125213"/>
+            <a:ext cx="83703" cy="4368"/>
           </a:xfrm>
           <a:prstGeom prst="line">
             <a:avLst/>
@@ -6755,14 +6970,14 @@
       </p:sp>
       <p:sp>
         <p:nvSpPr>
-          <p:cNvPr id="206" name="Shape 203"/>
-          <p:cNvSpPr/>
-          <p:nvPr/>
-        </p:nvSpPr>
-        <p:spPr>
-          <a:xfrm flipV="1">
-            <a:off x="5868338" y="13308949"/>
-            <a:ext cx="83703" cy="4470"/>
+          <p:cNvPr id="210" name="Shape 207"/>
+          <p:cNvSpPr/>
+          <p:nvPr/>
+        </p:nvSpPr>
+        <p:spPr>
+          <a:xfrm flipV="1">
+            <a:off x="5868338" y="14120470"/>
+            <a:ext cx="83703" cy="4743"/>
           </a:xfrm>
           <a:prstGeom prst="line">
             <a:avLst/>
@@ -6778,14 +6993,14 @@
       </p:sp>
       <p:sp>
         <p:nvSpPr>
-          <p:cNvPr id="207" name="Shape 204"/>
-          <p:cNvSpPr/>
-          <p:nvPr/>
-        </p:nvSpPr>
-        <p:spPr>
-          <a:xfrm flipV="1">
-            <a:off x="5952041" y="13304075"/>
-            <a:ext cx="83703" cy="4874"/>
+          <p:cNvPr id="211" name="Shape 208"/>
+          <p:cNvSpPr/>
+          <p:nvPr/>
+        </p:nvSpPr>
+        <p:spPr>
+          <a:xfrm flipV="1">
+            <a:off x="5952041" y="14115299"/>
+            <a:ext cx="83703" cy="5171"/>
           </a:xfrm>
           <a:prstGeom prst="line">
             <a:avLst/>
@@ -6801,14 +7016,14 @@
       </p:sp>
       <p:sp>
         <p:nvSpPr>
-          <p:cNvPr id="208" name="Shape 205"/>
-          <p:cNvSpPr/>
-          <p:nvPr/>
-        </p:nvSpPr>
-        <p:spPr>
-          <a:xfrm flipV="1">
-            <a:off x="6035743" y="13298737"/>
-            <a:ext cx="83703" cy="5338"/>
+          <p:cNvPr id="212" name="Shape 209"/>
+          <p:cNvSpPr/>
+          <p:nvPr/>
+        </p:nvSpPr>
+        <p:spPr>
+          <a:xfrm flipV="1">
+            <a:off x="6035743" y="14109635"/>
+            <a:ext cx="83703" cy="5664"/>
           </a:xfrm>
           <a:prstGeom prst="line">
             <a:avLst/>
@@ -6824,14 +7039,14 @@
       </p:sp>
       <p:sp>
         <p:nvSpPr>
-          <p:cNvPr id="209" name="Shape 206"/>
-          <p:cNvSpPr/>
-          <p:nvPr/>
-        </p:nvSpPr>
-        <p:spPr>
-          <a:xfrm flipV="1">
-            <a:off x="6119446" y="13292861"/>
-            <a:ext cx="83703" cy="5876"/>
+          <p:cNvPr id="213" name="Shape 210"/>
+          <p:cNvSpPr/>
+          <p:nvPr/>
+        </p:nvSpPr>
+        <p:spPr>
+          <a:xfrm flipV="1">
+            <a:off x="6119446" y="14103401"/>
+            <a:ext cx="83703" cy="6234"/>
           </a:xfrm>
           <a:prstGeom prst="line">
             <a:avLst/>
@@ -6847,14 +7062,14 @@
       </p:sp>
       <p:sp>
         <p:nvSpPr>
-          <p:cNvPr id="210" name="Shape 207"/>
-          <p:cNvSpPr/>
-          <p:nvPr/>
-        </p:nvSpPr>
-        <p:spPr>
-          <a:xfrm flipV="1">
-            <a:off x="6203149" y="13286357"/>
-            <a:ext cx="83703" cy="6504"/>
+          <p:cNvPr id="214" name="Shape 211"/>
+          <p:cNvSpPr/>
+          <p:nvPr/>
+        </p:nvSpPr>
+        <p:spPr>
+          <a:xfrm flipV="1">
+            <a:off x="6203149" y="14096501"/>
+            <a:ext cx="83703" cy="6900"/>
           </a:xfrm>
           <a:prstGeom prst="line">
             <a:avLst/>
@@ -6870,14 +7085,14 @@
       </p:sp>
       <p:sp>
         <p:nvSpPr>
-          <p:cNvPr id="211" name="Shape 208"/>
-          <p:cNvSpPr/>
-          <p:nvPr/>
-        </p:nvSpPr>
-        <p:spPr>
-          <a:xfrm flipV="1">
-            <a:off x="6286852" y="13279115"/>
-            <a:ext cx="83703" cy="7242"/>
+          <p:cNvPr id="215" name="Shape 212"/>
+          <p:cNvSpPr/>
+          <p:nvPr/>
+        </p:nvSpPr>
+        <p:spPr>
+          <a:xfrm flipV="1">
+            <a:off x="6286852" y="14088817"/>
+            <a:ext cx="83703" cy="7684"/>
           </a:xfrm>
           <a:prstGeom prst="line">
             <a:avLst/>
@@ -6893,14 +7108,14 @@
       </p:sp>
       <p:sp>
         <p:nvSpPr>
-          <p:cNvPr id="212" name="Shape 209"/>
-          <p:cNvSpPr/>
-          <p:nvPr/>
-        </p:nvSpPr>
-        <p:spPr>
-          <a:xfrm flipV="1">
-            <a:off x="6370554" y="13270996"/>
-            <a:ext cx="83703" cy="8119"/>
+          <p:cNvPr id="216" name="Shape 213"/>
+          <p:cNvSpPr/>
+          <p:nvPr/>
+        </p:nvSpPr>
+        <p:spPr>
+          <a:xfrm flipV="1">
+            <a:off x="6370554" y="14080203"/>
+            <a:ext cx="83703" cy="8614"/>
           </a:xfrm>
           <a:prstGeom prst="line">
             <a:avLst/>
@@ -6916,14 +7131,14 @@
       </p:sp>
       <p:sp>
         <p:nvSpPr>
-          <p:cNvPr id="213" name="Shape 210"/>
-          <p:cNvSpPr/>
-          <p:nvPr/>
-        </p:nvSpPr>
-        <p:spPr>
-          <a:xfrm flipV="1">
-            <a:off x="6454257" y="13261825"/>
-            <a:ext cx="83703" cy="9172"/>
+          <p:cNvPr id="217" name="Shape 214"/>
+          <p:cNvSpPr/>
+          <p:nvPr/>
+        </p:nvSpPr>
+        <p:spPr>
+          <a:xfrm flipV="1">
+            <a:off x="6454257" y="14070472"/>
+            <a:ext cx="83703" cy="9731"/>
           </a:xfrm>
           <a:prstGeom prst="line">
             <a:avLst/>
@@ -6939,14 +7154,14 @@
       </p:sp>
       <p:sp>
         <p:nvSpPr>
-          <p:cNvPr id="214" name="Text 211"/>
-          <p:cNvSpPr/>
-          <p:nvPr/>
-        </p:nvSpPr>
-        <p:spPr>
-          <a:xfrm>
-            <a:off x="1115568" y="10359416"/>
-            <a:ext cx="2560320" cy="215462"/>
+          <p:cNvPr id="218" name="Text 215"/>
+          <p:cNvSpPr/>
+          <p:nvPr/>
+        </p:nvSpPr>
+        <p:spPr>
+          <a:xfrm>
+            <a:off x="1115568" y="10991088"/>
+            <a:ext cx="2560320" cy="228600"/>
           </a:xfrm>
           <a:prstGeom prst="rect">
             <a:avLst/>
@@ -6980,14 +7195,14 @@
       </p:sp>
       <p:sp>
         <p:nvSpPr>
-          <p:cNvPr id="215" name="Text 212"/>
-          <p:cNvSpPr/>
-          <p:nvPr/>
-        </p:nvSpPr>
-        <p:spPr>
-          <a:xfrm>
-            <a:off x="3703320" y="10359416"/>
-            <a:ext cx="2743200" cy="215462"/>
+          <p:cNvPr id="219" name="Text 216"/>
+          <p:cNvSpPr/>
+          <p:nvPr/>
+        </p:nvSpPr>
+        <p:spPr>
+          <a:xfrm>
+            <a:off x="3703320" y="10991088"/>
+            <a:ext cx="2743200" cy="228600"/>
           </a:xfrm>
           <a:prstGeom prst="rect">
             <a:avLst/>
@@ -7021,14 +7236,14 @@
       </p:sp>
       <p:sp>
         <p:nvSpPr>
-          <p:cNvPr id="216" name="Text 213"/>
-          <p:cNvSpPr/>
-          <p:nvPr/>
-        </p:nvSpPr>
-        <p:spPr>
-          <a:xfrm>
-            <a:off x="1965960" y="13703388"/>
-            <a:ext cx="4023360" cy="224081"/>
+          <p:cNvPr id="220" name="Text 217"/>
+          <p:cNvSpPr/>
+          <p:nvPr/>
+        </p:nvSpPr>
+        <p:spPr>
+          <a:xfrm>
+            <a:off x="1965960" y="14538960"/>
+            <a:ext cx="4023360" cy="237744"/>
           </a:xfrm>
           <a:prstGeom prst="rect">
             <a:avLst/>
@@ -7062,14 +7277,14 @@
       </p:sp>
       <p:sp>
         <p:nvSpPr>
-          <p:cNvPr id="217" name="Text 214"/>
-          <p:cNvSpPr/>
-          <p:nvPr/>
-        </p:nvSpPr>
-        <p:spPr>
-          <a:xfrm>
-            <a:off x="713232" y="14082601"/>
-            <a:ext cx="4572000" cy="327502"/>
+          <p:cNvPr id="221" name="Text 218"/>
+          <p:cNvSpPr/>
+          <p:nvPr/>
+        </p:nvSpPr>
+        <p:spPr>
+          <a:xfrm>
+            <a:off x="713232" y="14941296"/>
+            <a:ext cx="4572000" cy="347472"/>
           </a:xfrm>
           <a:prstGeom prst="rect">
             <a:avLst/>
@@ -7103,14 +7318,14 @@
       </p:sp>
       <p:sp>
         <p:nvSpPr>
-          <p:cNvPr id="218" name="Text 215"/>
-          <p:cNvSpPr/>
-          <p:nvPr/>
-        </p:nvSpPr>
-        <p:spPr>
-          <a:xfrm>
-            <a:off x="713232" y="14496288"/>
-            <a:ext cx="6035040" cy="534346"/>
+          <p:cNvPr id="222" name="Text 219"/>
+          <p:cNvSpPr/>
+          <p:nvPr/>
+        </p:nvSpPr>
+        <p:spPr>
+          <a:xfrm>
+            <a:off x="713232" y="15380208"/>
+            <a:ext cx="6035040" cy="566928"/>
           </a:xfrm>
           <a:prstGeom prst="rect">
             <a:avLst/>
@@ -7144,14 +7359,14 @@
       </p:sp>
       <p:sp>
         <p:nvSpPr>
-          <p:cNvPr id="219" name="Text 216"/>
-          <p:cNvSpPr/>
-          <p:nvPr/>
-        </p:nvSpPr>
-        <p:spPr>
-          <a:xfrm>
-            <a:off x="7909560" y="10592115"/>
-            <a:ext cx="5669280" cy="189607"/>
+          <p:cNvPr id="223" name="Text 220"/>
+          <p:cNvSpPr/>
+          <p:nvPr/>
+        </p:nvSpPr>
+        <p:spPr>
+          <a:xfrm>
+            <a:off x="7909560" y="11237976"/>
+            <a:ext cx="5669280" cy="201168"/>
           </a:xfrm>
           <a:prstGeom prst="rect">
             <a:avLst/>
@@ -7185,13 +7400,13 @@
       </p:sp>
       <p:sp>
         <p:nvSpPr>
-          <p:cNvPr id="220" name="Shape 217"/>
-          <p:cNvSpPr/>
-          <p:nvPr/>
-        </p:nvSpPr>
-        <p:spPr>
-          <a:xfrm>
-            <a:off x="7909560" y="13384504"/>
+          <p:cNvPr id="224" name="Shape 221"/>
+          <p:cNvSpPr/>
+          <p:nvPr/>
+        </p:nvSpPr>
+        <p:spPr>
+          <a:xfrm>
+            <a:off x="7909560" y="14200632"/>
             <a:ext cx="5669280" cy="914"/>
           </a:xfrm>
           <a:prstGeom prst="line">
@@ -7208,14 +7423,14 @@
       </p:sp>
       <p:sp>
         <p:nvSpPr>
-          <p:cNvPr id="221" name="Text 218"/>
-          <p:cNvSpPr/>
-          <p:nvPr/>
-        </p:nvSpPr>
-        <p:spPr>
-          <a:xfrm>
-            <a:off x="7498080" y="13298319"/>
-            <a:ext cx="347472" cy="172370"/>
+          <p:cNvPr id="225" name="Text 222"/>
+          <p:cNvSpPr/>
+          <p:nvPr/>
+        </p:nvSpPr>
+        <p:spPr>
+          <a:xfrm>
+            <a:off x="7498080" y="14109192"/>
+            <a:ext cx="347472" cy="182880"/>
           </a:xfrm>
           <a:prstGeom prst="rect">
             <a:avLst/>
@@ -7249,13 +7464,13 @@
       </p:sp>
       <p:sp>
         <p:nvSpPr>
-          <p:cNvPr id="222" name="Shape 219"/>
-          <p:cNvSpPr/>
-          <p:nvPr/>
-        </p:nvSpPr>
-        <p:spPr>
-          <a:xfrm>
-            <a:off x="7909560" y="12888079"/>
+          <p:cNvPr id="226" name="Shape 223"/>
+          <p:cNvSpPr/>
+          <p:nvPr/>
+        </p:nvSpPr>
+        <p:spPr>
+          <a:xfrm>
+            <a:off x="7909560" y="13673938"/>
             <a:ext cx="5669280" cy="914"/>
           </a:xfrm>
           <a:prstGeom prst="line">
@@ -7272,14 +7487,14 @@
       </p:sp>
       <p:sp>
         <p:nvSpPr>
-          <p:cNvPr id="223" name="Text 220"/>
-          <p:cNvSpPr/>
-          <p:nvPr/>
-        </p:nvSpPr>
-        <p:spPr>
-          <a:xfrm>
-            <a:off x="7498080" y="12801894"/>
-            <a:ext cx="347472" cy="172370"/>
+          <p:cNvPr id="227" name="Text 224"/>
+          <p:cNvSpPr/>
+          <p:nvPr/>
+        </p:nvSpPr>
+        <p:spPr>
+          <a:xfrm>
+            <a:off x="7498080" y="13582498"/>
+            <a:ext cx="347472" cy="182880"/>
           </a:xfrm>
           <a:prstGeom prst="rect">
             <a:avLst/>
@@ -7313,13 +7528,13 @@
       </p:sp>
       <p:sp>
         <p:nvSpPr>
-          <p:cNvPr id="224" name="Shape 221"/>
-          <p:cNvSpPr/>
-          <p:nvPr/>
-        </p:nvSpPr>
-        <p:spPr>
-          <a:xfrm>
-            <a:off x="7909560" y="12391655"/>
+          <p:cNvPr id="228" name="Shape 225"/>
+          <p:cNvSpPr/>
+          <p:nvPr/>
+        </p:nvSpPr>
+        <p:spPr>
+          <a:xfrm>
+            <a:off x="7909560" y="13147243"/>
             <a:ext cx="5669280" cy="914"/>
           </a:xfrm>
           <a:prstGeom prst="line">
@@ -7336,14 +7551,14 @@
       </p:sp>
       <p:sp>
         <p:nvSpPr>
-          <p:cNvPr id="225" name="Text 222"/>
-          <p:cNvSpPr/>
-          <p:nvPr/>
-        </p:nvSpPr>
-        <p:spPr>
-          <a:xfrm>
-            <a:off x="7498080" y="12305470"/>
-            <a:ext cx="347472" cy="172370"/>
+          <p:cNvPr id="229" name="Text 226"/>
+          <p:cNvSpPr/>
+          <p:nvPr/>
+        </p:nvSpPr>
+        <p:spPr>
+          <a:xfrm>
+            <a:off x="7498080" y="13055803"/>
+            <a:ext cx="347472" cy="182880"/>
           </a:xfrm>
           <a:prstGeom prst="rect">
             <a:avLst/>
@@ -7377,13 +7592,13 @@
       </p:sp>
       <p:sp>
         <p:nvSpPr>
-          <p:cNvPr id="226" name="Shape 223"/>
-          <p:cNvSpPr/>
-          <p:nvPr/>
-        </p:nvSpPr>
-        <p:spPr>
-          <a:xfrm>
-            <a:off x="7909560" y="11895230"/>
+          <p:cNvPr id="230" name="Shape 227"/>
+          <p:cNvSpPr/>
+          <p:nvPr/>
+        </p:nvSpPr>
+        <p:spPr>
+          <a:xfrm>
+            <a:off x="7909560" y="12620549"/>
             <a:ext cx="5669280" cy="914"/>
           </a:xfrm>
           <a:prstGeom prst="line">
@@ -7400,14 +7615,14 @@
       </p:sp>
       <p:sp>
         <p:nvSpPr>
-          <p:cNvPr id="227" name="Text 224"/>
-          <p:cNvSpPr/>
-          <p:nvPr/>
-        </p:nvSpPr>
-        <p:spPr>
-          <a:xfrm>
-            <a:off x="7498080" y="11809045"/>
-            <a:ext cx="347472" cy="172370"/>
+          <p:cNvPr id="231" name="Text 228"/>
+          <p:cNvSpPr/>
+          <p:nvPr/>
+        </p:nvSpPr>
+        <p:spPr>
+          <a:xfrm>
+            <a:off x="7498080" y="12529109"/>
+            <a:ext cx="347472" cy="182880"/>
           </a:xfrm>
           <a:prstGeom prst="rect">
             <a:avLst/>
@@ -7441,13 +7656,13 @@
       </p:sp>
       <p:sp>
         <p:nvSpPr>
-          <p:cNvPr id="228" name="Shape 225"/>
-          <p:cNvSpPr/>
-          <p:nvPr/>
-        </p:nvSpPr>
-        <p:spPr>
-          <a:xfrm>
-            <a:off x="7909560" y="11398805"/>
+          <p:cNvPr id="232" name="Shape 229"/>
+          <p:cNvSpPr/>
+          <p:nvPr/>
+        </p:nvSpPr>
+        <p:spPr>
+          <a:xfrm>
+            <a:off x="7909560" y="12093854"/>
             <a:ext cx="5669280" cy="914"/>
           </a:xfrm>
           <a:prstGeom prst="line">
@@ -7464,14 +7679,14 @@
       </p:sp>
       <p:sp>
         <p:nvSpPr>
-          <p:cNvPr id="229" name="Text 226"/>
-          <p:cNvSpPr/>
-          <p:nvPr/>
-        </p:nvSpPr>
-        <p:spPr>
-          <a:xfrm>
-            <a:off x="7498080" y="11312620"/>
-            <a:ext cx="347472" cy="172370"/>
+          <p:cNvPr id="233" name="Text 230"/>
+          <p:cNvSpPr/>
+          <p:nvPr/>
+        </p:nvSpPr>
+        <p:spPr>
+          <a:xfrm>
+            <a:off x="7498080" y="12002414"/>
+            <a:ext cx="347472" cy="182880"/>
           </a:xfrm>
           <a:prstGeom prst="rect">
             <a:avLst/>
@@ -7505,13 +7720,13 @@
       </p:sp>
       <p:sp>
         <p:nvSpPr>
-          <p:cNvPr id="230" name="Shape 227"/>
-          <p:cNvSpPr/>
-          <p:nvPr/>
-        </p:nvSpPr>
-        <p:spPr>
-          <a:xfrm>
-            <a:off x="7909560" y="10902381"/>
+          <p:cNvPr id="234" name="Shape 231"/>
+          <p:cNvSpPr/>
+          <p:nvPr/>
+        </p:nvSpPr>
+        <p:spPr>
+          <a:xfrm>
+            <a:off x="7909560" y="11567160"/>
             <a:ext cx="5669280" cy="914"/>
           </a:xfrm>
           <a:prstGeom prst="line">
@@ -7528,14 +7743,14 @@
       </p:sp>
       <p:sp>
         <p:nvSpPr>
-          <p:cNvPr id="231" name="Text 228"/>
-          <p:cNvSpPr/>
-          <p:nvPr/>
-        </p:nvSpPr>
-        <p:spPr>
-          <a:xfrm>
-            <a:off x="7498080" y="10816196"/>
-            <a:ext cx="347472" cy="172370"/>
+          <p:cNvPr id="235" name="Text 232"/>
+          <p:cNvSpPr/>
+          <p:nvPr/>
+        </p:nvSpPr>
+        <p:spPr>
+          <a:xfrm>
+            <a:off x="7498080" y="11475720"/>
+            <a:ext cx="347472" cy="182880"/>
           </a:xfrm>
           <a:prstGeom prst="rect">
             <a:avLst/>
@@ -7569,14 +7784,14 @@
       </p:sp>
       <p:sp>
         <p:nvSpPr>
-          <p:cNvPr id="232" name="Shape 229"/>
-          <p:cNvSpPr/>
-          <p:nvPr/>
-        </p:nvSpPr>
-        <p:spPr>
-          <a:xfrm>
-            <a:off x="8037576" y="11202718"/>
-            <a:ext cx="274320" cy="2181786"/>
+          <p:cNvPr id="236" name="Shape 233"/>
+          <p:cNvSpPr/>
+          <p:nvPr/>
+        </p:nvSpPr>
+        <p:spPr>
+          <a:xfrm>
+            <a:off x="8037576" y="11885810"/>
+            <a:ext cx="274320" cy="2314822"/>
           </a:xfrm>
           <a:prstGeom prst="rect">
             <a:avLst/>
@@ -7596,14 +7811,14 @@
       </p:sp>
       <p:sp>
         <p:nvSpPr>
-          <p:cNvPr id="233" name="Shape 230"/>
-          <p:cNvSpPr/>
-          <p:nvPr/>
-        </p:nvSpPr>
-        <p:spPr>
-          <a:xfrm>
-            <a:off x="8330184" y="11818284"/>
-            <a:ext cx="274320" cy="1566220"/>
+          <p:cNvPr id="237" name="Shape 234"/>
+          <p:cNvSpPr/>
+          <p:nvPr/>
+        </p:nvSpPr>
+        <p:spPr>
+          <a:xfrm>
+            <a:off x="8330184" y="12538911"/>
+            <a:ext cx="274320" cy="1661721"/>
           </a:xfrm>
           <a:prstGeom prst="rect">
             <a:avLst/>
@@ -7623,14 +7838,14 @@
       </p:sp>
       <p:sp>
         <p:nvSpPr>
-          <p:cNvPr id="234" name="Text 231"/>
-          <p:cNvSpPr/>
-          <p:nvPr/>
-        </p:nvSpPr>
-        <p:spPr>
-          <a:xfrm>
-            <a:off x="8001000" y="11004492"/>
-            <a:ext cx="365760" cy="172370"/>
+          <p:cNvPr id="238" name="Text 235"/>
+          <p:cNvSpPr/>
+          <p:nvPr/>
+        </p:nvSpPr>
+        <p:spPr>
+          <a:xfrm>
+            <a:off x="8001000" y="11675498"/>
+            <a:ext cx="365760" cy="182880"/>
           </a:xfrm>
           <a:prstGeom prst="rect">
             <a:avLst/>
@@ -7664,14 +7879,14 @@
       </p:sp>
       <p:sp>
         <p:nvSpPr>
-          <p:cNvPr id="235" name="Text 232"/>
-          <p:cNvSpPr/>
-          <p:nvPr/>
-        </p:nvSpPr>
-        <p:spPr>
-          <a:xfrm>
-            <a:off x="7927848" y="13462070"/>
-            <a:ext cx="822960" cy="413687"/>
+          <p:cNvPr id="239" name="Text 236"/>
+          <p:cNvSpPr/>
+          <p:nvPr/>
+        </p:nvSpPr>
+        <p:spPr>
+          <a:xfrm>
+            <a:off x="7927848" y="14282928"/>
+            <a:ext cx="822960" cy="438912"/>
           </a:xfrm>
           <a:prstGeom prst="rect">
             <a:avLst/>
@@ -7722,14 +7937,14 @@
       </p:sp>
       <p:sp>
         <p:nvSpPr>
-          <p:cNvPr id="236" name="Shape 233"/>
-          <p:cNvSpPr/>
-          <p:nvPr/>
-        </p:nvSpPr>
-        <p:spPr>
-          <a:xfrm>
-            <a:off x="8951976" y="11148111"/>
-            <a:ext cx="274320" cy="2236393"/>
+          <p:cNvPr id="240" name="Shape 237"/>
+          <p:cNvSpPr/>
+          <p:nvPr/>
+        </p:nvSpPr>
+        <p:spPr>
+          <a:xfrm>
+            <a:off x="8951976" y="11827874"/>
+            <a:ext cx="274320" cy="2372758"/>
           </a:xfrm>
           <a:prstGeom prst="rect">
             <a:avLst/>
@@ -7749,14 +7964,14 @@
       </p:sp>
       <p:sp>
         <p:nvSpPr>
-          <p:cNvPr id="237" name="Shape 234"/>
-          <p:cNvSpPr/>
-          <p:nvPr/>
-        </p:nvSpPr>
-        <p:spPr>
-          <a:xfrm>
-            <a:off x="9244584" y="11624678"/>
-            <a:ext cx="274320" cy="1759825"/>
+          <p:cNvPr id="241" name="Shape 238"/>
+          <p:cNvSpPr/>
+          <p:nvPr/>
+        </p:nvSpPr>
+        <p:spPr>
+          <a:xfrm>
+            <a:off x="9244584" y="12333500"/>
+            <a:ext cx="274320" cy="1867132"/>
           </a:xfrm>
           <a:prstGeom prst="rect">
             <a:avLst/>
@@ -7776,14 +7991,14 @@
       </p:sp>
       <p:sp>
         <p:nvSpPr>
-          <p:cNvPr id="238" name="Text 235"/>
-          <p:cNvSpPr/>
-          <p:nvPr/>
-        </p:nvSpPr>
-        <p:spPr>
-          <a:xfrm>
-            <a:off x="8915400" y="10949886"/>
-            <a:ext cx="365760" cy="172370"/>
+          <p:cNvPr id="242" name="Text 239"/>
+          <p:cNvSpPr/>
+          <p:nvPr/>
+        </p:nvSpPr>
+        <p:spPr>
+          <a:xfrm>
+            <a:off x="8915400" y="11617562"/>
+            <a:ext cx="365760" cy="182880"/>
           </a:xfrm>
           <a:prstGeom prst="rect">
             <a:avLst/>
@@ -7817,14 +8032,14 @@
       </p:sp>
       <p:sp>
         <p:nvSpPr>
-          <p:cNvPr id="239" name="Text 236"/>
-          <p:cNvSpPr/>
-          <p:nvPr/>
-        </p:nvSpPr>
-        <p:spPr>
-          <a:xfrm>
-            <a:off x="8842248" y="13462070"/>
-            <a:ext cx="822960" cy="413687"/>
+          <p:cNvPr id="243" name="Text 240"/>
+          <p:cNvSpPr/>
+          <p:nvPr/>
+        </p:nvSpPr>
+        <p:spPr>
+          <a:xfrm>
+            <a:off x="8842248" y="14282928"/>
+            <a:ext cx="822960" cy="438912"/>
           </a:xfrm>
           <a:prstGeom prst="rect">
             <a:avLst/>
@@ -7875,14 +8090,14 @@
       </p:sp>
       <p:sp>
         <p:nvSpPr>
-          <p:cNvPr id="240" name="Shape 237"/>
-          <p:cNvSpPr/>
-          <p:nvPr/>
-        </p:nvSpPr>
-        <p:spPr>
-          <a:xfrm>
-            <a:off x="9866376" y="11269735"/>
-            <a:ext cx="274320" cy="2114769"/>
+          <p:cNvPr id="244" name="Shape 241"/>
+          <p:cNvSpPr/>
+          <p:nvPr/>
+        </p:nvSpPr>
+        <p:spPr>
+          <a:xfrm>
+            <a:off x="9866376" y="11956914"/>
+            <a:ext cx="274320" cy="2243718"/>
           </a:xfrm>
           <a:prstGeom prst="rect">
             <a:avLst/>
@@ -7902,14 +8117,14 @@
       </p:sp>
       <p:sp>
         <p:nvSpPr>
-          <p:cNvPr id="241" name="Shape 238"/>
-          <p:cNvSpPr/>
-          <p:nvPr/>
-        </p:nvSpPr>
-        <p:spPr>
-          <a:xfrm>
-            <a:off x="10158984" y="11905158"/>
-            <a:ext cx="274320" cy="1479345"/>
+          <p:cNvPr id="245" name="Shape 242"/>
+          <p:cNvSpPr/>
+          <p:nvPr/>
+        </p:nvSpPr>
+        <p:spPr>
+          <a:xfrm>
+            <a:off x="10158984" y="12631083"/>
+            <a:ext cx="274320" cy="1569549"/>
           </a:xfrm>
           <a:prstGeom prst="rect">
             <a:avLst/>
@@ -7929,14 +8144,14 @@
       </p:sp>
       <p:sp>
         <p:nvSpPr>
-          <p:cNvPr id="242" name="Text 239"/>
-          <p:cNvSpPr/>
-          <p:nvPr/>
-        </p:nvSpPr>
-        <p:spPr>
-          <a:xfrm>
-            <a:off x="9829800" y="11071510"/>
-            <a:ext cx="365760" cy="172370"/>
+          <p:cNvPr id="246" name="Text 243"/>
+          <p:cNvSpPr/>
+          <p:nvPr/>
+        </p:nvSpPr>
+        <p:spPr>
+          <a:xfrm>
+            <a:off x="9829800" y="11746602"/>
+            <a:ext cx="365760" cy="182880"/>
           </a:xfrm>
           <a:prstGeom prst="rect">
             <a:avLst/>
@@ -7970,14 +8185,14 @@
       </p:sp>
       <p:sp>
         <p:nvSpPr>
-          <p:cNvPr id="243" name="Text 240"/>
-          <p:cNvSpPr/>
-          <p:nvPr/>
-        </p:nvSpPr>
-        <p:spPr>
-          <a:xfrm>
-            <a:off x="9756648" y="13462070"/>
-            <a:ext cx="822960" cy="413687"/>
+          <p:cNvPr id="247" name="Text 244"/>
+          <p:cNvSpPr/>
+          <p:nvPr/>
+        </p:nvSpPr>
+        <p:spPr>
+          <a:xfrm>
+            <a:off x="9756648" y="14282928"/>
+            <a:ext cx="822960" cy="438912"/>
           </a:xfrm>
           <a:prstGeom prst="rect">
             <a:avLst/>
@@ -8028,14 +8243,14 @@
       </p:sp>
       <p:sp>
         <p:nvSpPr>
-          <p:cNvPr id="244" name="Shape 241"/>
-          <p:cNvSpPr/>
-          <p:nvPr/>
-        </p:nvSpPr>
-        <p:spPr>
-          <a:xfrm>
-            <a:off x="10780776" y="11118325"/>
-            <a:ext cx="274320" cy="2266178"/>
+          <p:cNvPr id="248" name="Shape 245"/>
+          <p:cNvSpPr/>
+          <p:nvPr/>
+        </p:nvSpPr>
+        <p:spPr>
+          <a:xfrm>
+            <a:off x="10780776" y="11796272"/>
+            <a:ext cx="274320" cy="2404360"/>
           </a:xfrm>
           <a:prstGeom prst="rect">
             <a:avLst/>
@@ -8055,14 +8270,14 @@
       </p:sp>
       <p:sp>
         <p:nvSpPr>
-          <p:cNvPr id="245" name="Shape 242"/>
-          <p:cNvSpPr/>
-          <p:nvPr/>
-        </p:nvSpPr>
-        <p:spPr>
-          <a:xfrm>
-            <a:off x="11073384" y="11656946"/>
-            <a:ext cx="274320" cy="1727558"/>
+          <p:cNvPr id="249" name="Shape 246"/>
+          <p:cNvSpPr/>
+          <p:nvPr/>
+        </p:nvSpPr>
+        <p:spPr>
+          <a:xfrm>
+            <a:off x="11073384" y="12367735"/>
+            <a:ext cx="274320" cy="1832897"/>
           </a:xfrm>
           <a:prstGeom prst="rect">
             <a:avLst/>
@@ -8082,14 +8297,14 @@
       </p:sp>
       <p:sp>
         <p:nvSpPr>
-          <p:cNvPr id="246" name="Text 243"/>
-          <p:cNvSpPr/>
-          <p:nvPr/>
-        </p:nvSpPr>
-        <p:spPr>
-          <a:xfrm>
-            <a:off x="10744200" y="10920100"/>
-            <a:ext cx="365760" cy="172370"/>
+          <p:cNvPr id="250" name="Text 247"/>
+          <p:cNvSpPr/>
+          <p:nvPr/>
+        </p:nvSpPr>
+        <p:spPr>
+          <a:xfrm>
+            <a:off x="10744200" y="11585960"/>
+            <a:ext cx="365760" cy="182880"/>
           </a:xfrm>
           <a:prstGeom prst="rect">
             <a:avLst/>
@@ -8123,14 +8338,14 @@
       </p:sp>
       <p:sp>
         <p:nvSpPr>
-          <p:cNvPr id="247" name="Text 244"/>
-          <p:cNvSpPr/>
-          <p:nvPr/>
-        </p:nvSpPr>
-        <p:spPr>
-          <a:xfrm>
-            <a:off x="10671048" y="13462070"/>
-            <a:ext cx="822960" cy="413687"/>
+          <p:cNvPr id="251" name="Text 248"/>
+          <p:cNvSpPr/>
+          <p:nvPr/>
+        </p:nvSpPr>
+        <p:spPr>
+          <a:xfrm>
+            <a:off x="10671048" y="14282928"/>
+            <a:ext cx="822960" cy="438912"/>
           </a:xfrm>
           <a:prstGeom prst="rect">
             <a:avLst/>
@@ -8181,14 +8396,14 @@
       </p:sp>
       <p:sp>
         <p:nvSpPr>
-          <p:cNvPr id="248" name="Shape 245"/>
-          <p:cNvSpPr/>
-          <p:nvPr/>
-        </p:nvSpPr>
-        <p:spPr>
-          <a:xfrm>
-            <a:off x="11695176" y="11001666"/>
-            <a:ext cx="274320" cy="2382838"/>
+          <p:cNvPr id="252" name="Shape 249"/>
+          <p:cNvSpPr/>
+          <p:nvPr/>
+        </p:nvSpPr>
+        <p:spPr>
+          <a:xfrm>
+            <a:off x="11695176" y="11672499"/>
+            <a:ext cx="274320" cy="2528133"/>
           </a:xfrm>
           <a:prstGeom prst="rect">
             <a:avLst/>
@@ -8208,14 +8423,14 @@
       </p:sp>
       <p:sp>
         <p:nvSpPr>
-          <p:cNvPr id="249" name="Shape 246"/>
-          <p:cNvSpPr/>
-          <p:nvPr/>
-        </p:nvSpPr>
-        <p:spPr>
-          <a:xfrm>
-            <a:off x="11987784" y="11428591"/>
-            <a:ext cx="274320" cy="1955913"/>
+          <p:cNvPr id="253" name="Shape 250"/>
+          <p:cNvSpPr/>
+          <p:nvPr/>
+        </p:nvSpPr>
+        <p:spPr>
+          <a:xfrm>
+            <a:off x="11987784" y="12125456"/>
+            <a:ext cx="274320" cy="2075176"/>
           </a:xfrm>
           <a:prstGeom prst="rect">
             <a:avLst/>
@@ -8235,14 +8450,14 @@
       </p:sp>
       <p:sp>
         <p:nvSpPr>
-          <p:cNvPr id="250" name="Text 247"/>
-          <p:cNvSpPr/>
-          <p:nvPr/>
-        </p:nvSpPr>
-        <p:spPr>
-          <a:xfrm>
-            <a:off x="11658600" y="10803441"/>
-            <a:ext cx="365760" cy="172370"/>
+          <p:cNvPr id="254" name="Text 251"/>
+          <p:cNvSpPr/>
+          <p:nvPr/>
+        </p:nvSpPr>
+        <p:spPr>
+          <a:xfrm>
+            <a:off x="11658600" y="11462187"/>
+            <a:ext cx="365760" cy="182880"/>
           </a:xfrm>
           <a:prstGeom prst="rect">
             <a:avLst/>
@@ -8276,14 +8491,14 @@
       </p:sp>
       <p:sp>
         <p:nvSpPr>
-          <p:cNvPr id="251" name="Text 248"/>
-          <p:cNvSpPr/>
-          <p:nvPr/>
-        </p:nvSpPr>
-        <p:spPr>
-          <a:xfrm>
-            <a:off x="11585448" y="13462070"/>
-            <a:ext cx="822960" cy="413687"/>
+          <p:cNvPr id="255" name="Text 252"/>
+          <p:cNvSpPr/>
+          <p:nvPr/>
+        </p:nvSpPr>
+        <p:spPr>
+          <a:xfrm>
+            <a:off x="11585448" y="14282928"/>
+            <a:ext cx="822960" cy="438912"/>
           </a:xfrm>
           <a:prstGeom prst="rect">
             <a:avLst/>
@@ -8334,14 +8549,14 @@
       </p:sp>
       <p:sp>
         <p:nvSpPr>
-          <p:cNvPr id="252" name="Shape 249"/>
-          <p:cNvSpPr/>
-          <p:nvPr/>
-        </p:nvSpPr>
-        <p:spPr>
-          <a:xfrm>
-            <a:off x="12609576" y="11108397"/>
-            <a:ext cx="274320" cy="2276107"/>
+          <p:cNvPr id="256" name="Shape 253"/>
+          <p:cNvSpPr/>
+          <p:nvPr/>
+        </p:nvSpPr>
+        <p:spPr>
+          <a:xfrm>
+            <a:off x="12609576" y="11785738"/>
+            <a:ext cx="274320" cy="2414894"/>
           </a:xfrm>
           <a:prstGeom prst="rect">
             <a:avLst/>
@@ -8361,14 +8576,14 @@
       </p:sp>
       <p:sp>
         <p:nvSpPr>
-          <p:cNvPr id="253" name="Shape 250"/>
-          <p:cNvSpPr/>
-          <p:nvPr/>
-        </p:nvSpPr>
-        <p:spPr>
-          <a:xfrm>
-            <a:off x="12902184" y="11602339"/>
-            <a:ext cx="274320" cy="1782164"/>
+          <p:cNvPr id="257" name="Shape 254"/>
+          <p:cNvSpPr/>
+          <p:nvPr/>
+        </p:nvSpPr>
+        <p:spPr>
+          <a:xfrm>
+            <a:off x="12902184" y="12309799"/>
+            <a:ext cx="274320" cy="1890833"/>
           </a:xfrm>
           <a:prstGeom prst="rect">
             <a:avLst/>
@@ -8388,14 +8603,14 @@
       </p:sp>
       <p:sp>
         <p:nvSpPr>
-          <p:cNvPr id="254" name="Text 251"/>
-          <p:cNvSpPr/>
-          <p:nvPr/>
-        </p:nvSpPr>
-        <p:spPr>
-          <a:xfrm>
-            <a:off x="12573000" y="10910172"/>
-            <a:ext cx="365760" cy="172370"/>
+          <p:cNvPr id="258" name="Text 255"/>
+          <p:cNvSpPr/>
+          <p:nvPr/>
+        </p:nvSpPr>
+        <p:spPr>
+          <a:xfrm>
+            <a:off x="12573000" y="11575426"/>
+            <a:ext cx="365760" cy="182880"/>
           </a:xfrm>
           <a:prstGeom prst="rect">
             <a:avLst/>
@@ -8429,14 +8644,14 @@
       </p:sp>
       <p:sp>
         <p:nvSpPr>
-          <p:cNvPr id="255" name="Text 252"/>
-          <p:cNvSpPr/>
-          <p:nvPr/>
-        </p:nvSpPr>
-        <p:spPr>
-          <a:xfrm>
-            <a:off x="12499848" y="13462070"/>
-            <a:ext cx="822960" cy="413687"/>
+          <p:cNvPr id="259" name="Text 256"/>
+          <p:cNvSpPr/>
+          <p:nvPr/>
+        </p:nvSpPr>
+        <p:spPr>
+          <a:xfrm>
+            <a:off x="12499848" y="14282928"/>
+            <a:ext cx="822960" cy="438912"/>
           </a:xfrm>
           <a:prstGeom prst="rect">
             <a:avLst/>
@@ -8487,14 +8702,14 @@
       </p:sp>
       <p:sp>
         <p:nvSpPr>
-          <p:cNvPr id="256" name="Shape 253"/>
-          <p:cNvSpPr/>
-          <p:nvPr/>
-        </p:nvSpPr>
-        <p:spPr>
-          <a:xfrm>
-            <a:off x="7909560" y="10411127"/>
-            <a:ext cx="137160" cy="77566"/>
+          <p:cNvPr id="260" name="Shape 257"/>
+          <p:cNvSpPr/>
+          <p:nvPr/>
+        </p:nvSpPr>
+        <p:spPr>
+          <a:xfrm>
+            <a:off x="7909560" y="11045952"/>
+            <a:ext cx="137160" cy="82296"/>
           </a:xfrm>
           <a:prstGeom prst="rect">
             <a:avLst/>
@@ -8514,14 +8729,14 @@
       </p:sp>
       <p:sp>
         <p:nvSpPr>
-          <p:cNvPr id="257" name="Text 254"/>
-          <p:cNvSpPr/>
-          <p:nvPr/>
-        </p:nvSpPr>
-        <p:spPr>
-          <a:xfrm>
-            <a:off x="8138160" y="10376653"/>
-            <a:ext cx="2651760" cy="189607"/>
+          <p:cNvPr id="261" name="Text 258"/>
+          <p:cNvSpPr/>
+          <p:nvPr/>
+        </p:nvSpPr>
+        <p:spPr>
+          <a:xfrm>
+            <a:off x="8138160" y="11009376"/>
+            <a:ext cx="2651760" cy="201168"/>
           </a:xfrm>
           <a:prstGeom prst="rect">
             <a:avLst/>
@@ -8555,14 +8770,14 @@
       </p:sp>
       <p:sp>
         <p:nvSpPr>
-          <p:cNvPr id="258" name="Shape 255"/>
-          <p:cNvSpPr/>
-          <p:nvPr/>
-        </p:nvSpPr>
-        <p:spPr>
-          <a:xfrm>
-            <a:off x="10789920" y="10411127"/>
-            <a:ext cx="137160" cy="77566"/>
+          <p:cNvPr id="262" name="Shape 259"/>
+          <p:cNvSpPr/>
+          <p:nvPr/>
+        </p:nvSpPr>
+        <p:spPr>
+          <a:xfrm>
+            <a:off x="10789920" y="11045952"/>
+            <a:ext cx="137160" cy="82296"/>
           </a:xfrm>
           <a:prstGeom prst="rect">
             <a:avLst/>
@@ -8582,14 +8797,14 @@
       </p:sp>
       <p:sp>
         <p:nvSpPr>
-          <p:cNvPr id="259" name="Text 256"/>
-          <p:cNvSpPr/>
-          <p:nvPr/>
-        </p:nvSpPr>
-        <p:spPr>
-          <a:xfrm>
-            <a:off x="11018520" y="10376653"/>
-            <a:ext cx="2560320" cy="189607"/>
+          <p:cNvPr id="263" name="Text 260"/>
+          <p:cNvSpPr/>
+          <p:nvPr/>
+        </p:nvSpPr>
+        <p:spPr>
+          <a:xfrm>
+            <a:off x="11018520" y="11009376"/>
+            <a:ext cx="2560320" cy="201168"/>
           </a:xfrm>
           <a:prstGeom prst="rect">
             <a:avLst/>
@@ -8623,14 +8838,14 @@
       </p:sp>
       <p:sp>
         <p:nvSpPr>
-          <p:cNvPr id="260" name="Text 257"/>
-          <p:cNvSpPr/>
-          <p:nvPr/>
-        </p:nvSpPr>
-        <p:spPr>
-          <a:xfrm>
-            <a:off x="7635240" y="14082601"/>
-            <a:ext cx="6126480" cy="301647"/>
+          <p:cNvPr id="264" name="Text 261"/>
+          <p:cNvSpPr/>
+          <p:nvPr/>
+        </p:nvSpPr>
+        <p:spPr>
+          <a:xfrm>
+            <a:off x="7635240" y="14941296"/>
+            <a:ext cx="6126480" cy="320040"/>
           </a:xfrm>
           <a:prstGeom prst="rect">
             <a:avLst/>
@@ -8664,14 +8879,14 @@
       </p:sp>
       <p:sp>
         <p:nvSpPr>
-          <p:cNvPr id="261" name="Text 258"/>
-          <p:cNvSpPr/>
-          <p:nvPr/>
-        </p:nvSpPr>
-        <p:spPr>
-          <a:xfrm>
-            <a:off x="7635240" y="14496288"/>
-            <a:ext cx="6126480" cy="534346"/>
+          <p:cNvPr id="265" name="Text 262"/>
+          <p:cNvSpPr/>
+          <p:nvPr/>
+        </p:nvSpPr>
+        <p:spPr>
+          <a:xfrm>
+            <a:off x="7635240" y="15380208"/>
+            <a:ext cx="6126480" cy="566928"/>
           </a:xfrm>
           <a:prstGeom prst="rect">
             <a:avLst/>
@@ -8705,14 +8920,14 @@
       </p:sp>
       <p:sp>
         <p:nvSpPr>
-          <p:cNvPr id="262" name="Shape 259"/>
-          <p:cNvSpPr/>
-          <p:nvPr/>
-        </p:nvSpPr>
-        <p:spPr>
-          <a:xfrm>
-            <a:off x="548640" y="15297807"/>
-            <a:ext cx="6492240" cy="293028"/>
+          <p:cNvPr id="266" name="Shape 263"/>
+          <p:cNvSpPr/>
+          <p:nvPr/>
+        </p:nvSpPr>
+        <p:spPr>
+          <a:xfrm>
+            <a:off x="548640" y="16230600"/>
+            <a:ext cx="6492240" cy="310896"/>
           </a:xfrm>
           <a:prstGeom prst="rect">
             <a:avLst/>
@@ -8732,14 +8947,14 @@
       </p:sp>
       <p:sp>
         <p:nvSpPr>
-          <p:cNvPr id="263" name="Text 260"/>
-          <p:cNvSpPr/>
-          <p:nvPr/>
-        </p:nvSpPr>
-        <p:spPr>
-          <a:xfrm>
-            <a:off x="658368" y="15327972"/>
-            <a:ext cx="6309360" cy="206844"/>
+          <p:cNvPr id="267" name="Text 264"/>
+          <p:cNvSpPr/>
+          <p:nvPr/>
+        </p:nvSpPr>
+        <p:spPr>
+          <a:xfrm>
+            <a:off x="658368" y="16262604"/>
+            <a:ext cx="6309360" cy="219456"/>
           </a:xfrm>
           <a:prstGeom prst="rect">
             <a:avLst/>
@@ -8773,14 +8988,14 @@
       </p:sp>
       <p:sp>
         <p:nvSpPr>
-          <p:cNvPr id="264" name="Shape 261"/>
-          <p:cNvSpPr/>
-          <p:nvPr/>
-        </p:nvSpPr>
-        <p:spPr>
-          <a:xfrm>
-            <a:off x="7498080" y="15297807"/>
-            <a:ext cx="6583680" cy="293028"/>
+          <p:cNvPr id="268" name="Shape 265"/>
+          <p:cNvSpPr/>
+          <p:nvPr/>
+        </p:nvSpPr>
+        <p:spPr>
+          <a:xfrm>
+            <a:off x="7498080" y="16230600"/>
+            <a:ext cx="6583680" cy="310896"/>
           </a:xfrm>
           <a:prstGeom prst="rect">
             <a:avLst/>
@@ -8800,14 +9015,14 @@
       </p:sp>
       <p:sp>
         <p:nvSpPr>
-          <p:cNvPr id="265" name="Text 262"/>
-          <p:cNvSpPr/>
-          <p:nvPr/>
-        </p:nvSpPr>
-        <p:spPr>
-          <a:xfrm>
-            <a:off x="7607808" y="15327972"/>
-            <a:ext cx="6400800" cy="206844"/>
+          <p:cNvPr id="269" name="Text 266"/>
+          <p:cNvSpPr/>
+          <p:nvPr/>
+        </p:nvSpPr>
+        <p:spPr>
+          <a:xfrm>
+            <a:off x="7607808" y="16262604"/>
+            <a:ext cx="6400800" cy="219456"/>
           </a:xfrm>
           <a:prstGeom prst="rect">
             <a:avLst/>
@@ -8841,14 +9056,14 @@
       </p:sp>
       <p:sp>
         <p:nvSpPr>
-          <p:cNvPr id="266" name="Text 263"/>
-          <p:cNvSpPr/>
-          <p:nvPr/>
-        </p:nvSpPr>
-        <p:spPr>
-          <a:xfrm>
-            <a:off x="594360" y="15702876"/>
-            <a:ext cx="6400800" cy="275791"/>
+          <p:cNvPr id="270" name="Text 267"/>
+          <p:cNvSpPr/>
+          <p:nvPr/>
+        </p:nvSpPr>
+        <p:spPr>
+          <a:xfrm>
+            <a:off x="594360" y="16660368"/>
+            <a:ext cx="6400800" cy="292608"/>
           </a:xfrm>
           <a:prstGeom prst="rect">
             <a:avLst/>
@@ -8882,14 +9097,14 @@
       </p:sp>
       <p:sp>
         <p:nvSpPr>
-          <p:cNvPr id="267" name="Shape 264"/>
-          <p:cNvSpPr/>
-          <p:nvPr/>
-        </p:nvSpPr>
-        <p:spPr>
-          <a:xfrm>
-            <a:off x="685800" y="16151037"/>
-            <a:ext cx="1508760" cy="327502"/>
+          <p:cNvPr id="271" name="Shape 268"/>
+          <p:cNvSpPr/>
+          <p:nvPr/>
+        </p:nvSpPr>
+        <p:spPr>
+          <a:xfrm>
+            <a:off x="685800" y="17135856"/>
+            <a:ext cx="1508760" cy="347472"/>
           </a:xfrm>
           <a:prstGeom prst="rect">
             <a:avLst/>
@@ -8909,14 +9124,14 @@
       </p:sp>
       <p:sp>
         <p:nvSpPr>
-          <p:cNvPr id="268" name="Text 265"/>
-          <p:cNvSpPr/>
-          <p:nvPr/>
-        </p:nvSpPr>
-        <p:spPr>
-          <a:xfrm>
-            <a:off x="713232" y="16202748"/>
-            <a:ext cx="1453896" cy="215462"/>
+          <p:cNvPr id="272" name="Text 269"/>
+          <p:cNvSpPr/>
+          <p:nvPr/>
+        </p:nvSpPr>
+        <p:spPr>
+          <a:xfrm>
+            <a:off x="713232" y="17190720"/>
+            <a:ext cx="1453896" cy="228600"/>
           </a:xfrm>
           <a:prstGeom prst="rect">
             <a:avLst/>
@@ -8950,14 +9165,14 @@
       </p:sp>
       <p:sp>
         <p:nvSpPr>
-          <p:cNvPr id="269" name="Shape 266"/>
-          <p:cNvSpPr/>
-          <p:nvPr/>
-        </p:nvSpPr>
-        <p:spPr>
-          <a:xfrm>
-            <a:off x="2240280" y="16151037"/>
-            <a:ext cx="640080" cy="327502"/>
+          <p:cNvPr id="273" name="Shape 270"/>
+          <p:cNvSpPr/>
+          <p:nvPr/>
+        </p:nvSpPr>
+        <p:spPr>
+          <a:xfrm>
+            <a:off x="2240280" y="17135856"/>
+            <a:ext cx="640080" cy="347472"/>
           </a:xfrm>
           <a:prstGeom prst="rect">
             <a:avLst/>
@@ -8977,14 +9192,14 @@
       </p:sp>
       <p:sp>
         <p:nvSpPr>
-          <p:cNvPr id="270" name="Text 267"/>
-          <p:cNvSpPr/>
-          <p:nvPr/>
-        </p:nvSpPr>
-        <p:spPr>
-          <a:xfrm>
-            <a:off x="2267712" y="16202748"/>
-            <a:ext cx="585216" cy="215462"/>
+          <p:cNvPr id="274" name="Text 271"/>
+          <p:cNvSpPr/>
+          <p:nvPr/>
+        </p:nvSpPr>
+        <p:spPr>
+          <a:xfrm>
+            <a:off x="2267712" y="17190720"/>
+            <a:ext cx="585216" cy="228600"/>
           </a:xfrm>
           <a:prstGeom prst="rect">
             <a:avLst/>
@@ -9018,14 +9233,14 @@
       </p:sp>
       <p:sp>
         <p:nvSpPr>
-          <p:cNvPr id="271" name="Shape 268"/>
-          <p:cNvSpPr/>
-          <p:nvPr/>
-        </p:nvSpPr>
-        <p:spPr>
-          <a:xfrm>
-            <a:off x="2880360" y="16151037"/>
-            <a:ext cx="1234440" cy="327502"/>
+          <p:cNvPr id="275" name="Shape 272"/>
+          <p:cNvSpPr/>
+          <p:nvPr/>
+        </p:nvSpPr>
+        <p:spPr>
+          <a:xfrm>
+            <a:off x="2880360" y="17135856"/>
+            <a:ext cx="1234440" cy="347472"/>
           </a:xfrm>
           <a:prstGeom prst="rect">
             <a:avLst/>
@@ -9045,14 +9260,14 @@
       </p:sp>
       <p:sp>
         <p:nvSpPr>
-          <p:cNvPr id="272" name="Text 269"/>
-          <p:cNvSpPr/>
-          <p:nvPr/>
-        </p:nvSpPr>
-        <p:spPr>
-          <a:xfrm>
-            <a:off x="2907792" y="16202748"/>
-            <a:ext cx="1179576" cy="215462"/>
+          <p:cNvPr id="276" name="Text 273"/>
+          <p:cNvSpPr/>
+          <p:nvPr/>
+        </p:nvSpPr>
+        <p:spPr>
+          <a:xfrm>
+            <a:off x="2907792" y="17190720"/>
+            <a:ext cx="1179576" cy="228600"/>
           </a:xfrm>
           <a:prstGeom prst="rect">
             <a:avLst/>
@@ -9086,14 +9301,14 @@
       </p:sp>
       <p:sp>
         <p:nvSpPr>
-          <p:cNvPr id="273" name="Shape 270"/>
-          <p:cNvSpPr/>
-          <p:nvPr/>
-        </p:nvSpPr>
-        <p:spPr>
-          <a:xfrm>
-            <a:off x="4160520" y="16151037"/>
-            <a:ext cx="1097280" cy="327502"/>
+          <p:cNvPr id="277" name="Shape 274"/>
+          <p:cNvSpPr/>
+          <p:nvPr/>
+        </p:nvSpPr>
+        <p:spPr>
+          <a:xfrm>
+            <a:off x="4160520" y="17135856"/>
+            <a:ext cx="1097280" cy="347472"/>
           </a:xfrm>
           <a:prstGeom prst="rect">
             <a:avLst/>
@@ -9113,14 +9328,14 @@
       </p:sp>
       <p:sp>
         <p:nvSpPr>
-          <p:cNvPr id="274" name="Text 271"/>
-          <p:cNvSpPr/>
-          <p:nvPr/>
-        </p:nvSpPr>
-        <p:spPr>
-          <a:xfrm>
-            <a:off x="4187952" y="16202748"/>
-            <a:ext cx="1042416" cy="215462"/>
+          <p:cNvPr id="278" name="Text 275"/>
+          <p:cNvSpPr/>
+          <p:nvPr/>
+        </p:nvSpPr>
+        <p:spPr>
+          <a:xfrm>
+            <a:off x="4187952" y="17190720"/>
+            <a:ext cx="1042416" cy="228600"/>
           </a:xfrm>
           <a:prstGeom prst="rect">
             <a:avLst/>
@@ -9154,14 +9369,14 @@
       </p:sp>
       <p:sp>
         <p:nvSpPr>
-          <p:cNvPr id="275" name="Shape 272"/>
-          <p:cNvSpPr/>
-          <p:nvPr/>
-        </p:nvSpPr>
-        <p:spPr>
-          <a:xfrm>
-            <a:off x="5303520" y="16151037"/>
-            <a:ext cx="960120" cy="327502"/>
+          <p:cNvPr id="279" name="Shape 276"/>
+          <p:cNvSpPr/>
+          <p:nvPr/>
+        </p:nvSpPr>
+        <p:spPr>
+          <a:xfrm>
+            <a:off x="5303520" y="17135856"/>
+            <a:ext cx="960120" cy="347472"/>
           </a:xfrm>
           <a:prstGeom prst="rect">
             <a:avLst/>
@@ -9181,14 +9396,14 @@
       </p:sp>
       <p:sp>
         <p:nvSpPr>
-          <p:cNvPr id="276" name="Text 273"/>
-          <p:cNvSpPr/>
-          <p:nvPr/>
-        </p:nvSpPr>
-        <p:spPr>
-          <a:xfrm>
-            <a:off x="5330952" y="16202748"/>
-            <a:ext cx="905256" cy="215462"/>
+          <p:cNvPr id="280" name="Text 277"/>
+          <p:cNvSpPr/>
+          <p:nvPr/>
+        </p:nvSpPr>
+        <p:spPr>
+          <a:xfrm>
+            <a:off x="5330952" y="17190720"/>
+            <a:ext cx="905256" cy="228600"/>
           </a:xfrm>
           <a:prstGeom prst="rect">
             <a:avLst/>
@@ -9222,14 +9437,14 @@
       </p:sp>
       <p:sp>
         <p:nvSpPr>
-          <p:cNvPr id="277" name="Shape 274"/>
-          <p:cNvSpPr/>
-          <p:nvPr/>
-        </p:nvSpPr>
-        <p:spPr>
-          <a:xfrm>
-            <a:off x="685800" y="16495776"/>
-            <a:ext cx="1508760" cy="327502"/>
+          <p:cNvPr id="281" name="Shape 278"/>
+          <p:cNvSpPr/>
+          <p:nvPr/>
+        </p:nvSpPr>
+        <p:spPr>
+          <a:xfrm>
+            <a:off x="685800" y="17501616"/>
+            <a:ext cx="1508760" cy="347472"/>
           </a:xfrm>
           <a:prstGeom prst="rect">
             <a:avLst/>
@@ -9249,14 +9464,14 @@
       </p:sp>
       <p:sp>
         <p:nvSpPr>
-          <p:cNvPr id="278" name="Text 275"/>
-          <p:cNvSpPr/>
-          <p:nvPr/>
-        </p:nvSpPr>
-        <p:spPr>
-          <a:xfrm>
-            <a:off x="713232" y="16547487"/>
-            <a:ext cx="1453896" cy="215462"/>
+          <p:cNvPr id="282" name="Text 279"/>
+          <p:cNvSpPr/>
+          <p:nvPr/>
+        </p:nvSpPr>
+        <p:spPr>
+          <a:xfrm>
+            <a:off x="713232" y="17556480"/>
+            <a:ext cx="1453896" cy="228600"/>
           </a:xfrm>
           <a:prstGeom prst="rect">
             <a:avLst/>
@@ -9290,14 +9505,14 @@
       </p:sp>
       <p:sp>
         <p:nvSpPr>
-          <p:cNvPr id="279" name="Shape 276"/>
-          <p:cNvSpPr/>
-          <p:nvPr/>
-        </p:nvSpPr>
-        <p:spPr>
-          <a:xfrm>
-            <a:off x="2240280" y="16495776"/>
-            <a:ext cx="640080" cy="327502"/>
+          <p:cNvPr id="283" name="Shape 280"/>
+          <p:cNvSpPr/>
+          <p:nvPr/>
+        </p:nvSpPr>
+        <p:spPr>
+          <a:xfrm>
+            <a:off x="2240280" y="17501616"/>
+            <a:ext cx="640080" cy="347472"/>
           </a:xfrm>
           <a:prstGeom prst="rect">
             <a:avLst/>
@@ -9317,14 +9532,14 @@
       </p:sp>
       <p:sp>
         <p:nvSpPr>
-          <p:cNvPr id="280" name="Text 277"/>
-          <p:cNvSpPr/>
-          <p:nvPr/>
-        </p:nvSpPr>
-        <p:spPr>
-          <a:xfrm>
-            <a:off x="2267712" y="16547487"/>
-            <a:ext cx="585216" cy="215462"/>
+          <p:cNvPr id="284" name="Text 281"/>
+          <p:cNvSpPr/>
+          <p:nvPr/>
+        </p:nvSpPr>
+        <p:spPr>
+          <a:xfrm>
+            <a:off x="2267712" y="17556480"/>
+            <a:ext cx="585216" cy="228600"/>
           </a:xfrm>
           <a:prstGeom prst="rect">
             <a:avLst/>
@@ -9358,14 +9573,14 @@
       </p:sp>
       <p:sp>
         <p:nvSpPr>
-          <p:cNvPr id="281" name="Shape 278"/>
-          <p:cNvSpPr/>
-          <p:nvPr/>
-        </p:nvSpPr>
-        <p:spPr>
-          <a:xfrm>
-            <a:off x="2880360" y="16495776"/>
-            <a:ext cx="1234440" cy="327502"/>
+          <p:cNvPr id="285" name="Shape 282"/>
+          <p:cNvSpPr/>
+          <p:nvPr/>
+        </p:nvSpPr>
+        <p:spPr>
+          <a:xfrm>
+            <a:off x="2880360" y="17501616"/>
+            <a:ext cx="1234440" cy="347472"/>
           </a:xfrm>
           <a:prstGeom prst="rect">
             <a:avLst/>
@@ -9385,14 +9600,14 @@
       </p:sp>
       <p:sp>
         <p:nvSpPr>
-          <p:cNvPr id="282" name="Text 279"/>
-          <p:cNvSpPr/>
-          <p:nvPr/>
-        </p:nvSpPr>
-        <p:spPr>
-          <a:xfrm>
-            <a:off x="2907792" y="16547487"/>
-            <a:ext cx="1179576" cy="215462"/>
+          <p:cNvPr id="286" name="Text 283"/>
+          <p:cNvSpPr/>
+          <p:nvPr/>
+        </p:nvSpPr>
+        <p:spPr>
+          <a:xfrm>
+            <a:off x="2907792" y="17556480"/>
+            <a:ext cx="1179576" cy="228600"/>
           </a:xfrm>
           <a:prstGeom prst="rect">
             <a:avLst/>
@@ -9426,14 +9641,14 @@
       </p:sp>
       <p:sp>
         <p:nvSpPr>
-          <p:cNvPr id="283" name="Shape 280"/>
-          <p:cNvSpPr/>
-          <p:nvPr/>
-        </p:nvSpPr>
-        <p:spPr>
-          <a:xfrm>
-            <a:off x="4160520" y="16495776"/>
-            <a:ext cx="1097280" cy="327502"/>
+          <p:cNvPr id="287" name="Shape 284"/>
+          <p:cNvSpPr/>
+          <p:nvPr/>
+        </p:nvSpPr>
+        <p:spPr>
+          <a:xfrm>
+            <a:off x="4160520" y="17501616"/>
+            <a:ext cx="1097280" cy="347472"/>
           </a:xfrm>
           <a:prstGeom prst="rect">
             <a:avLst/>
@@ -9453,14 +9668,14 @@
       </p:sp>
       <p:sp>
         <p:nvSpPr>
-          <p:cNvPr id="284" name="Text 281"/>
-          <p:cNvSpPr/>
-          <p:nvPr/>
-        </p:nvSpPr>
-        <p:spPr>
-          <a:xfrm>
-            <a:off x="4187952" y="16547487"/>
-            <a:ext cx="1042416" cy="215462"/>
+          <p:cNvPr id="288" name="Text 285"/>
+          <p:cNvSpPr/>
+          <p:nvPr/>
+        </p:nvSpPr>
+        <p:spPr>
+          <a:xfrm>
+            <a:off x="4187952" y="17556480"/>
+            <a:ext cx="1042416" cy="228600"/>
           </a:xfrm>
           <a:prstGeom prst="rect">
             <a:avLst/>
@@ -9494,14 +9709,14 @@
       </p:sp>
       <p:sp>
         <p:nvSpPr>
-          <p:cNvPr id="285" name="Shape 282"/>
-          <p:cNvSpPr/>
-          <p:nvPr/>
-        </p:nvSpPr>
-        <p:spPr>
-          <a:xfrm>
-            <a:off x="5303520" y="16495776"/>
-            <a:ext cx="960120" cy="327502"/>
+          <p:cNvPr id="289" name="Shape 286"/>
+          <p:cNvSpPr/>
+          <p:nvPr/>
+        </p:nvSpPr>
+        <p:spPr>
+          <a:xfrm>
+            <a:off x="5303520" y="17501616"/>
+            <a:ext cx="960120" cy="347472"/>
           </a:xfrm>
           <a:prstGeom prst="rect">
             <a:avLst/>
@@ -9521,14 +9736,14 @@
       </p:sp>
       <p:sp>
         <p:nvSpPr>
-          <p:cNvPr id="286" name="Text 283"/>
-          <p:cNvSpPr/>
-          <p:nvPr/>
-        </p:nvSpPr>
-        <p:spPr>
-          <a:xfrm>
-            <a:off x="5330952" y="16547487"/>
-            <a:ext cx="905256" cy="215462"/>
+          <p:cNvPr id="290" name="Text 287"/>
+          <p:cNvSpPr/>
+          <p:nvPr/>
+        </p:nvSpPr>
+        <p:spPr>
+          <a:xfrm>
+            <a:off x="5330952" y="17556480"/>
+            <a:ext cx="905256" cy="228600"/>
           </a:xfrm>
           <a:prstGeom prst="rect">
             <a:avLst/>
@@ -9562,14 +9777,14 @@
       </p:sp>
       <p:sp>
         <p:nvSpPr>
-          <p:cNvPr id="287" name="Shape 284"/>
-          <p:cNvSpPr/>
-          <p:nvPr/>
-        </p:nvSpPr>
-        <p:spPr>
-          <a:xfrm>
-            <a:off x="685800" y="16840515"/>
-            <a:ext cx="1508760" cy="327502"/>
+          <p:cNvPr id="291" name="Shape 288"/>
+          <p:cNvSpPr/>
+          <p:nvPr/>
+        </p:nvSpPr>
+        <p:spPr>
+          <a:xfrm>
+            <a:off x="685800" y="17867376"/>
+            <a:ext cx="1508760" cy="347472"/>
           </a:xfrm>
           <a:prstGeom prst="rect">
             <a:avLst/>
@@ -9589,14 +9804,14 @@
       </p:sp>
       <p:sp>
         <p:nvSpPr>
-          <p:cNvPr id="288" name="Text 285"/>
-          <p:cNvSpPr/>
-          <p:nvPr/>
-        </p:nvSpPr>
-        <p:spPr>
-          <a:xfrm>
-            <a:off x="713232" y="16892226"/>
-            <a:ext cx="1453896" cy="215462"/>
+          <p:cNvPr id="292" name="Text 289"/>
+          <p:cNvSpPr/>
+          <p:nvPr/>
+        </p:nvSpPr>
+        <p:spPr>
+          <a:xfrm>
+            <a:off x="713232" y="17922240"/>
+            <a:ext cx="1453896" cy="228600"/>
           </a:xfrm>
           <a:prstGeom prst="rect">
             <a:avLst/>
@@ -9630,14 +9845,14 @@
       </p:sp>
       <p:sp>
         <p:nvSpPr>
-          <p:cNvPr id="289" name="Shape 286"/>
-          <p:cNvSpPr/>
-          <p:nvPr/>
-        </p:nvSpPr>
-        <p:spPr>
-          <a:xfrm>
-            <a:off x="2240280" y="16840515"/>
-            <a:ext cx="640080" cy="327502"/>
+          <p:cNvPr id="293" name="Shape 290"/>
+          <p:cNvSpPr/>
+          <p:nvPr/>
+        </p:nvSpPr>
+        <p:spPr>
+          <a:xfrm>
+            <a:off x="2240280" y="17867376"/>
+            <a:ext cx="640080" cy="347472"/>
           </a:xfrm>
           <a:prstGeom prst="rect">
             <a:avLst/>
@@ -9657,14 +9872,14 @@
       </p:sp>
       <p:sp>
         <p:nvSpPr>
-          <p:cNvPr id="290" name="Text 287"/>
-          <p:cNvSpPr/>
-          <p:nvPr/>
-        </p:nvSpPr>
-        <p:spPr>
-          <a:xfrm>
-            <a:off x="2267712" y="16892226"/>
-            <a:ext cx="585216" cy="215462"/>
+          <p:cNvPr id="294" name="Text 291"/>
+          <p:cNvSpPr/>
+          <p:nvPr/>
+        </p:nvSpPr>
+        <p:spPr>
+          <a:xfrm>
+            <a:off x="2267712" y="17922240"/>
+            <a:ext cx="585216" cy="228600"/>
           </a:xfrm>
           <a:prstGeom prst="rect">
             <a:avLst/>
@@ -9698,14 +9913,14 @@
       </p:sp>
       <p:sp>
         <p:nvSpPr>
-          <p:cNvPr id="291" name="Shape 288"/>
-          <p:cNvSpPr/>
-          <p:nvPr/>
-        </p:nvSpPr>
-        <p:spPr>
-          <a:xfrm>
-            <a:off x="2880360" y="16840515"/>
-            <a:ext cx="1234440" cy="327502"/>
+          <p:cNvPr id="295" name="Shape 292"/>
+          <p:cNvSpPr/>
+          <p:nvPr/>
+        </p:nvSpPr>
+        <p:spPr>
+          <a:xfrm>
+            <a:off x="2880360" y="17867376"/>
+            <a:ext cx="1234440" cy="347472"/>
           </a:xfrm>
           <a:prstGeom prst="rect">
             <a:avLst/>
@@ -9725,14 +9940,14 @@
       </p:sp>
       <p:sp>
         <p:nvSpPr>
-          <p:cNvPr id="292" name="Text 289"/>
-          <p:cNvSpPr/>
-          <p:nvPr/>
-        </p:nvSpPr>
-        <p:spPr>
-          <a:xfrm>
-            <a:off x="2907792" y="16892226"/>
-            <a:ext cx="1179576" cy="215462"/>
+          <p:cNvPr id="296" name="Text 293"/>
+          <p:cNvSpPr/>
+          <p:nvPr/>
+        </p:nvSpPr>
+        <p:spPr>
+          <a:xfrm>
+            <a:off x="2907792" y="17922240"/>
+            <a:ext cx="1179576" cy="228600"/>
           </a:xfrm>
           <a:prstGeom prst="rect">
             <a:avLst/>
@@ -9766,14 +9981,14 @@
       </p:sp>
       <p:sp>
         <p:nvSpPr>
-          <p:cNvPr id="293" name="Shape 290"/>
-          <p:cNvSpPr/>
-          <p:nvPr/>
-        </p:nvSpPr>
-        <p:spPr>
-          <a:xfrm>
-            <a:off x="4160520" y="16840515"/>
-            <a:ext cx="1097280" cy="327502"/>
+          <p:cNvPr id="297" name="Shape 294"/>
+          <p:cNvSpPr/>
+          <p:nvPr/>
+        </p:nvSpPr>
+        <p:spPr>
+          <a:xfrm>
+            <a:off x="4160520" y="17867376"/>
+            <a:ext cx="1097280" cy="347472"/>
           </a:xfrm>
           <a:prstGeom prst="rect">
             <a:avLst/>
@@ -9793,14 +10008,14 @@
       </p:sp>
       <p:sp>
         <p:nvSpPr>
-          <p:cNvPr id="294" name="Text 291"/>
-          <p:cNvSpPr/>
-          <p:nvPr/>
-        </p:nvSpPr>
-        <p:spPr>
-          <a:xfrm>
-            <a:off x="4187952" y="16892226"/>
-            <a:ext cx="1042416" cy="215462"/>
+          <p:cNvPr id="298" name="Text 295"/>
+          <p:cNvSpPr/>
+          <p:nvPr/>
+        </p:nvSpPr>
+        <p:spPr>
+          <a:xfrm>
+            <a:off x="4187952" y="17922240"/>
+            <a:ext cx="1042416" cy="228600"/>
           </a:xfrm>
           <a:prstGeom prst="rect">
             <a:avLst/>
@@ -9834,14 +10049,14 @@
       </p:sp>
       <p:sp>
         <p:nvSpPr>
-          <p:cNvPr id="295" name="Shape 292"/>
-          <p:cNvSpPr/>
-          <p:nvPr/>
-        </p:nvSpPr>
-        <p:spPr>
-          <a:xfrm>
-            <a:off x="5303520" y="16840515"/>
-            <a:ext cx="960120" cy="327502"/>
+          <p:cNvPr id="299" name="Shape 296"/>
+          <p:cNvSpPr/>
+          <p:nvPr/>
+        </p:nvSpPr>
+        <p:spPr>
+          <a:xfrm>
+            <a:off x="5303520" y="17867376"/>
+            <a:ext cx="960120" cy="347472"/>
           </a:xfrm>
           <a:prstGeom prst="rect">
             <a:avLst/>
@@ -9861,14 +10076,14 @@
       </p:sp>
       <p:sp>
         <p:nvSpPr>
-          <p:cNvPr id="296" name="Text 293"/>
-          <p:cNvSpPr/>
-          <p:nvPr/>
-        </p:nvSpPr>
-        <p:spPr>
-          <a:xfrm>
-            <a:off x="5330952" y="16892226"/>
-            <a:ext cx="905256" cy="215462"/>
+          <p:cNvPr id="300" name="Text 297"/>
+          <p:cNvSpPr/>
+          <p:nvPr/>
+        </p:nvSpPr>
+        <p:spPr>
+          <a:xfrm>
+            <a:off x="5330952" y="17922240"/>
+            <a:ext cx="905256" cy="228600"/>
           </a:xfrm>
           <a:prstGeom prst="rect">
             <a:avLst/>
@@ -9902,14 +10117,14 @@
       </p:sp>
       <p:sp>
         <p:nvSpPr>
-          <p:cNvPr id="297" name="Shape 294"/>
-          <p:cNvSpPr/>
-          <p:nvPr/>
-        </p:nvSpPr>
-        <p:spPr>
-          <a:xfrm>
-            <a:off x="685800" y="17185255"/>
-            <a:ext cx="1508760" cy="327502"/>
+          <p:cNvPr id="301" name="Shape 298"/>
+          <p:cNvSpPr/>
+          <p:nvPr/>
+        </p:nvSpPr>
+        <p:spPr>
+          <a:xfrm>
+            <a:off x="685800" y="18233136"/>
+            <a:ext cx="1508760" cy="347472"/>
           </a:xfrm>
           <a:prstGeom prst="rect">
             <a:avLst/>
@@ -9929,14 +10144,14 @@
       </p:sp>
       <p:sp>
         <p:nvSpPr>
-          <p:cNvPr id="298" name="Text 295"/>
-          <p:cNvSpPr/>
-          <p:nvPr/>
-        </p:nvSpPr>
-        <p:spPr>
-          <a:xfrm>
-            <a:off x="713232" y="17236966"/>
-            <a:ext cx="1453896" cy="215462"/>
+          <p:cNvPr id="302" name="Text 299"/>
+          <p:cNvSpPr/>
+          <p:nvPr/>
+        </p:nvSpPr>
+        <p:spPr>
+          <a:xfrm>
+            <a:off x="713232" y="18288000"/>
+            <a:ext cx="1453896" cy="228600"/>
           </a:xfrm>
           <a:prstGeom prst="rect">
             <a:avLst/>
@@ -9970,14 +10185,14 @@
       </p:sp>
       <p:sp>
         <p:nvSpPr>
-          <p:cNvPr id="299" name="Shape 296"/>
-          <p:cNvSpPr/>
-          <p:nvPr/>
-        </p:nvSpPr>
-        <p:spPr>
-          <a:xfrm>
-            <a:off x="2240280" y="17185255"/>
-            <a:ext cx="640080" cy="327502"/>
+          <p:cNvPr id="303" name="Shape 300"/>
+          <p:cNvSpPr/>
+          <p:nvPr/>
+        </p:nvSpPr>
+        <p:spPr>
+          <a:xfrm>
+            <a:off x="2240280" y="18233136"/>
+            <a:ext cx="640080" cy="347472"/>
           </a:xfrm>
           <a:prstGeom prst="rect">
             <a:avLst/>
@@ -9997,14 +10212,14 @@
       </p:sp>
       <p:sp>
         <p:nvSpPr>
-          <p:cNvPr id="300" name="Text 297"/>
-          <p:cNvSpPr/>
-          <p:nvPr/>
-        </p:nvSpPr>
-        <p:spPr>
-          <a:xfrm>
-            <a:off x="2267712" y="17236966"/>
-            <a:ext cx="585216" cy="215462"/>
+          <p:cNvPr id="304" name="Text 301"/>
+          <p:cNvSpPr/>
+          <p:nvPr/>
+        </p:nvSpPr>
+        <p:spPr>
+          <a:xfrm>
+            <a:off x="2267712" y="18288000"/>
+            <a:ext cx="585216" cy="228600"/>
           </a:xfrm>
           <a:prstGeom prst="rect">
             <a:avLst/>
@@ -10038,14 +10253,14 @@
       </p:sp>
       <p:sp>
         <p:nvSpPr>
-          <p:cNvPr id="301" name="Shape 298"/>
-          <p:cNvSpPr/>
-          <p:nvPr/>
-        </p:nvSpPr>
-        <p:spPr>
-          <a:xfrm>
-            <a:off x="2880360" y="17185255"/>
-            <a:ext cx="1234440" cy="327502"/>
+          <p:cNvPr id="305" name="Shape 302"/>
+          <p:cNvSpPr/>
+          <p:nvPr/>
+        </p:nvSpPr>
+        <p:spPr>
+          <a:xfrm>
+            <a:off x="2880360" y="18233136"/>
+            <a:ext cx="1234440" cy="347472"/>
           </a:xfrm>
           <a:prstGeom prst="rect">
             <a:avLst/>
@@ -10065,14 +10280,14 @@
       </p:sp>
       <p:sp>
         <p:nvSpPr>
-          <p:cNvPr id="302" name="Text 299"/>
-          <p:cNvSpPr/>
-          <p:nvPr/>
-        </p:nvSpPr>
-        <p:spPr>
-          <a:xfrm>
-            <a:off x="2907792" y="17236966"/>
-            <a:ext cx="1179576" cy="215462"/>
+          <p:cNvPr id="306" name="Text 303"/>
+          <p:cNvSpPr/>
+          <p:nvPr/>
+        </p:nvSpPr>
+        <p:spPr>
+          <a:xfrm>
+            <a:off x="2907792" y="18288000"/>
+            <a:ext cx="1179576" cy="228600"/>
           </a:xfrm>
           <a:prstGeom prst="rect">
             <a:avLst/>
@@ -10106,14 +10321,14 @@
       </p:sp>
       <p:sp>
         <p:nvSpPr>
-          <p:cNvPr id="303" name="Shape 300"/>
-          <p:cNvSpPr/>
-          <p:nvPr/>
-        </p:nvSpPr>
-        <p:spPr>
-          <a:xfrm>
-            <a:off x="4160520" y="17185255"/>
-            <a:ext cx="1097280" cy="327502"/>
+          <p:cNvPr id="307" name="Shape 304"/>
+          <p:cNvSpPr/>
+          <p:nvPr/>
+        </p:nvSpPr>
+        <p:spPr>
+          <a:xfrm>
+            <a:off x="4160520" y="18233136"/>
+            <a:ext cx="1097280" cy="347472"/>
           </a:xfrm>
           <a:prstGeom prst="rect">
             <a:avLst/>
@@ -10133,14 +10348,14 @@
       </p:sp>
       <p:sp>
         <p:nvSpPr>
-          <p:cNvPr id="304" name="Text 301"/>
-          <p:cNvSpPr/>
-          <p:nvPr/>
-        </p:nvSpPr>
-        <p:spPr>
-          <a:xfrm>
-            <a:off x="4187952" y="17236966"/>
-            <a:ext cx="1042416" cy="215462"/>
+          <p:cNvPr id="308" name="Text 305"/>
+          <p:cNvSpPr/>
+          <p:nvPr/>
+        </p:nvSpPr>
+        <p:spPr>
+          <a:xfrm>
+            <a:off x="4187952" y="18288000"/>
+            <a:ext cx="1042416" cy="228600"/>
           </a:xfrm>
           <a:prstGeom prst="rect">
             <a:avLst/>
@@ -10174,14 +10389,14 @@
       </p:sp>
       <p:sp>
         <p:nvSpPr>
-          <p:cNvPr id="305" name="Shape 302"/>
-          <p:cNvSpPr/>
-          <p:nvPr/>
-        </p:nvSpPr>
-        <p:spPr>
-          <a:xfrm>
-            <a:off x="5303520" y="17185255"/>
-            <a:ext cx="960120" cy="327502"/>
+          <p:cNvPr id="309" name="Shape 306"/>
+          <p:cNvSpPr/>
+          <p:nvPr/>
+        </p:nvSpPr>
+        <p:spPr>
+          <a:xfrm>
+            <a:off x="5303520" y="18233136"/>
+            <a:ext cx="960120" cy="347472"/>
           </a:xfrm>
           <a:prstGeom prst="rect">
             <a:avLst/>
@@ -10201,14 +10416,14 @@
       </p:sp>
       <p:sp>
         <p:nvSpPr>
-          <p:cNvPr id="306" name="Text 303"/>
-          <p:cNvSpPr/>
-          <p:nvPr/>
-        </p:nvSpPr>
-        <p:spPr>
-          <a:xfrm>
-            <a:off x="5330952" y="17236966"/>
-            <a:ext cx="905256" cy="215462"/>
+          <p:cNvPr id="310" name="Text 307"/>
+          <p:cNvSpPr/>
+          <p:nvPr/>
+        </p:nvSpPr>
+        <p:spPr>
+          <a:xfrm>
+            <a:off x="5330952" y="18288000"/>
+            <a:ext cx="905256" cy="228600"/>
           </a:xfrm>
           <a:prstGeom prst="rect">
             <a:avLst/>
@@ -10242,14 +10457,14 @@
       </p:sp>
       <p:sp>
         <p:nvSpPr>
-          <p:cNvPr id="307" name="Text 304"/>
-          <p:cNvSpPr/>
-          <p:nvPr/>
-        </p:nvSpPr>
-        <p:spPr>
-          <a:xfrm>
-            <a:off x="713232" y="17710982"/>
-            <a:ext cx="6080760" cy="474017"/>
+          <p:cNvPr id="311" name="Text 308"/>
+          <p:cNvSpPr/>
+          <p:nvPr/>
+        </p:nvSpPr>
+        <p:spPr>
+          <a:xfrm>
+            <a:off x="713232" y="18790920"/>
+            <a:ext cx="6080760" cy="502920"/>
           </a:xfrm>
           <a:prstGeom prst="rect">
             <a:avLst/>
@@ -10283,14 +10498,14 @@
       </p:sp>
       <p:sp>
         <p:nvSpPr>
-          <p:cNvPr id="308" name="Text 305"/>
-          <p:cNvSpPr/>
-          <p:nvPr/>
-        </p:nvSpPr>
-        <p:spPr>
-          <a:xfrm>
-            <a:off x="713232" y="18253946"/>
-            <a:ext cx="6080760" cy="474017"/>
+          <p:cNvPr id="312" name="Text 309"/>
+          <p:cNvSpPr/>
+          <p:nvPr/>
+        </p:nvSpPr>
+        <p:spPr>
+          <a:xfrm>
+            <a:off x="713232" y="19366992"/>
+            <a:ext cx="6080760" cy="502920"/>
           </a:xfrm>
           <a:prstGeom prst="rect">
             <a:avLst/>
@@ -10324,14 +10539,14 @@
       </p:sp>
       <p:sp>
         <p:nvSpPr>
-          <p:cNvPr id="309" name="Text 306"/>
-          <p:cNvSpPr/>
-          <p:nvPr/>
-        </p:nvSpPr>
-        <p:spPr>
-          <a:xfrm>
-            <a:off x="7635240" y="15702876"/>
-            <a:ext cx="6309360" cy="275791"/>
+          <p:cNvPr id="313" name="Text 310"/>
+          <p:cNvSpPr/>
+          <p:nvPr/>
+        </p:nvSpPr>
+        <p:spPr>
+          <a:xfrm>
+            <a:off x="7635240" y="16660368"/>
+            <a:ext cx="6309360" cy="292608"/>
           </a:xfrm>
           <a:prstGeom prst="rect">
             <a:avLst/>
@@ -10365,14 +10580,14 @@
       </p:sp>
       <p:sp>
         <p:nvSpPr>
-          <p:cNvPr id="310" name="Text 307"/>
-          <p:cNvSpPr/>
-          <p:nvPr/>
-        </p:nvSpPr>
-        <p:spPr>
-          <a:xfrm>
-            <a:off x="7635240" y="16013141"/>
-            <a:ext cx="6309360" cy="482635"/>
+          <p:cNvPr id="314" name="Text 311"/>
+          <p:cNvSpPr/>
+          <p:nvPr/>
+        </p:nvSpPr>
+        <p:spPr>
+          <a:xfrm>
+            <a:off x="7635240" y="16989552"/>
+            <a:ext cx="6309360" cy="512064"/>
           </a:xfrm>
           <a:prstGeom prst="rect">
             <a:avLst/>
@@ -10406,14 +10621,14 @@
       </p:sp>
       <p:sp>
         <p:nvSpPr>
-          <p:cNvPr id="311" name="Text 308"/>
-          <p:cNvSpPr/>
-          <p:nvPr/>
-        </p:nvSpPr>
-        <p:spPr>
-          <a:xfrm>
-            <a:off x="7635240" y="16547487"/>
-            <a:ext cx="6309360" cy="275791"/>
+          <p:cNvPr id="315" name="Text 312"/>
+          <p:cNvSpPr/>
+          <p:nvPr/>
+        </p:nvSpPr>
+        <p:spPr>
+          <a:xfrm>
+            <a:off x="7635240" y="17556480"/>
+            <a:ext cx="6309360" cy="292608"/>
           </a:xfrm>
           <a:prstGeom prst="rect">
             <a:avLst/>
@@ -10447,14 +10662,14 @@
       </p:sp>
       <p:sp>
         <p:nvSpPr>
-          <p:cNvPr id="312" name="Text 309"/>
-          <p:cNvSpPr/>
-          <p:nvPr/>
-        </p:nvSpPr>
-        <p:spPr>
-          <a:xfrm>
-            <a:off x="7635240" y="16857752"/>
-            <a:ext cx="6309360" cy="482635"/>
+          <p:cNvPr id="316" name="Text 313"/>
+          <p:cNvSpPr/>
+          <p:nvPr/>
+        </p:nvSpPr>
+        <p:spPr>
+          <a:xfrm>
+            <a:off x="7635240" y="17885664"/>
+            <a:ext cx="6309360" cy="512064"/>
           </a:xfrm>
           <a:prstGeom prst="rect">
             <a:avLst/>
@@ -10488,14 +10703,14 @@
       </p:sp>
       <p:sp>
         <p:nvSpPr>
-          <p:cNvPr id="313" name="Text 310"/>
-          <p:cNvSpPr/>
-          <p:nvPr/>
-        </p:nvSpPr>
-        <p:spPr>
-          <a:xfrm>
-            <a:off x="7635240" y="17392098"/>
-            <a:ext cx="6309360" cy="275791"/>
+          <p:cNvPr id="317" name="Text 314"/>
+          <p:cNvSpPr/>
+          <p:nvPr/>
+        </p:nvSpPr>
+        <p:spPr>
+          <a:xfrm>
+            <a:off x="7635240" y="18452592"/>
+            <a:ext cx="6309360" cy="292608"/>
           </a:xfrm>
           <a:prstGeom prst="rect">
             <a:avLst/>
@@ -10529,14 +10744,14 @@
       </p:sp>
       <p:sp>
         <p:nvSpPr>
-          <p:cNvPr id="314" name="Text 311"/>
-          <p:cNvSpPr/>
-          <p:nvPr/>
-        </p:nvSpPr>
-        <p:spPr>
-          <a:xfrm>
-            <a:off x="7635240" y="17702364"/>
-            <a:ext cx="6309360" cy="482635"/>
+          <p:cNvPr id="318" name="Text 315"/>
+          <p:cNvSpPr/>
+          <p:nvPr/>
+        </p:nvSpPr>
+        <p:spPr>
+          <a:xfrm>
+            <a:off x="7635240" y="18781776"/>
+            <a:ext cx="6309360" cy="512064"/>
           </a:xfrm>
           <a:prstGeom prst="rect">
             <a:avLst/>
@@ -10570,14 +10785,14 @@
       </p:sp>
       <p:sp>
         <p:nvSpPr>
-          <p:cNvPr id="315" name="Text 312"/>
-          <p:cNvSpPr/>
-          <p:nvPr/>
-        </p:nvSpPr>
-        <p:spPr>
-          <a:xfrm>
-            <a:off x="7635240" y="18253946"/>
-            <a:ext cx="6309360" cy="474017"/>
+          <p:cNvPr id="319" name="Text 316"/>
+          <p:cNvSpPr/>
+          <p:nvPr/>
+        </p:nvSpPr>
+        <p:spPr>
+          <a:xfrm>
+            <a:off x="7635240" y="19366992"/>
+            <a:ext cx="6309360" cy="502920"/>
           </a:xfrm>
           <a:prstGeom prst="rect">
             <a:avLst/>
@@ -10611,14 +10826,14 @@
       </p:sp>
       <p:sp>
         <p:nvSpPr>
-          <p:cNvPr id="316" name="Shape 313"/>
-          <p:cNvSpPr/>
-          <p:nvPr/>
-        </p:nvSpPr>
-        <p:spPr>
-          <a:xfrm>
-            <a:off x="548640" y="18960662"/>
-            <a:ext cx="13533120" cy="413687"/>
+          <p:cNvPr id="320" name="Shape 317"/>
+          <p:cNvSpPr/>
+          <p:nvPr/>
+        </p:nvSpPr>
+        <p:spPr>
+          <a:xfrm>
+            <a:off x="548640" y="20116800"/>
+            <a:ext cx="13533120" cy="438912"/>
           </a:xfrm>
           <a:prstGeom prst="rect">
             <a:avLst/>
@@ -10638,14 +10853,14 @@
       </p:sp>
       <p:sp>
         <p:nvSpPr>
-          <p:cNvPr id="317" name="Text 314"/>
-          <p:cNvSpPr/>
-          <p:nvPr/>
-        </p:nvSpPr>
-        <p:spPr>
-          <a:xfrm>
-            <a:off x="713232" y="19038228"/>
-            <a:ext cx="13075920" cy="224081"/>
+          <p:cNvPr id="321" name="Text 318"/>
+          <p:cNvSpPr/>
+          <p:nvPr/>
+        </p:nvSpPr>
+        <p:spPr>
+          <a:xfrm>
+            <a:off x="713232" y="20199096"/>
+            <a:ext cx="13075920" cy="237744"/>
           </a:xfrm>
           <a:prstGeom prst="rect">
             <a:avLst/>
@@ -10679,14 +10894,14 @@
       </p:sp>
       <p:sp>
         <p:nvSpPr>
-          <p:cNvPr id="318" name="Text 315"/>
-          <p:cNvSpPr/>
-          <p:nvPr/>
-        </p:nvSpPr>
-        <p:spPr>
-          <a:xfrm>
-            <a:off x="594360" y="19529482"/>
-            <a:ext cx="12070080" cy="413687"/>
+          <p:cNvPr id="322" name="Text 319"/>
+          <p:cNvSpPr/>
+          <p:nvPr/>
+        </p:nvSpPr>
+        <p:spPr>
+          <a:xfrm>
+            <a:off x="594360" y="20720304"/>
+            <a:ext cx="12070080" cy="438912"/>
           </a:xfrm>
           <a:prstGeom prst="rect">
             <a:avLst/>
@@ -10737,13 +10952,13 @@
       </p:sp>
       <p:sp>
         <p:nvSpPr>
-          <p:cNvPr id="319" name="Shape 316"/>
-          <p:cNvSpPr/>
-          <p:nvPr/>
-        </p:nvSpPr>
-        <p:spPr>
-          <a:xfrm>
-            <a:off x="594360" y="20012117"/>
+          <p:cNvPr id="323" name="Shape 320"/>
+          <p:cNvSpPr/>
+          <p:nvPr/>
+        </p:nvSpPr>
+        <p:spPr>
+          <a:xfrm>
+            <a:off x="594360" y="21232368"/>
             <a:ext cx="12298680" cy="914"/>
           </a:xfrm>
           <a:prstGeom prst="line">
@@ -10760,7 +10975,7 @@
       </p:sp>
       <p:pic>
         <p:nvPicPr>
-          <p:cNvPr id="320" name="Image 1" descr="/home/kawase/Documents/GitHub/umbra/docs/poster/qr-github.png">    </p:cNvPr>
+          <p:cNvPr id="324" name="Image 1" descr="/home/kawase/Documents/GitHub/umbra/docs/poster/qr-github.png">    </p:cNvPr>
           <p:cNvPicPr>
             <a:picLocks noChangeAspect="1"/>
           </p:cNvPicPr>
@@ -10774,7 +10989,7 @@
         </p:blipFill>
         <p:spPr>
           <a:xfrm>
-            <a:off x="13167360" y="19460534"/>
+            <a:off x="13167360" y="20647152"/>
             <a:ext cx="914400" cy="914400"/>
           </a:xfrm>
           <a:prstGeom prst="rect">
@@ -10784,14 +10999,14 @@
       </p:pic>
       <p:sp>
         <p:nvSpPr>
-          <p:cNvPr id="321" name="Text 317"/>
-          <p:cNvSpPr/>
-          <p:nvPr/>
-        </p:nvSpPr>
-        <p:spPr>
-          <a:xfrm>
-            <a:off x="594360" y="20081065"/>
-            <a:ext cx="12252960" cy="215462"/>
+          <p:cNvPr id="325" name="Text 321"/>
+          <p:cNvSpPr/>
+          <p:nvPr/>
+        </p:nvSpPr>
+        <p:spPr>
+          <a:xfrm>
+            <a:off x="594360" y="21305520"/>
+            <a:ext cx="12252960" cy="228600"/>
           </a:xfrm>
           <a:prstGeom prst="rect">
             <a:avLst/>
@@ -10817,7 +11032,7 @@
                 <a:ea typeface="Noto Sans" pitchFamily="34" charset="-122"/>
                 <a:cs typeface="Noto Sans" pitchFamily="34" charset="-120"/>
               </a:rPr>
-              <a:t>Liceul Tehnologic de Marină · Liceul Internațional de Informatică Constanța · Liceul Tehnologic de Electrotehnică și Telecomunicații</a:t>
+              <a:t>Clasa a X-a · Constanța · Coordonator: prof. Ramona Rădulescu · Informatică pentru Viitor (IPV)</a:t>
             </a:r>
             <a:endParaRPr lang="en-US" sz="1100" dirty="0"/>
           </a:p>
@@ -10825,14 +11040,14 @@
       </p:sp>
       <p:sp>
         <p:nvSpPr>
-          <p:cNvPr id="322" name="Text 318"/>
-          <p:cNvSpPr/>
-          <p:nvPr/>
-        </p:nvSpPr>
-        <p:spPr>
-          <a:xfrm>
-            <a:off x="594360" y="20331001"/>
-            <a:ext cx="12252960" cy="215462"/>
+          <p:cNvPr id="326" name="Text 322"/>
+          <p:cNvSpPr/>
+          <p:nvPr/>
+        </p:nvSpPr>
+        <p:spPr>
+          <a:xfrm>
+            <a:off x="594360" y="21570696"/>
+            <a:ext cx="12252960" cy="228600"/>
           </a:xfrm>
           <a:prstGeom prst="rect">
             <a:avLst/>
@@ -10858,7 +11073,7 @@
                 <a:ea typeface="Noto Sans" pitchFamily="34" charset="-122"/>
                 <a:cs typeface="Noto Sans" pitchFamily="34" charset="-120"/>
               </a:rPr>
-              <a:t>Coordonator: prof. Ramona Rădulescu · Informatică pentru Viitor · radramra@gmail.com     |     github.com/Ieditzu/umbra</a:t>
+              <a:t>Contact: radramra@gmail.com     |     Cod și documentație: github.com/Ieditzu/umbra</a:t>
             </a:r>
             <a:endParaRPr lang="en-US" sz="1100" dirty="0"/>
           </a:p>
